--- a/docs/predlog.pptx
+++ b/docs/predlog.pptx
@@ -4,6 +4,9 @@
   <p:sldMasterIdLst>
     <p:sldMasterId id="2147483648" r:id="rId1"/>
   </p:sldMasterIdLst>
+  <p:notesMasterIdLst>
+    <p:notesMasterId r:id="rId9"/>
+  </p:notesMasterIdLst>
   <p:sldIdLst>
     <p:sldId id="256" r:id="rId2"/>
     <p:sldId id="257" r:id="rId3"/>
@@ -13,9 +16,6 @@
     <p:sldId id="261" r:id="rId7"/>
     <p:sldId id="262" r:id="rId8"/>
   </p:sldIdLst>
-  <p:notesMasterIdLst>
-    <p:notesMasterId r:id="rId9"/>
-  </p:notesMasterIdLst>
   <p:sldSz cx="12192000" cy="6858000"/>
   <p:notesSz cx="6858000" cy="12192000"/>
   <p:defaultTextStyle>
@@ -113,7 +113,7 @@
   <p:extLst>
     <p:ext uri="{521415D9-36F7-43E2-AB2F-B90AF26B5E84}">
       <p14:sectionLst xmlns:p14="http://schemas.microsoft.com/office/powerpoint/2010/main">
-        <p14:section name="Предлог" id="{2326ced4-c589-00da-34a0-3fd94411a74a}">
+        <p14:section name="Предлог" id="{2326CED4-C589-00DA-34A0-3FD94411A74A}">
           <p14:sldIdLst>
             <p14:sldId id="256"/>
             <p14:sldId id="257"/>
@@ -155,234 +155,10 @@
           <a:chExt cx="0" cy="0"/>
         </a:xfrm>
       </p:grpSpPr>
-      <p:sp>
-        <p:nvSpPr>
-          <p:cNvPr id="2" name="Header Placeholder 1"/>
-          <p:cNvSpPr>
-            <a:spLocks noGrp="1"/>
-          </p:cNvSpPr>
-          <p:nvPr>
-            <p:ph type="hdr" sz="quarter"/>
-          </p:nvPr>
-        </p:nvSpPr>
-        <p:spPr>
-          <a:xfrm>
-            <a:off x="0" y="0"/>
-            <a:ext cx="2971800" cy="458788"/>
-          </a:xfrm>
-          <a:prstGeom prst="rect">
-            <a:avLst/>
-          </a:prstGeom>
-        </p:spPr>
-        <p:txBody>
-          <a:bodyPr vert="horz" lIns="91440" tIns="45720" rIns="91440" bIns="45720" rtlCol="0"/>
-          <a:lstStyle>
-            <a:lvl1pPr algn="l">
-              <a:defRPr sz="1200"/>
-            </a:lvl1pPr>
-          </a:lstStyle>
-          <a:p>
-            <a:endParaRPr lang="en-US"/>
-          </a:p>
-        </p:txBody>
-      </p:sp>
-      <p:sp>
-        <p:nvSpPr>
-          <p:cNvPr id="3" name="Date Placeholder 2"/>
-          <p:cNvSpPr>
-            <a:spLocks noGrp="1"/>
-          </p:cNvSpPr>
-          <p:nvPr>
-            <p:ph type="dt" idx="1"/>
-          </p:nvPr>
-        </p:nvSpPr>
-        <p:spPr>
-          <a:xfrm>
-            <a:off x="3884613" y="0"/>
-            <a:ext cx="2971800" cy="458788"/>
-          </a:xfrm>
-          <a:prstGeom prst="rect">
-            <a:avLst/>
-          </a:prstGeom>
-        </p:spPr>
-        <p:txBody>
-          <a:bodyPr vert="horz" lIns="91440" tIns="45720" rIns="91440" bIns="45720" rtlCol="0"/>
-          <a:lstStyle>
-            <a:lvl1pPr algn="r">
-              <a:defRPr sz="1200"/>
-            </a:lvl1pPr>
-          </a:lstStyle>
-          <a:p>
-            <a:fld id="{5282F153-3F37-0F45-9E97-73ACFA13230C}" type="datetimeFigureOut">
-              <a:rPr lang="en-US"/>
-              <a:t>7/23/19</a:t>
-            </a:fld>
-            <a:endParaRPr lang="en-US"/>
-          </a:p>
-        </p:txBody>
-      </p:sp>
-      <p:sp>
-        <p:nvSpPr>
-          <p:cNvPr id="4" name="Slide Image Placeholder 3"/>
-          <p:cNvSpPr>
-            <a:spLocks noGrp="1" noRot="1" noChangeAspect="1"/>
-          </p:cNvSpPr>
-          <p:nvPr>
-            <p:ph type="sldImg" idx="2"/>
-          </p:nvPr>
-        </p:nvSpPr>
-        <p:spPr>
-          <a:xfrm>
-            <a:off x="685800" y="1143000"/>
-            <a:ext cx="5486400" cy="3086100"/>
-          </a:xfrm>
-          <a:prstGeom prst="rect">
-            <a:avLst/>
-          </a:prstGeom>
-          <a:noFill/>
-          <a:ln w="12700">
-            <a:solidFill>
-              <a:prstClr val="black"/>
-            </a:solidFill>
-          </a:ln>
-        </p:spPr>
-        <p:txBody>
-          <a:bodyPr vert="horz" lIns="91440" tIns="45720" rIns="91440" bIns="45720" rtlCol="0" anchor="ctr"/>
-          <a:lstStyle/>
-          <a:p>
-            <a:endParaRPr lang="en-US"/>
-          </a:p>
-        </p:txBody>
-      </p:sp>
-      <p:sp>
-        <p:nvSpPr>
-          <p:cNvPr id="5" name="Notes Placeholder 4"/>
-          <p:cNvSpPr>
-            <a:spLocks noGrp="1"/>
-          </p:cNvSpPr>
-          <p:nvPr>
-            <p:ph type="body" sz="quarter" idx="3"/>
-          </p:nvPr>
-        </p:nvSpPr>
-        <p:spPr>
-          <a:xfrm>
-            <a:off x="685800" y="4400550"/>
-            <a:ext cx="5486400" cy="3600450"/>
-          </a:xfrm>
-          <a:prstGeom prst="rect">
-            <a:avLst/>
-          </a:prstGeom>
-        </p:spPr>
-        <p:txBody>
-          <a:bodyPr vert="horz" lIns="91440" tIns="45720" rIns="91440" bIns="45720" rtlCol="0"/>
-          <a:lstStyle/>
-          <a:p>
-            <a:pPr lvl="0"/>
-            <a:r>
-              <a:rPr lang="en-US"/>
-              <a:t>Click to edit Master text styles</a:t>
-            </a:r>
-          </a:p>
-          <a:p>
-            <a:pPr lvl="1"/>
-            <a:r>
-              <a:rPr lang="en-US"/>
-              <a:t>Second level</a:t>
-            </a:r>
-          </a:p>
-          <a:p>
-            <a:pPr lvl="2"/>
-            <a:r>
-              <a:rPr lang="en-US"/>
-              <a:t>Third level</a:t>
-            </a:r>
-          </a:p>
-          <a:p>
-            <a:pPr lvl="3"/>
-            <a:r>
-              <a:rPr lang="en-US"/>
-              <a:t>Fourth level</a:t>
-            </a:r>
-          </a:p>
-          <a:p>
-            <a:pPr lvl="4"/>
-            <a:r>
-              <a:rPr lang="en-US"/>
-              <a:t>Fifth level</a:t>
-            </a:r>
-          </a:p>
-        </p:txBody>
-      </p:sp>
-      <p:sp>
-        <p:nvSpPr>
-          <p:cNvPr id="6" name="Footer Placeholder 5"/>
-          <p:cNvSpPr>
-            <a:spLocks noGrp="1"/>
-          </p:cNvSpPr>
-          <p:nvPr>
-            <p:ph type="ftr" sz="quarter" idx="4"/>
-          </p:nvPr>
-        </p:nvSpPr>
-        <p:spPr>
-          <a:xfrm>
-            <a:off x="0" y="8685213"/>
-            <a:ext cx="2971800" cy="458787"/>
-          </a:xfrm>
-          <a:prstGeom prst="rect">
-            <a:avLst/>
-          </a:prstGeom>
-        </p:spPr>
-        <p:txBody>
-          <a:bodyPr vert="horz" lIns="91440" tIns="45720" rIns="91440" bIns="45720" rtlCol="0" anchor="b"/>
-          <a:lstStyle>
-            <a:lvl1pPr algn="l">
-              <a:defRPr sz="1200"/>
-            </a:lvl1pPr>
-          </a:lstStyle>
-          <a:p>
-            <a:endParaRPr lang="en-US"/>
-          </a:p>
-        </p:txBody>
-      </p:sp>
-      <p:sp>
-        <p:nvSpPr>
-          <p:cNvPr id="7" name="Slide Number Placeholder 6"/>
-          <p:cNvSpPr>
-            <a:spLocks noGrp="1"/>
-          </p:cNvSpPr>
-          <p:nvPr>
-            <p:ph type="sldNum" sz="quarter" idx="5"/>
-          </p:nvPr>
-        </p:nvSpPr>
-        <p:spPr>
-          <a:xfrm>
-            <a:off x="3884613" y="8685213"/>
-            <a:ext cx="2971800" cy="458787"/>
-          </a:xfrm>
-          <a:prstGeom prst="rect">
-            <a:avLst/>
-          </a:prstGeom>
-        </p:spPr>
-        <p:txBody>
-          <a:bodyPr vert="horz" lIns="91440" tIns="45720" rIns="91440" bIns="45720" rtlCol="0" anchor="b"/>
-          <a:lstStyle>
-            <a:lvl1pPr algn="r">
-              <a:defRPr sz="1200"/>
-            </a:lvl1pPr>
-          </a:lstStyle>
-          <a:p>
-            <a:fld id="{CE5E9CC1-C706-0F49-92D6-E571CC5EEA8F}" type="slidenum">
-              <a:rPr lang="en-US"/>
-              <a:t>‹#›</a:t>
-            </a:fld>
-            <a:endParaRPr lang="en-US"/>
-          </a:p>
-        </p:txBody>
-      </p:sp>
     </p:spTree>
     <p:extLst>
       <p:ext uri="{BB962C8B-B14F-4D97-AF65-F5344CB8AC3E}">
-        <p14:creationId xmlns:p14="http://schemas.microsoft.com/office/powerpoint/2010/main" val="1024086991"/>
+        <p14:creationId xmlns:p14="http://schemas.microsoft.com/office/powerpoint/2010/main" val="617829023"/>
       </p:ext>
     </p:extLst>
   </p:cSld>
@@ -531,7 +307,6 @@
               <a:t>Добар ден. Предлагам дипломска работа на тема event-driven микросервиси со модерна оркестрација и observability.
 Во една реченица: имам постоечка монолитна апликација за огласи за автомобили. Ќе ја разделам на сервиси што комуницираат преку настани, ќе ја оркестрирам со Kubernetes, ќе ја направам набљудлива — и ќе ги измерам двете верзии една против друга.</a:t>
             </a:r>
-            <a:endParaRPr lang="en-US" dirty="0"/>
           </a:p>
         </p:txBody>
       </p:sp>
@@ -622,7 +397,6 @@
 Темата е изводлива: прототип веќе постои, а DevOps делот го претставив на предметот DevOps.
 Зошто да го пишувам истото повторно? Затоа што функционалноста ја знам, па можам да ги споредувам архитектурите наместо да учам нов домен.</a:t>
             </a:r>
-            <a:endParaRPr lang="en-US" dirty="0"/>
           </a:p>
         </p:txBody>
       </p:sp>
@@ -713,7 +487,6 @@
 Пример: огласот треба да го прикаже името на продавачот, но сервисот за огласи има само id. Наместо да го прашува сервисот за корисници секој пат — и да падне ако тој не работи — при регистрација добива настан и си чува своја копија. Цената е кратко доцнење, eventual consistency.
 Сè работи во Kubernetes, а Grafana покажува што се случува.</a:t>
             </a:r>
-            <a:endParaRPr lang="en-US" dirty="0"/>
           </a:p>
         </p:txBody>
       </p:sp>
@@ -805,7 +578,6 @@
 Мал relay потоа ги праќа пораките. Ако Kafka не работи, пораката чека; ништо не се губи, само доцни.
 А ако иста порака стигне двапати, примачот (inbox) памти што веќе обработил и не ја повторува.</a:t>
             </a:r>
-            <a:endParaRPr lang="en-US" dirty="0"/>
           </a:p>
         </p:txBody>
       </p:sp>
@@ -895,7 +667,6 @@
 Прво, испораката е автоматска: секој push поминува низ CI (тестови, build, Docker image), а ArgoCD го синхронизира Kubernetes кластерот со она што е запишано во Git — GitOps, без рачни чекори. Во кластерот: автоскалирање, health проби, мрежна изолација меѓу сервисите, Helm charts.
 Второ, системот е видлив. Асинхроните дефекти се тивки: API-то враќа 200, а настаните не течат. Затоа три столба преку OpenTelemetry — метрики во Prometheus, логови во Loki, traces во Tempo — а Grafana ги прикажува и алармира, на пример кога outbox престане да се празни.</a:t>
             </a:r>
-            <a:endParaRPr lang="en-US" dirty="0"/>
           </a:p>
         </p:txBody>
       </p:sp>
@@ -988,7 +759,6 @@
 4. Убивам pod или прекинувам мрежа — колку брзо се јавува аларм и колку брзо ја наоѓам причината (MTTD).
 Придонесот на трудот е токму ова: истата апликација во две архитектури, со измерено однесување при оптоварување и при откази.</a:t>
             </a:r>
-            <a:endParaRPr lang="en-US" dirty="0"/>
           </a:p>
         </p:txBody>
       </p:sp>
@@ -1084,7 +854,6 @@
 Не е ли обемот преголем? Затоа кажувам што не влегува. Нема нова функционалност — само архитектура, инфраструктура и мерења.
 Зошто Kafka, а не REST повици? Со директен повик, ако другиот сервис е паднат, паѓа и моето барање. Со настани, барањето поминува.</a:t>
             </a:r>
-            <a:endParaRPr lang="en-US" dirty="0"/>
           </a:p>
         </p:txBody>
       </p:sp>
@@ -1162,6 +931,7 @@
         <a:solidFill>
           <a:schemeClr val="tx2"/>
         </a:solidFill>
+        <a:effectLst/>
       </p:bgPr>
     </p:bg>
     <p:spTree>
@@ -1181,9 +951,11 @@
       <p:sp>
         <p:nvSpPr>
           <p:cNvPr id="2" name="Text 0"/>
-          <p:cNvSpPr/>
+          <p:cNvSpPr>
+            <a:spLocks noGrp="1"/>
+          </p:cNvSpPr>
           <p:nvPr>
-            <p:ph idx="100" type="body" hasCustomPrompt="1"/>
+            <p:ph type="body" idx="100" hasCustomPrompt="1"/>
           </p:nvPr>
         </p:nvSpPr>
         <p:spPr>
@@ -1200,9 +972,9 @@
         <p:txBody>
           <a:bodyPr wrap="square" rtlCol="0"/>
           <a:lstStyle>
-            <a:lvl1pPr indent="0" marL="0">
-              <a:buNone/>
-              <a:defRPr lang="en-US" sz="1200" b="1" spc="300" kern="0" dirty="0">
+            <a:lvl1pPr marL="0" indent="0">
+              <a:buNone/>
+              <a:defRPr lang="en-US" sz="1200" b="1" kern="0" spc="300" dirty="0">
                 <a:solidFill>
                   <a:schemeClr val="accent6"/>
                 </a:solidFill>
@@ -1213,7 +985,7 @@
             </a:lvl1pPr>
           </a:lstStyle>
           <a:p>
-            <a:pPr indent="0" marL="0">
+            <a:pPr marL="0" indent="0">
               <a:buNone/>
             </a:pPr>
             <a:endParaRPr lang="en-US" sz="1200" dirty="0"/>
@@ -1223,9 +995,11 @@
       <p:sp>
         <p:nvSpPr>
           <p:cNvPr id="3" name="Text 0"/>
-          <p:cNvSpPr/>
+          <p:cNvSpPr>
+            <a:spLocks noGrp="1"/>
+          </p:cNvSpPr>
           <p:nvPr>
-            <p:ph idx="101" type="title" hasCustomPrompt="1"/>
+            <p:ph type="title" idx="101" hasCustomPrompt="1"/>
           </p:nvPr>
         </p:nvSpPr>
         <p:spPr>
@@ -1242,7 +1016,7 @@
         <p:txBody>
           <a:bodyPr wrap="square" rtlCol="0"/>
           <a:lstStyle>
-            <a:lvl1pPr algn="l" indent="0" marL="0">
+            <a:lvl1pPr marL="0" indent="0" algn="l">
               <a:buNone/>
               <a:defRPr lang="en-US" sz="3800" b="1" dirty="0">
                 <a:solidFill>
@@ -1252,7 +1026,7 @@
             </a:lvl1pPr>
           </a:lstStyle>
           <a:p>
-            <a:pPr algn="l" indent="0" marL="0">
+            <a:pPr marL="0" indent="0" algn="l">
               <a:buNone/>
             </a:pPr>
             <a:endParaRPr lang="en-US" sz="3800" dirty="0"/>
@@ -1262,9 +1036,11 @@
       <p:sp>
         <p:nvSpPr>
           <p:cNvPr id="4" name="Text 0"/>
-          <p:cNvSpPr/>
+          <p:cNvSpPr>
+            <a:spLocks noGrp="1"/>
+          </p:cNvSpPr>
           <p:nvPr>
-            <p:ph idx="102" type="body" hasCustomPrompt="1"/>
+            <p:ph type="body" idx="102" hasCustomPrompt="1"/>
           </p:nvPr>
         </p:nvSpPr>
         <p:spPr>
@@ -1281,7 +1057,7 @@
         <p:txBody>
           <a:bodyPr wrap="square" rtlCol="0"/>
           <a:lstStyle>
-            <a:lvl1pPr indent="0" marL="0">
+            <a:lvl1pPr marL="0" indent="0">
               <a:buNone/>
               <a:defRPr lang="en-US" sz="1800" dirty="0">
                 <a:solidFill>
@@ -1291,7 +1067,7 @@
             </a:lvl1pPr>
           </a:lstStyle>
           <a:p>
-            <a:pPr indent="0" marL="0">
+            <a:pPr marL="0" indent="0">
               <a:buNone/>
             </a:pPr>
             <a:endParaRPr lang="en-US" sz="1800" dirty="0"/>
@@ -1301,9 +1077,11 @@
       <p:sp>
         <p:nvSpPr>
           <p:cNvPr id="5" name="Text 0"/>
-          <p:cNvSpPr/>
+          <p:cNvSpPr>
+            <a:spLocks noGrp="1"/>
+          </p:cNvSpPr>
           <p:nvPr>
-            <p:ph idx="103" type="body" hasCustomPrompt="1"/>
+            <p:ph type="body" idx="103" hasCustomPrompt="1"/>
           </p:nvPr>
         </p:nvSpPr>
         <p:spPr>
@@ -1320,7 +1098,7 @@
         <p:txBody>
           <a:bodyPr wrap="square" rtlCol="0"/>
           <a:lstStyle>
-            <a:lvl1pPr indent="0" marL="0">
+            <a:lvl1pPr marL="0" indent="0">
               <a:spcAft>
                 <a:spcPts val="400"/>
               </a:spcAft>
@@ -1333,7 +1111,7 @@
             </a:lvl1pPr>
           </a:lstStyle>
           <a:p>
-            <a:pPr indent="0" marL="0">
+            <a:pPr marL="0" indent="0">
               <a:spcAft>
                 <a:spcPts val="400"/>
               </a:spcAft>
@@ -1359,6 +1137,7 @@
         <a:solidFill>
           <a:schemeClr val="bg2"/>
         </a:solidFill>
+        <a:effectLst/>
       </p:bgPr>
     </p:bg>
     <p:spTree>
@@ -1378,9 +1157,11 @@
       <p:sp>
         <p:nvSpPr>
           <p:cNvPr id="2" name="Text 0"/>
-          <p:cNvSpPr/>
+          <p:cNvSpPr>
+            <a:spLocks noGrp="1"/>
+          </p:cNvSpPr>
           <p:nvPr>
-            <p:ph idx="100" type="body" hasCustomPrompt="1"/>
+            <p:ph type="body" idx="100" hasCustomPrompt="1"/>
           </p:nvPr>
         </p:nvSpPr>
         <p:spPr>
@@ -1397,9 +1178,9 @@
         <p:txBody>
           <a:bodyPr wrap="square" rtlCol="0"/>
           <a:lstStyle>
-            <a:lvl1pPr indent="0" marL="0">
-              <a:buNone/>
-              <a:defRPr lang="en-US" sz="1100" b="1" spc="200" kern="0" dirty="0">
+            <a:lvl1pPr marL="0" indent="0">
+              <a:buNone/>
+              <a:defRPr lang="en-US" sz="1100" b="1" kern="0" spc="200" dirty="0">
                 <a:solidFill>
                   <a:schemeClr val="accent1"/>
                 </a:solidFill>
@@ -1410,7 +1191,7 @@
             </a:lvl1pPr>
           </a:lstStyle>
           <a:p>
-            <a:pPr indent="0" marL="0">
+            <a:pPr marL="0" indent="0">
               <a:buNone/>
             </a:pPr>
             <a:endParaRPr lang="en-US" sz="1100" dirty="0"/>
@@ -1420,9 +1201,11 @@
       <p:sp>
         <p:nvSpPr>
           <p:cNvPr id="3" name="Text 0"/>
-          <p:cNvSpPr/>
+          <p:cNvSpPr>
+            <a:spLocks noGrp="1"/>
+          </p:cNvSpPr>
           <p:nvPr>
-            <p:ph idx="101" type="title" hasCustomPrompt="1"/>
+            <p:ph type="title" idx="101" hasCustomPrompt="1"/>
           </p:nvPr>
         </p:nvSpPr>
         <p:spPr>
@@ -1439,7 +1222,7 @@
         <p:txBody>
           <a:bodyPr wrap="square" rtlCol="0"/>
           <a:lstStyle>
-            <a:lvl1pPr algn="l" indent="0" marL="0">
+            <a:lvl1pPr marL="0" indent="0" algn="l">
               <a:buNone/>
               <a:defRPr lang="en-US" sz="3200" b="1" dirty="0">
                 <a:solidFill>
@@ -1449,7 +1232,7 @@
             </a:lvl1pPr>
           </a:lstStyle>
           <a:p>
-            <a:pPr algn="l" indent="0" marL="0">
+            <a:pPr marL="0" indent="0" algn="l">
               <a:buNone/>
             </a:pPr>
             <a:endParaRPr lang="en-US" sz="3200" dirty="0"/>
@@ -1476,7 +1259,7 @@
           </a:prstGeom>
           <a:extLst>
             <a:ext uri="{C572A759-6A51-4108-AA02-DFA0A04FC94B}">
-              <ma14:wrappingTextBoxFlag xmlns:ma14="http://schemas.microsoft.com/office/mac/drawingml/2011/main" val="0"/>
+              <ma14:wrappingTextBoxFlag xmlns:ma14="http://schemas.microsoft.com/office/mac/drawingml/2011/main" xmlns="" val="0"/>
             </a:ext>
           </a:extLst>
         </p:spPr>
@@ -1497,8 +1280,8 @@
           <a:p>
             <a:pPr algn="r"/>
             <a:fld id="{F7021451-1387-4CA6-816F-3879F97B5CBC}" type="slidenum">
-              <a:rPr b="0" lang="en-US"/>
-              <a:t>1003</a:t>
+              <a:rPr lang="en-US" b="0"/>
+              <a:t>‹#›</a:t>
             </a:fld>
             <a:endParaRPr lang="en-US"/>
           </a:p>
@@ -1520,6 +1303,7 @@
         <a:solidFill>
           <a:schemeClr val="bg2"/>
         </a:solidFill>
+        <a:effectLst/>
       </p:bgPr>
     </p:bg>
     <p:spTree>
@@ -1539,9 +1323,11 @@
       <p:sp>
         <p:nvSpPr>
           <p:cNvPr id="2" name="Text 0"/>
-          <p:cNvSpPr/>
+          <p:cNvSpPr>
+            <a:spLocks noGrp="1"/>
+          </p:cNvSpPr>
           <p:nvPr>
-            <p:ph idx="100" type="body" hasCustomPrompt="1"/>
+            <p:ph type="body" idx="100" hasCustomPrompt="1"/>
           </p:nvPr>
         </p:nvSpPr>
         <p:spPr>
@@ -1558,9 +1344,9 @@
         <p:txBody>
           <a:bodyPr wrap="square" rtlCol="0"/>
           <a:lstStyle>
-            <a:lvl1pPr indent="0" marL="0">
-              <a:buNone/>
-              <a:defRPr lang="en-US" sz="1100" b="1" spc="200" kern="0" dirty="0">
+            <a:lvl1pPr marL="0" indent="0">
+              <a:buNone/>
+              <a:defRPr lang="en-US" sz="1100" b="1" kern="0" spc="200" dirty="0">
                 <a:solidFill>
                   <a:schemeClr val="accent1"/>
                 </a:solidFill>
@@ -1571,7 +1357,7 @@
             </a:lvl1pPr>
           </a:lstStyle>
           <a:p>
-            <a:pPr indent="0" marL="0">
+            <a:pPr marL="0" indent="0">
               <a:buNone/>
             </a:pPr>
             <a:endParaRPr lang="en-US" sz="1100" dirty="0"/>
@@ -1581,9 +1367,11 @@
       <p:sp>
         <p:nvSpPr>
           <p:cNvPr id="3" name="Text 0"/>
-          <p:cNvSpPr/>
+          <p:cNvSpPr>
+            <a:spLocks noGrp="1"/>
+          </p:cNvSpPr>
           <p:nvPr>
-            <p:ph idx="101" type="title" hasCustomPrompt="1"/>
+            <p:ph type="title" idx="101" hasCustomPrompt="1"/>
           </p:nvPr>
         </p:nvSpPr>
         <p:spPr>
@@ -1600,7 +1388,7 @@
         <p:txBody>
           <a:bodyPr wrap="square" rtlCol="0"/>
           <a:lstStyle>
-            <a:lvl1pPr algn="l" indent="0" marL="0">
+            <a:lvl1pPr marL="0" indent="0" algn="l">
               <a:buNone/>
               <a:defRPr lang="en-US" sz="3200" b="1" dirty="0">
                 <a:solidFill>
@@ -1610,7 +1398,7 @@
             </a:lvl1pPr>
           </a:lstStyle>
           <a:p>
-            <a:pPr algn="l" indent="0" marL="0">
+            <a:pPr marL="0" indent="0" algn="l">
               <a:buNone/>
             </a:pPr>
             <a:endParaRPr lang="en-US" sz="3200" dirty="0"/>
@@ -1620,9 +1408,11 @@
       <p:sp>
         <p:nvSpPr>
           <p:cNvPr id="4" name="Text 0"/>
-          <p:cNvSpPr/>
+          <p:cNvSpPr>
+            <a:spLocks noGrp="1"/>
+          </p:cNvSpPr>
           <p:nvPr>
-            <p:ph idx="102" type="body" hasCustomPrompt="1"/>
+            <p:ph type="body" idx="102" hasCustomPrompt="1"/>
           </p:nvPr>
         </p:nvSpPr>
         <p:spPr>
@@ -1639,7 +1429,7 @@
         <p:txBody>
           <a:bodyPr wrap="square" rtlCol="0"/>
           <a:lstStyle>
-            <a:lvl1pPr indent="0" marL="0">
+            <a:lvl1pPr marL="0" indent="0">
               <a:buNone/>
               <a:defRPr lang="en-US" sz="1800" dirty="0">
                 <a:solidFill>
@@ -1649,7 +1439,7 @@
             </a:lvl1pPr>
           </a:lstStyle>
           <a:p>
-            <a:pPr indent="0" marL="0">
+            <a:pPr marL="0" indent="0">
               <a:buNone/>
             </a:pPr>
             <a:endParaRPr lang="en-US" sz="1800" dirty="0"/>
@@ -1676,7 +1466,7 @@
           </a:prstGeom>
           <a:extLst>
             <a:ext uri="{C572A759-6A51-4108-AA02-DFA0A04FC94B}">
-              <ma14:wrappingTextBoxFlag xmlns:ma14="http://schemas.microsoft.com/office/mac/drawingml/2011/main" val="0"/>
+              <ma14:wrappingTextBoxFlag xmlns:ma14="http://schemas.microsoft.com/office/mac/drawingml/2011/main" xmlns="" val="0"/>
             </a:ext>
           </a:extLst>
         </p:spPr>
@@ -1697,8 +1487,8 @@
           <a:p>
             <a:pPr algn="r"/>
             <a:fld id="{F7021451-1387-4CA6-816F-3879F97B5CBC}" type="slidenum">
-              <a:rPr b="0" lang="en-US"/>
-              <a:t>1004</a:t>
+              <a:rPr lang="en-US" b="0"/>
+              <a:t>‹#›</a:t>
             </a:fld>
             <a:endParaRPr lang="en-US"/>
           </a:p>
@@ -1720,6 +1510,7 @@
         <a:solidFill>
           <a:schemeClr val="tx2"/>
         </a:solidFill>
+        <a:effectLst/>
       </p:bgPr>
     </p:bg>
     <p:spTree>
@@ -1739,9 +1530,11 @@
       <p:sp>
         <p:nvSpPr>
           <p:cNvPr id="2" name="Text 0"/>
-          <p:cNvSpPr/>
+          <p:cNvSpPr>
+            <a:spLocks noGrp="1"/>
+          </p:cNvSpPr>
           <p:nvPr>
-            <p:ph idx="100" type="body" hasCustomPrompt="1"/>
+            <p:ph type="body" idx="100" hasCustomPrompt="1"/>
           </p:nvPr>
         </p:nvSpPr>
         <p:spPr>
@@ -1758,9 +1551,9 @@
         <p:txBody>
           <a:bodyPr wrap="square" rtlCol="0"/>
           <a:lstStyle>
-            <a:lvl1pPr indent="0" marL="0">
-              <a:buNone/>
-              <a:defRPr lang="en-US" sz="1100" b="1" spc="200" kern="0" dirty="0">
+            <a:lvl1pPr marL="0" indent="0">
+              <a:buNone/>
+              <a:defRPr lang="en-US" sz="1100" b="1" kern="0" spc="200" dirty="0">
                 <a:solidFill>
                   <a:schemeClr val="accent6"/>
                 </a:solidFill>
@@ -1771,7 +1564,7 @@
             </a:lvl1pPr>
           </a:lstStyle>
           <a:p>
-            <a:pPr indent="0" marL="0">
+            <a:pPr marL="0" indent="0">
               <a:buNone/>
             </a:pPr>
             <a:endParaRPr lang="en-US" sz="1100" dirty="0"/>
@@ -1781,9 +1574,11 @@
       <p:sp>
         <p:nvSpPr>
           <p:cNvPr id="3" name="Text 0"/>
-          <p:cNvSpPr/>
+          <p:cNvSpPr>
+            <a:spLocks noGrp="1"/>
+          </p:cNvSpPr>
           <p:nvPr>
-            <p:ph idx="101" type="title" hasCustomPrompt="1"/>
+            <p:ph type="title" idx="101" hasCustomPrompt="1"/>
           </p:nvPr>
         </p:nvSpPr>
         <p:spPr>
@@ -1800,7 +1595,7 @@
         <p:txBody>
           <a:bodyPr wrap="square" rtlCol="0"/>
           <a:lstStyle>
-            <a:lvl1pPr algn="l" indent="0" marL="0">
+            <a:lvl1pPr marL="0" indent="0" algn="l">
               <a:buNone/>
               <a:defRPr lang="en-US" sz="3200" b="1" dirty="0">
                 <a:solidFill>
@@ -1810,7 +1605,7 @@
             </a:lvl1pPr>
           </a:lstStyle>
           <a:p>
-            <a:pPr algn="l" indent="0" marL="0">
+            <a:pPr marL="0" indent="0" algn="l">
               <a:buNone/>
             </a:pPr>
             <a:endParaRPr lang="en-US" sz="3200" dirty="0"/>
@@ -1837,7 +1632,7 @@
           </a:prstGeom>
           <a:extLst>
             <a:ext uri="{C572A759-6A51-4108-AA02-DFA0A04FC94B}">
-              <ma14:wrappingTextBoxFlag xmlns:ma14="http://schemas.microsoft.com/office/mac/drawingml/2011/main" val="0"/>
+              <ma14:wrappingTextBoxFlag xmlns:ma14="http://schemas.microsoft.com/office/mac/drawingml/2011/main" xmlns="" val="0"/>
             </a:ext>
           </a:extLst>
         </p:spPr>
@@ -1858,8 +1653,8 @@
           <a:p>
             <a:pPr algn="r"/>
             <a:fld id="{F7021451-1387-4CA6-816F-3879F97B5CBC}" type="slidenum">
-              <a:rPr b="0" lang="en-US"/>
-              <a:t>1005</a:t>
+              <a:rPr lang="en-US" b="0"/>
+              <a:t>‹#›</a:t>
             </a:fld>
             <a:endParaRPr lang="en-US"/>
           </a:p>
@@ -1876,6 +1671,11 @@
 <file path=ppt/slideMasters/slideMaster1.xml><?xml version="1.0" encoding="utf-8"?>
 <p:sldMaster xmlns:a="http://schemas.openxmlformats.org/drawingml/2006/main" xmlns:r="http://schemas.openxmlformats.org/officeDocument/2006/relationships" xmlns:p="http://schemas.openxmlformats.org/presentationml/2006/main">
   <p:cSld>
+    <p:bg>
+      <p:bgRef idx="1001">
+        <a:schemeClr val="bg1"/>
+      </p:bgRef>
+    </p:bg>
     <p:spTree>
       <p:nvGrpSpPr>
         <p:cNvPr id="1" name=""/>
@@ -1910,7 +1710,7 @@
           </a:prstGeom>
           <a:extLst>
             <a:ext uri="{C572A759-6A51-4108-AA02-DFA0A04FC94B}">
-              <ma14:wrappingTextBoxFlag xmlns:ma14="http://schemas.microsoft.com/office/mac/drawingml/2011/main" val="0"/>
+              <ma14:wrappingTextBoxFlag xmlns:ma14="http://schemas.microsoft.com/office/mac/drawingml/2011/main" xmlns="" val="0"/>
             </a:ext>
           </a:extLst>
         </p:spPr>
@@ -1931,8 +1731,8 @@
           <a:p>
             <a:pPr algn="r"/>
             <a:fld id="{F7021451-1387-4CA6-816F-3879F97B5CBC}" type="slidenum">
-              <a:rPr b="0" lang="en-US"/>
-              <a:t>null</a:t>
+              <a:rPr lang="en-US" b="0"/>
+              <a:t>‹#›</a:t>
             </a:fld>
             <a:endParaRPr lang="en-US"/>
           </a:p>
@@ -2222,9 +2022,11 @@
       <p:sp>
         <p:nvSpPr>
           <p:cNvPr id="2" name="Text 0"/>
-          <p:cNvSpPr/>
+          <p:cNvSpPr>
+            <a:spLocks noGrp="1"/>
+          </p:cNvSpPr>
           <p:nvPr>
-            <p:ph idx="100" type="body" hasCustomPrompt="1"/>
+            <p:ph type="body" idx="100" hasCustomPrompt="1"/>
           </p:nvPr>
         </p:nvSpPr>
         <p:spPr>
@@ -2242,11 +2044,11 @@
           <a:bodyPr wrap="square" lIns="0" tIns="0" rIns="0" bIns="0" rtlCol="0" anchor="ctr"/>
           <a:lstStyle/>
           <a:p>
-            <a:pPr indent="0" marL="0">
-              <a:buNone/>
-            </a:pPr>
-            <a:r>
-              <a:rPr lang="en-US" sz="1200" b="1" spc="300" kern="0" dirty="0">
+            <a:pPr marL="0" indent="0">
+              <a:buNone/>
+            </a:pPr>
+            <a:r>
+              <a:rPr lang="en-US" sz="1200" b="1" kern="0" spc="300" dirty="0">
                 <a:solidFill>
                   <a:schemeClr val="accent6"/>
                 </a:solidFill>
@@ -2263,9 +2065,11 @@
       <p:sp>
         <p:nvSpPr>
           <p:cNvPr id="3" name="Text 0"/>
-          <p:cNvSpPr/>
+          <p:cNvSpPr>
+            <a:spLocks noGrp="1"/>
+          </p:cNvSpPr>
           <p:nvPr>
-            <p:ph idx="101" type="title" hasCustomPrompt="1"/>
+            <p:ph type="title" idx="101" hasCustomPrompt="1"/>
           </p:nvPr>
         </p:nvSpPr>
         <p:spPr>
@@ -2283,7 +2087,7 @@
           <a:bodyPr wrap="square" lIns="0" tIns="0" rIns="0" bIns="0" rtlCol="0" anchor="t"/>
           <a:lstStyle/>
           <a:p>
-            <a:pPr algn="l" indent="0" marL="0">
+            <a:pPr marL="0" indent="0" algn="l">
               <a:buNone/>
             </a:pPr>
             <a:r>
@@ -2301,9 +2105,11 @@
       <p:sp>
         <p:nvSpPr>
           <p:cNvPr id="4" name="Text 0"/>
-          <p:cNvSpPr/>
+          <p:cNvSpPr>
+            <a:spLocks noGrp="1"/>
+          </p:cNvSpPr>
           <p:nvPr>
-            <p:ph idx="102" type="body" hasCustomPrompt="1"/>
+            <p:ph type="body" idx="102" hasCustomPrompt="1"/>
           </p:nvPr>
         </p:nvSpPr>
         <p:spPr>
@@ -2321,16 +2127,24 @@
           <a:bodyPr wrap="square" lIns="0" tIns="0" rIns="0" bIns="0" rtlCol="0" anchor="t"/>
           <a:lstStyle/>
           <a:p>
-            <a:pPr indent="0" marL="0">
-              <a:buNone/>
-            </a:pPr>
+            <a:pPr marL="0" indent="0">
+              <a:buNone/>
+            </a:pPr>
+            <a:r>
+              <a:rPr lang="en-US" sz="1800" dirty="0" err="1">
+                <a:solidFill>
+                  <a:schemeClr val="accent5"/>
+                </a:solidFill>
+              </a:rPr>
+              <a:t>AutoMarket</a:t>
+            </a:r>
             <a:r>
               <a:rPr lang="en-US" sz="1800" dirty="0">
                 <a:solidFill>
                   <a:schemeClr val="accent5"/>
                 </a:solidFill>
               </a:rPr>
-              <a:t>Студија на случај: AutoMarket — огласи за автомобили</a:t>
+              <a:t> — огласи за автомобили</a:t>
             </a:r>
             <a:endParaRPr lang="en-US" sz="1800" dirty="0"/>
           </a:p>
@@ -2339,9 +2153,11 @@
       <p:sp>
         <p:nvSpPr>
           <p:cNvPr id="5" name="Text 0"/>
-          <p:cNvSpPr/>
+          <p:cNvSpPr>
+            <a:spLocks noGrp="1"/>
+          </p:cNvSpPr>
           <p:nvPr>
-            <p:ph idx="103" type="body" hasCustomPrompt="1"/>
+            <p:ph type="body" idx="103" hasCustomPrompt="1"/>
           </p:nvPr>
         </p:nvSpPr>
         <p:spPr>
@@ -2359,53 +2175,99 @@
           <a:bodyPr wrap="square" lIns="0" tIns="0" rIns="0" bIns="0" rtlCol="0" anchor="t"/>
           <a:lstStyle/>
           <a:p>
-            <a:pPr indent="0" marL="0">
+            <a:pPr marL="0" indent="0">
               <a:spcAft>
                 <a:spcPts val="400"/>
               </a:spcAft>
               <a:buNone/>
             </a:pPr>
             <a:r>
+              <a:rPr lang="mk-MK" sz="1400" b="1" dirty="0">
+                <a:solidFill>
+                  <a:schemeClr val="bg1"/>
+                </a:solidFill>
+              </a:rPr>
+              <a:t>Даниел Костоски</a:t>
+            </a:r>
+            <a:r>
               <a:rPr lang="en-US" sz="1400" b="1" dirty="0">
                 <a:solidFill>
                   <a:schemeClr val="bg1"/>
                 </a:solidFill>
               </a:rPr>
-              <a:t>[Име Презиме] · [бр. на индекс]</a:t>
+              <a:t>· </a:t>
+            </a:r>
+            <a:r>
+              <a:rPr lang="mk-MK" sz="1400" b="1" dirty="0">
+                <a:solidFill>
+                  <a:schemeClr val="bg1"/>
+                </a:solidFill>
+              </a:rPr>
+              <a:t>221189</a:t>
             </a:r>
             <a:endParaRPr lang="en-US" sz="1400" dirty="0"/>
           </a:p>
           <a:p>
-            <a:pPr indent="0" marL="0">
+            <a:r>
+              <a:rPr lang="en-US" sz="1400" dirty="0" err="1">
+                <a:solidFill>
+                  <a:schemeClr val="accent5"/>
+                </a:solidFill>
+              </a:rPr>
+              <a:t>Ментор</a:t>
+            </a:r>
+            <a:r>
+              <a:rPr lang="en-US" sz="1400" dirty="0">
+                <a:solidFill>
+                  <a:schemeClr val="accent5"/>
+                </a:solidFill>
+              </a:rPr>
+              <a:t>: </a:t>
+            </a:r>
+            <a:r>
+              <a:rPr lang="en-US" sz="1400" dirty="0" err="1">
+                <a:solidFill>
+                  <a:schemeClr val="accent5"/>
+                </a:solidFill>
+              </a:rPr>
+              <a:t>проф</a:t>
+            </a:r>
+            <a:r>
+              <a:rPr lang="en-US" sz="1400" dirty="0">
+                <a:solidFill>
+                  <a:schemeClr val="accent5"/>
+                </a:solidFill>
+              </a:rPr>
+              <a:t>. </a:t>
+            </a:r>
+            <a:r>
+              <a:rPr lang="" dirty="0"/>
+              <a:t>д-р Костадин Мишев</a:t>
+            </a:r>
+            <a:endParaRPr lang="en-US" sz="1400" dirty="0"/>
+          </a:p>
+          <a:p>
+            <a:pPr marL="0" indent="0">
               <a:spcAft>
                 <a:spcPts val="400"/>
               </a:spcAft>
               <a:buNone/>
             </a:pPr>
             <a:r>
+              <a:rPr lang="mk-MK" sz="1400" dirty="0">
+                <a:solidFill>
+                  <a:schemeClr val="accent5"/>
+                </a:solidFill>
+              </a:rPr>
+              <a:t>ФИНКИ</a:t>
+            </a:r>
+            <a:r>
               <a:rPr lang="en-US" sz="1400" dirty="0">
                 <a:solidFill>
                   <a:schemeClr val="accent5"/>
                 </a:solidFill>
               </a:rPr>
-              <a:t>Ментор: [проф. д-р Име Презиме]</a:t>
-            </a:r>
-            <a:endParaRPr lang="en-US" sz="1400" dirty="0"/>
-          </a:p>
-          <a:p>
-            <a:pPr indent="0" marL="0">
-              <a:spcAft>
-                <a:spcPts val="400"/>
-              </a:spcAft>
-              <a:buNone/>
-            </a:pPr>
-            <a:r>
-              <a:rPr lang="en-US" sz="1400" dirty="0">
-                <a:solidFill>
-                  <a:schemeClr val="accent5"/>
-                </a:solidFill>
-              </a:rPr>
-              <a:t>[Факултет] · октомври 2026</a:t>
+              <a:t>· октомври 2026</a:t>
             </a:r>
             <a:endParaRPr lang="en-US" sz="1400" dirty="0"/>
           </a:p>
@@ -2433,6 +2295,13 @@
             <a:prstDash val="solid"/>
           </a:ln>
         </p:spPr>
+        <p:txBody>
+          <a:bodyPr/>
+          <a:lstStyle/>
+          <a:p>
+            <a:endParaRPr lang="LID4096"/>
+          </a:p>
+        </p:txBody>
       </p:sp>
       <p:sp>
         <p:nvSpPr>
@@ -2460,17 +2329,24 @@
             <a:prstDash val="solid"/>
           </a:ln>
         </p:spPr>
+        <p:txBody>
+          <a:bodyPr/>
+          <a:lstStyle/>
+          <a:p>
+            <a:endParaRPr lang="LID4096"/>
+          </a:p>
+        </p:txBody>
       </p:sp>
       <p:pic>
         <p:nvPicPr>
-          <p:cNvPr id="8" name="icon-2" descr="preencoded.png">    </p:cNvPr>
+          <p:cNvPr id="8" name="icon-2" descr="preencoded.png"/>
           <p:cNvPicPr>
             <a:picLocks noChangeAspect="1"/>
           </p:cNvPicPr>
           <p:nvPr/>
         </p:nvPicPr>
         <p:blipFill>
-          <a:blip r:embed="rId1"/>
+          <a:blip r:embed="rId3"/>
           <a:stretch>
             <a:fillRect/>
           </a:stretch>
@@ -2506,7 +2382,7 @@
           <a:bodyPr wrap="square" lIns="0" tIns="0" rIns="0" bIns="0" rtlCol="0" anchor="ctr"/>
           <a:lstStyle/>
           <a:p>
-            <a:pPr algn="ctr" indent="0" marL="0">
+            <a:pPr marL="0" indent="0" algn="ctr">
               <a:buNone/>
             </a:pPr>
             <a:r>
@@ -2546,6 +2422,13 @@
             <a:prstDash val="dash"/>
           </a:ln>
         </p:spPr>
+        <p:txBody>
+          <a:bodyPr/>
+          <a:lstStyle/>
+          <a:p>
+            <a:endParaRPr lang="LID4096"/>
+          </a:p>
+        </p:txBody>
       </p:sp>
       <p:sp>
         <p:nvSpPr>
@@ -2573,17 +2456,24 @@
             <a:prstDash val="solid"/>
           </a:ln>
         </p:spPr>
+        <p:txBody>
+          <a:bodyPr/>
+          <a:lstStyle/>
+          <a:p>
+            <a:endParaRPr lang="LID4096"/>
+          </a:p>
+        </p:txBody>
       </p:sp>
       <p:pic>
         <p:nvPicPr>
-          <p:cNvPr id="12" name="icon-6" descr="preencoded.png">    </p:cNvPr>
+          <p:cNvPr id="12" name="icon-6" descr="preencoded.png"/>
           <p:cNvPicPr>
             <a:picLocks noChangeAspect="1"/>
           </p:cNvPicPr>
           <p:nvPr/>
         </p:nvPicPr>
         <p:blipFill>
-          <a:blip r:embed="rId2"/>
+          <a:blip r:embed="rId4"/>
           <a:stretch>
             <a:fillRect/>
           </a:stretch>
@@ -2619,7 +2509,7 @@
           <a:bodyPr wrap="square" lIns="0" tIns="0" rIns="0" bIns="0" rtlCol="0" anchor="ctr"/>
           <a:lstStyle/>
           <a:p>
-            <a:pPr algn="ctr" indent="0" marL="0">
+            <a:pPr marL="0" indent="0" algn="ctr">
               <a:buNone/>
             </a:pPr>
             <a:r>
@@ -2659,6 +2549,13 @@
             <a:prstDash val="dash"/>
           </a:ln>
         </p:spPr>
+        <p:txBody>
+          <a:bodyPr/>
+          <a:lstStyle/>
+          <a:p>
+            <a:endParaRPr lang="LID4096"/>
+          </a:p>
+        </p:txBody>
       </p:sp>
       <p:sp>
         <p:nvSpPr>
@@ -2686,17 +2583,24 @@
             <a:prstDash val="solid"/>
           </a:ln>
         </p:spPr>
+        <p:txBody>
+          <a:bodyPr/>
+          <a:lstStyle/>
+          <a:p>
+            <a:endParaRPr lang="LID4096"/>
+          </a:p>
+        </p:txBody>
       </p:sp>
       <p:pic>
         <p:nvPicPr>
-          <p:cNvPr id="16" name="icon-10" descr="preencoded.png">    </p:cNvPr>
+          <p:cNvPr id="16" name="icon-10" descr="preencoded.png"/>
           <p:cNvPicPr>
             <a:picLocks noChangeAspect="1"/>
           </p:cNvPicPr>
           <p:nvPr/>
         </p:nvPicPr>
         <p:blipFill>
-          <a:blip r:embed="rId3"/>
+          <a:blip r:embed="rId5"/>
           <a:stretch>
             <a:fillRect/>
           </a:stretch>
@@ -2732,7 +2636,7 @@
           <a:bodyPr wrap="square" lIns="0" tIns="0" rIns="0" bIns="0" rtlCol="0" anchor="ctr"/>
           <a:lstStyle/>
           <a:p>
-            <a:pPr algn="ctr" indent="0" marL="0">
+            <a:pPr marL="0" indent="0" algn="ctr">
               <a:buNone/>
             </a:pPr>
             <a:r>
@@ -2772,6 +2676,13 @@
             <a:prstDash val="dash"/>
           </a:ln>
         </p:spPr>
+        <p:txBody>
+          <a:bodyPr/>
+          <a:lstStyle/>
+          <a:p>
+            <a:endParaRPr lang="LID4096"/>
+          </a:p>
+        </p:txBody>
       </p:sp>
       <p:sp>
         <p:nvSpPr>
@@ -2799,17 +2710,24 @@
             <a:prstDash val="solid"/>
           </a:ln>
         </p:spPr>
+        <p:txBody>
+          <a:bodyPr/>
+          <a:lstStyle/>
+          <a:p>
+            <a:endParaRPr lang="LID4096"/>
+          </a:p>
+        </p:txBody>
       </p:sp>
       <p:pic>
         <p:nvPicPr>
-          <p:cNvPr id="20" name="icon-14" descr="preencoded.png">    </p:cNvPr>
+          <p:cNvPr id="20" name="icon-14" descr="preencoded.png"/>
           <p:cNvPicPr>
             <a:picLocks noChangeAspect="1"/>
           </p:cNvPicPr>
           <p:nvPr/>
         </p:nvPicPr>
         <p:blipFill>
-          <a:blip r:embed="rId4"/>
+          <a:blip r:embed="rId6"/>
           <a:stretch>
             <a:fillRect/>
           </a:stretch>
@@ -2845,7 +2763,7 @@
           <a:bodyPr wrap="square" lIns="0" tIns="0" rIns="0" bIns="0" rtlCol="0" anchor="ctr"/>
           <a:lstStyle/>
           <a:p>
-            <a:pPr algn="ctr" indent="0" marL="0">
+            <a:pPr marL="0" indent="0" algn="ctr">
               <a:buNone/>
             </a:pPr>
             <a:r>
@@ -2885,6 +2803,13 @@
             <a:prstDash val="dash"/>
           </a:ln>
         </p:spPr>
+        <p:txBody>
+          <a:bodyPr/>
+          <a:lstStyle/>
+          <a:p>
+            <a:endParaRPr lang="LID4096"/>
+          </a:p>
+        </p:txBody>
       </p:sp>
       <p:sp>
         <p:nvSpPr>
@@ -2912,17 +2837,24 @@
             <a:prstDash val="solid"/>
           </a:ln>
         </p:spPr>
+        <p:txBody>
+          <a:bodyPr/>
+          <a:lstStyle/>
+          <a:p>
+            <a:endParaRPr lang="LID4096"/>
+          </a:p>
+        </p:txBody>
       </p:sp>
       <p:pic>
         <p:nvPicPr>
-          <p:cNvPr id="24" name="icon-18" descr="preencoded.png">    </p:cNvPr>
+          <p:cNvPr id="24" name="icon-18" descr="preencoded.png"/>
           <p:cNvPicPr>
             <a:picLocks noChangeAspect="1"/>
           </p:cNvPicPr>
           <p:nvPr/>
         </p:nvPicPr>
         <p:blipFill>
-          <a:blip r:embed="rId5"/>
+          <a:blip r:embed="rId7"/>
           <a:stretch>
             <a:fillRect/>
           </a:stretch>
@@ -2958,7 +2890,7 @@
           <a:bodyPr wrap="square" lIns="0" tIns="0" rIns="0" bIns="0" rtlCol="0" anchor="ctr"/>
           <a:lstStyle/>
           <a:p>
-            <a:pPr algn="ctr" indent="0" marL="0">
+            <a:pPr marL="0" indent="0" algn="ctr">
               <a:buNone/>
             </a:pPr>
             <a:r>
@@ -2998,6 +2930,13 @@
             <a:prstDash val="dash"/>
           </a:ln>
         </p:spPr>
+        <p:txBody>
+          <a:bodyPr/>
+          <a:lstStyle/>
+          <a:p>
+            <a:endParaRPr lang="LID4096"/>
+          </a:p>
+        </p:txBody>
       </p:sp>
       <p:sp>
         <p:nvSpPr>
@@ -3025,17 +2964,24 @@
             <a:prstDash val="solid"/>
           </a:ln>
         </p:spPr>
+        <p:txBody>
+          <a:bodyPr/>
+          <a:lstStyle/>
+          <a:p>
+            <a:endParaRPr lang="LID4096"/>
+          </a:p>
+        </p:txBody>
       </p:sp>
       <p:pic>
         <p:nvPicPr>
-          <p:cNvPr id="28" name="icon-22" descr="preencoded.png">    </p:cNvPr>
+          <p:cNvPr id="28" name="icon-22" descr="preencoded.png"/>
           <p:cNvPicPr>
             <a:picLocks noChangeAspect="1"/>
           </p:cNvPicPr>
           <p:nvPr/>
         </p:nvPicPr>
         <p:blipFill>
-          <a:blip r:embed="rId6"/>
+          <a:blip r:embed="rId8"/>
           <a:stretch>
             <a:fillRect/>
           </a:stretch>
@@ -3071,7 +3017,7 @@
           <a:bodyPr wrap="square" lIns="0" tIns="0" rIns="0" bIns="0" rtlCol="0" anchor="ctr"/>
           <a:lstStyle/>
           <a:p>
-            <a:pPr algn="ctr" indent="0" marL="0">
+            <a:pPr marL="0" indent="0" algn="ctr">
               <a:buNone/>
             </a:pPr>
             <a:r>
@@ -3111,6 +3057,13 @@
             <a:prstDash val="dash"/>
           </a:ln>
         </p:spPr>
+        <p:txBody>
+          <a:bodyPr/>
+          <a:lstStyle/>
+          <a:p>
+            <a:endParaRPr lang="LID4096"/>
+          </a:p>
+        </p:txBody>
       </p:sp>
       <p:sp>
         <p:nvSpPr>
@@ -3133,11 +3086,11 @@
           <a:bodyPr wrap="square" lIns="0" tIns="0" rIns="0" bIns="0" rtlCol="0" anchor="ctr"/>
           <a:lstStyle/>
           <a:p>
-            <a:pPr algn="ctr" indent="0" marL="0">
-              <a:buNone/>
-            </a:pPr>
-            <a:r>
-              <a:rPr lang="en-US" sz="1200" b="1" spc="100" kern="0" dirty="0">
+            <a:pPr marL="0" indent="0" algn="ctr">
+              <a:buNone/>
+            </a:pPr>
+            <a:r>
+              <a:rPr lang="en-US" sz="1200" b="1" kern="0" spc="100" dirty="0">
                 <a:solidFill>
                   <a:schemeClr val="accent6"/>
                 </a:solidFill>
@@ -3179,9 +3132,11 @@
       <p:sp>
         <p:nvSpPr>
           <p:cNvPr id="2" name="Text 0"/>
-          <p:cNvSpPr/>
+          <p:cNvSpPr>
+            <a:spLocks noGrp="1"/>
+          </p:cNvSpPr>
           <p:nvPr>
-            <p:ph idx="100" type="body" hasCustomPrompt="1"/>
+            <p:ph type="body" idx="100" hasCustomPrompt="1"/>
           </p:nvPr>
         </p:nvSpPr>
         <p:spPr>
@@ -3199,11 +3154,11 @@
           <a:bodyPr wrap="square" lIns="0" tIns="0" rIns="0" bIns="0" rtlCol="0" anchor="ctr"/>
           <a:lstStyle/>
           <a:p>
-            <a:pPr indent="0" marL="0">
-              <a:buNone/>
-            </a:pPr>
-            <a:r>
-              <a:rPr lang="en-US" sz="1100" b="1" spc="200" kern="0" dirty="0">
+            <a:pPr marL="0" indent="0">
+              <a:buNone/>
+            </a:pPr>
+            <a:r>
+              <a:rPr lang="en-US" sz="1100" b="1" kern="0" spc="200" dirty="0">
                 <a:solidFill>
                   <a:schemeClr val="accent1"/>
                 </a:solidFill>
@@ -3211,7 +3166,7 @@
                 <a:ea typeface="Courier New" pitchFamily="34" charset="-122"/>
                 <a:cs typeface="Courier New" pitchFamily="34" charset="-120"/>
               </a:rPr>
-              <a:t>01 · ИДЕЈАТА</a:t>
+              <a:t>01</a:t>
             </a:r>
             <a:endParaRPr lang="en-US" sz="1100" dirty="0"/>
           </a:p>
@@ -3220,9 +3175,11 @@
       <p:sp>
         <p:nvSpPr>
           <p:cNvPr id="3" name="Text 0"/>
-          <p:cNvSpPr/>
+          <p:cNvSpPr>
+            <a:spLocks noGrp="1"/>
+          </p:cNvSpPr>
           <p:nvPr>
-            <p:ph idx="101" type="title" hasCustomPrompt="1"/>
+            <p:ph type="title" idx="101" hasCustomPrompt="1"/>
           </p:nvPr>
         </p:nvSpPr>
         <p:spPr>
@@ -3240,56 +3197,14 @@
           <a:bodyPr wrap="square" lIns="0" tIns="0" rIns="0" bIns="0" rtlCol="0" anchor="t"/>
           <a:lstStyle/>
           <a:p>
-            <a:pPr algn="l" indent="0" marL="0">
-              <a:buNone/>
-            </a:pPr>
-            <a:r>
-              <a:rPr lang="en-US" sz="3200" b="1" dirty="0">
-                <a:solidFill>
-                  <a:schemeClr val="tx1"/>
-                </a:solidFill>
-              </a:rPr>
-              <a:t>Имам монолит. Предлагам да го разделам.</a:t>
+            <a:pPr marL="0" indent="0" algn="l">
+              <a:buNone/>
+            </a:pPr>
+            <a:r>
+              <a:rPr lang="en-US" dirty="0"/>
+              <a:t>Monolith -&gt; Microservice architecture</a:t>
             </a:r>
             <a:endParaRPr lang="en-US" sz="3200" dirty="0"/>
-          </a:p>
-        </p:txBody>
-      </p:sp>
-      <p:sp>
-        <p:nvSpPr>
-          <p:cNvPr id="4" name="Text 0"/>
-          <p:cNvSpPr/>
-          <p:nvPr>
-            <p:ph idx="102" type="body" hasCustomPrompt="1"/>
-          </p:nvPr>
-        </p:nvSpPr>
-        <p:spPr>
-          <a:xfrm>
-            <a:off x="548640" y="1371600"/>
-            <a:ext cx="10789920" cy="411480"/>
-          </a:xfrm>
-          <a:prstGeom prst="rect">
-            <a:avLst/>
-          </a:prstGeom>
-          <a:noFill/>
-          <a:ln/>
-        </p:spPr>
-        <p:txBody>
-          <a:bodyPr wrap="square" lIns="0" tIns="0" rIns="0" bIns="0" rtlCol="0" anchor="t"/>
-          <a:lstStyle/>
-          <a:p>
-            <a:pPr indent="0" marL="0">
-              <a:buNone/>
-            </a:pPr>
-            <a:r>
-              <a:rPr lang="en-US" sz="1800" dirty="0">
-                <a:solidFill>
-                  <a:schemeClr val="accent2"/>
-                </a:solidFill>
-              </a:rPr>
-              <a:t>Истата функционалност, изградена двапати — стариот проект ми е основа за споредба.</a:t>
-            </a:r>
-            <a:endParaRPr lang="en-US" sz="1800" dirty="0"/>
           </a:p>
         </p:txBody>
       </p:sp>
@@ -3314,11 +3229,11 @@
           <a:bodyPr wrap="square" lIns="0" tIns="0" rIns="0" bIns="0" rtlCol="0" anchor="ctr"/>
           <a:lstStyle/>
           <a:p>
-            <a:pPr algn="l" indent="0" marL="0">
-              <a:buNone/>
-            </a:pPr>
-            <a:r>
-              <a:rPr lang="en-US" sz="1100" b="1" spc="100" kern="0" dirty="0">
+            <a:pPr marL="0" indent="0" algn="l">
+              <a:buNone/>
+            </a:pPr>
+            <a:r>
+              <a:rPr lang="en-US" sz="1100" b="1" kern="0" spc="100" dirty="0">
                 <a:solidFill>
                   <a:schemeClr val="accent2"/>
                 </a:solidFill>
@@ -3358,17 +3273,24 @@
             <a:prstDash val="solid"/>
           </a:ln>
         </p:spPr>
+        <p:txBody>
+          <a:bodyPr/>
+          <a:lstStyle/>
+          <a:p>
+            <a:endParaRPr lang="LID4096"/>
+          </a:p>
+        </p:txBody>
       </p:sp>
       <p:pic>
         <p:nvPicPr>
-          <p:cNvPr id="7" name="icon-27" descr="preencoded.png">    </p:cNvPr>
+          <p:cNvPr id="7" name="icon-27" descr="preencoded.png"/>
           <p:cNvPicPr>
             <a:picLocks noChangeAspect="1"/>
           </p:cNvPicPr>
           <p:nvPr/>
         </p:nvPicPr>
         <p:blipFill>
-          <a:blip r:embed="rId1"/>
+          <a:blip r:embed="rId3"/>
           <a:stretch>
             <a:fillRect/>
           </a:stretch>
@@ -3404,11 +3326,11 @@
           <a:bodyPr wrap="square" lIns="0" tIns="0" rIns="0" bIns="0" rtlCol="0" anchor="t"/>
           <a:lstStyle/>
           <a:p>
-            <a:pPr algn="ctr" indent="0" marL="0">
-              <a:buNone/>
-            </a:pPr>
-            <a:r>
-              <a:rPr lang="en-US" sz="2400" b="1" dirty="0">
+            <a:pPr marL="0" indent="0" algn="ctr">
+              <a:buNone/>
+            </a:pPr>
+            <a:r>
+              <a:rPr lang="en-US" sz="2400" b="1" dirty="0" err="1">
                 <a:solidFill>
                   <a:schemeClr val="accent2"/>
                 </a:solidFill>
@@ -3416,7 +3338,7 @@
                 <a:ea typeface="+mj-lt" pitchFamily="34" charset="-122"/>
                 <a:cs typeface="+mj-lt" pitchFamily="34" charset="-120"/>
               </a:rPr>
-              <a:t>.NET монолит</a:t>
+              <a:t>монолит</a:t>
             </a:r>
             <a:endParaRPr lang="en-US" sz="2400" dirty="0"/>
           </a:p>
@@ -3443,7 +3365,7 @@
           <a:bodyPr wrap="square" lIns="0" tIns="0" rIns="0" bIns="0" rtlCol="0" anchor="t"/>
           <a:lstStyle/>
           <a:p>
-            <a:pPr algn="ctr" indent="0" marL="0">
+            <a:pPr marL="0" indent="0" algn="ctr">
               <a:buNone/>
             </a:pPr>
             <a:r>
@@ -3481,6 +3403,13 @@
             <a:tailEnd type="triangle"/>
           </a:ln>
         </p:spPr>
+        <p:txBody>
+          <a:bodyPr/>
+          <a:lstStyle/>
+          <a:p>
+            <a:endParaRPr lang="LID4096"/>
+          </a:p>
+        </p:txBody>
       </p:sp>
       <p:sp>
         <p:nvSpPr>
@@ -3503,11 +3432,11 @@
           <a:bodyPr wrap="square" lIns="0" tIns="0" rIns="0" bIns="0" rtlCol="0" anchor="ctr"/>
           <a:lstStyle/>
           <a:p>
-            <a:pPr algn="l" indent="0" marL="0">
-              <a:buNone/>
-            </a:pPr>
-            <a:r>
-              <a:rPr lang="en-US" sz="1100" b="1" spc="100" kern="0" dirty="0">
+            <a:pPr marL="0" indent="0" algn="l">
+              <a:buNone/>
+            </a:pPr>
+            <a:r>
+              <a:rPr lang="en-US" sz="1100" b="1" kern="0" spc="100" dirty="0">
                 <a:solidFill>
                   <a:schemeClr val="accent1"/>
                 </a:solidFill>
@@ -3543,6 +3472,13 @@
             <a:prstDash val="solid"/>
           </a:ln>
         </p:spPr>
+        <p:txBody>
+          <a:bodyPr/>
+          <a:lstStyle/>
+          <a:p>
+            <a:endParaRPr lang="LID4096"/>
+          </a:p>
+        </p:txBody>
       </p:sp>
       <p:sp>
         <p:nvSpPr>
@@ -3568,24 +3504,31 @@
             <a:prstDash val="solid"/>
           </a:ln>
           <a:effectLst>
-            <a:outerShdw sx="100000" sy="100000" kx="0" ky="0" algn="bl" rotWithShape="0" blurRad="101600" dist="19050" dir="5400000">
+            <a:outerShdw blurRad="101600" dist="19050" dir="5400000" algn="bl" rotWithShape="0">
               <a:srgbClr val="000000">
                 <a:alpha val="7000"/>
               </a:srgbClr>
             </a:outerShdw>
           </a:effectLst>
         </p:spPr>
+        <p:txBody>
+          <a:bodyPr/>
+          <a:lstStyle/>
+          <a:p>
+            <a:endParaRPr lang="LID4096"/>
+          </a:p>
+        </p:txBody>
       </p:sp>
       <p:pic>
         <p:nvPicPr>
-          <p:cNvPr id="14" name="icon-33" descr="preencoded.png">    </p:cNvPr>
+          <p:cNvPr id="14" name="icon-33" descr="preencoded.png"/>
           <p:cNvPicPr>
             <a:picLocks noChangeAspect="1"/>
           </p:cNvPicPr>
           <p:nvPr/>
         </p:nvPicPr>
         <p:blipFill>
-          <a:blip r:embed="rId2"/>
+          <a:blip r:embed="rId4"/>
           <a:stretch>
             <a:fillRect/>
           </a:stretch>
@@ -3621,7 +3564,7 @@
           <a:bodyPr wrap="square" lIns="0" tIns="0" rIns="0" bIns="0" rtlCol="0" anchor="ctr"/>
           <a:lstStyle/>
           <a:p>
-            <a:pPr algn="ctr" indent="0" marL="0">
+            <a:pPr marL="0" indent="0" algn="ctr">
               <a:buNone/>
             </a:pPr>
             <a:r>
@@ -3658,6 +3601,13 @@
             <a:prstDash val="dash"/>
           </a:ln>
         </p:spPr>
+        <p:txBody>
+          <a:bodyPr/>
+          <a:lstStyle/>
+          <a:p>
+            <a:endParaRPr lang="LID4096"/>
+          </a:p>
+        </p:txBody>
       </p:sp>
       <p:sp>
         <p:nvSpPr>
@@ -3683,24 +3633,31 @@
             <a:prstDash val="solid"/>
           </a:ln>
           <a:effectLst>
-            <a:outerShdw sx="100000" sy="100000" kx="0" ky="0" algn="bl" rotWithShape="0" blurRad="101600" dist="19050" dir="5400000">
+            <a:outerShdw blurRad="101600" dist="19050" dir="5400000" algn="bl" rotWithShape="0">
               <a:srgbClr val="000000">
                 <a:alpha val="7000"/>
               </a:srgbClr>
             </a:outerShdw>
           </a:effectLst>
         </p:spPr>
+        <p:txBody>
+          <a:bodyPr/>
+          <a:lstStyle/>
+          <a:p>
+            <a:endParaRPr lang="LID4096"/>
+          </a:p>
+        </p:txBody>
       </p:sp>
       <p:pic>
         <p:nvPicPr>
-          <p:cNvPr id="18" name="icon-37" descr="preencoded.png">    </p:cNvPr>
+          <p:cNvPr id="18" name="icon-37" descr="preencoded.png"/>
           <p:cNvPicPr>
             <a:picLocks noChangeAspect="1"/>
           </p:cNvPicPr>
           <p:nvPr/>
         </p:nvPicPr>
         <p:blipFill>
-          <a:blip r:embed="rId3"/>
+          <a:blip r:embed="rId5"/>
           <a:stretch>
             <a:fillRect/>
           </a:stretch>
@@ -3736,7 +3693,7 @@
           <a:bodyPr wrap="square" lIns="0" tIns="0" rIns="0" bIns="0" rtlCol="0" anchor="ctr"/>
           <a:lstStyle/>
           <a:p>
-            <a:pPr algn="ctr" indent="0" marL="0">
+            <a:pPr marL="0" indent="0" algn="ctr">
               <a:buNone/>
             </a:pPr>
             <a:r>
@@ -3773,6 +3730,13 @@
             <a:prstDash val="dash"/>
           </a:ln>
         </p:spPr>
+        <p:txBody>
+          <a:bodyPr/>
+          <a:lstStyle/>
+          <a:p>
+            <a:endParaRPr lang="LID4096"/>
+          </a:p>
+        </p:txBody>
       </p:sp>
       <p:sp>
         <p:nvSpPr>
@@ -3798,24 +3762,31 @@
             <a:prstDash val="solid"/>
           </a:ln>
           <a:effectLst>
-            <a:outerShdw sx="100000" sy="100000" kx="0" ky="0" algn="bl" rotWithShape="0" blurRad="101600" dist="19050" dir="5400000">
+            <a:outerShdw blurRad="101600" dist="19050" dir="5400000" algn="bl" rotWithShape="0">
               <a:srgbClr val="000000">
                 <a:alpha val="7000"/>
               </a:srgbClr>
             </a:outerShdw>
           </a:effectLst>
         </p:spPr>
+        <p:txBody>
+          <a:bodyPr/>
+          <a:lstStyle/>
+          <a:p>
+            <a:endParaRPr lang="LID4096"/>
+          </a:p>
+        </p:txBody>
       </p:sp>
       <p:pic>
         <p:nvPicPr>
-          <p:cNvPr id="22" name="icon-41" descr="preencoded.png">    </p:cNvPr>
+          <p:cNvPr id="22" name="icon-41" descr="preencoded.png"/>
           <p:cNvPicPr>
             <a:picLocks noChangeAspect="1"/>
           </p:cNvPicPr>
           <p:nvPr/>
         </p:nvPicPr>
         <p:blipFill>
-          <a:blip r:embed="rId4"/>
+          <a:blip r:embed="rId6"/>
           <a:stretch>
             <a:fillRect/>
           </a:stretch>
@@ -3851,7 +3822,7 @@
           <a:bodyPr wrap="square" lIns="0" tIns="0" rIns="0" bIns="0" rtlCol="0" anchor="ctr"/>
           <a:lstStyle/>
           <a:p>
-            <a:pPr algn="ctr" indent="0" marL="0">
+            <a:pPr marL="0" indent="0" algn="ctr">
               <a:buNone/>
             </a:pPr>
             <a:r>
@@ -3888,6 +3859,13 @@
             <a:prstDash val="dash"/>
           </a:ln>
         </p:spPr>
+        <p:txBody>
+          <a:bodyPr/>
+          <a:lstStyle/>
+          <a:p>
+            <a:endParaRPr lang="LID4096"/>
+          </a:p>
+        </p:txBody>
       </p:sp>
       <p:sp>
         <p:nvSpPr>
@@ -3913,24 +3891,31 @@
             <a:prstDash val="solid"/>
           </a:ln>
           <a:effectLst>
-            <a:outerShdw sx="100000" sy="100000" kx="0" ky="0" algn="bl" rotWithShape="0" blurRad="101600" dist="19050" dir="5400000">
+            <a:outerShdw blurRad="101600" dist="19050" dir="5400000" algn="bl" rotWithShape="0">
               <a:srgbClr val="000000">
                 <a:alpha val="7000"/>
               </a:srgbClr>
             </a:outerShdw>
           </a:effectLst>
         </p:spPr>
+        <p:txBody>
+          <a:bodyPr/>
+          <a:lstStyle/>
+          <a:p>
+            <a:endParaRPr lang="LID4096"/>
+          </a:p>
+        </p:txBody>
       </p:sp>
       <p:pic>
         <p:nvPicPr>
-          <p:cNvPr id="26" name="icon-45" descr="preencoded.png">    </p:cNvPr>
+          <p:cNvPr id="26" name="icon-45" descr="preencoded.png"/>
           <p:cNvPicPr>
             <a:picLocks noChangeAspect="1"/>
           </p:cNvPicPr>
           <p:nvPr/>
         </p:nvPicPr>
         <p:blipFill>
-          <a:blip r:embed="rId5"/>
+          <a:blip r:embed="rId7"/>
           <a:stretch>
             <a:fillRect/>
           </a:stretch>
@@ -3966,7 +3951,7 @@
           <a:bodyPr wrap="square" lIns="0" tIns="0" rIns="0" bIns="0" rtlCol="0" anchor="ctr"/>
           <a:lstStyle/>
           <a:p>
-            <a:pPr algn="ctr" indent="0" marL="0">
+            <a:pPr marL="0" indent="0" algn="ctr">
               <a:buNone/>
             </a:pPr>
             <a:r>
@@ -4003,6 +3988,13 @@
             <a:prstDash val="dash"/>
           </a:ln>
         </p:spPr>
+        <p:txBody>
+          <a:bodyPr/>
+          <a:lstStyle/>
+          <a:p>
+            <a:endParaRPr lang="LID4096"/>
+          </a:p>
+        </p:txBody>
       </p:sp>
       <p:sp>
         <p:nvSpPr>
@@ -4028,24 +4020,31 @@
             <a:prstDash val="solid"/>
           </a:ln>
           <a:effectLst>
-            <a:outerShdw sx="100000" sy="100000" kx="0" ky="0" algn="bl" rotWithShape="0" blurRad="101600" dist="19050" dir="5400000">
+            <a:outerShdw blurRad="101600" dist="19050" dir="5400000" algn="bl" rotWithShape="0">
               <a:srgbClr val="000000">
                 <a:alpha val="7000"/>
               </a:srgbClr>
             </a:outerShdw>
           </a:effectLst>
         </p:spPr>
+        <p:txBody>
+          <a:bodyPr/>
+          <a:lstStyle/>
+          <a:p>
+            <a:endParaRPr lang="LID4096"/>
+          </a:p>
+        </p:txBody>
       </p:sp>
       <p:pic>
         <p:nvPicPr>
-          <p:cNvPr id="30" name="icon-49" descr="preencoded.png">    </p:cNvPr>
+          <p:cNvPr id="30" name="icon-49" descr="preencoded.png"/>
           <p:cNvPicPr>
             <a:picLocks noChangeAspect="1"/>
           </p:cNvPicPr>
           <p:nvPr/>
         </p:nvPicPr>
         <p:blipFill>
-          <a:blip r:embed="rId6"/>
+          <a:blip r:embed="rId8"/>
           <a:stretch>
             <a:fillRect/>
           </a:stretch>
@@ -4081,7 +4080,7 @@
           <a:bodyPr wrap="square" lIns="0" tIns="0" rIns="0" bIns="0" rtlCol="0" anchor="ctr"/>
           <a:lstStyle/>
           <a:p>
-            <a:pPr algn="ctr" indent="0" marL="0">
+            <a:pPr marL="0" indent="0" algn="ctr">
               <a:buNone/>
             </a:pPr>
             <a:r>
@@ -4118,6 +4117,13 @@
             <a:prstDash val="dash"/>
           </a:ln>
         </p:spPr>
+        <p:txBody>
+          <a:bodyPr/>
+          <a:lstStyle/>
+          <a:p>
+            <a:endParaRPr lang="LID4096"/>
+          </a:p>
+        </p:txBody>
       </p:sp>
       <p:sp>
         <p:nvSpPr>
@@ -4143,24 +4149,31 @@
             <a:prstDash val="solid"/>
           </a:ln>
           <a:effectLst>
-            <a:outerShdw sx="100000" sy="100000" kx="0" ky="0" algn="bl" rotWithShape="0" blurRad="101600" dist="19050" dir="5400000">
+            <a:outerShdw blurRad="101600" dist="19050" dir="5400000" algn="bl" rotWithShape="0">
               <a:srgbClr val="000000">
                 <a:alpha val="7000"/>
               </a:srgbClr>
             </a:outerShdw>
           </a:effectLst>
         </p:spPr>
+        <p:txBody>
+          <a:bodyPr/>
+          <a:lstStyle/>
+          <a:p>
+            <a:endParaRPr lang="LID4096"/>
+          </a:p>
+        </p:txBody>
       </p:sp>
       <p:pic>
         <p:nvPicPr>
-          <p:cNvPr id="34" name="icon-53" descr="preencoded.png">    </p:cNvPr>
+          <p:cNvPr id="34" name="icon-53" descr="preencoded.png"/>
           <p:cNvPicPr>
             <a:picLocks noChangeAspect="1"/>
           </p:cNvPicPr>
           <p:nvPr/>
         </p:nvPicPr>
         <p:blipFill>
-          <a:blip r:embed="rId7"/>
+          <a:blip r:embed="rId9"/>
           <a:stretch>
             <a:fillRect/>
           </a:stretch>
@@ -4196,7 +4209,7 @@
           <a:bodyPr wrap="square" lIns="0" tIns="0" rIns="0" bIns="0" rtlCol="0" anchor="ctr"/>
           <a:lstStyle/>
           <a:p>
-            <a:pPr algn="ctr" indent="0" marL="0">
+            <a:pPr marL="0" indent="0" algn="ctr">
               <a:buNone/>
             </a:pPr>
             <a:r>
@@ -4233,6 +4246,13 @@
             <a:prstDash val="dash"/>
           </a:ln>
         </p:spPr>
+        <p:txBody>
+          <a:bodyPr/>
+          <a:lstStyle/>
+          <a:p>
+            <a:endParaRPr lang="LID4096"/>
+          </a:p>
+        </p:txBody>
       </p:sp>
       <p:sp>
         <p:nvSpPr>
@@ -4255,6 +4275,13 @@
           </a:solidFill>
           <a:ln/>
         </p:spPr>
+        <p:txBody>
+          <a:bodyPr/>
+          <a:lstStyle/>
+          <a:p>
+            <a:endParaRPr lang="LID4096"/>
+          </a:p>
+        </p:txBody>
       </p:sp>
       <p:sp>
         <p:nvSpPr>
@@ -4277,7 +4304,7 @@
           <a:bodyPr wrap="square" lIns="0" tIns="0" rIns="0" bIns="0" rtlCol="0" anchor="ctr"/>
           <a:lstStyle/>
           <a:p>
-            <a:pPr algn="ctr" indent="0" marL="0">
+            <a:pPr marL="0" indent="0" algn="ctr">
               <a:buNone/>
             </a:pPr>
             <a:r>
@@ -4295,69 +4322,9 @@
           </a:p>
         </p:txBody>
       </p:sp>
-      <p:pic>
-        <p:nvPicPr>
-          <p:cNvPr id="39" name="icon-57" descr="preencoded.png">    </p:cNvPr>
-          <p:cNvPicPr>
-            <a:picLocks noChangeAspect="1"/>
-          </p:cNvPicPr>
-          <p:nvPr/>
-        </p:nvPicPr>
-        <p:blipFill>
-          <a:blip r:embed="rId8"/>
-          <a:stretch>
-            <a:fillRect/>
-          </a:stretch>
-        </p:blipFill>
-        <p:spPr>
-          <a:xfrm>
-            <a:off x="548640" y="5641848"/>
-            <a:ext cx="274320" cy="274320"/>
-          </a:xfrm>
-          <a:prstGeom prst="rect">
-            <a:avLst/>
-          </a:prstGeom>
-        </p:spPr>
-      </p:pic>
-      <p:sp>
-        <p:nvSpPr>
-          <p:cNvPr id="40" name="text-58"/>
-          <p:cNvSpPr txBox="1"/>
-          <p:nvPr/>
-        </p:nvSpPr>
-        <p:spPr>
-          <a:xfrm>
-            <a:off x="960120" y="5577840"/>
-            <a:ext cx="10682935" cy="411480"/>
-          </a:xfrm>
-          <a:prstGeom prst="rect">
-            <a:avLst/>
-          </a:prstGeom>
-          <a:noFill/>
-          <a:ln/>
-        </p:spPr>
-        <p:txBody>
-          <a:bodyPr wrap="square" lIns="0" tIns="0" rIns="0" bIns="0" rtlCol="0" anchor="ctr"/>
-          <a:lstStyle/>
-          <a:p>
-            <a:pPr indent="0" marL="0">
-              <a:buNone/>
-            </a:pPr>
-            <a:r>
-              <a:rPr lang="en-US" sz="1500" dirty="0">
-                <a:solidFill>
-                  <a:schemeClr val="accent2"/>
-                </a:solidFill>
-              </a:rPr>
-              <a:t>Прототип на новата архитектура веќе постои; DevOps делот беше претставен на предметот DevOps.</a:t>
-            </a:r>
-            <a:endParaRPr lang="en-US" sz="1500" dirty="0"/>
-          </a:p>
-        </p:txBody>
-      </p:sp>
-      <p:sp>
-        <p:nvSpPr>
-          <p:cNvPr id="25" name="Slide Number Placeholder 0"/>
+      <p:sp>
+        <p:nvSpPr>
+          <p:cNvPr id="41" name="Slide Number Placeholder 0"/>
           <p:cNvSpPr>
             <a:spLocks noGrp="1"/>
           </p:cNvSpPr>
@@ -4375,7 +4342,7 @@
           </a:prstGeom>
           <a:extLst>
             <a:ext uri="{C572A759-6A51-4108-AA02-DFA0A04FC94B}">
-              <ma14:wrappingTextBoxFlag xmlns:ma14="http://schemas.microsoft.com/office/mac/drawingml/2011/main" val="0"/>
+              <ma14:wrappingTextBoxFlag xmlns:ma14="http://schemas.microsoft.com/office/mac/drawingml/2011/main" xmlns="" val="0"/>
             </a:ext>
           </a:extLst>
         </p:spPr>
@@ -4396,7 +4363,7 @@
           <a:p>
             <a:pPr algn="r"/>
             <a:fld id="{F7021451-1387-4CA6-816F-3879F97B5CBC}" type="slidenum">
-              <a:rPr b="0" lang="en-US"/>
+              <a:rPr lang="en-US" b="0"/>
               <a:t>2</a:t>
             </a:fld>
             <a:endParaRPr lang="en-US"/>
@@ -4431,9 +4398,11 @@
       <p:sp>
         <p:nvSpPr>
           <p:cNvPr id="2" name="Text 0"/>
-          <p:cNvSpPr/>
+          <p:cNvSpPr>
+            <a:spLocks noGrp="1"/>
+          </p:cNvSpPr>
           <p:nvPr>
-            <p:ph idx="100" type="body" hasCustomPrompt="1"/>
+            <p:ph type="body" idx="100" hasCustomPrompt="1"/>
           </p:nvPr>
         </p:nvSpPr>
         <p:spPr>
@@ -4451,11 +4420,11 @@
           <a:bodyPr wrap="square" lIns="0" tIns="0" rIns="0" bIns="0" rtlCol="0" anchor="ctr"/>
           <a:lstStyle/>
           <a:p>
-            <a:pPr indent="0" marL="0">
-              <a:buNone/>
-            </a:pPr>
-            <a:r>
-              <a:rPr lang="en-US" sz="1100" b="1" spc="200" kern="0" dirty="0">
+            <a:pPr marL="0" indent="0">
+              <a:buNone/>
+            </a:pPr>
+            <a:r>
+              <a:rPr lang="en-US" sz="1100" b="1" kern="0" spc="200" dirty="0">
                 <a:solidFill>
                   <a:schemeClr val="accent1"/>
                 </a:solidFill>
@@ -4472,9 +4441,11 @@
       <p:sp>
         <p:nvSpPr>
           <p:cNvPr id="3" name="Text 0"/>
-          <p:cNvSpPr/>
+          <p:cNvSpPr>
+            <a:spLocks noGrp="1"/>
+          </p:cNvSpPr>
           <p:nvPr>
-            <p:ph idx="101" type="title" hasCustomPrompt="1"/>
+            <p:ph type="title" idx="101" hasCustomPrompt="1"/>
           </p:nvPr>
         </p:nvSpPr>
         <p:spPr>
@@ -4492,7 +4463,7 @@
           <a:bodyPr wrap="square" lIns="0" tIns="0" rIns="0" bIns="0" rtlCol="0" anchor="t"/>
           <a:lstStyle/>
           <a:p>
-            <a:pPr algn="l" indent="0" marL="0">
+            <a:pPr marL="0" indent="0" algn="l">
               <a:buNone/>
             </a:pPr>
             <a:r>
@@ -4535,6 +4506,13 @@
             <a:prstDash val="dash"/>
           </a:ln>
         </p:spPr>
+        <p:txBody>
+          <a:bodyPr/>
+          <a:lstStyle/>
+          <a:p>
+            <a:endParaRPr lang="LID4096"/>
+          </a:p>
+        </p:txBody>
       </p:sp>
       <p:sp>
         <p:nvSpPr>
@@ -4557,11 +4535,11 @@
           <a:bodyPr wrap="square" lIns="0" tIns="0" rIns="0" bIns="0" rtlCol="0" anchor="ctr"/>
           <a:lstStyle/>
           <a:p>
-            <a:pPr algn="l" indent="0" marL="0">
-              <a:buNone/>
-            </a:pPr>
-            <a:r>
-              <a:rPr lang="en-US" sz="1100" b="1" spc="100" kern="0" dirty="0">
+            <a:pPr marL="0" indent="0" algn="l">
+              <a:buNone/>
+            </a:pPr>
+            <a:r>
+              <a:rPr lang="en-US" sz="1100" b="1" kern="0" spc="100" dirty="0">
                 <a:solidFill>
                   <a:schemeClr val="accent2"/>
                 </a:solidFill>
@@ -4599,6 +4577,13 @@
             <a:prstDash val="solid"/>
           </a:ln>
         </p:spPr>
+        <p:txBody>
+          <a:bodyPr/>
+          <a:lstStyle/>
+          <a:p>
+            <a:endParaRPr lang="LID4096"/>
+          </a:p>
+        </p:txBody>
       </p:sp>
       <p:sp>
         <p:nvSpPr>
@@ -4621,7 +4606,7 @@
           <a:bodyPr wrap="square" lIns="0" tIns="0" rIns="0" bIns="0" rtlCol="0" anchor="ctr"/>
           <a:lstStyle/>
           <a:p>
-            <a:pPr algn="ctr" indent="0" marL="0">
+            <a:pPr marL="0" indent="0" algn="ctr">
               <a:spcAft>
                 <a:spcPts val="300"/>
               </a:spcAft>
@@ -4638,7 +4623,7 @@
             <a:endParaRPr lang="en-US" sz="1600" dirty="0"/>
           </a:p>
           <a:p>
-            <a:pPr algn="ctr" indent="0" marL="0">
+            <a:pPr marL="0" indent="0" algn="ctr">
               <a:spcAft>
                 <a:spcPts val="300"/>
               </a:spcAft>
@@ -4685,13 +4670,20 @@
             <a:prstDash val="solid"/>
           </a:ln>
           <a:effectLst>
-            <a:outerShdw sx="100000" sy="100000" kx="0" ky="0" algn="bl" rotWithShape="0" blurRad="101600" dist="19050" dir="5400000">
+            <a:outerShdw blurRad="101600" dist="19050" dir="5400000" algn="bl" rotWithShape="0">
               <a:srgbClr val="000000">
                 <a:alpha val="7000"/>
               </a:srgbClr>
             </a:outerShdw>
           </a:effectLst>
         </p:spPr>
+        <p:txBody>
+          <a:bodyPr/>
+          <a:lstStyle/>
+          <a:p>
+            <a:endParaRPr lang="LID4096"/>
+          </a:p>
+        </p:txBody>
       </p:sp>
       <p:sp>
         <p:nvSpPr>
@@ -4714,7 +4706,7 @@
           <a:bodyPr wrap="square" lIns="0" tIns="0" rIns="0" bIns="0" rtlCol="0" anchor="ctr"/>
           <a:lstStyle/>
           <a:p>
-            <a:pPr algn="ctr" indent="0" marL="0">
+            <a:pPr marL="0" indent="0" algn="ctr">
               <a:spcAft>
                 <a:spcPts val="300"/>
               </a:spcAft>
@@ -4731,7 +4723,7 @@
             <a:endParaRPr lang="en-US" sz="1600" dirty="0"/>
           </a:p>
           <a:p>
-            <a:pPr algn="ctr" indent="0" marL="0">
+            <a:pPr marL="0" indent="0" algn="ctr">
               <a:spcAft>
                 <a:spcPts val="300"/>
               </a:spcAft>
@@ -4775,6 +4767,13 @@
             <a:tailEnd type="triangle"/>
           </a:ln>
         </p:spPr>
+        <p:txBody>
+          <a:bodyPr/>
+          <a:lstStyle/>
+          <a:p>
+            <a:endParaRPr lang="LID4096"/>
+          </a:p>
+        </p:txBody>
       </p:sp>
       <p:sp>
         <p:nvSpPr>
@@ -4799,6 +4798,13 @@
             <a:tailEnd type="triangle"/>
           </a:ln>
         </p:spPr>
+        <p:txBody>
+          <a:bodyPr/>
+          <a:lstStyle/>
+          <a:p>
+            <a:endParaRPr lang="LID4096"/>
+          </a:p>
+        </p:txBody>
       </p:sp>
       <p:sp>
         <p:nvSpPr>
@@ -4824,24 +4830,31 @@
             <a:prstDash val="solid"/>
           </a:ln>
           <a:effectLst>
-            <a:outerShdw sx="100000" sy="100000" kx="0" ky="0" algn="bl" rotWithShape="0" blurRad="101600" dist="19050" dir="5400000">
+            <a:outerShdw blurRad="101600" dist="19050" dir="5400000" algn="bl" rotWithShape="0">
               <a:srgbClr val="000000">
                 <a:alpha val="7000"/>
               </a:srgbClr>
             </a:outerShdw>
           </a:effectLst>
         </p:spPr>
+        <p:txBody>
+          <a:bodyPr/>
+          <a:lstStyle/>
+          <a:p>
+            <a:endParaRPr lang="LID4096"/>
+          </a:p>
+        </p:txBody>
       </p:sp>
       <p:pic>
         <p:nvPicPr>
-          <p:cNvPr id="13" name="icon-67" descr="preencoded.png">    </p:cNvPr>
+          <p:cNvPr id="13" name="icon-67" descr="preencoded.png"/>
           <p:cNvPicPr>
             <a:picLocks noChangeAspect="1"/>
           </p:cNvPicPr>
           <p:nvPr/>
         </p:nvPicPr>
         <p:blipFill>
-          <a:blip r:embed="rId1"/>
+          <a:blip r:embed="rId3"/>
           <a:stretch>
             <a:fillRect/>
           </a:stretch>
@@ -4877,7 +4890,7 @@
           <a:bodyPr wrap="square" lIns="0" tIns="0" rIns="0" bIns="0" rtlCol="0" anchor="ctr"/>
           <a:lstStyle/>
           <a:p>
-            <a:pPr algn="ctr" indent="0" marL="0">
+            <a:pPr marL="0" indent="0" algn="ctr">
               <a:buNone/>
             </a:pPr>
             <a:r>
@@ -4916,24 +4929,31 @@
             <a:prstDash val="solid"/>
           </a:ln>
           <a:effectLst>
-            <a:outerShdw sx="100000" sy="100000" kx="0" ky="0" algn="bl" rotWithShape="0" blurRad="101600" dist="19050" dir="5400000">
+            <a:outerShdw blurRad="101600" dist="19050" dir="5400000" algn="bl" rotWithShape="0">
               <a:srgbClr val="000000">
                 <a:alpha val="7000"/>
               </a:srgbClr>
             </a:outerShdw>
           </a:effectLst>
         </p:spPr>
+        <p:txBody>
+          <a:bodyPr/>
+          <a:lstStyle/>
+          <a:p>
+            <a:endParaRPr lang="LID4096"/>
+          </a:p>
+        </p:txBody>
       </p:sp>
       <p:pic>
         <p:nvPicPr>
-          <p:cNvPr id="16" name="icon-70" descr="preencoded.png">    </p:cNvPr>
+          <p:cNvPr id="16" name="icon-70" descr="preencoded.png"/>
           <p:cNvPicPr>
             <a:picLocks noChangeAspect="1"/>
           </p:cNvPicPr>
           <p:nvPr/>
         </p:nvPicPr>
         <p:blipFill>
-          <a:blip r:embed="rId2"/>
+          <a:blip r:embed="rId4"/>
           <a:stretch>
             <a:fillRect/>
           </a:stretch>
@@ -4969,7 +4989,7 @@
           <a:bodyPr wrap="square" lIns="0" tIns="0" rIns="0" bIns="0" rtlCol="0" anchor="ctr"/>
           <a:lstStyle/>
           <a:p>
-            <a:pPr algn="ctr" indent="0" marL="0">
+            <a:pPr marL="0" indent="0" algn="ctr">
               <a:buNone/>
             </a:pPr>
             <a:r>
@@ -5008,24 +5028,31 @@
             <a:prstDash val="solid"/>
           </a:ln>
           <a:effectLst>
-            <a:outerShdw sx="100000" sy="100000" kx="0" ky="0" algn="bl" rotWithShape="0" blurRad="101600" dist="19050" dir="5400000">
+            <a:outerShdw blurRad="101600" dist="19050" dir="5400000" algn="bl" rotWithShape="0">
               <a:srgbClr val="000000">
                 <a:alpha val="7000"/>
               </a:srgbClr>
             </a:outerShdw>
           </a:effectLst>
         </p:spPr>
+        <p:txBody>
+          <a:bodyPr/>
+          <a:lstStyle/>
+          <a:p>
+            <a:endParaRPr lang="LID4096"/>
+          </a:p>
+        </p:txBody>
       </p:sp>
       <p:pic>
         <p:nvPicPr>
-          <p:cNvPr id="19" name="icon-73" descr="preencoded.png">    </p:cNvPr>
+          <p:cNvPr id="19" name="icon-73" descr="preencoded.png"/>
           <p:cNvPicPr>
             <a:picLocks noChangeAspect="1"/>
           </p:cNvPicPr>
           <p:nvPr/>
         </p:nvPicPr>
         <p:blipFill>
-          <a:blip r:embed="rId3"/>
+          <a:blip r:embed="rId5"/>
           <a:stretch>
             <a:fillRect/>
           </a:stretch>
@@ -5061,7 +5088,7 @@
           <a:bodyPr wrap="square" lIns="0" tIns="0" rIns="0" bIns="0" rtlCol="0" anchor="ctr"/>
           <a:lstStyle/>
           <a:p>
-            <a:pPr algn="ctr" indent="0" marL="0">
+            <a:pPr marL="0" indent="0" algn="ctr">
               <a:buNone/>
             </a:pPr>
             <a:r>
@@ -5100,24 +5127,31 @@
             <a:prstDash val="solid"/>
           </a:ln>
           <a:effectLst>
-            <a:outerShdw sx="100000" sy="100000" kx="0" ky="0" algn="bl" rotWithShape="0" blurRad="101600" dist="19050" dir="5400000">
+            <a:outerShdw blurRad="101600" dist="19050" dir="5400000" algn="bl" rotWithShape="0">
               <a:srgbClr val="000000">
                 <a:alpha val="7000"/>
               </a:srgbClr>
             </a:outerShdw>
           </a:effectLst>
         </p:spPr>
+        <p:txBody>
+          <a:bodyPr/>
+          <a:lstStyle/>
+          <a:p>
+            <a:endParaRPr lang="LID4096"/>
+          </a:p>
+        </p:txBody>
       </p:sp>
       <p:pic>
         <p:nvPicPr>
-          <p:cNvPr id="22" name="icon-76" descr="preencoded.png">    </p:cNvPr>
+          <p:cNvPr id="22" name="icon-76" descr="preencoded.png"/>
           <p:cNvPicPr>
             <a:picLocks noChangeAspect="1"/>
           </p:cNvPicPr>
           <p:nvPr/>
         </p:nvPicPr>
         <p:blipFill>
-          <a:blip r:embed="rId4"/>
+          <a:blip r:embed="rId6"/>
           <a:stretch>
             <a:fillRect/>
           </a:stretch>
@@ -5153,7 +5187,7 @@
           <a:bodyPr wrap="square" lIns="0" tIns="0" rIns="0" bIns="0" rtlCol="0" anchor="ctr"/>
           <a:lstStyle/>
           <a:p>
-            <a:pPr algn="ctr" indent="0" marL="0">
+            <a:pPr marL="0" indent="0" algn="ctr">
               <a:buNone/>
             </a:pPr>
             <a:r>
@@ -5192,24 +5226,31 @@
             <a:prstDash val="solid"/>
           </a:ln>
           <a:effectLst>
-            <a:outerShdw sx="100000" sy="100000" kx="0" ky="0" algn="bl" rotWithShape="0" blurRad="101600" dist="19050" dir="5400000">
+            <a:outerShdw blurRad="101600" dist="19050" dir="5400000" algn="bl" rotWithShape="0">
               <a:srgbClr val="000000">
                 <a:alpha val="7000"/>
               </a:srgbClr>
             </a:outerShdw>
           </a:effectLst>
         </p:spPr>
+        <p:txBody>
+          <a:bodyPr/>
+          <a:lstStyle/>
+          <a:p>
+            <a:endParaRPr lang="LID4096"/>
+          </a:p>
+        </p:txBody>
       </p:sp>
       <p:pic>
         <p:nvPicPr>
-          <p:cNvPr id="25" name="icon-79" descr="preencoded.png">    </p:cNvPr>
+          <p:cNvPr id="25" name="icon-79" descr="preencoded.png"/>
           <p:cNvPicPr>
             <a:picLocks noChangeAspect="1"/>
           </p:cNvPicPr>
           <p:nvPr/>
         </p:nvPicPr>
         <p:blipFill>
-          <a:blip r:embed="rId5"/>
+          <a:blip r:embed="rId7"/>
           <a:stretch>
             <a:fillRect/>
           </a:stretch>
@@ -5245,7 +5286,7 @@
           <a:bodyPr wrap="square" lIns="0" tIns="0" rIns="0" bIns="0" rtlCol="0" anchor="ctr"/>
           <a:lstStyle/>
           <a:p>
-            <a:pPr algn="ctr" indent="0" marL="0">
+            <a:pPr marL="0" indent="0" algn="ctr">
               <a:buNone/>
             </a:pPr>
             <a:r>
@@ -5284,24 +5325,31 @@
             <a:prstDash val="solid"/>
           </a:ln>
           <a:effectLst>
-            <a:outerShdw sx="100000" sy="100000" kx="0" ky="0" algn="bl" rotWithShape="0" blurRad="101600" dist="19050" dir="5400000">
+            <a:outerShdw blurRad="101600" dist="19050" dir="5400000" algn="bl" rotWithShape="0">
               <a:srgbClr val="000000">
                 <a:alpha val="7000"/>
               </a:srgbClr>
             </a:outerShdw>
           </a:effectLst>
         </p:spPr>
+        <p:txBody>
+          <a:bodyPr/>
+          <a:lstStyle/>
+          <a:p>
+            <a:endParaRPr lang="LID4096"/>
+          </a:p>
+        </p:txBody>
       </p:sp>
       <p:pic>
         <p:nvPicPr>
-          <p:cNvPr id="28" name="icon-82" descr="preencoded.png">    </p:cNvPr>
+          <p:cNvPr id="28" name="icon-82" descr="preencoded.png"/>
           <p:cNvPicPr>
             <a:picLocks noChangeAspect="1"/>
           </p:cNvPicPr>
           <p:nvPr/>
         </p:nvPicPr>
         <p:blipFill>
-          <a:blip r:embed="rId6"/>
+          <a:blip r:embed="rId8"/>
           <a:stretch>
             <a:fillRect/>
           </a:stretch>
@@ -5337,7 +5385,7 @@
           <a:bodyPr wrap="square" lIns="0" tIns="0" rIns="0" bIns="0" rtlCol="0" anchor="ctr"/>
           <a:lstStyle/>
           <a:p>
-            <a:pPr algn="ctr" indent="0" marL="0">
+            <a:pPr marL="0" indent="0" algn="ctr">
               <a:buNone/>
             </a:pPr>
             <a:r>
@@ -5378,13 +5426,20 @@
             <a:prstDash val="solid"/>
           </a:ln>
           <a:effectLst>
-            <a:outerShdw sx="100000" sy="100000" kx="0" ky="0" algn="bl" rotWithShape="0" blurRad="101600" dist="19050" dir="5400000">
+            <a:outerShdw blurRad="101600" dist="19050" dir="5400000" algn="bl" rotWithShape="0">
               <a:srgbClr val="000000">
                 <a:alpha val="7000"/>
               </a:srgbClr>
             </a:outerShdw>
           </a:effectLst>
         </p:spPr>
+        <p:txBody>
+          <a:bodyPr/>
+          <a:lstStyle/>
+          <a:p>
+            <a:endParaRPr lang="LID4096"/>
+          </a:p>
+        </p:txBody>
       </p:sp>
       <p:sp>
         <p:nvSpPr>
@@ -5407,7 +5462,7 @@
           <a:bodyPr wrap="square" lIns="0" tIns="0" rIns="0" bIns="0" rtlCol="0" anchor="ctr"/>
           <a:lstStyle/>
           <a:p>
-            <a:pPr algn="ctr" indent="0" marL="0">
+            <a:pPr marL="0" indent="0" algn="ctr">
               <a:spcAft>
                 <a:spcPts val="300"/>
               </a:spcAft>
@@ -5424,7 +5479,7 @@
             <a:endParaRPr lang="en-US" sz="1600" dirty="0"/>
           </a:p>
           <a:p>
-            <a:pPr algn="ctr" indent="0" marL="0">
+            <a:pPr marL="0" indent="0" algn="ctr">
               <a:spcAft>
                 <a:spcPts val="300"/>
               </a:spcAft>
@@ -5469,6 +5524,13 @@
             <a:tailEnd type="triangle"/>
           </a:ln>
         </p:spPr>
+        <p:txBody>
+          <a:bodyPr/>
+          <a:lstStyle/>
+          <a:p>
+            <a:endParaRPr lang="LID4096"/>
+          </a:p>
+        </p:txBody>
       </p:sp>
       <p:sp>
         <p:nvSpPr>
@@ -5494,6 +5556,13 @@
             <a:prstDash val="solid"/>
           </a:ln>
         </p:spPr>
+        <p:txBody>
+          <a:bodyPr/>
+          <a:lstStyle/>
+          <a:p>
+            <a:endParaRPr lang="LID4096"/>
+          </a:p>
+        </p:txBody>
       </p:sp>
       <p:sp>
         <p:nvSpPr>
@@ -5516,7 +5585,7 @@
           <a:bodyPr wrap="square" lIns="0" tIns="0" rIns="0" bIns="0" rtlCol="0" anchor="ctr"/>
           <a:lstStyle/>
           <a:p>
-            <a:pPr algn="ctr" indent="0" marL="0">
+            <a:pPr marL="0" indent="0" algn="ctr">
               <a:spcAft>
                 <a:spcPts val="300"/>
               </a:spcAft>
@@ -5533,7 +5602,7 @@
             <a:endParaRPr lang="en-US" sz="1600" dirty="0"/>
           </a:p>
           <a:p>
-            <a:pPr algn="ctr" indent="0" marL="0">
+            <a:pPr marL="0" indent="0" algn="ctr">
               <a:spcAft>
                 <a:spcPts val="300"/>
               </a:spcAft>
@@ -5577,6 +5646,13 @@
             <a:tailEnd type="triangle"/>
           </a:ln>
         </p:spPr>
+        <p:txBody>
+          <a:bodyPr/>
+          <a:lstStyle/>
+          <a:p>
+            <a:endParaRPr lang="LID4096"/>
+          </a:p>
+        </p:txBody>
       </p:sp>
       <p:sp>
         <p:nvSpPr>
@@ -5602,6 +5678,13 @@
             <a:prstDash val="solid"/>
           </a:ln>
         </p:spPr>
+        <p:txBody>
+          <a:bodyPr/>
+          <a:lstStyle/>
+          <a:p>
+            <a:endParaRPr lang="LID4096"/>
+          </a:p>
+        </p:txBody>
       </p:sp>
       <p:sp>
         <p:nvSpPr>
@@ -5624,7 +5707,7 @@
           <a:bodyPr wrap="square" lIns="0" tIns="0" rIns="0" bIns="0" rtlCol="0" anchor="ctr"/>
           <a:lstStyle/>
           <a:p>
-            <a:pPr algn="ctr" indent="0" marL="0">
+            <a:pPr marL="0" indent="0" algn="ctr">
               <a:spcAft>
                 <a:spcPts val="300"/>
               </a:spcAft>
@@ -5641,7 +5724,7 @@
             <a:endParaRPr lang="en-US" sz="1600" dirty="0"/>
           </a:p>
           <a:p>
-            <a:pPr algn="ctr" indent="0" marL="0">
+            <a:pPr marL="0" indent="0" algn="ctr">
               <a:spcAft>
                 <a:spcPts val="300"/>
               </a:spcAft>
@@ -5664,7 +5747,7 @@
       </p:sp>
       <p:sp>
         <p:nvSpPr>
-          <p:cNvPr id="25" name="Slide Number Placeholder 0"/>
+          <p:cNvPr id="38" name="Slide Number Placeholder 0"/>
           <p:cNvSpPr>
             <a:spLocks noGrp="1"/>
           </p:cNvSpPr>
@@ -5682,7 +5765,7 @@
           </a:prstGeom>
           <a:extLst>
             <a:ext uri="{C572A759-6A51-4108-AA02-DFA0A04FC94B}">
-              <ma14:wrappingTextBoxFlag xmlns:ma14="http://schemas.microsoft.com/office/mac/drawingml/2011/main" val="0"/>
+              <ma14:wrappingTextBoxFlag xmlns:ma14="http://schemas.microsoft.com/office/mac/drawingml/2011/main" xmlns="" val="0"/>
             </a:ext>
           </a:extLst>
         </p:spPr>
@@ -5703,7 +5786,7 @@
           <a:p>
             <a:pPr algn="r"/>
             <a:fld id="{F7021451-1387-4CA6-816F-3879F97B5CBC}" type="slidenum">
-              <a:rPr b="0" lang="en-US"/>
+              <a:rPr lang="en-US" b="0"/>
               <a:t>3</a:t>
             </a:fld>
             <a:endParaRPr lang="en-US"/>
@@ -5738,9 +5821,11 @@
       <p:sp>
         <p:nvSpPr>
           <p:cNvPr id="2" name="Text 0"/>
-          <p:cNvSpPr/>
+          <p:cNvSpPr>
+            <a:spLocks noGrp="1"/>
+          </p:cNvSpPr>
           <p:nvPr>
-            <p:ph idx="100" type="body" hasCustomPrompt="1"/>
+            <p:ph type="body" idx="100" hasCustomPrompt="1"/>
           </p:nvPr>
         </p:nvSpPr>
         <p:spPr>
@@ -5758,11 +5843,11 @@
           <a:bodyPr wrap="square" lIns="0" tIns="0" rIns="0" bIns="0" rtlCol="0" anchor="ctr"/>
           <a:lstStyle/>
           <a:p>
-            <a:pPr indent="0" marL="0">
-              <a:buNone/>
-            </a:pPr>
-            <a:r>
-              <a:rPr lang="en-US" sz="1100" b="1" spc="200" kern="0" dirty="0">
+            <a:pPr marL="0" indent="0">
+              <a:buNone/>
+            </a:pPr>
+            <a:r>
+              <a:rPr lang="en-US" sz="1100" b="1" kern="0" spc="200" dirty="0">
                 <a:solidFill>
                   <a:schemeClr val="accent1"/>
                 </a:solidFill>
@@ -5770,7 +5855,7 @@
                 <a:ea typeface="Courier New" pitchFamily="34" charset="-122"/>
                 <a:cs typeface="Courier New" pitchFamily="34" charset="-120"/>
               </a:rPr>
-              <a:t>03 · ТЕШКИОТ ДЕЛ</a:t>
+              <a:t>03</a:t>
             </a:r>
             <a:endParaRPr lang="en-US" sz="1100" dirty="0"/>
           </a:p>
@@ -5779,9 +5864,11 @@
       <p:sp>
         <p:nvSpPr>
           <p:cNvPr id="3" name="Text 0"/>
-          <p:cNvSpPr/>
+          <p:cNvSpPr>
+            <a:spLocks noGrp="1"/>
+          </p:cNvSpPr>
           <p:nvPr>
-            <p:ph idx="101" type="title" hasCustomPrompt="1"/>
+            <p:ph type="title" idx="101" hasCustomPrompt="1"/>
           </p:nvPr>
         </p:nvSpPr>
         <p:spPr>
@@ -5799,7 +5886,7 @@
           <a:bodyPr wrap="square" lIns="0" tIns="0" rIns="0" bIns="0" rtlCol="0" anchor="t"/>
           <a:lstStyle/>
           <a:p>
-            <a:pPr algn="l" indent="0" marL="0">
+            <a:pPr marL="0" indent="0" algn="l">
               <a:buNone/>
             </a:pPr>
             <a:r>
@@ -5808,47 +5895,9 @@
                   <a:schemeClr val="tx1"/>
                 </a:solidFill>
               </a:rPr>
-              <a:t>Што ако пораката не се прати?</a:t>
+              <a:t>Event driven design</a:t>
             </a:r>
             <a:endParaRPr lang="en-US" sz="3200" dirty="0"/>
-          </a:p>
-        </p:txBody>
-      </p:sp>
-      <p:sp>
-        <p:nvSpPr>
-          <p:cNvPr id="4" name="Text 0"/>
-          <p:cNvSpPr/>
-          <p:nvPr>
-            <p:ph idx="102" type="body" hasCustomPrompt="1"/>
-          </p:nvPr>
-        </p:nvSpPr>
-        <p:spPr>
-          <a:xfrm>
-            <a:off x="548640" y="1371600"/>
-            <a:ext cx="10789920" cy="411480"/>
-          </a:xfrm>
-          <a:prstGeom prst="rect">
-            <a:avLst/>
-          </a:prstGeom>
-          <a:noFill/>
-          <a:ln/>
-        </p:spPr>
-        <p:txBody>
-          <a:bodyPr wrap="square" lIns="0" tIns="0" rIns="0" bIns="0" rtlCol="0" anchor="t"/>
-          <a:lstStyle/>
-          <a:p>
-            <a:pPr indent="0" marL="0">
-              <a:buNone/>
-            </a:pPr>
-            <a:r>
-              <a:rPr lang="en-US" sz="1800" dirty="0">
-                <a:solidFill>
-                  <a:schemeClr val="accent2"/>
-                </a:solidFill>
-              </a:rPr>
-              <a:t>Запис во база и порака до Kafka се две операции. Ако втората падне, сервисите тивко се разминуваат.</a:t>
-            </a:r>
-            <a:endParaRPr lang="en-US" sz="1800" dirty="0"/>
           </a:p>
         </p:txBody>
       </p:sp>
@@ -5876,24 +5925,31 @@
             <a:prstDash val="solid"/>
           </a:ln>
           <a:effectLst>
-            <a:outerShdw sx="100000" sy="100000" kx="0" ky="0" algn="bl" rotWithShape="0" blurRad="101600" dist="19050" dir="5400000">
+            <a:outerShdw blurRad="101600" dist="19050" dir="5400000" algn="bl" rotWithShape="0">
               <a:srgbClr val="000000">
                 <a:alpha val="7000"/>
               </a:srgbClr>
             </a:outerShdw>
           </a:effectLst>
         </p:spPr>
+        <p:txBody>
+          <a:bodyPr/>
+          <a:lstStyle/>
+          <a:p>
+            <a:endParaRPr lang="LID4096"/>
+          </a:p>
+        </p:txBody>
       </p:sp>
       <p:pic>
         <p:nvPicPr>
-          <p:cNvPr id="6" name="icon-93" descr="preencoded.png">    </p:cNvPr>
+          <p:cNvPr id="6" name="icon-93" descr="preencoded.png"/>
           <p:cNvPicPr>
             <a:picLocks noChangeAspect="1"/>
           </p:cNvPicPr>
           <p:nvPr/>
         </p:nvPicPr>
         <p:blipFill>
-          <a:blip r:embed="rId1"/>
+          <a:blip r:embed="rId3"/>
           <a:stretch>
             <a:fillRect/>
           </a:stretch>
@@ -5929,7 +5985,7 @@
           <a:bodyPr wrap="square" lIns="0" tIns="0" rIns="0" bIns="0" rtlCol="0" anchor="ctr"/>
           <a:lstStyle/>
           <a:p>
-            <a:pPr algn="ctr" indent="0" marL="0">
+            <a:pPr marL="0" indent="0" algn="ctr">
               <a:buNone/>
             </a:pPr>
             <a:r>
@@ -5970,13 +6026,20 @@
             <a:prstDash val="solid"/>
           </a:ln>
           <a:effectLst>
-            <a:outerShdw sx="100000" sy="100000" kx="0" ky="0" algn="bl" rotWithShape="0" blurRad="101600" dist="19050" dir="5400000">
+            <a:outerShdw blurRad="101600" dist="19050" dir="5400000" algn="bl" rotWithShape="0">
               <a:srgbClr val="000000">
                 <a:alpha val="7000"/>
               </a:srgbClr>
             </a:outerShdw>
           </a:effectLst>
         </p:spPr>
+        <p:txBody>
+          <a:bodyPr/>
+          <a:lstStyle/>
+          <a:p>
+            <a:endParaRPr lang="LID4096"/>
+          </a:p>
+        </p:txBody>
       </p:sp>
       <p:sp>
         <p:nvSpPr>
@@ -5999,11 +6062,11 @@
           <a:bodyPr wrap="square" lIns="0" tIns="0" rIns="0" bIns="0" rtlCol="0" anchor="ctr"/>
           <a:lstStyle/>
           <a:p>
-            <a:pPr algn="ctr" indent="0" marL="0">
-              <a:buNone/>
-            </a:pPr>
-            <a:r>
-              <a:rPr lang="en-US" sz="1100" b="1" spc="100" kern="0" dirty="0">
+            <a:pPr marL="0" indent="0" algn="ctr">
+              <a:buNone/>
+            </a:pPr>
+            <a:r>
+              <a:rPr lang="en-US" sz="1100" b="1" kern="0" spc="100" dirty="0">
                 <a:solidFill>
                   <a:schemeClr val="accent1"/>
                 </a:solidFill>
@@ -6041,6 +6104,13 @@
             <a:prstDash val="solid"/>
           </a:ln>
         </p:spPr>
+        <p:txBody>
+          <a:bodyPr/>
+          <a:lstStyle/>
+          <a:p>
+            <a:endParaRPr lang="LID4096"/>
+          </a:p>
+        </p:txBody>
       </p:sp>
       <p:sp>
         <p:nvSpPr>
@@ -6063,7 +6133,7 @@
           <a:bodyPr wrap="square" lIns="0" tIns="0" rIns="0" bIns="0" rtlCol="0" anchor="ctr"/>
           <a:lstStyle/>
           <a:p>
-            <a:pPr algn="ctr" indent="0" marL="0">
+            <a:pPr marL="0" indent="0" algn="ctr">
               <a:spcAft>
                 <a:spcPts val="300"/>
               </a:spcAft>
@@ -6105,6 +6175,13 @@
             <a:prstDash val="solid"/>
           </a:ln>
         </p:spPr>
+        <p:txBody>
+          <a:bodyPr/>
+          <a:lstStyle/>
+          <a:p>
+            <a:endParaRPr lang="LID4096"/>
+          </a:p>
+        </p:txBody>
       </p:sp>
       <p:sp>
         <p:nvSpPr>
@@ -6127,7 +6204,7 @@
           <a:bodyPr wrap="square" lIns="0" tIns="0" rIns="0" bIns="0" rtlCol="0" anchor="ctr"/>
           <a:lstStyle/>
           <a:p>
-            <a:pPr algn="ctr" indent="0" marL="0">
+            <a:pPr marL="0" indent="0" algn="ctr">
               <a:spcAft>
                 <a:spcPts val="300"/>
               </a:spcAft>
@@ -6169,13 +6246,20 @@
             <a:prstDash val="solid"/>
           </a:ln>
           <a:effectLst>
-            <a:outerShdw sx="100000" sy="100000" kx="0" ky="0" algn="bl" rotWithShape="0" blurRad="101600" dist="19050" dir="5400000">
+            <a:outerShdw blurRad="101600" dist="19050" dir="5400000" algn="bl" rotWithShape="0">
               <a:srgbClr val="000000">
                 <a:alpha val="7000"/>
               </a:srgbClr>
             </a:outerShdw>
           </a:effectLst>
         </p:spPr>
+        <p:txBody>
+          <a:bodyPr/>
+          <a:lstStyle/>
+          <a:p>
+            <a:endParaRPr lang="LID4096"/>
+          </a:p>
+        </p:txBody>
       </p:sp>
       <p:sp>
         <p:nvSpPr>
@@ -6198,7 +6282,7 @@
           <a:bodyPr wrap="square" lIns="0" tIns="0" rIns="0" bIns="0" rtlCol="0" anchor="ctr"/>
           <a:lstStyle/>
           <a:p>
-            <a:pPr algn="ctr" indent="0" marL="0">
+            <a:pPr marL="0" indent="0" algn="ctr">
               <a:spcAft>
                 <a:spcPts val="300"/>
               </a:spcAft>
@@ -6215,7 +6299,7 @@
             <a:endParaRPr lang="en-US" sz="1600" dirty="0"/>
           </a:p>
           <a:p>
-            <a:pPr algn="ctr" indent="0" marL="0">
+            <a:pPr marL="0" indent="0" algn="ctr">
               <a:spcAft>
                 <a:spcPts val="300"/>
               </a:spcAft>
@@ -6260,24 +6344,31 @@
             <a:prstDash val="solid"/>
           </a:ln>
           <a:effectLst>
-            <a:outerShdw sx="100000" sy="100000" kx="0" ky="0" algn="bl" rotWithShape="0" blurRad="101600" dist="19050" dir="5400000">
+            <a:outerShdw blurRad="101600" dist="19050" dir="5400000" algn="bl" rotWithShape="0">
               <a:srgbClr val="000000">
                 <a:alpha val="7000"/>
               </a:srgbClr>
             </a:outerShdw>
           </a:effectLst>
         </p:spPr>
+        <p:txBody>
+          <a:bodyPr/>
+          <a:lstStyle/>
+          <a:p>
+            <a:endParaRPr lang="LID4096"/>
+          </a:p>
+        </p:txBody>
       </p:sp>
       <p:pic>
         <p:nvPicPr>
-          <p:cNvPr id="17" name="icon-103" descr="preencoded.png">    </p:cNvPr>
+          <p:cNvPr id="17" name="icon-103" descr="preencoded.png"/>
           <p:cNvPicPr>
             <a:picLocks noChangeAspect="1"/>
           </p:cNvPicPr>
           <p:nvPr/>
         </p:nvPicPr>
         <p:blipFill>
-          <a:blip r:embed="rId2"/>
+          <a:blip r:embed="rId4"/>
           <a:stretch>
             <a:fillRect/>
           </a:stretch>
@@ -6313,7 +6404,7 @@
           <a:bodyPr wrap="square" lIns="0" tIns="0" rIns="0" bIns="0" rtlCol="0" anchor="ctr"/>
           <a:lstStyle/>
           <a:p>
-            <a:pPr algn="ctr" indent="0" marL="0">
+            <a:pPr marL="0" indent="0" algn="ctr">
               <a:buNone/>
             </a:pPr>
             <a:r>
@@ -6351,6 +6442,13 @@
             <a:tailEnd type="triangle"/>
           </a:ln>
         </p:spPr>
+        <p:txBody>
+          <a:bodyPr/>
+          <a:lstStyle/>
+          <a:p>
+            <a:endParaRPr lang="LID4096"/>
+          </a:p>
+        </p:txBody>
       </p:sp>
       <p:sp>
         <p:nvSpPr>
@@ -6375,6 +6473,13 @@
             <a:tailEnd type="triangle"/>
           </a:ln>
         </p:spPr>
+        <p:txBody>
+          <a:bodyPr/>
+          <a:lstStyle/>
+          <a:p>
+            <a:endParaRPr lang="LID4096"/>
+          </a:p>
+        </p:txBody>
       </p:sp>
       <p:sp>
         <p:nvSpPr>
@@ -6399,202 +6504,17 @@
             <a:tailEnd type="triangle"/>
           </a:ln>
         </p:spPr>
+        <p:txBody>
+          <a:bodyPr/>
+          <a:lstStyle/>
+          <a:p>
+            <a:endParaRPr lang="LID4096"/>
+          </a:p>
+        </p:txBody>
       </p:sp>
       <p:pic>
         <p:nvPicPr>
-          <p:cNvPr id="22" name="icon-108" descr="preencoded.png">    </p:cNvPr>
-          <p:cNvPicPr>
-            <a:picLocks noChangeAspect="1"/>
-          </p:cNvPicPr>
-          <p:nvPr/>
-        </p:nvPicPr>
-        <p:blipFill>
-          <a:blip r:embed="rId3"/>
-          <a:stretch>
-            <a:fillRect/>
-          </a:stretch>
-        </p:blipFill>
-        <p:spPr>
-          <a:xfrm>
-            <a:off x="548640" y="4617720"/>
-            <a:ext cx="365760" cy="365760"/>
-          </a:xfrm>
-          <a:prstGeom prst="rect">
-            <a:avLst/>
-          </a:prstGeom>
-        </p:spPr>
-      </p:pic>
-      <p:sp>
-        <p:nvSpPr>
-          <p:cNvPr id="23" name="text-109"/>
-          <p:cNvSpPr txBox="1"/>
-          <p:nvPr/>
-        </p:nvSpPr>
-        <p:spPr>
-          <a:xfrm>
-            <a:off x="1051560" y="4572000"/>
-            <a:ext cx="3012338" cy="411480"/>
-          </a:xfrm>
-          <a:prstGeom prst="rect">
-            <a:avLst/>
-          </a:prstGeom>
-          <a:noFill/>
-          <a:ln/>
-        </p:spPr>
-        <p:txBody>
-          <a:bodyPr wrap="square" lIns="0" tIns="0" rIns="0" bIns="0" rtlCol="0" anchor="ctr"/>
-          <a:lstStyle/>
-          <a:p>
-            <a:pPr indent="0" marL="0">
-              <a:buNone/>
-            </a:pPr>
-            <a:r>
-              <a:rPr lang="en-US" sz="1800" b="1" dirty="0">
-                <a:solidFill>
-                  <a:schemeClr val="tx1"/>
-                </a:solidFill>
-              </a:rPr>
-              <a:t>Или двете, или ниедно</a:t>
-            </a:r>
-            <a:endParaRPr lang="en-US" sz="1800" dirty="0"/>
-          </a:p>
-        </p:txBody>
-      </p:sp>
-      <p:sp>
-        <p:nvSpPr>
-          <p:cNvPr id="24" name="text-110"/>
-          <p:cNvSpPr txBox="1"/>
-          <p:nvPr/>
-        </p:nvSpPr>
-        <p:spPr>
-          <a:xfrm>
-            <a:off x="1051560" y="5029200"/>
-            <a:ext cx="3012338" cy="548640"/>
-          </a:xfrm>
-          <a:prstGeom prst="rect">
-            <a:avLst/>
-          </a:prstGeom>
-          <a:noFill/>
-          <a:ln/>
-        </p:spPr>
-        <p:txBody>
-          <a:bodyPr wrap="square" lIns="0" tIns="0" rIns="0" bIns="0" rtlCol="0" anchor="t"/>
-          <a:lstStyle/>
-          <a:p>
-            <a:pPr indent="0" marL="0">
-              <a:buNone/>
-            </a:pPr>
-            <a:r>
-              <a:rPr lang="en-US" sz="1500" dirty="0">
-                <a:solidFill>
-                  <a:schemeClr val="accent2"/>
-                </a:solidFill>
-              </a:rPr>
-              <a:t>телефонот и пораката се запишуваат заедно</a:t>
-            </a:r>
-            <a:endParaRPr lang="en-US" sz="1500" dirty="0"/>
-          </a:p>
-        </p:txBody>
-      </p:sp>
-      <p:pic>
-        <p:nvPicPr>
-          <p:cNvPr id="25" name="icon-111" descr="preencoded.png">    </p:cNvPr>
-          <p:cNvPicPr>
-            <a:picLocks noChangeAspect="1"/>
-          </p:cNvPicPr>
-          <p:nvPr/>
-        </p:nvPicPr>
-        <p:blipFill>
-          <a:blip r:embed="rId4"/>
-          <a:stretch>
-            <a:fillRect/>
-          </a:stretch>
-        </p:blipFill>
-        <p:spPr>
-          <a:xfrm>
-            <a:off x="4338218" y="4617720"/>
-            <a:ext cx="365760" cy="365760"/>
-          </a:xfrm>
-          <a:prstGeom prst="rect">
-            <a:avLst/>
-          </a:prstGeom>
-        </p:spPr>
-      </p:pic>
-      <p:sp>
-        <p:nvSpPr>
-          <p:cNvPr id="26" name="text-112"/>
-          <p:cNvSpPr txBox="1"/>
-          <p:nvPr/>
-        </p:nvSpPr>
-        <p:spPr>
-          <a:xfrm>
-            <a:off x="4841138" y="4572000"/>
-            <a:ext cx="3012338" cy="411480"/>
-          </a:xfrm>
-          <a:prstGeom prst="rect">
-            <a:avLst/>
-          </a:prstGeom>
-          <a:noFill/>
-          <a:ln/>
-        </p:spPr>
-        <p:txBody>
-          <a:bodyPr wrap="square" lIns="0" tIns="0" rIns="0" bIns="0" rtlCol="0" anchor="ctr"/>
-          <a:lstStyle/>
-          <a:p>
-            <a:pPr indent="0" marL="0">
-              <a:buNone/>
-            </a:pPr>
-            <a:r>
-              <a:rPr lang="en-US" sz="1800" b="1" dirty="0">
-                <a:solidFill>
-                  <a:schemeClr val="tx1"/>
-                </a:solidFill>
-              </a:rPr>
-              <a:t>Kafka падна? Пораката чека</a:t>
-            </a:r>
-            <a:endParaRPr lang="en-US" sz="1800" dirty="0"/>
-          </a:p>
-        </p:txBody>
-      </p:sp>
-      <p:sp>
-        <p:nvSpPr>
-          <p:cNvPr id="27" name="text-113"/>
-          <p:cNvSpPr txBox="1"/>
-          <p:nvPr/>
-        </p:nvSpPr>
-        <p:spPr>
-          <a:xfrm>
-            <a:off x="4841138" y="5029200"/>
-            <a:ext cx="3012338" cy="548640"/>
-          </a:xfrm>
-          <a:prstGeom prst="rect">
-            <a:avLst/>
-          </a:prstGeom>
-          <a:noFill/>
-          <a:ln/>
-        </p:spPr>
-        <p:txBody>
-          <a:bodyPr wrap="square" lIns="0" tIns="0" rIns="0" bIns="0" rtlCol="0" anchor="t"/>
-          <a:lstStyle/>
-          <a:p>
-            <a:pPr indent="0" marL="0">
-              <a:buNone/>
-            </a:pPr>
-            <a:r>
-              <a:rPr lang="en-US" sz="1500" dirty="0">
-                <a:solidFill>
-                  <a:schemeClr val="accent2"/>
-                </a:solidFill>
-              </a:rPr>
-              <a:t>се праќа штом брокерот ќе се врати</a:t>
-            </a:r>
-            <a:endParaRPr lang="en-US" sz="1500" dirty="0"/>
-          </a:p>
-        </p:txBody>
-      </p:sp>
-      <p:pic>
-        <p:nvPicPr>
-          <p:cNvPr id="28" name="icon-114" descr="preencoded.png">    </p:cNvPr>
+          <p:cNvPr id="22" name="icon-108" descr="preencoded.png"/>
           <p:cNvPicPr>
             <a:picLocks noChangeAspect="1"/>
           </p:cNvPicPr>
@@ -6608,6 +6528,198 @@
         </p:blipFill>
         <p:spPr>
           <a:xfrm>
+            <a:off x="548640" y="4617720"/>
+            <a:ext cx="365760" cy="365760"/>
+          </a:xfrm>
+          <a:prstGeom prst="rect">
+            <a:avLst/>
+          </a:prstGeom>
+        </p:spPr>
+      </p:pic>
+      <p:sp>
+        <p:nvSpPr>
+          <p:cNvPr id="23" name="text-109"/>
+          <p:cNvSpPr txBox="1"/>
+          <p:nvPr/>
+        </p:nvSpPr>
+        <p:spPr>
+          <a:xfrm>
+            <a:off x="1051560" y="4572000"/>
+            <a:ext cx="3012338" cy="411480"/>
+          </a:xfrm>
+          <a:prstGeom prst="rect">
+            <a:avLst/>
+          </a:prstGeom>
+          <a:noFill/>
+          <a:ln/>
+        </p:spPr>
+        <p:txBody>
+          <a:bodyPr wrap="square" lIns="0" tIns="0" rIns="0" bIns="0" rtlCol="0" anchor="ctr"/>
+          <a:lstStyle/>
+          <a:p>
+            <a:pPr marL="0" indent="0">
+              <a:buNone/>
+            </a:pPr>
+            <a:r>
+              <a:rPr lang="en-US" sz="1800" b="1" dirty="0">
+                <a:solidFill>
+                  <a:schemeClr val="tx1"/>
+                </a:solidFill>
+              </a:rPr>
+              <a:t>Или двете, или ниедно</a:t>
+            </a:r>
+            <a:endParaRPr lang="en-US" sz="1800" dirty="0"/>
+          </a:p>
+        </p:txBody>
+      </p:sp>
+      <p:sp>
+        <p:nvSpPr>
+          <p:cNvPr id="24" name="text-110"/>
+          <p:cNvSpPr txBox="1"/>
+          <p:nvPr/>
+        </p:nvSpPr>
+        <p:spPr>
+          <a:xfrm>
+            <a:off x="1051560" y="5029200"/>
+            <a:ext cx="3012338" cy="548640"/>
+          </a:xfrm>
+          <a:prstGeom prst="rect">
+            <a:avLst/>
+          </a:prstGeom>
+          <a:noFill/>
+          <a:ln/>
+        </p:spPr>
+        <p:txBody>
+          <a:bodyPr wrap="square" lIns="0" tIns="0" rIns="0" bIns="0" rtlCol="0" anchor="t"/>
+          <a:lstStyle/>
+          <a:p>
+            <a:pPr marL="0" indent="0">
+              <a:buNone/>
+            </a:pPr>
+            <a:r>
+              <a:rPr lang="en-US" sz="1500" dirty="0">
+                <a:solidFill>
+                  <a:schemeClr val="accent2"/>
+                </a:solidFill>
+              </a:rPr>
+              <a:t>телефонот и пораката се запишуваат заедно</a:t>
+            </a:r>
+            <a:endParaRPr lang="en-US" sz="1500" dirty="0"/>
+          </a:p>
+        </p:txBody>
+      </p:sp>
+      <p:pic>
+        <p:nvPicPr>
+          <p:cNvPr id="25" name="icon-111" descr="preencoded.png"/>
+          <p:cNvPicPr>
+            <a:picLocks noChangeAspect="1"/>
+          </p:cNvPicPr>
+          <p:nvPr/>
+        </p:nvPicPr>
+        <p:blipFill>
+          <a:blip r:embed="rId5"/>
+          <a:stretch>
+            <a:fillRect/>
+          </a:stretch>
+        </p:blipFill>
+        <p:spPr>
+          <a:xfrm>
+            <a:off x="4338218" y="4617720"/>
+            <a:ext cx="365760" cy="365760"/>
+          </a:xfrm>
+          <a:prstGeom prst="rect">
+            <a:avLst/>
+          </a:prstGeom>
+        </p:spPr>
+      </p:pic>
+      <p:sp>
+        <p:nvSpPr>
+          <p:cNvPr id="26" name="text-112"/>
+          <p:cNvSpPr txBox="1"/>
+          <p:nvPr/>
+        </p:nvSpPr>
+        <p:spPr>
+          <a:xfrm>
+            <a:off x="4841138" y="4572000"/>
+            <a:ext cx="3012338" cy="411480"/>
+          </a:xfrm>
+          <a:prstGeom prst="rect">
+            <a:avLst/>
+          </a:prstGeom>
+          <a:noFill/>
+          <a:ln/>
+        </p:spPr>
+        <p:txBody>
+          <a:bodyPr wrap="square" lIns="0" tIns="0" rIns="0" bIns="0" rtlCol="0" anchor="ctr"/>
+          <a:lstStyle/>
+          <a:p>
+            <a:pPr marL="0" indent="0">
+              <a:buNone/>
+            </a:pPr>
+            <a:r>
+              <a:rPr lang="en-US" sz="1800" b="1" dirty="0">
+                <a:solidFill>
+                  <a:schemeClr val="tx1"/>
+                </a:solidFill>
+              </a:rPr>
+              <a:t>Kafka падна? Пораката чека</a:t>
+            </a:r>
+            <a:endParaRPr lang="en-US" sz="1800" dirty="0"/>
+          </a:p>
+        </p:txBody>
+      </p:sp>
+      <p:sp>
+        <p:nvSpPr>
+          <p:cNvPr id="27" name="text-113"/>
+          <p:cNvSpPr txBox="1"/>
+          <p:nvPr/>
+        </p:nvSpPr>
+        <p:spPr>
+          <a:xfrm>
+            <a:off x="4841138" y="5029200"/>
+            <a:ext cx="3012338" cy="548640"/>
+          </a:xfrm>
+          <a:prstGeom prst="rect">
+            <a:avLst/>
+          </a:prstGeom>
+          <a:noFill/>
+          <a:ln/>
+        </p:spPr>
+        <p:txBody>
+          <a:bodyPr wrap="square" lIns="0" tIns="0" rIns="0" bIns="0" rtlCol="0" anchor="t"/>
+          <a:lstStyle/>
+          <a:p>
+            <a:pPr marL="0" indent="0">
+              <a:buNone/>
+            </a:pPr>
+            <a:r>
+              <a:rPr lang="en-US" sz="1500" dirty="0">
+                <a:solidFill>
+                  <a:schemeClr val="accent2"/>
+                </a:solidFill>
+              </a:rPr>
+              <a:t>се праќа штом брокерот ќе се врати</a:t>
+            </a:r>
+            <a:endParaRPr lang="en-US" sz="1500" dirty="0"/>
+          </a:p>
+        </p:txBody>
+      </p:sp>
+      <p:pic>
+        <p:nvPicPr>
+          <p:cNvPr id="28" name="icon-114" descr="preencoded.png"/>
+          <p:cNvPicPr>
+            <a:picLocks noChangeAspect="1"/>
+          </p:cNvPicPr>
+          <p:nvPr/>
+        </p:nvPicPr>
+        <p:blipFill>
+          <a:blip r:embed="rId5"/>
+          <a:stretch>
+            <a:fillRect/>
+          </a:stretch>
+        </p:blipFill>
+        <p:spPr>
+          <a:xfrm>
             <a:off x="8127797" y="4617720"/>
             <a:ext cx="365760" cy="365760"/>
           </a:xfrm>
@@ -6637,7 +6749,7 @@
           <a:bodyPr wrap="square" lIns="0" tIns="0" rIns="0" bIns="0" rtlCol="0" anchor="ctr"/>
           <a:lstStyle/>
           <a:p>
-            <a:pPr indent="0" marL="0">
+            <a:pPr marL="0" indent="0">
               <a:buNone/>
             </a:pPr>
             <a:r>
@@ -6673,7 +6785,7 @@
           <a:bodyPr wrap="square" lIns="0" tIns="0" rIns="0" bIns="0" rtlCol="0" anchor="t"/>
           <a:lstStyle/>
           <a:p>
-            <a:pPr indent="0" marL="0">
+            <a:pPr marL="0" indent="0">
               <a:buNone/>
             </a:pPr>
             <a:r>
@@ -6690,7 +6802,7 @@
       </p:sp>
       <p:sp>
         <p:nvSpPr>
-          <p:cNvPr id="25" name="Slide Number Placeholder 0"/>
+          <p:cNvPr id="31" name="Slide Number Placeholder 0"/>
           <p:cNvSpPr>
             <a:spLocks noGrp="1"/>
           </p:cNvSpPr>
@@ -6708,7 +6820,7 @@
           </a:prstGeom>
           <a:extLst>
             <a:ext uri="{C572A759-6A51-4108-AA02-DFA0A04FC94B}">
-              <ma14:wrappingTextBoxFlag xmlns:ma14="http://schemas.microsoft.com/office/mac/drawingml/2011/main" val="0"/>
+              <ma14:wrappingTextBoxFlag xmlns:ma14="http://schemas.microsoft.com/office/mac/drawingml/2011/main" xmlns="" val="0"/>
             </a:ext>
           </a:extLst>
         </p:spPr>
@@ -6729,10 +6841,10 @@
           <a:p>
             <a:pPr algn="r"/>
             <a:fld id="{F7021451-1387-4CA6-816F-3879F97B5CBC}" type="slidenum">
-              <a:rPr b="0" lang="en-US"/>
+              <a:rPr lang="en-US" b="0"/>
               <a:t>4</a:t>
             </a:fld>
-            <a:endParaRPr lang="en-US"/>
+            <a:endParaRPr lang="en-US" dirty="0"/>
           </a:p>
         </p:txBody>
       </p:sp>
@@ -6764,9 +6876,11 @@
       <p:sp>
         <p:nvSpPr>
           <p:cNvPr id="2" name="Text 0"/>
-          <p:cNvSpPr/>
+          <p:cNvSpPr>
+            <a:spLocks noGrp="1"/>
+          </p:cNvSpPr>
           <p:nvPr>
-            <p:ph idx="100" type="body" hasCustomPrompt="1"/>
+            <p:ph type="body" idx="100" hasCustomPrompt="1"/>
           </p:nvPr>
         </p:nvSpPr>
         <p:spPr>
@@ -6784,11 +6898,11 @@
           <a:bodyPr wrap="square" lIns="0" tIns="0" rIns="0" bIns="0" rtlCol="0" anchor="ctr"/>
           <a:lstStyle/>
           <a:p>
-            <a:pPr indent="0" marL="0">
-              <a:buNone/>
-            </a:pPr>
-            <a:r>
-              <a:rPr lang="en-US" sz="1100" b="1" spc="200" kern="0" dirty="0">
+            <a:pPr marL="0" indent="0">
+              <a:buNone/>
+            </a:pPr>
+            <a:r>
+              <a:rPr lang="en-US" sz="1100" b="1" kern="0" spc="200" dirty="0">
                 <a:solidFill>
                   <a:schemeClr val="accent1"/>
                 </a:solidFill>
@@ -6805,9 +6919,11 @@
       <p:sp>
         <p:nvSpPr>
           <p:cNvPr id="3" name="Text 0"/>
-          <p:cNvSpPr/>
+          <p:cNvSpPr>
+            <a:spLocks noGrp="1"/>
+          </p:cNvSpPr>
           <p:nvPr>
-            <p:ph idx="101" type="title" hasCustomPrompt="1"/>
+            <p:ph type="title" idx="101" hasCustomPrompt="1"/>
           </p:nvPr>
         </p:nvSpPr>
         <p:spPr>
@@ -6825,7 +6941,7 @@
           <a:bodyPr wrap="square" lIns="0" tIns="0" rIns="0" bIns="0" rtlCol="0" anchor="t"/>
           <a:lstStyle/>
           <a:p>
-            <a:pPr algn="l" indent="0" marL="0">
+            <a:pPr marL="0" indent="0" algn="l">
               <a:buNone/>
             </a:pPr>
             <a:r>
@@ -6864,13 +6980,20 @@
             <a:prstDash val="solid"/>
           </a:ln>
           <a:effectLst>
-            <a:outerShdw sx="100000" sy="100000" kx="0" ky="0" algn="bl" rotWithShape="0" blurRad="101600" dist="19050" dir="5400000">
+            <a:outerShdw blurRad="101600" dist="19050" dir="5400000" algn="bl" rotWithShape="0">
               <a:srgbClr val="000000">
                 <a:alpha val="7000"/>
               </a:srgbClr>
             </a:outerShdw>
           </a:effectLst>
         </p:spPr>
+        <p:txBody>
+          <a:bodyPr/>
+          <a:lstStyle/>
+          <a:p>
+            <a:endParaRPr lang="LID4096"/>
+          </a:p>
+        </p:txBody>
       </p:sp>
       <p:sp>
         <p:nvSpPr>
@@ -6893,11 +7016,11 @@
           <a:bodyPr wrap="square" lIns="0" tIns="0" rIns="0" bIns="0" rtlCol="0" anchor="ctr"/>
           <a:lstStyle/>
           <a:p>
-            <a:pPr algn="l" indent="0" marL="0">
-              <a:buNone/>
-            </a:pPr>
-            <a:r>
-              <a:rPr lang="en-US" sz="1100" b="1" spc="100" kern="0" dirty="0">
+            <a:pPr marL="0" indent="0" algn="l">
+              <a:buNone/>
+            </a:pPr>
+            <a:r>
+              <a:rPr lang="en-US" sz="1100" b="1" kern="0" spc="100" dirty="0">
                 <a:solidFill>
                   <a:schemeClr val="accent1"/>
                 </a:solidFill>
@@ -6932,17 +7055,24 @@
           </a:solidFill>
           <a:ln/>
         </p:spPr>
+        <p:txBody>
+          <a:bodyPr/>
+          <a:lstStyle/>
+          <a:p>
+            <a:endParaRPr lang="LID4096"/>
+          </a:p>
+        </p:txBody>
       </p:sp>
       <p:pic>
         <p:nvPicPr>
-          <p:cNvPr id="7" name="icon-120" descr="preencoded.png">    </p:cNvPr>
+          <p:cNvPr id="7" name="icon-120" descr="preencoded.png"/>
           <p:cNvPicPr>
             <a:picLocks noChangeAspect="1"/>
           </p:cNvPicPr>
           <p:nvPr/>
         </p:nvPicPr>
         <p:blipFill>
-          <a:blip r:embed="rId1"/>
+          <a:blip r:embed="rId3"/>
           <a:stretch>
             <a:fillRect/>
           </a:stretch>
@@ -6978,7 +7108,7 @@
           <a:bodyPr wrap="square" lIns="0" tIns="0" rIns="0" bIns="0" rtlCol="0" anchor="t"/>
           <a:lstStyle/>
           <a:p>
-            <a:pPr algn="ctr" indent="0" marL="0">
+            <a:pPr marL="0" indent="0" algn="ctr">
               <a:buNone/>
             </a:pPr>
             <a:r>
@@ -7016,6 +7146,13 @@
             <a:tailEnd type="triangle"/>
           </a:ln>
         </p:spPr>
+        <p:txBody>
+          <a:bodyPr/>
+          <a:lstStyle/>
+          <a:p>
+            <a:endParaRPr lang="LID4096"/>
+          </a:p>
+        </p:txBody>
       </p:sp>
       <p:sp>
         <p:nvSpPr>
@@ -7038,17 +7175,24 @@
           </a:solidFill>
           <a:ln/>
         </p:spPr>
+        <p:txBody>
+          <a:bodyPr/>
+          <a:lstStyle/>
+          <a:p>
+            <a:endParaRPr lang="LID4096"/>
+          </a:p>
+        </p:txBody>
       </p:sp>
       <p:pic>
         <p:nvPicPr>
-          <p:cNvPr id="11" name="icon-124" descr="preencoded.png">    </p:cNvPr>
+          <p:cNvPr id="11" name="icon-124" descr="preencoded.png"/>
           <p:cNvPicPr>
             <a:picLocks noChangeAspect="1"/>
           </p:cNvPicPr>
           <p:nvPr/>
         </p:nvPicPr>
         <p:blipFill>
-          <a:blip r:embed="rId2"/>
+          <a:blip r:embed="rId4"/>
           <a:stretch>
             <a:fillRect/>
           </a:stretch>
@@ -7084,7 +7228,7 @@
           <a:bodyPr wrap="square" lIns="0" tIns="0" rIns="0" bIns="0" rtlCol="0" anchor="t"/>
           <a:lstStyle/>
           <a:p>
-            <a:pPr algn="ctr" indent="0" marL="0">
+            <a:pPr marL="0" indent="0" algn="ctr">
               <a:buNone/>
             </a:pPr>
             <a:r>
@@ -7122,6 +7266,13 @@
             <a:tailEnd type="triangle"/>
           </a:ln>
         </p:spPr>
+        <p:txBody>
+          <a:bodyPr/>
+          <a:lstStyle/>
+          <a:p>
+            <a:endParaRPr lang="LID4096"/>
+          </a:p>
+        </p:txBody>
       </p:sp>
       <p:sp>
         <p:nvSpPr>
@@ -7144,17 +7295,24 @@
           </a:solidFill>
           <a:ln/>
         </p:spPr>
+        <p:txBody>
+          <a:bodyPr/>
+          <a:lstStyle/>
+          <a:p>
+            <a:endParaRPr lang="LID4096"/>
+          </a:p>
+        </p:txBody>
       </p:sp>
       <p:pic>
         <p:nvPicPr>
-          <p:cNvPr id="15" name="icon-128" descr="preencoded.png">    </p:cNvPr>
+          <p:cNvPr id="15" name="icon-128" descr="preencoded.png"/>
           <p:cNvPicPr>
             <a:picLocks noChangeAspect="1"/>
           </p:cNvPicPr>
           <p:nvPr/>
         </p:nvPicPr>
         <p:blipFill>
-          <a:blip r:embed="rId3"/>
+          <a:blip r:embed="rId5"/>
           <a:stretch>
             <a:fillRect/>
           </a:stretch>
@@ -7190,7 +7348,7 @@
           <a:bodyPr wrap="square" lIns="0" tIns="0" rIns="0" bIns="0" rtlCol="0" anchor="t"/>
           <a:lstStyle/>
           <a:p>
-            <a:pPr algn="ctr" indent="0" marL="0">
+            <a:pPr marL="0" indent="0" algn="ctr">
               <a:buNone/>
             </a:pPr>
             <a:r>
@@ -7228,6 +7386,13 @@
             <a:tailEnd type="triangle"/>
           </a:ln>
         </p:spPr>
+        <p:txBody>
+          <a:bodyPr/>
+          <a:lstStyle/>
+          <a:p>
+            <a:endParaRPr lang="LID4096"/>
+          </a:p>
+        </p:txBody>
       </p:sp>
       <p:sp>
         <p:nvSpPr>
@@ -7250,17 +7415,24 @@
           </a:solidFill>
           <a:ln/>
         </p:spPr>
+        <p:txBody>
+          <a:bodyPr/>
+          <a:lstStyle/>
+          <a:p>
+            <a:endParaRPr lang="LID4096"/>
+          </a:p>
+        </p:txBody>
       </p:sp>
       <p:pic>
         <p:nvPicPr>
-          <p:cNvPr id="19" name="icon-132" descr="preencoded.png">    </p:cNvPr>
+          <p:cNvPr id="19" name="icon-132" descr="preencoded.png"/>
           <p:cNvPicPr>
             <a:picLocks noChangeAspect="1"/>
           </p:cNvPicPr>
           <p:nvPr/>
         </p:nvPicPr>
         <p:blipFill>
-          <a:blip r:embed="rId4"/>
+          <a:blip r:embed="rId6"/>
           <a:stretch>
             <a:fillRect/>
           </a:stretch>
@@ -7296,7 +7468,7 @@
           <a:bodyPr wrap="square" lIns="0" tIns="0" rIns="0" bIns="0" rtlCol="0" anchor="t"/>
           <a:lstStyle/>
           <a:p>
-            <a:pPr algn="ctr" indent="0" marL="0">
+            <a:pPr marL="0" indent="0" algn="ctr">
               <a:buNone/>
             </a:pPr>
             <a:r>
@@ -7333,6 +7505,13 @@
             <a:prstDash val="solid"/>
           </a:ln>
         </p:spPr>
+        <p:txBody>
+          <a:bodyPr/>
+          <a:lstStyle/>
+          <a:p>
+            <a:endParaRPr lang="LID4096"/>
+          </a:p>
+        </p:txBody>
       </p:sp>
       <p:sp>
         <p:nvSpPr>
@@ -7360,6 +7539,13 @@
             <a:prstDash val="solid"/>
           </a:ln>
         </p:spPr>
+        <p:txBody>
+          <a:bodyPr/>
+          <a:lstStyle/>
+          <a:p>
+            <a:endParaRPr lang="LID4096"/>
+          </a:p>
+        </p:txBody>
       </p:sp>
       <p:sp>
         <p:nvSpPr>
@@ -7382,7 +7568,7 @@
           <a:bodyPr wrap="square" lIns="0" tIns="0" rIns="0" bIns="0" rtlCol="0" anchor="ctr"/>
           <a:lstStyle/>
           <a:p>
-            <a:pPr algn="ctr" indent="0" marL="0">
+            <a:pPr marL="0" indent="0" algn="ctr">
               <a:buNone/>
             </a:pPr>
             <a:r>
@@ -7423,6 +7609,13 @@
             <a:prstDash val="solid"/>
           </a:ln>
         </p:spPr>
+        <p:txBody>
+          <a:bodyPr/>
+          <a:lstStyle/>
+          <a:p>
+            <a:endParaRPr lang="LID4096"/>
+          </a:p>
+        </p:txBody>
       </p:sp>
       <p:sp>
         <p:nvSpPr>
@@ -7445,7 +7638,7 @@
           <a:bodyPr wrap="square" lIns="0" tIns="0" rIns="0" bIns="0" rtlCol="0" anchor="ctr"/>
           <a:lstStyle/>
           <a:p>
-            <a:pPr algn="ctr" indent="0" marL="0">
+            <a:pPr marL="0" indent="0" algn="ctr">
               <a:buNone/>
             </a:pPr>
             <a:r>
@@ -7486,6 +7679,13 @@
             <a:prstDash val="solid"/>
           </a:ln>
         </p:spPr>
+        <p:txBody>
+          <a:bodyPr/>
+          <a:lstStyle/>
+          <a:p>
+            <a:endParaRPr lang="LID4096"/>
+          </a:p>
+        </p:txBody>
       </p:sp>
       <p:sp>
         <p:nvSpPr>
@@ -7508,7 +7708,7 @@
           <a:bodyPr wrap="square" lIns="0" tIns="0" rIns="0" bIns="0" rtlCol="0" anchor="ctr"/>
           <a:lstStyle/>
           <a:p>
-            <a:pPr algn="ctr" indent="0" marL="0">
+            <a:pPr marL="0" indent="0" algn="ctr">
               <a:buNone/>
             </a:pPr>
             <a:r>
@@ -7549,6 +7749,13 @@
             <a:prstDash val="solid"/>
           </a:ln>
         </p:spPr>
+        <p:txBody>
+          <a:bodyPr/>
+          <a:lstStyle/>
+          <a:p>
+            <a:endParaRPr lang="LID4096"/>
+          </a:p>
+        </p:txBody>
       </p:sp>
       <p:sp>
         <p:nvSpPr>
@@ -7571,7 +7778,7 @@
           <a:bodyPr wrap="square" lIns="0" tIns="0" rIns="0" bIns="0" rtlCol="0" anchor="ctr"/>
           <a:lstStyle/>
           <a:p>
-            <a:pPr algn="ctr" indent="0" marL="0">
+            <a:pPr marL="0" indent="0" algn="ctr">
               <a:buNone/>
             </a:pPr>
             <a:r>
@@ -7610,13 +7817,20 @@
             <a:prstDash val="solid"/>
           </a:ln>
           <a:effectLst>
-            <a:outerShdw sx="100000" sy="100000" kx="0" ky="0" algn="bl" rotWithShape="0" blurRad="101600" dist="19050" dir="5400000">
+            <a:outerShdw blurRad="101600" dist="19050" dir="5400000" algn="bl" rotWithShape="0">
               <a:srgbClr val="000000">
                 <a:alpha val="7000"/>
               </a:srgbClr>
             </a:outerShdw>
           </a:effectLst>
         </p:spPr>
+        <p:txBody>
+          <a:bodyPr/>
+          <a:lstStyle/>
+          <a:p>
+            <a:endParaRPr lang="LID4096"/>
+          </a:p>
+        </p:txBody>
       </p:sp>
       <p:sp>
         <p:nvSpPr>
@@ -7639,11 +7853,11 @@
           <a:bodyPr wrap="square" lIns="0" tIns="0" rIns="0" bIns="0" rtlCol="0" anchor="ctr"/>
           <a:lstStyle/>
           <a:p>
-            <a:pPr algn="l" indent="0" marL="0">
-              <a:buNone/>
-            </a:pPr>
-            <a:r>
-              <a:rPr lang="en-US" sz="1100" b="1" spc="100" kern="0" dirty="0">
+            <a:pPr marL="0" indent="0" algn="l">
+              <a:buNone/>
+            </a:pPr>
+            <a:r>
+              <a:rPr lang="en-US" sz="1100" b="1" kern="0" spc="100" dirty="0">
                 <a:solidFill>
                   <a:schemeClr val="accent1"/>
                 </a:solidFill>
@@ -7678,274 +7892,17 @@
           </a:solidFill>
           <a:ln/>
         </p:spPr>
+        <p:txBody>
+          <a:bodyPr/>
+          <a:lstStyle/>
+          <a:p>
+            <a:endParaRPr lang="LID4096"/>
+          </a:p>
+        </p:txBody>
       </p:sp>
       <p:pic>
         <p:nvPicPr>
-          <p:cNvPr id="33" name="icon-145" descr="preencoded.png">    </p:cNvPr>
-          <p:cNvPicPr>
-            <a:picLocks noChangeAspect="1"/>
-          </p:cNvPicPr>
-          <p:nvPr/>
-        </p:nvPicPr>
-        <p:blipFill>
-          <a:blip r:embed="rId5"/>
-          <a:stretch>
-            <a:fillRect/>
-          </a:stretch>
-        </p:blipFill>
-        <p:spPr>
-          <a:xfrm>
-            <a:off x="6765188" y="2635301"/>
-            <a:ext cx="307238" cy="307238"/>
-          </a:xfrm>
-          <a:prstGeom prst="rect">
-            <a:avLst/>
-          </a:prstGeom>
-        </p:spPr>
-      </p:pic>
-      <p:sp>
-        <p:nvSpPr>
-          <p:cNvPr id="34" name="text-146"/>
-          <p:cNvSpPr txBox="1"/>
-          <p:nvPr/>
-        </p:nvSpPr>
-        <p:spPr>
-          <a:xfrm>
-            <a:off x="7421728" y="2450592"/>
-            <a:ext cx="3855568" cy="365760"/>
-          </a:xfrm>
-          <a:prstGeom prst="rect">
-            <a:avLst/>
-          </a:prstGeom>
-          <a:noFill/>
-          <a:ln/>
-        </p:spPr>
-        <p:txBody>
-          <a:bodyPr wrap="square" lIns="0" tIns="0" rIns="0" bIns="0" rtlCol="0" anchor="ctr"/>
-          <a:lstStyle/>
-          <a:p>
-            <a:pPr indent="0" marL="0">
-              <a:buNone/>
-            </a:pPr>
-            <a:r>
-              <a:rPr lang="en-US" sz="1800" b="1" dirty="0">
-                <a:solidFill>
-                  <a:schemeClr val="tx1"/>
-                </a:solidFill>
-              </a:rPr>
-              <a:t>Метрики  </a:t>
-            </a:r>
-            <a:pPr indent="0" marL="0">
-              <a:buNone/>
-            </a:pPr>
-            <a:r>
-              <a:rPr lang="en-US" sz="1200" dirty="0">
-                <a:solidFill>
-                  <a:schemeClr val="accent2"/>
-                </a:solidFill>
-                <a:latin typeface="Courier New" pitchFamily="34" charset="0"/>
-                <a:ea typeface="Courier New" pitchFamily="34" charset="-122"/>
-                <a:cs typeface="Courier New" pitchFamily="34" charset="-120"/>
-              </a:rPr>
-              <a:t>Prometheus</a:t>
-            </a:r>
-            <a:endParaRPr lang="en-US" sz="1600" dirty="0"/>
-          </a:p>
-        </p:txBody>
-      </p:sp>
-      <p:sp>
-        <p:nvSpPr>
-          <p:cNvPr id="35" name="text-147"/>
-          <p:cNvSpPr txBox="1"/>
-          <p:nvPr/>
-        </p:nvSpPr>
-        <p:spPr>
-          <a:xfrm>
-            <a:off x="7421728" y="2798064"/>
-            <a:ext cx="3855568" cy="292608"/>
-          </a:xfrm>
-          <a:prstGeom prst="rect">
-            <a:avLst/>
-          </a:prstGeom>
-          <a:noFill/>
-          <a:ln/>
-        </p:spPr>
-        <p:txBody>
-          <a:bodyPr wrap="square" lIns="0" tIns="0" rIns="0" bIns="0" rtlCol="0" anchor="ctr"/>
-          <a:lstStyle/>
-          <a:p>
-            <a:pPr indent="0" marL="0">
-              <a:buNone/>
-            </a:pPr>
-            <a:r>
-              <a:rPr lang="en-US" sz="1500" i="1" dirty="0">
-                <a:solidFill>
-                  <a:schemeClr val="accent2"/>
-                </a:solidFill>
-              </a:rPr>
-              <a:t>дали нешто не е во ред?</a:t>
-            </a:r>
-            <a:endParaRPr lang="en-US" sz="1500" dirty="0"/>
-          </a:p>
-        </p:txBody>
-      </p:sp>
-      <p:sp>
-        <p:nvSpPr>
-          <p:cNvPr id="36" name="icon-bg-148"/>
-          <p:cNvSpPr/>
-          <p:nvPr/>
-        </p:nvSpPr>
-        <p:spPr>
-          <a:xfrm>
-            <a:off x="6598768" y="3383280"/>
-            <a:ext cx="640080" cy="640080"/>
-          </a:xfrm>
-          <a:prstGeom prst="ellipse">
-            <a:avLst/>
-          </a:prstGeom>
-          <a:solidFill>
-            <a:schemeClr val="accent1">
-              <a:alpha val="12000"/>
-            </a:schemeClr>
-          </a:solidFill>
-          <a:ln/>
-        </p:spPr>
-      </p:sp>
-      <p:pic>
-        <p:nvPicPr>
-          <p:cNvPr id="37" name="icon-149" descr="preencoded.png">    </p:cNvPr>
-          <p:cNvPicPr>
-            <a:picLocks noChangeAspect="1"/>
-          </p:cNvPicPr>
-          <p:nvPr/>
-        </p:nvPicPr>
-        <p:blipFill>
-          <a:blip r:embed="rId6"/>
-          <a:stretch>
-            <a:fillRect/>
-          </a:stretch>
-        </p:blipFill>
-        <p:spPr>
-          <a:xfrm>
-            <a:off x="6765188" y="3549701"/>
-            <a:ext cx="307238" cy="307238"/>
-          </a:xfrm>
-          <a:prstGeom prst="rect">
-            <a:avLst/>
-          </a:prstGeom>
-        </p:spPr>
-      </p:pic>
-      <p:sp>
-        <p:nvSpPr>
-          <p:cNvPr id="38" name="text-150"/>
-          <p:cNvSpPr txBox="1"/>
-          <p:nvPr/>
-        </p:nvSpPr>
-        <p:spPr>
-          <a:xfrm>
-            <a:off x="7421728" y="3364992"/>
-            <a:ext cx="3855568" cy="365760"/>
-          </a:xfrm>
-          <a:prstGeom prst="rect">
-            <a:avLst/>
-          </a:prstGeom>
-          <a:noFill/>
-          <a:ln/>
-        </p:spPr>
-        <p:txBody>
-          <a:bodyPr wrap="square" lIns="0" tIns="0" rIns="0" bIns="0" rtlCol="0" anchor="ctr"/>
-          <a:lstStyle/>
-          <a:p>
-            <a:pPr indent="0" marL="0">
-              <a:buNone/>
-            </a:pPr>
-            <a:r>
-              <a:rPr lang="en-US" sz="1800" b="1" dirty="0">
-                <a:solidFill>
-                  <a:schemeClr val="tx1"/>
-                </a:solidFill>
-              </a:rPr>
-              <a:t>Логови  </a:t>
-            </a:r>
-            <a:pPr indent="0" marL="0">
-              <a:buNone/>
-            </a:pPr>
-            <a:r>
-              <a:rPr lang="en-US" sz="1200" dirty="0">
-                <a:solidFill>
-                  <a:schemeClr val="accent2"/>
-                </a:solidFill>
-                <a:latin typeface="Courier New" pitchFamily="34" charset="0"/>
-                <a:ea typeface="Courier New" pitchFamily="34" charset="-122"/>
-                <a:cs typeface="Courier New" pitchFamily="34" charset="-120"/>
-              </a:rPr>
-              <a:t>Loki</a:t>
-            </a:r>
-            <a:endParaRPr lang="en-US" sz="1600" dirty="0"/>
-          </a:p>
-        </p:txBody>
-      </p:sp>
-      <p:sp>
-        <p:nvSpPr>
-          <p:cNvPr id="39" name="text-151"/>
-          <p:cNvSpPr txBox="1"/>
-          <p:nvPr/>
-        </p:nvSpPr>
-        <p:spPr>
-          <a:xfrm>
-            <a:off x="7421728" y="3712464"/>
-            <a:ext cx="3855568" cy="292608"/>
-          </a:xfrm>
-          <a:prstGeom prst="rect">
-            <a:avLst/>
-          </a:prstGeom>
-          <a:noFill/>
-          <a:ln/>
-        </p:spPr>
-        <p:txBody>
-          <a:bodyPr wrap="square" lIns="0" tIns="0" rIns="0" bIns="0" rtlCol="0" anchor="ctr"/>
-          <a:lstStyle/>
-          <a:p>
-            <a:pPr indent="0" marL="0">
-              <a:buNone/>
-            </a:pPr>
-            <a:r>
-              <a:rPr lang="en-US" sz="1500" i="1" dirty="0">
-                <a:solidFill>
-                  <a:schemeClr val="accent2"/>
-                </a:solidFill>
-              </a:rPr>
-              <a:t>што точно се случило?</a:t>
-            </a:r>
-            <a:endParaRPr lang="en-US" sz="1500" dirty="0"/>
-          </a:p>
-        </p:txBody>
-      </p:sp>
-      <p:sp>
-        <p:nvSpPr>
-          <p:cNvPr id="40" name="icon-bg-152"/>
-          <p:cNvSpPr/>
-          <p:nvPr/>
-        </p:nvSpPr>
-        <p:spPr>
-          <a:xfrm>
-            <a:off x="6598768" y="4297680"/>
-            <a:ext cx="640080" cy="640080"/>
-          </a:xfrm>
-          <a:prstGeom prst="ellipse">
-            <a:avLst/>
-          </a:prstGeom>
-          <a:solidFill>
-            <a:schemeClr val="accent1">
-              <a:alpha val="12000"/>
-            </a:schemeClr>
-          </a:solidFill>
-          <a:ln/>
-        </p:spPr>
-      </p:sp>
-      <p:pic>
-        <p:nvPicPr>
-          <p:cNvPr id="41" name="icon-153" descr="preencoded.png">    </p:cNvPr>
+          <p:cNvPr id="33" name="icon-145" descr="preencoded.png"/>
           <p:cNvPicPr>
             <a:picLocks noChangeAspect="1"/>
           </p:cNvPicPr>
@@ -7959,7 +7916,7 @@
         </p:blipFill>
         <p:spPr>
           <a:xfrm>
-            <a:off x="6765188" y="4464101"/>
+            <a:off x="6765188" y="2635301"/>
             <a:ext cx="307238" cy="307238"/>
           </a:xfrm>
           <a:prstGeom prst="rect">
@@ -7969,13 +7926,13 @@
       </p:pic>
       <p:sp>
         <p:nvSpPr>
-          <p:cNvPr id="42" name="text-154"/>
+          <p:cNvPr id="34" name="text-146"/>
           <p:cNvSpPr txBox="1"/>
           <p:nvPr/>
         </p:nvSpPr>
         <p:spPr>
           <a:xfrm>
-            <a:off x="7421728" y="4279392"/>
+            <a:off x="7421728" y="2450592"/>
             <a:ext cx="3855568" cy="365760"/>
           </a:xfrm>
           <a:prstGeom prst="rect">
@@ -7988,7 +7945,7 @@
           <a:bodyPr wrap="square" lIns="0" tIns="0" rIns="0" bIns="0" rtlCol="0" anchor="ctr"/>
           <a:lstStyle/>
           <a:p>
-            <a:pPr indent="0" marL="0">
+            <a:pPr marL="0" indent="0">
               <a:buNone/>
             </a:pPr>
             <a:r>
@@ -7997,11 +7954,8 @@
                   <a:schemeClr val="tx1"/>
                 </a:solidFill>
               </a:rPr>
-              <a:t>Traces  </a:t>
-            </a:r>
-            <a:pPr indent="0" marL="0">
-              <a:buNone/>
-            </a:pPr>
+              <a:t>Метрики  </a:t>
+            </a:r>
             <a:r>
               <a:rPr lang="en-US" sz="1200" dirty="0">
                 <a:solidFill>
@@ -8011,7 +7965,7 @@
                 <a:ea typeface="Courier New" pitchFamily="34" charset="-122"/>
                 <a:cs typeface="Courier New" pitchFamily="34" charset="-120"/>
               </a:rPr>
-              <a:t>Tempo</a:t>
+              <a:t>Prometheus</a:t>
             </a:r>
             <a:endParaRPr lang="en-US" sz="1600" dirty="0"/>
           </a:p>
@@ -8019,13 +7973,13 @@
       </p:sp>
       <p:sp>
         <p:nvSpPr>
-          <p:cNvPr id="43" name="text-155"/>
+          <p:cNvPr id="35" name="text-147"/>
           <p:cNvSpPr txBox="1"/>
           <p:nvPr/>
         </p:nvSpPr>
         <p:spPr>
           <a:xfrm>
-            <a:off x="7421728" y="4626864"/>
+            <a:off x="7421728" y="2798064"/>
             <a:ext cx="3855568" cy="292608"/>
           </a:xfrm>
           <a:prstGeom prst="rect">
@@ -8038,7 +7992,7 @@
           <a:bodyPr wrap="square" lIns="0" tIns="0" rIns="0" bIns="0" rtlCol="0" anchor="ctr"/>
           <a:lstStyle/>
           <a:p>
-            <a:pPr indent="0" marL="0">
+            <a:pPr marL="0" indent="0">
               <a:buNone/>
             </a:pPr>
             <a:r>
@@ -8047,7 +8001,7 @@
                   <a:schemeClr val="accent2"/>
                 </a:solidFill>
               </a:rPr>
-              <a:t>каде се случило?</a:t>
+              <a:t>дали нешто не е во ред?</a:t>
             </a:r>
             <a:endParaRPr lang="en-US" sz="1500" dirty="0"/>
           </a:p>
@@ -8055,30 +8009,36 @@
       </p:sp>
       <p:sp>
         <p:nvSpPr>
-          <p:cNvPr id="44" name="rule-r"/>
+          <p:cNvPr id="36" name="icon-bg-148"/>
           <p:cNvSpPr/>
           <p:nvPr/>
         </p:nvSpPr>
         <p:spPr>
           <a:xfrm>
-            <a:off x="6598768" y="5303520"/>
-            <a:ext cx="4678528" cy="0"/>
-          </a:xfrm>
-          <a:prstGeom prst="line">
-            <a:avLst/>
-          </a:prstGeom>
-          <a:noFill/>
-          <a:ln w="9525">
-            <a:solidFill>
-              <a:schemeClr val="accent5"/>
-            </a:solidFill>
-            <a:prstDash val="solid"/>
-          </a:ln>
-        </p:spPr>
+            <a:off x="6598768" y="3383280"/>
+            <a:ext cx="640080" cy="640080"/>
+          </a:xfrm>
+          <a:prstGeom prst="ellipse">
+            <a:avLst/>
+          </a:prstGeom>
+          <a:solidFill>
+            <a:schemeClr val="accent1">
+              <a:alpha val="12000"/>
+            </a:schemeClr>
+          </a:solidFill>
+          <a:ln/>
+        </p:spPr>
+        <p:txBody>
+          <a:bodyPr/>
+          <a:lstStyle/>
+          <a:p>
+            <a:endParaRPr lang="LID4096"/>
+          </a:p>
+        </p:txBody>
       </p:sp>
       <p:pic>
         <p:nvPicPr>
-          <p:cNvPr id="45" name="icon-156" descr="preencoded.png">    </p:cNvPr>
+          <p:cNvPr id="37" name="icon-149" descr="preencoded.png"/>
           <p:cNvPicPr>
             <a:picLocks noChangeAspect="1"/>
           </p:cNvPicPr>
@@ -8092,6 +8052,279 @@
         </p:blipFill>
         <p:spPr>
           <a:xfrm>
+            <a:off x="6765188" y="3549701"/>
+            <a:ext cx="307238" cy="307238"/>
+          </a:xfrm>
+          <a:prstGeom prst="rect">
+            <a:avLst/>
+          </a:prstGeom>
+        </p:spPr>
+      </p:pic>
+      <p:sp>
+        <p:nvSpPr>
+          <p:cNvPr id="38" name="text-150"/>
+          <p:cNvSpPr txBox="1"/>
+          <p:nvPr/>
+        </p:nvSpPr>
+        <p:spPr>
+          <a:xfrm>
+            <a:off x="7421728" y="3364992"/>
+            <a:ext cx="3855568" cy="365760"/>
+          </a:xfrm>
+          <a:prstGeom prst="rect">
+            <a:avLst/>
+          </a:prstGeom>
+          <a:noFill/>
+          <a:ln/>
+        </p:spPr>
+        <p:txBody>
+          <a:bodyPr wrap="square" lIns="0" tIns="0" rIns="0" bIns="0" rtlCol="0" anchor="ctr"/>
+          <a:lstStyle/>
+          <a:p>
+            <a:pPr marL="0" indent="0">
+              <a:buNone/>
+            </a:pPr>
+            <a:r>
+              <a:rPr lang="en-US" sz="1800" b="1" dirty="0">
+                <a:solidFill>
+                  <a:schemeClr val="tx1"/>
+                </a:solidFill>
+              </a:rPr>
+              <a:t>Логови  </a:t>
+            </a:r>
+            <a:r>
+              <a:rPr lang="en-US" sz="1200" dirty="0">
+                <a:solidFill>
+                  <a:schemeClr val="accent2"/>
+                </a:solidFill>
+                <a:latin typeface="Courier New" pitchFamily="34" charset="0"/>
+                <a:ea typeface="Courier New" pitchFamily="34" charset="-122"/>
+                <a:cs typeface="Courier New" pitchFamily="34" charset="-120"/>
+              </a:rPr>
+              <a:t>Loki</a:t>
+            </a:r>
+            <a:endParaRPr lang="en-US" sz="1600" dirty="0"/>
+          </a:p>
+        </p:txBody>
+      </p:sp>
+      <p:sp>
+        <p:nvSpPr>
+          <p:cNvPr id="39" name="text-151"/>
+          <p:cNvSpPr txBox="1"/>
+          <p:nvPr/>
+        </p:nvSpPr>
+        <p:spPr>
+          <a:xfrm>
+            <a:off x="7421728" y="3712464"/>
+            <a:ext cx="3855568" cy="292608"/>
+          </a:xfrm>
+          <a:prstGeom prst="rect">
+            <a:avLst/>
+          </a:prstGeom>
+          <a:noFill/>
+          <a:ln/>
+        </p:spPr>
+        <p:txBody>
+          <a:bodyPr wrap="square" lIns="0" tIns="0" rIns="0" bIns="0" rtlCol="0" anchor="ctr"/>
+          <a:lstStyle/>
+          <a:p>
+            <a:pPr marL="0" indent="0">
+              <a:buNone/>
+            </a:pPr>
+            <a:r>
+              <a:rPr lang="en-US" sz="1500" i="1" dirty="0">
+                <a:solidFill>
+                  <a:schemeClr val="accent2"/>
+                </a:solidFill>
+              </a:rPr>
+              <a:t>што точно се случило?</a:t>
+            </a:r>
+            <a:endParaRPr lang="en-US" sz="1500" dirty="0"/>
+          </a:p>
+        </p:txBody>
+      </p:sp>
+      <p:sp>
+        <p:nvSpPr>
+          <p:cNvPr id="40" name="icon-bg-152"/>
+          <p:cNvSpPr/>
+          <p:nvPr/>
+        </p:nvSpPr>
+        <p:spPr>
+          <a:xfrm>
+            <a:off x="6598768" y="4297680"/>
+            <a:ext cx="640080" cy="640080"/>
+          </a:xfrm>
+          <a:prstGeom prst="ellipse">
+            <a:avLst/>
+          </a:prstGeom>
+          <a:solidFill>
+            <a:schemeClr val="accent1">
+              <a:alpha val="12000"/>
+            </a:schemeClr>
+          </a:solidFill>
+          <a:ln/>
+        </p:spPr>
+        <p:txBody>
+          <a:bodyPr/>
+          <a:lstStyle/>
+          <a:p>
+            <a:endParaRPr lang="LID4096"/>
+          </a:p>
+        </p:txBody>
+      </p:sp>
+      <p:pic>
+        <p:nvPicPr>
+          <p:cNvPr id="41" name="icon-153" descr="preencoded.png"/>
+          <p:cNvPicPr>
+            <a:picLocks noChangeAspect="1"/>
+          </p:cNvPicPr>
+          <p:nvPr/>
+        </p:nvPicPr>
+        <p:blipFill>
+          <a:blip r:embed="rId9"/>
+          <a:stretch>
+            <a:fillRect/>
+          </a:stretch>
+        </p:blipFill>
+        <p:spPr>
+          <a:xfrm>
+            <a:off x="6765188" y="4464101"/>
+            <a:ext cx="307238" cy="307238"/>
+          </a:xfrm>
+          <a:prstGeom prst="rect">
+            <a:avLst/>
+          </a:prstGeom>
+        </p:spPr>
+      </p:pic>
+      <p:sp>
+        <p:nvSpPr>
+          <p:cNvPr id="42" name="text-154"/>
+          <p:cNvSpPr txBox="1"/>
+          <p:nvPr/>
+        </p:nvSpPr>
+        <p:spPr>
+          <a:xfrm>
+            <a:off x="7421728" y="4279392"/>
+            <a:ext cx="3855568" cy="365760"/>
+          </a:xfrm>
+          <a:prstGeom prst="rect">
+            <a:avLst/>
+          </a:prstGeom>
+          <a:noFill/>
+          <a:ln/>
+        </p:spPr>
+        <p:txBody>
+          <a:bodyPr wrap="square" lIns="0" tIns="0" rIns="0" bIns="0" rtlCol="0" anchor="ctr"/>
+          <a:lstStyle/>
+          <a:p>
+            <a:pPr marL="0" indent="0">
+              <a:buNone/>
+            </a:pPr>
+            <a:r>
+              <a:rPr lang="en-US" sz="1800" b="1" dirty="0">
+                <a:solidFill>
+                  <a:schemeClr val="tx1"/>
+                </a:solidFill>
+              </a:rPr>
+              <a:t>Traces  </a:t>
+            </a:r>
+            <a:r>
+              <a:rPr lang="en-US" sz="1200" dirty="0">
+                <a:solidFill>
+                  <a:schemeClr val="accent2"/>
+                </a:solidFill>
+                <a:latin typeface="Courier New" pitchFamily="34" charset="0"/>
+                <a:ea typeface="Courier New" pitchFamily="34" charset="-122"/>
+                <a:cs typeface="Courier New" pitchFamily="34" charset="-120"/>
+              </a:rPr>
+              <a:t>Tempo</a:t>
+            </a:r>
+            <a:endParaRPr lang="en-US" sz="1600" dirty="0"/>
+          </a:p>
+        </p:txBody>
+      </p:sp>
+      <p:sp>
+        <p:nvSpPr>
+          <p:cNvPr id="43" name="text-155"/>
+          <p:cNvSpPr txBox="1"/>
+          <p:nvPr/>
+        </p:nvSpPr>
+        <p:spPr>
+          <a:xfrm>
+            <a:off x="7421728" y="4626864"/>
+            <a:ext cx="3855568" cy="292608"/>
+          </a:xfrm>
+          <a:prstGeom prst="rect">
+            <a:avLst/>
+          </a:prstGeom>
+          <a:noFill/>
+          <a:ln/>
+        </p:spPr>
+        <p:txBody>
+          <a:bodyPr wrap="square" lIns="0" tIns="0" rIns="0" bIns="0" rtlCol="0" anchor="ctr"/>
+          <a:lstStyle/>
+          <a:p>
+            <a:pPr marL="0" indent="0">
+              <a:buNone/>
+            </a:pPr>
+            <a:r>
+              <a:rPr lang="en-US" sz="1500" i="1" dirty="0">
+                <a:solidFill>
+                  <a:schemeClr val="accent2"/>
+                </a:solidFill>
+              </a:rPr>
+              <a:t>каде се случило?</a:t>
+            </a:r>
+            <a:endParaRPr lang="en-US" sz="1500" dirty="0"/>
+          </a:p>
+        </p:txBody>
+      </p:sp>
+      <p:sp>
+        <p:nvSpPr>
+          <p:cNvPr id="44" name="rule-r"/>
+          <p:cNvSpPr/>
+          <p:nvPr/>
+        </p:nvSpPr>
+        <p:spPr>
+          <a:xfrm>
+            <a:off x="6598768" y="5303520"/>
+            <a:ext cx="4678528" cy="0"/>
+          </a:xfrm>
+          <a:prstGeom prst="line">
+            <a:avLst/>
+          </a:prstGeom>
+          <a:noFill/>
+          <a:ln w="9525">
+            <a:solidFill>
+              <a:schemeClr val="accent5"/>
+            </a:solidFill>
+            <a:prstDash val="solid"/>
+          </a:ln>
+        </p:spPr>
+        <p:txBody>
+          <a:bodyPr/>
+          <a:lstStyle/>
+          <a:p>
+            <a:endParaRPr lang="LID4096"/>
+          </a:p>
+        </p:txBody>
+      </p:sp>
+      <p:pic>
+        <p:nvPicPr>
+          <p:cNvPr id="45" name="icon-156" descr="preencoded.png"/>
+          <p:cNvPicPr>
+            <a:picLocks noChangeAspect="1"/>
+          </p:cNvPicPr>
+          <p:nvPr/>
+        </p:nvPicPr>
+        <p:blipFill>
+          <a:blip r:embed="rId10"/>
+          <a:stretch>
+            <a:fillRect/>
+          </a:stretch>
+        </p:blipFill>
+        <p:spPr>
+          <a:xfrm>
             <a:off x="6735928" y="5550408"/>
             <a:ext cx="365760" cy="365760"/>
           </a:xfrm>
@@ -8121,7 +8354,7 @@
           <a:bodyPr wrap="square" lIns="0" tIns="0" rIns="0" bIns="0" rtlCol="0" anchor="ctr"/>
           <a:lstStyle/>
           <a:p>
-            <a:pPr indent="0" marL="0">
+            <a:pPr marL="0" indent="0">
               <a:buNone/>
             </a:pPr>
             <a:r>
@@ -8132,9 +8365,6 @@
               </a:rPr>
               <a:t>Grafana: </a:t>
             </a:r>
-            <a:pPr indent="0" marL="0">
-              <a:buNone/>
-            </a:pPr>
             <a:r>
               <a:rPr lang="en-US" sz="1700" dirty="0">
                 <a:solidFill>
@@ -8149,7 +8379,7 @@
       </p:sp>
       <p:sp>
         <p:nvSpPr>
-          <p:cNvPr id="25" name="Slide Number Placeholder 0"/>
+          <p:cNvPr id="47" name="Slide Number Placeholder 0"/>
           <p:cNvSpPr>
             <a:spLocks noGrp="1"/>
           </p:cNvSpPr>
@@ -8167,7 +8397,7 @@
           </a:prstGeom>
           <a:extLst>
             <a:ext uri="{C572A759-6A51-4108-AA02-DFA0A04FC94B}">
-              <ma14:wrappingTextBoxFlag xmlns:ma14="http://schemas.microsoft.com/office/mac/drawingml/2011/main" val="0"/>
+              <ma14:wrappingTextBoxFlag xmlns:ma14="http://schemas.microsoft.com/office/mac/drawingml/2011/main" xmlns="" val="0"/>
             </a:ext>
           </a:extLst>
         </p:spPr>
@@ -8188,7 +8418,7 @@
           <a:p>
             <a:pPr algn="r"/>
             <a:fld id="{F7021451-1387-4CA6-816F-3879F97B5CBC}" type="slidenum">
-              <a:rPr b="0" lang="en-US"/>
+              <a:rPr lang="en-US" b="0"/>
               <a:t>5</a:t>
             </a:fld>
             <a:endParaRPr lang="en-US"/>
@@ -8223,9 +8453,11 @@
       <p:sp>
         <p:nvSpPr>
           <p:cNvPr id="2" name="Text 0"/>
-          <p:cNvSpPr/>
+          <p:cNvSpPr>
+            <a:spLocks noGrp="1"/>
+          </p:cNvSpPr>
           <p:nvPr>
-            <p:ph idx="100" type="body" hasCustomPrompt="1"/>
+            <p:ph type="body" idx="100" hasCustomPrompt="1"/>
           </p:nvPr>
         </p:nvSpPr>
         <p:spPr>
@@ -8243,11 +8475,11 @@
           <a:bodyPr wrap="square" lIns="0" tIns="0" rIns="0" bIns="0" rtlCol="0" anchor="ctr"/>
           <a:lstStyle/>
           <a:p>
-            <a:pPr indent="0" marL="0">
-              <a:buNone/>
-            </a:pPr>
-            <a:r>
-              <a:rPr lang="en-US" sz="1100" b="1" spc="200" kern="0" dirty="0">
+            <a:pPr marL="0" indent="0">
+              <a:buNone/>
+            </a:pPr>
+            <a:r>
+              <a:rPr lang="en-US" sz="1100" b="1" kern="0" spc="200" dirty="0">
                 <a:solidFill>
                   <a:schemeClr val="accent1"/>
                 </a:solidFill>
@@ -8264,9 +8496,11 @@
       <p:sp>
         <p:nvSpPr>
           <p:cNvPr id="3" name="Text 0"/>
-          <p:cNvSpPr/>
+          <p:cNvSpPr>
+            <a:spLocks noGrp="1"/>
+          </p:cNvSpPr>
           <p:nvPr>
-            <p:ph idx="101" type="title" hasCustomPrompt="1"/>
+            <p:ph type="title" idx="101" hasCustomPrompt="1"/>
           </p:nvPr>
         </p:nvSpPr>
         <p:spPr>
@@ -8284,7 +8518,7 @@
           <a:bodyPr wrap="square" lIns="0" tIns="0" rIns="0" bIns="0" rtlCol="0" anchor="t"/>
           <a:lstStyle/>
           <a:p>
-            <a:pPr algn="l" indent="0" marL="0">
+            <a:pPr marL="0" indent="0" algn="l">
               <a:buNone/>
             </a:pPr>
             <a:r>
@@ -8302,9 +8536,11 @@
       <p:sp>
         <p:nvSpPr>
           <p:cNvPr id="4" name="Text 0"/>
-          <p:cNvSpPr/>
+          <p:cNvSpPr>
+            <a:spLocks noGrp="1"/>
+          </p:cNvSpPr>
           <p:nvPr>
-            <p:ph idx="102" type="body" hasCustomPrompt="1"/>
+            <p:ph type="body" idx="102" hasCustomPrompt="1"/>
           </p:nvPr>
         </p:nvSpPr>
         <p:spPr>
@@ -8322,7 +8558,7 @@
           <a:bodyPr wrap="square" lIns="0" tIns="0" rIns="0" bIns="0" rtlCol="0" anchor="t"/>
           <a:lstStyle/>
           <a:p>
-            <a:pPr indent="0" marL="0">
+            <a:pPr marL="0" indent="0">
               <a:buNone/>
             </a:pPr>
             <a:r>
@@ -8358,7 +8594,7 @@
           <a:bodyPr wrap="square" lIns="0" tIns="0" rIns="0" bIns="0" rtlCol="0" anchor="ctr"/>
           <a:lstStyle/>
           <a:p>
-            <a:pPr indent="0" marL="0">
+            <a:pPr marL="0" indent="0">
               <a:buNone/>
             </a:pPr>
             <a:r>
@@ -8397,7 +8633,7 @@
           <a:bodyPr wrap="square" lIns="0" tIns="0" rIns="0" bIns="0" rtlCol="0" anchor="t"/>
           <a:lstStyle/>
           <a:p>
-            <a:pPr indent="0" marL="0">
+            <a:pPr marL="0" indent="0">
               <a:buNone/>
             </a:pPr>
             <a:r>
@@ -8433,7 +8669,7 @@
           <a:bodyPr wrap="square" lIns="0" tIns="0" rIns="0" bIns="0" rtlCol="0" anchor="t"/>
           <a:lstStyle/>
           <a:p>
-            <a:pPr indent="0" marL="0">
+            <a:pPr marL="0" indent="0">
               <a:buNone/>
             </a:pPr>
             <a:r>
@@ -8470,6 +8706,13 @@
             <a:prstDash val="solid"/>
           </a:ln>
         </p:spPr>
+        <p:txBody>
+          <a:bodyPr/>
+          <a:lstStyle/>
+          <a:p>
+            <a:endParaRPr lang="LID4096"/>
+          </a:p>
+        </p:txBody>
       </p:sp>
       <p:sp>
         <p:nvSpPr>
@@ -8492,7 +8735,7 @@
           <a:bodyPr wrap="square" lIns="0" tIns="0" rIns="0" bIns="0" rtlCol="0" anchor="ctr"/>
           <a:lstStyle/>
           <a:p>
-            <a:pPr indent="0" marL="0">
+            <a:pPr marL="0" indent="0">
               <a:buNone/>
             </a:pPr>
             <a:r>
@@ -8531,7 +8774,7 @@
           <a:bodyPr wrap="square" lIns="0" tIns="0" rIns="0" bIns="0" rtlCol="0" anchor="t"/>
           <a:lstStyle/>
           <a:p>
-            <a:pPr indent="0" marL="0">
+            <a:pPr marL="0" indent="0">
               <a:buNone/>
             </a:pPr>
             <a:r>
@@ -8567,7 +8810,7 @@
           <a:bodyPr wrap="square" lIns="0" tIns="0" rIns="0" bIns="0" rtlCol="0" anchor="t"/>
           <a:lstStyle/>
           <a:p>
-            <a:pPr indent="0" marL="0">
+            <a:pPr marL="0" indent="0">
               <a:buNone/>
             </a:pPr>
             <a:r>
@@ -8604,6 +8847,13 @@
             <a:prstDash val="solid"/>
           </a:ln>
         </p:spPr>
+        <p:txBody>
+          <a:bodyPr/>
+          <a:lstStyle/>
+          <a:p>
+            <a:endParaRPr lang="LID4096"/>
+          </a:p>
+        </p:txBody>
       </p:sp>
       <p:sp>
         <p:nvSpPr>
@@ -8626,7 +8876,7 @@
           <a:bodyPr wrap="square" lIns="0" tIns="0" rIns="0" bIns="0" rtlCol="0" anchor="ctr"/>
           <a:lstStyle/>
           <a:p>
-            <a:pPr indent="0" marL="0">
+            <a:pPr marL="0" indent="0">
               <a:buNone/>
             </a:pPr>
             <a:r>
@@ -8665,7 +8915,7 @@
           <a:bodyPr wrap="square" lIns="0" tIns="0" rIns="0" bIns="0" rtlCol="0" anchor="t"/>
           <a:lstStyle/>
           <a:p>
-            <a:pPr indent="0" marL="0">
+            <a:pPr marL="0" indent="0">
               <a:buNone/>
             </a:pPr>
             <a:r>
@@ -8701,7 +8951,7 @@
           <a:bodyPr wrap="square" lIns="0" tIns="0" rIns="0" bIns="0" rtlCol="0" anchor="t"/>
           <a:lstStyle/>
           <a:p>
-            <a:pPr indent="0" marL="0">
+            <a:pPr marL="0" indent="0">
               <a:buNone/>
             </a:pPr>
             <a:r>
@@ -8738,6 +8988,13 @@
             <a:prstDash val="solid"/>
           </a:ln>
         </p:spPr>
+        <p:txBody>
+          <a:bodyPr/>
+          <a:lstStyle/>
+          <a:p>
+            <a:endParaRPr lang="LID4096"/>
+          </a:p>
+        </p:txBody>
       </p:sp>
       <p:sp>
         <p:nvSpPr>
@@ -8760,7 +9017,7 @@
           <a:bodyPr wrap="square" lIns="0" tIns="0" rIns="0" bIns="0" rtlCol="0" anchor="ctr"/>
           <a:lstStyle/>
           <a:p>
-            <a:pPr indent="0" marL="0">
+            <a:pPr marL="0" indent="0">
               <a:buNone/>
             </a:pPr>
             <a:r>
@@ -8799,7 +9056,7 @@
           <a:bodyPr wrap="square" lIns="0" tIns="0" rIns="0" bIns="0" rtlCol="0" anchor="t"/>
           <a:lstStyle/>
           <a:p>
-            <a:pPr indent="0" marL="0">
+            <a:pPr marL="0" indent="0">
               <a:buNone/>
             </a:pPr>
             <a:r>
@@ -8835,7 +9092,7 @@
           <a:bodyPr wrap="square" lIns="0" tIns="0" rIns="0" bIns="0" rtlCol="0" anchor="t"/>
           <a:lstStyle/>
           <a:p>
-            <a:pPr indent="0" marL="0">
+            <a:pPr marL="0" indent="0">
               <a:buNone/>
             </a:pPr>
             <a:r>
@@ -8870,7 +9127,7 @@
           </a:prstGeom>
           <a:extLst>
             <a:ext uri="{C572A759-6A51-4108-AA02-DFA0A04FC94B}">
-              <ma14:wrappingTextBoxFlag xmlns:ma14="http://schemas.microsoft.com/office/mac/drawingml/2011/main" val="0"/>
+              <ma14:wrappingTextBoxFlag xmlns:ma14="http://schemas.microsoft.com/office/mac/drawingml/2011/main" xmlns="" val="0"/>
             </a:ext>
           </a:extLst>
         </p:spPr>
@@ -8891,7 +9148,7 @@
           <a:p>
             <a:pPr algn="r"/>
             <a:fld id="{F7021451-1387-4CA6-816F-3879F97B5CBC}" type="slidenum">
-              <a:rPr b="0" lang="en-US"/>
+              <a:rPr lang="en-US" b="0"/>
               <a:t>6</a:t>
             </a:fld>
             <a:endParaRPr lang="en-US"/>
@@ -8926,9 +9183,11 @@
       <p:sp>
         <p:nvSpPr>
           <p:cNvPr id="2" name="Text 0"/>
-          <p:cNvSpPr/>
+          <p:cNvSpPr>
+            <a:spLocks noGrp="1"/>
+          </p:cNvSpPr>
           <p:nvPr>
-            <p:ph idx="100" type="body" hasCustomPrompt="1"/>
+            <p:ph type="body" idx="100" hasCustomPrompt="1"/>
           </p:nvPr>
         </p:nvSpPr>
         <p:spPr>
@@ -8946,11 +9205,11 @@
           <a:bodyPr wrap="square" lIns="0" tIns="0" rIns="0" bIns="0" rtlCol="0" anchor="ctr"/>
           <a:lstStyle/>
           <a:p>
-            <a:pPr indent="0" marL="0">
-              <a:buNone/>
-            </a:pPr>
-            <a:r>
-              <a:rPr lang="en-US" sz="1100" b="1" spc="200" kern="0" dirty="0">
+            <a:pPr marL="0" indent="0">
+              <a:buNone/>
+            </a:pPr>
+            <a:r>
+              <a:rPr lang="en-US" sz="1100" b="1" kern="0" spc="200" dirty="0">
                 <a:solidFill>
                   <a:schemeClr val="accent6"/>
                 </a:solidFill>
@@ -8967,9 +9226,11 @@
       <p:sp>
         <p:nvSpPr>
           <p:cNvPr id="3" name="Text 0"/>
-          <p:cNvSpPr/>
+          <p:cNvSpPr>
+            <a:spLocks noGrp="1"/>
+          </p:cNvSpPr>
           <p:nvPr>
-            <p:ph idx="101" type="title" hasCustomPrompt="1"/>
+            <p:ph type="title" idx="101" hasCustomPrompt="1"/>
           </p:nvPr>
         </p:nvSpPr>
         <p:spPr>
@@ -8987,7 +9248,7 @@
           <a:bodyPr wrap="square" lIns="0" tIns="0" rIns="0" bIns="0" rtlCol="0" anchor="t"/>
           <a:lstStyle/>
           <a:p>
-            <a:pPr algn="l" indent="0" marL="0">
+            <a:pPr marL="0" indent="0" algn="l">
               <a:buNone/>
             </a:pPr>
             <a:r>
@@ -9023,11 +9284,11 @@
           <a:bodyPr wrap="square" lIns="0" tIns="0" rIns="0" bIns="0" rtlCol="0" anchor="ctr"/>
           <a:lstStyle/>
           <a:p>
-            <a:pPr algn="l" indent="0" marL="0">
-              <a:buNone/>
-            </a:pPr>
-            <a:r>
-              <a:rPr lang="en-US" sz="1200" b="1" spc="100" kern="0" dirty="0">
+            <a:pPr marL="0" indent="0" algn="l">
+              <a:buNone/>
+            </a:pPr>
+            <a:r>
+              <a:rPr lang="en-US" sz="1200" b="1" kern="0" spc="100" dirty="0">
                 <a:solidFill>
                   <a:schemeClr val="accent6"/>
                 </a:solidFill>
@@ -9043,127 +9304,7 @@
       </p:sp>
       <p:pic>
         <p:nvPicPr>
-          <p:cNvPr id="5" name="icon-174" descr="preencoded.png">    </p:cNvPr>
-          <p:cNvPicPr>
-            <a:picLocks noChangeAspect="1"/>
-          </p:cNvPicPr>
-          <p:nvPr/>
-        </p:nvPicPr>
-        <p:blipFill>
-          <a:blip r:embed="rId1"/>
-          <a:stretch>
-            <a:fillRect/>
-          </a:stretch>
-        </p:blipFill>
-        <p:spPr>
-          <a:xfrm>
-            <a:off x="548640" y="2359152"/>
-            <a:ext cx="274320" cy="274320"/>
-          </a:xfrm>
-          <a:prstGeom prst="rect">
-            <a:avLst/>
-          </a:prstGeom>
-        </p:spPr>
-      </p:pic>
-      <p:sp>
-        <p:nvSpPr>
-          <p:cNvPr id="6" name="text-175"/>
-          <p:cNvSpPr txBox="1"/>
-          <p:nvPr/>
-        </p:nvSpPr>
-        <p:spPr>
-          <a:xfrm>
-            <a:off x="1005840" y="2286000"/>
-            <a:ext cx="5120640" cy="420624"/>
-          </a:xfrm>
-          <a:prstGeom prst="rect">
-            <a:avLst/>
-          </a:prstGeom>
-          <a:noFill/>
-          <a:ln/>
-        </p:spPr>
-        <p:txBody>
-          <a:bodyPr wrap="square" lIns="0" tIns="0" rIns="0" bIns="0" rtlCol="0" anchor="ctr"/>
-          <a:lstStyle/>
-          <a:p>
-            <a:pPr indent="0" marL="0">
-              <a:buNone/>
-            </a:pPr>
-            <a:r>
-              <a:rPr lang="en-US" sz="1900" dirty="0">
-                <a:solidFill>
-                  <a:schemeClr val="bg1"/>
-                </a:solidFill>
-              </a:rPr>
-              <a:t>Kafka · outbox · inbox</a:t>
-            </a:r>
-            <a:endParaRPr lang="en-US" sz="1900" dirty="0"/>
-          </a:p>
-        </p:txBody>
-      </p:sp>
-      <p:pic>
-        <p:nvPicPr>
-          <p:cNvPr id="7" name="icon-176" descr="preencoded.png">    </p:cNvPr>
-          <p:cNvPicPr>
-            <a:picLocks noChangeAspect="1"/>
-          </p:cNvPicPr>
-          <p:nvPr/>
-        </p:nvPicPr>
-        <p:blipFill>
-          <a:blip r:embed="rId2"/>
-          <a:stretch>
-            <a:fillRect/>
-          </a:stretch>
-        </p:blipFill>
-        <p:spPr>
-          <a:xfrm>
-            <a:off x="548640" y="2862072"/>
-            <a:ext cx="274320" cy="274320"/>
-          </a:xfrm>
-          <a:prstGeom prst="rect">
-            <a:avLst/>
-          </a:prstGeom>
-        </p:spPr>
-      </p:pic>
-      <p:sp>
-        <p:nvSpPr>
-          <p:cNvPr id="8" name="text-177"/>
-          <p:cNvSpPr txBox="1"/>
-          <p:nvPr/>
-        </p:nvSpPr>
-        <p:spPr>
-          <a:xfrm>
-            <a:off x="1005840" y="2788920"/>
-            <a:ext cx="5120640" cy="420624"/>
-          </a:xfrm>
-          <a:prstGeom prst="rect">
-            <a:avLst/>
-          </a:prstGeom>
-          <a:noFill/>
-          <a:ln/>
-        </p:spPr>
-        <p:txBody>
-          <a:bodyPr wrap="square" lIns="0" tIns="0" rIns="0" bIns="0" rtlCol="0" anchor="ctr"/>
-          <a:lstStyle/>
-          <a:p>
-            <a:pPr indent="0" marL="0">
-              <a:buNone/>
-            </a:pPr>
-            <a:r>
-              <a:rPr lang="en-US" sz="1900" dirty="0">
-                <a:solidFill>
-                  <a:schemeClr val="bg1"/>
-                </a:solidFill>
-              </a:rPr>
-              <a:t>Kubernetes · Helm · ArgoCD</a:t>
-            </a:r>
-            <a:endParaRPr lang="en-US" sz="1900" dirty="0"/>
-          </a:p>
-        </p:txBody>
-      </p:sp>
-      <p:pic>
-        <p:nvPicPr>
-          <p:cNvPr id="9" name="icon-178" descr="preencoded.png">    </p:cNvPr>
+          <p:cNvPr id="5" name="icon-174" descr="preencoded.png"/>
           <p:cNvPicPr>
             <a:picLocks noChangeAspect="1"/>
           </p:cNvPicPr>
@@ -9177,6 +9318,126 @@
         </p:blipFill>
         <p:spPr>
           <a:xfrm>
+            <a:off x="548640" y="2359152"/>
+            <a:ext cx="274320" cy="274320"/>
+          </a:xfrm>
+          <a:prstGeom prst="rect">
+            <a:avLst/>
+          </a:prstGeom>
+        </p:spPr>
+      </p:pic>
+      <p:sp>
+        <p:nvSpPr>
+          <p:cNvPr id="6" name="text-175"/>
+          <p:cNvSpPr txBox="1"/>
+          <p:nvPr/>
+        </p:nvSpPr>
+        <p:spPr>
+          <a:xfrm>
+            <a:off x="1005840" y="2286000"/>
+            <a:ext cx="5120640" cy="420624"/>
+          </a:xfrm>
+          <a:prstGeom prst="rect">
+            <a:avLst/>
+          </a:prstGeom>
+          <a:noFill/>
+          <a:ln/>
+        </p:spPr>
+        <p:txBody>
+          <a:bodyPr wrap="square" lIns="0" tIns="0" rIns="0" bIns="0" rtlCol="0" anchor="ctr"/>
+          <a:lstStyle/>
+          <a:p>
+            <a:pPr marL="0" indent="0">
+              <a:buNone/>
+            </a:pPr>
+            <a:r>
+              <a:rPr lang="en-US" sz="1900" dirty="0">
+                <a:solidFill>
+                  <a:schemeClr val="bg1"/>
+                </a:solidFill>
+              </a:rPr>
+              <a:t>Kafka · outbox · inbox</a:t>
+            </a:r>
+            <a:endParaRPr lang="en-US" sz="1900" dirty="0"/>
+          </a:p>
+        </p:txBody>
+      </p:sp>
+      <p:pic>
+        <p:nvPicPr>
+          <p:cNvPr id="7" name="icon-176" descr="preencoded.png"/>
+          <p:cNvPicPr>
+            <a:picLocks noChangeAspect="1"/>
+          </p:cNvPicPr>
+          <p:nvPr/>
+        </p:nvPicPr>
+        <p:blipFill>
+          <a:blip r:embed="rId3"/>
+          <a:stretch>
+            <a:fillRect/>
+          </a:stretch>
+        </p:blipFill>
+        <p:spPr>
+          <a:xfrm>
+            <a:off x="548640" y="2862072"/>
+            <a:ext cx="274320" cy="274320"/>
+          </a:xfrm>
+          <a:prstGeom prst="rect">
+            <a:avLst/>
+          </a:prstGeom>
+        </p:spPr>
+      </p:pic>
+      <p:sp>
+        <p:nvSpPr>
+          <p:cNvPr id="8" name="text-177"/>
+          <p:cNvSpPr txBox="1"/>
+          <p:nvPr/>
+        </p:nvSpPr>
+        <p:spPr>
+          <a:xfrm>
+            <a:off x="1005840" y="2788920"/>
+            <a:ext cx="5120640" cy="420624"/>
+          </a:xfrm>
+          <a:prstGeom prst="rect">
+            <a:avLst/>
+          </a:prstGeom>
+          <a:noFill/>
+          <a:ln/>
+        </p:spPr>
+        <p:txBody>
+          <a:bodyPr wrap="square" lIns="0" tIns="0" rIns="0" bIns="0" rtlCol="0" anchor="ctr"/>
+          <a:lstStyle/>
+          <a:p>
+            <a:pPr marL="0" indent="0">
+              <a:buNone/>
+            </a:pPr>
+            <a:r>
+              <a:rPr lang="en-US" sz="1900" dirty="0">
+                <a:solidFill>
+                  <a:schemeClr val="bg1"/>
+                </a:solidFill>
+              </a:rPr>
+              <a:t>Kubernetes · Helm · ArgoCD</a:t>
+            </a:r>
+            <a:endParaRPr lang="en-US" sz="1900" dirty="0"/>
+          </a:p>
+        </p:txBody>
+      </p:sp>
+      <p:pic>
+        <p:nvPicPr>
+          <p:cNvPr id="9" name="icon-178" descr="preencoded.png"/>
+          <p:cNvPicPr>
+            <a:picLocks noChangeAspect="1"/>
+          </p:cNvPicPr>
+          <p:nvPr/>
+        </p:nvPicPr>
+        <p:blipFill>
+          <a:blip r:embed="rId3"/>
+          <a:stretch>
+            <a:fillRect/>
+          </a:stretch>
+        </p:blipFill>
+        <p:spPr>
+          <a:xfrm>
             <a:off x="548640" y="3364992"/>
             <a:ext cx="274320" cy="274320"/>
           </a:xfrm>
@@ -9206,7 +9467,7 @@
           <a:bodyPr wrap="square" lIns="0" tIns="0" rIns="0" bIns="0" rtlCol="0" anchor="ctr"/>
           <a:lstStyle/>
           <a:p>
-            <a:pPr indent="0" marL="0">
+            <a:pPr marL="0" indent="0">
               <a:buNone/>
             </a:pPr>
             <a:r>
@@ -9223,7 +9484,166 @@
       </p:sp>
       <p:pic>
         <p:nvPicPr>
-          <p:cNvPr id="11" name="icon-180" descr="preencoded.png">    </p:cNvPr>
+          <p:cNvPr id="11" name="icon-180" descr="preencoded.png"/>
+          <p:cNvPicPr>
+            <a:picLocks noChangeAspect="1"/>
+          </p:cNvPicPr>
+          <p:nvPr/>
+        </p:nvPicPr>
+        <p:blipFill>
+          <a:blip r:embed="rId3"/>
+          <a:stretch>
+            <a:fillRect/>
+          </a:stretch>
+        </p:blipFill>
+        <p:spPr>
+          <a:xfrm>
+            <a:off x="548640" y="3867912"/>
+            <a:ext cx="274320" cy="274320"/>
+          </a:xfrm>
+          <a:prstGeom prst="rect">
+            <a:avLst/>
+          </a:prstGeom>
+        </p:spPr>
+      </p:pic>
+      <p:sp>
+        <p:nvSpPr>
+          <p:cNvPr id="12" name="text-181"/>
+          <p:cNvSpPr txBox="1"/>
+          <p:nvPr/>
+        </p:nvSpPr>
+        <p:spPr>
+          <a:xfrm>
+            <a:off x="1005840" y="3794760"/>
+            <a:ext cx="5120640" cy="420624"/>
+          </a:xfrm>
+          <a:prstGeom prst="rect">
+            <a:avLst/>
+          </a:prstGeom>
+          <a:noFill/>
+          <a:ln/>
+        </p:spPr>
+        <p:txBody>
+          <a:bodyPr wrap="square" lIns="0" tIns="0" rIns="0" bIns="0" rtlCol="0" anchor="ctr"/>
+          <a:lstStyle/>
+          <a:p>
+            <a:pPr marL="0" indent="0">
+              <a:buNone/>
+            </a:pPr>
+            <a:r>
+              <a:rPr lang="en-US" sz="1900" dirty="0">
+                <a:solidFill>
+                  <a:schemeClr val="bg1"/>
+                </a:solidFill>
+              </a:rPr>
+              <a:t>Метрики · логови · traces</a:t>
+            </a:r>
+            <a:endParaRPr lang="en-US" sz="1900" dirty="0"/>
+          </a:p>
+        </p:txBody>
+      </p:sp>
+      <p:pic>
+        <p:nvPicPr>
+          <p:cNvPr id="13" name="icon-182" descr="preencoded.png"/>
+          <p:cNvPicPr>
+            <a:picLocks noChangeAspect="1"/>
+          </p:cNvPicPr>
+          <p:nvPr/>
+        </p:nvPicPr>
+        <p:blipFill>
+          <a:blip r:embed="rId3"/>
+          <a:stretch>
+            <a:fillRect/>
+          </a:stretch>
+        </p:blipFill>
+        <p:spPr>
+          <a:xfrm>
+            <a:off x="548640" y="4370832"/>
+            <a:ext cx="274320" cy="274320"/>
+          </a:xfrm>
+          <a:prstGeom prst="rect">
+            <a:avLst/>
+          </a:prstGeom>
+        </p:spPr>
+      </p:pic>
+      <p:sp>
+        <p:nvSpPr>
+          <p:cNvPr id="14" name="text-183"/>
+          <p:cNvSpPr txBox="1"/>
+          <p:nvPr/>
+        </p:nvSpPr>
+        <p:spPr>
+          <a:xfrm>
+            <a:off x="1005840" y="4297680"/>
+            <a:ext cx="5120640" cy="420624"/>
+          </a:xfrm>
+          <a:prstGeom prst="rect">
+            <a:avLst/>
+          </a:prstGeom>
+          <a:noFill/>
+          <a:ln/>
+        </p:spPr>
+        <p:txBody>
+          <a:bodyPr wrap="square" lIns="0" tIns="0" rIns="0" bIns="0" rtlCol="0" anchor="ctr"/>
+          <a:lstStyle/>
+          <a:p>
+            <a:pPr marL="0" indent="0">
+              <a:buNone/>
+            </a:pPr>
+            <a:r>
+              <a:rPr lang="en-US" sz="1900" dirty="0">
+                <a:solidFill>
+                  <a:schemeClr val="bg1"/>
+                </a:solidFill>
+              </a:rPr>
+              <a:t>Мерења со k6 и Chaos Mesh</a:t>
+            </a:r>
+            <a:endParaRPr lang="en-US" sz="1900" dirty="0"/>
+          </a:p>
+        </p:txBody>
+      </p:sp>
+      <p:sp>
+        <p:nvSpPr>
+          <p:cNvPr id="15" name="text-184"/>
+          <p:cNvSpPr txBox="1"/>
+          <p:nvPr/>
+        </p:nvSpPr>
+        <p:spPr>
+          <a:xfrm>
+            <a:off x="6766560" y="1828800"/>
+            <a:ext cx="4572000" cy="274320"/>
+          </a:xfrm>
+          <a:prstGeom prst="rect">
+            <a:avLst/>
+          </a:prstGeom>
+          <a:noFill/>
+          <a:ln/>
+        </p:spPr>
+        <p:txBody>
+          <a:bodyPr wrap="square" lIns="0" tIns="0" rIns="0" bIns="0" rtlCol="0" anchor="ctr"/>
+          <a:lstStyle/>
+          <a:p>
+            <a:pPr marL="0" indent="0" algn="l">
+              <a:buNone/>
+            </a:pPr>
+            <a:r>
+              <a:rPr lang="en-US" sz="1200" b="1" kern="0" spc="100" dirty="0">
+                <a:solidFill>
+                  <a:schemeClr val="accent5"/>
+                </a:solidFill>
+                <a:latin typeface="Courier New" pitchFamily="34" charset="0"/>
+                <a:ea typeface="Courier New" pitchFamily="34" charset="-122"/>
+                <a:cs typeface="Courier New" pitchFamily="34" charset="-120"/>
+              </a:rPr>
+              <a:t>НЕ ВЛЕГУВА</a:t>
+            </a:r>
+            <a:endParaRPr lang="en-US" sz="1200" dirty="0"/>
+          </a:p>
+        </p:txBody>
+      </p:sp>
+      <p:pic>
+        <p:nvPicPr>
+          <p:cNvPr id="16" name="icon-185" descr="preencoded.png"/>
           <p:cNvPicPr>
             <a:picLocks noChangeAspect="1"/>
           </p:cNvPicPr>
@@ -9237,7 +9657,7 @@
         </p:blipFill>
         <p:spPr>
           <a:xfrm>
-            <a:off x="548640" y="3867912"/>
+            <a:off x="6766560" y="2359152"/>
             <a:ext cx="274320" cy="274320"/>
           </a:xfrm>
           <a:prstGeom prst="rect">
@@ -9247,14 +9667,14 @@
       </p:pic>
       <p:sp>
         <p:nvSpPr>
-          <p:cNvPr id="12" name="text-181"/>
+          <p:cNvPr id="17" name="text-186"/>
           <p:cNvSpPr txBox="1"/>
           <p:nvPr/>
         </p:nvSpPr>
         <p:spPr>
           <a:xfrm>
-            <a:off x="1005840" y="3794760"/>
-            <a:ext cx="5120640" cy="420624"/>
+            <a:off x="7223760" y="2286000"/>
+            <a:ext cx="4572000" cy="420624"/>
           </a:xfrm>
           <a:prstGeom prst="rect">
             <a:avLst/>
@@ -9266,16 +9686,16 @@
           <a:bodyPr wrap="square" lIns="0" tIns="0" rIns="0" bIns="0" rtlCol="0" anchor="ctr"/>
           <a:lstStyle/>
           <a:p>
-            <a:pPr indent="0" marL="0">
-              <a:buNone/>
-            </a:pPr>
-            <a:r>
-              <a:rPr lang="en-US" sz="1900" dirty="0">
-                <a:solidFill>
-                  <a:schemeClr val="bg1"/>
-                </a:solidFill>
-              </a:rPr>
-              <a:t>Метрики · логови · traces</a:t>
+            <a:pPr marL="0" indent="0">
+              <a:buNone/>
+            </a:pPr>
+            <a:r>
+              <a:rPr lang="en-US" sz="1900" strike="sngStrike" dirty="0">
+                <a:solidFill>
+                  <a:schemeClr val="accent5"/>
+                </a:solidFill>
+              </a:rPr>
+              <a:t>Посебна база по сервис</a:t>
             </a:r>
             <a:endParaRPr lang="en-US" sz="1900" dirty="0"/>
           </a:p>
@@ -9283,21 +9703,21 @@
       </p:sp>
       <p:pic>
         <p:nvPicPr>
-          <p:cNvPr id="13" name="icon-182" descr="preencoded.png">    </p:cNvPr>
+          <p:cNvPr id="18" name="icon-187" descr="preencoded.png"/>
           <p:cNvPicPr>
             <a:picLocks noChangeAspect="1"/>
           </p:cNvPicPr>
           <p:nvPr/>
         </p:nvPicPr>
         <p:blipFill>
-          <a:blip r:embed="rId5"/>
+          <a:blip r:embed="rId4"/>
           <a:stretch>
             <a:fillRect/>
           </a:stretch>
         </p:blipFill>
         <p:spPr>
           <a:xfrm>
-            <a:off x="548640" y="4370832"/>
+            <a:off x="6766560" y="2862072"/>
             <a:ext cx="274320" cy="274320"/>
           </a:xfrm>
           <a:prstGeom prst="rect">
@@ -9307,14 +9727,14 @@
       </p:pic>
       <p:sp>
         <p:nvSpPr>
-          <p:cNvPr id="14" name="text-183"/>
+          <p:cNvPr id="19" name="text-188"/>
           <p:cNvSpPr txBox="1"/>
           <p:nvPr/>
         </p:nvSpPr>
         <p:spPr>
           <a:xfrm>
-            <a:off x="1005840" y="4297680"/>
-            <a:ext cx="5120640" cy="420624"/>
+            <a:off x="7223760" y="2788920"/>
+            <a:ext cx="4572000" cy="420624"/>
           </a:xfrm>
           <a:prstGeom prst="rect">
             <a:avLst/>
@@ -9326,77 +9746,38 @@
           <a:bodyPr wrap="square" lIns="0" tIns="0" rIns="0" bIns="0" rtlCol="0" anchor="ctr"/>
           <a:lstStyle/>
           <a:p>
-            <a:pPr indent="0" marL="0">
-              <a:buNone/>
-            </a:pPr>
-            <a:r>
-              <a:rPr lang="en-US" sz="1900" dirty="0">
-                <a:solidFill>
-                  <a:schemeClr val="bg1"/>
-                </a:solidFill>
-              </a:rPr>
-              <a:t>Мерења со k6 и Chaos Mesh</a:t>
+            <a:pPr marL="0" indent="0">
+              <a:buNone/>
+            </a:pPr>
+            <a:r>
+              <a:rPr lang="en-US" sz="1900" strike="sngStrike" dirty="0">
+                <a:solidFill>
+                  <a:schemeClr val="accent5"/>
+                </a:solidFill>
+              </a:rPr>
+              <a:t>Service mesh</a:t>
             </a:r>
             <a:endParaRPr lang="en-US" sz="1900" dirty="0"/>
-          </a:p>
-        </p:txBody>
-      </p:sp>
-      <p:sp>
-        <p:nvSpPr>
-          <p:cNvPr id="15" name="text-184"/>
-          <p:cNvSpPr txBox="1"/>
-          <p:nvPr/>
-        </p:nvSpPr>
-        <p:spPr>
-          <a:xfrm>
-            <a:off x="6766560" y="1828800"/>
-            <a:ext cx="4572000" cy="274320"/>
-          </a:xfrm>
-          <a:prstGeom prst="rect">
-            <a:avLst/>
-          </a:prstGeom>
-          <a:noFill/>
-          <a:ln/>
-        </p:spPr>
-        <p:txBody>
-          <a:bodyPr wrap="square" lIns="0" tIns="0" rIns="0" bIns="0" rtlCol="0" anchor="ctr"/>
-          <a:lstStyle/>
-          <a:p>
-            <a:pPr algn="l" indent="0" marL="0">
-              <a:buNone/>
-            </a:pPr>
-            <a:r>
-              <a:rPr lang="en-US" sz="1200" b="1" spc="100" kern="0" dirty="0">
-                <a:solidFill>
-                  <a:schemeClr val="accent5"/>
-                </a:solidFill>
-                <a:latin typeface="Courier New" pitchFamily="34" charset="0"/>
-                <a:ea typeface="Courier New" pitchFamily="34" charset="-122"/>
-                <a:cs typeface="Courier New" pitchFamily="34" charset="-120"/>
-              </a:rPr>
-              <a:t>НЕ ВЛЕГУВА</a:t>
-            </a:r>
-            <a:endParaRPr lang="en-US" sz="1200" dirty="0"/>
           </a:p>
         </p:txBody>
       </p:sp>
       <p:pic>
         <p:nvPicPr>
-          <p:cNvPr id="16" name="icon-185" descr="preencoded.png">    </p:cNvPr>
+          <p:cNvPr id="20" name="icon-189" descr="preencoded.png"/>
           <p:cNvPicPr>
             <a:picLocks noChangeAspect="1"/>
           </p:cNvPicPr>
           <p:nvPr/>
         </p:nvPicPr>
         <p:blipFill>
-          <a:blip r:embed="rId6"/>
+          <a:blip r:embed="rId4"/>
           <a:stretch>
             <a:fillRect/>
           </a:stretch>
         </p:blipFill>
         <p:spPr>
           <a:xfrm>
-            <a:off x="6766560" y="2359152"/>
+            <a:off x="6766560" y="3364992"/>
             <a:ext cx="274320" cy="274320"/>
           </a:xfrm>
           <a:prstGeom prst="rect">
@@ -9406,13 +9787,13 @@
       </p:pic>
       <p:sp>
         <p:nvSpPr>
-          <p:cNvPr id="17" name="text-186"/>
+          <p:cNvPr id="21" name="text-190"/>
           <p:cNvSpPr txBox="1"/>
           <p:nvPr/>
         </p:nvSpPr>
         <p:spPr>
           <a:xfrm>
-            <a:off x="7223760" y="2286000"/>
+            <a:off x="7223760" y="3291840"/>
             <a:ext cx="4572000" cy="420624"/>
           </a:xfrm>
           <a:prstGeom prst="rect">
@@ -9425,7 +9806,7 @@
           <a:bodyPr wrap="square" lIns="0" tIns="0" rIns="0" bIns="0" rtlCol="0" anchor="ctr"/>
           <a:lstStyle/>
           <a:p>
-            <a:pPr indent="0" marL="0">
+            <a:pPr marL="0" indent="0">
               <a:buNone/>
             </a:pPr>
             <a:r>
@@ -9434,7 +9815,7 @@
                   <a:schemeClr val="accent5"/>
                 </a:solidFill>
               </a:rPr>
-              <a:t>Посебна база по сервис</a:t>
+              <a:t>Хостинг во облак</a:t>
             </a:r>
             <a:endParaRPr lang="en-US" sz="1900" dirty="0"/>
           </a:p>
@@ -9442,140 +9823,20 @@
       </p:sp>
       <p:pic>
         <p:nvPicPr>
-          <p:cNvPr id="18" name="icon-187" descr="preencoded.png">    </p:cNvPr>
+          <p:cNvPr id="22" name="icon-191" descr="preencoded.png"/>
           <p:cNvPicPr>
             <a:picLocks noChangeAspect="1"/>
           </p:cNvPicPr>
           <p:nvPr/>
         </p:nvPicPr>
         <p:blipFill>
-          <a:blip r:embed="rId7"/>
+          <a:blip r:embed="rId4"/>
           <a:stretch>
             <a:fillRect/>
           </a:stretch>
         </p:blipFill>
         <p:spPr>
           <a:xfrm>
-            <a:off x="6766560" y="2862072"/>
-            <a:ext cx="274320" cy="274320"/>
-          </a:xfrm>
-          <a:prstGeom prst="rect">
-            <a:avLst/>
-          </a:prstGeom>
-        </p:spPr>
-      </p:pic>
-      <p:sp>
-        <p:nvSpPr>
-          <p:cNvPr id="19" name="text-188"/>
-          <p:cNvSpPr txBox="1"/>
-          <p:nvPr/>
-        </p:nvSpPr>
-        <p:spPr>
-          <a:xfrm>
-            <a:off x="7223760" y="2788920"/>
-            <a:ext cx="4572000" cy="420624"/>
-          </a:xfrm>
-          <a:prstGeom prst="rect">
-            <a:avLst/>
-          </a:prstGeom>
-          <a:noFill/>
-          <a:ln/>
-        </p:spPr>
-        <p:txBody>
-          <a:bodyPr wrap="square" lIns="0" tIns="0" rIns="0" bIns="0" rtlCol="0" anchor="ctr"/>
-          <a:lstStyle/>
-          <a:p>
-            <a:pPr indent="0" marL="0">
-              <a:buNone/>
-            </a:pPr>
-            <a:r>
-              <a:rPr lang="en-US" sz="1900" strike="sngStrike" dirty="0">
-                <a:solidFill>
-                  <a:schemeClr val="accent5"/>
-                </a:solidFill>
-              </a:rPr>
-              <a:t>Service mesh</a:t>
-            </a:r>
-            <a:endParaRPr lang="en-US" sz="1900" dirty="0"/>
-          </a:p>
-        </p:txBody>
-      </p:sp>
-      <p:pic>
-        <p:nvPicPr>
-          <p:cNvPr id="20" name="icon-189" descr="preencoded.png">    </p:cNvPr>
-          <p:cNvPicPr>
-            <a:picLocks noChangeAspect="1"/>
-          </p:cNvPicPr>
-          <p:nvPr/>
-        </p:nvPicPr>
-        <p:blipFill>
-          <a:blip r:embed="rId8"/>
-          <a:stretch>
-            <a:fillRect/>
-          </a:stretch>
-        </p:blipFill>
-        <p:spPr>
-          <a:xfrm>
-            <a:off x="6766560" y="3364992"/>
-            <a:ext cx="274320" cy="274320"/>
-          </a:xfrm>
-          <a:prstGeom prst="rect">
-            <a:avLst/>
-          </a:prstGeom>
-        </p:spPr>
-      </p:pic>
-      <p:sp>
-        <p:nvSpPr>
-          <p:cNvPr id="21" name="text-190"/>
-          <p:cNvSpPr txBox="1"/>
-          <p:nvPr/>
-        </p:nvSpPr>
-        <p:spPr>
-          <a:xfrm>
-            <a:off x="7223760" y="3291840"/>
-            <a:ext cx="4572000" cy="420624"/>
-          </a:xfrm>
-          <a:prstGeom prst="rect">
-            <a:avLst/>
-          </a:prstGeom>
-          <a:noFill/>
-          <a:ln/>
-        </p:spPr>
-        <p:txBody>
-          <a:bodyPr wrap="square" lIns="0" tIns="0" rIns="0" bIns="0" rtlCol="0" anchor="ctr"/>
-          <a:lstStyle/>
-          <a:p>
-            <a:pPr indent="0" marL="0">
-              <a:buNone/>
-            </a:pPr>
-            <a:r>
-              <a:rPr lang="en-US" sz="1900" strike="sngStrike" dirty="0">
-                <a:solidFill>
-                  <a:schemeClr val="accent5"/>
-                </a:solidFill>
-              </a:rPr>
-              <a:t>Хостинг во облак</a:t>
-            </a:r>
-            <a:endParaRPr lang="en-US" sz="1900" dirty="0"/>
-          </a:p>
-        </p:txBody>
-      </p:sp>
-      <p:pic>
-        <p:nvPicPr>
-          <p:cNvPr id="22" name="icon-191" descr="preencoded.png">    </p:cNvPr>
-          <p:cNvPicPr>
-            <a:picLocks noChangeAspect="1"/>
-          </p:cNvPicPr>
-          <p:nvPr/>
-        </p:nvPicPr>
-        <p:blipFill>
-          <a:blip r:embed="rId9"/>
-          <a:stretch>
-            <a:fillRect/>
-          </a:stretch>
-        </p:blipFill>
-        <p:spPr>
-          <a:xfrm>
             <a:off x="6766560" y="3867912"/>
             <a:ext cx="274320" cy="274320"/>
           </a:xfrm>
@@ -9605,7 +9866,7 @@
           <a:bodyPr wrap="square" lIns="0" tIns="0" rIns="0" bIns="0" rtlCol="0" anchor="ctr"/>
           <a:lstStyle/>
           <a:p>
-            <a:pPr indent="0" marL="0">
+            <a:pPr marL="0" indent="0">
               <a:buNone/>
             </a:pPr>
             <a:r>
@@ -9642,95 +9903,17 @@
             <a:prstDash val="solid"/>
           </a:ln>
         </p:spPr>
-      </p:sp>
-      <p:sp>
-        <p:nvSpPr>
-          <p:cNvPr id="25" name="icon-bg-193"/>
-          <p:cNvSpPr/>
-          <p:nvPr/>
-        </p:nvSpPr>
-        <p:spPr>
-          <a:xfrm>
-            <a:off x="548640" y="5166360"/>
-            <a:ext cx="548640" cy="548640"/>
-          </a:xfrm>
-          <a:prstGeom prst="ellipse">
-            <a:avLst/>
-          </a:prstGeom>
-          <a:solidFill>
-            <a:schemeClr val="accent6">
-              <a:alpha val="18000"/>
-            </a:schemeClr>
-          </a:solidFill>
-          <a:ln/>
-        </p:spPr>
-      </p:sp>
-      <p:pic>
-        <p:nvPicPr>
-          <p:cNvPr id="26" name="icon-194" descr="preencoded.png">    </p:cNvPr>
-          <p:cNvPicPr>
-            <a:picLocks noChangeAspect="1"/>
-          </p:cNvPicPr>
-          <p:nvPr/>
-        </p:nvPicPr>
-        <p:blipFill>
-          <a:blip r:embed="rId10"/>
-          <a:stretch>
-            <a:fillRect/>
-          </a:stretch>
-        </p:blipFill>
-        <p:spPr>
-          <a:xfrm>
-            <a:off x="691286" y="5309006"/>
-            <a:ext cx="263347" cy="263347"/>
-          </a:xfrm>
-          <a:prstGeom prst="rect">
-            <a:avLst/>
-          </a:prstGeom>
-        </p:spPr>
-      </p:pic>
-      <p:sp>
-        <p:nvSpPr>
-          <p:cNvPr id="27" name="text-195"/>
-          <p:cNvSpPr txBox="1"/>
-          <p:nvPr/>
-        </p:nvSpPr>
-        <p:spPr>
-          <a:xfrm>
-            <a:off x="1371600" y="5120640"/>
-            <a:ext cx="10271455" cy="640080"/>
-          </a:xfrm>
-          <a:prstGeom prst="rect">
-            <a:avLst/>
-          </a:prstGeom>
-          <a:noFill/>
-          <a:ln/>
-        </p:spPr>
-        <p:txBody>
-          <a:bodyPr wrap="square" lIns="0" tIns="0" rIns="0" bIns="0" rtlCol="0" anchor="ctr"/>
-          <a:lstStyle/>
-          <a:p>
-            <a:pPr indent="0" marL="0">
-              <a:buNone/>
-            </a:pPr>
-            <a:r>
-              <a:rPr lang="en-US" sz="2000" i="1" dirty="0">
-                <a:solidFill>
-                  <a:schemeClr val="bg1"/>
-                </a:solidFill>
-                <a:latin typeface="+mj-lt" pitchFamily="34" charset="0"/>
-                <a:ea typeface="+mj-lt" pitchFamily="34" charset="-122"/>
-                <a:cs typeface="+mj-lt" pitchFamily="34" charset="-120"/>
-              </a:rPr>
-              <a:t>Ако темата ви е во ред — следуваат доградбата, мерењата и пишувањето.</a:t>
-            </a:r>
-            <a:endParaRPr lang="en-US" sz="2000" dirty="0"/>
-          </a:p>
-        </p:txBody>
-      </p:sp>
-      <p:sp>
-        <p:nvSpPr>
-          <p:cNvPr id="25" name="Slide Number Placeholder 0"/>
+        <p:txBody>
+          <a:bodyPr/>
+          <a:lstStyle/>
+          <a:p>
+            <a:endParaRPr lang="LID4096"/>
+          </a:p>
+        </p:txBody>
+      </p:sp>
+      <p:sp>
+        <p:nvSpPr>
+          <p:cNvPr id="28" name="Slide Number Placeholder 0"/>
           <p:cNvSpPr>
             <a:spLocks noGrp="1"/>
           </p:cNvSpPr>
@@ -9748,7 +9931,7 @@
           </a:prstGeom>
           <a:extLst>
             <a:ext uri="{C572A759-6A51-4108-AA02-DFA0A04FC94B}">
-              <ma14:wrappingTextBoxFlag xmlns:ma14="http://schemas.microsoft.com/office/mac/drawingml/2011/main" val="0"/>
+              <ma14:wrappingTextBoxFlag xmlns:ma14="http://schemas.microsoft.com/office/mac/drawingml/2011/main" xmlns="" val="0"/>
             </a:ext>
           </a:extLst>
         </p:spPr>
@@ -9769,7 +9952,7 @@
           <a:p>
             <a:pPr algn="r"/>
             <a:fld id="{F7021451-1387-4CA6-816F-3879F97B5CBC}" type="slidenum">
-              <a:rPr b="0" lang="en-US"/>
+              <a:rPr lang="en-US" b="0"/>
               <a:t>7</a:t>
             </a:fld>
             <a:endParaRPr lang="en-US"/>
@@ -10077,4 +10260,319 @@
     </a:ext>
   </a:extLst>
 </a:theme>
+</file>
+
+<file path=ppt/theme/theme2.xml><?xml version="1.0" encoding="utf-8"?>
+<a:theme xmlns:a="http://schemas.openxmlformats.org/drawingml/2006/main" name="Office Theme">
+  <a:themeElements>
+    <a:clrScheme name="Office">
+      <a:dk1>
+        <a:sysClr val="windowText" lastClr="000000"/>
+      </a:dk1>
+      <a:lt1>
+        <a:sysClr val="window" lastClr="FFFFFF"/>
+      </a:lt1>
+      <a:dk2>
+        <a:srgbClr val="0E2841"/>
+      </a:dk2>
+      <a:lt2>
+        <a:srgbClr val="E8E8E8"/>
+      </a:lt2>
+      <a:accent1>
+        <a:srgbClr val="156082"/>
+      </a:accent1>
+      <a:accent2>
+        <a:srgbClr val="E97132"/>
+      </a:accent2>
+      <a:accent3>
+        <a:srgbClr val="196B24"/>
+      </a:accent3>
+      <a:accent4>
+        <a:srgbClr val="0F9ED5"/>
+      </a:accent4>
+      <a:accent5>
+        <a:srgbClr val="A02B93"/>
+      </a:accent5>
+      <a:accent6>
+        <a:srgbClr val="4EA72E"/>
+      </a:accent6>
+      <a:hlink>
+        <a:srgbClr val="467886"/>
+      </a:hlink>
+      <a:folHlink>
+        <a:srgbClr val="96607D"/>
+      </a:folHlink>
+    </a:clrScheme>
+    <a:fontScheme name="Office">
+      <a:majorFont>
+        <a:latin typeface="Aptos Display" panose="02110004020202020204"/>
+        <a:ea typeface=""/>
+        <a:cs typeface=""/>
+        <a:font script="Jpan" typeface="游ゴシック Light"/>
+        <a:font script="Hang" typeface="맑은 고딕"/>
+        <a:font script="Hans" typeface="等线 Light"/>
+        <a:font script="Hant" typeface="新細明體"/>
+        <a:font script="Arab" typeface="Times New Roman"/>
+        <a:font script="Hebr" typeface="Times New Roman"/>
+        <a:font script="Thai" typeface="Angsana New"/>
+        <a:font script="Ethi" typeface="Nyala"/>
+        <a:font script="Beng" typeface="Vrinda"/>
+        <a:font script="Gujr" typeface="Shruti"/>
+        <a:font script="Khmr" typeface="MoolBoran"/>
+        <a:font script="Knda" typeface="Tunga"/>
+        <a:font script="Guru" typeface="Raavi"/>
+        <a:font script="Cans" typeface="Euphemia"/>
+        <a:font script="Cher" typeface="Plantagenet Cherokee"/>
+        <a:font script="Yiii" typeface="Microsoft Yi Baiti"/>
+        <a:font script="Tibt" typeface="Microsoft Himalaya"/>
+        <a:font script="Thaa" typeface="MV Boli"/>
+        <a:font script="Deva" typeface="Mangal"/>
+        <a:font script="Telu" typeface="Gautami"/>
+        <a:font script="Taml" typeface="Latha"/>
+        <a:font script="Syrc" typeface="Estrangelo Edessa"/>
+        <a:font script="Orya" typeface="Kalinga"/>
+        <a:font script="Mlym" typeface="Kartika"/>
+        <a:font script="Laoo" typeface="DokChampa"/>
+        <a:font script="Sinh" typeface="Iskoola Pota"/>
+        <a:font script="Mong" typeface="Mongolian Baiti"/>
+        <a:font script="Viet" typeface="Times New Roman"/>
+        <a:font script="Uigh" typeface="Microsoft Uighur"/>
+        <a:font script="Geor" typeface="Sylfaen"/>
+        <a:font script="Armn" typeface="Arial"/>
+        <a:font script="Bugi" typeface="Leelawadee UI"/>
+        <a:font script="Bopo" typeface="Microsoft JhengHei"/>
+        <a:font script="Java" typeface="Javanese Text"/>
+        <a:font script="Lisu" typeface="Segoe UI"/>
+        <a:font script="Mymr" typeface="Myanmar Text"/>
+        <a:font script="Nkoo" typeface="Ebrima"/>
+        <a:font script="Olck" typeface="Nirmala UI"/>
+        <a:font script="Osma" typeface="Ebrima"/>
+        <a:font script="Phag" typeface="Phagspa"/>
+        <a:font script="Syrn" typeface="Estrangelo Edessa"/>
+        <a:font script="Syrj" typeface="Estrangelo Edessa"/>
+        <a:font script="Syre" typeface="Estrangelo Edessa"/>
+        <a:font script="Sora" typeface="Nirmala UI"/>
+        <a:font script="Tale" typeface="Microsoft Tai Le"/>
+        <a:font script="Talu" typeface="Microsoft New Tai Lue"/>
+        <a:font script="Tfng" typeface="Ebrima"/>
+      </a:majorFont>
+      <a:minorFont>
+        <a:latin typeface="Aptos" panose="02110004020202020204"/>
+        <a:ea typeface=""/>
+        <a:cs typeface=""/>
+        <a:font script="Jpan" typeface="游ゴシック"/>
+        <a:font script="Hang" typeface="맑은 고딕"/>
+        <a:font script="Hans" typeface="等线"/>
+        <a:font script="Hant" typeface="新細明體"/>
+        <a:font script="Arab" typeface="Arial"/>
+        <a:font script="Hebr" typeface="Arial"/>
+        <a:font script="Thai" typeface="Cordia New"/>
+        <a:font script="Ethi" typeface="Nyala"/>
+        <a:font script="Beng" typeface="Vrinda"/>
+        <a:font script="Gujr" typeface="Shruti"/>
+        <a:font script="Khmr" typeface="DaunPenh"/>
+        <a:font script="Knda" typeface="Tunga"/>
+        <a:font script="Guru" typeface="Raavi"/>
+        <a:font script="Cans" typeface="Euphemia"/>
+        <a:font script="Cher" typeface="Plantagenet Cherokee"/>
+        <a:font script="Yiii" typeface="Microsoft Yi Baiti"/>
+        <a:font script="Tibt" typeface="Microsoft Himalaya"/>
+        <a:font script="Thaa" typeface="MV Boli"/>
+        <a:font script="Deva" typeface="Mangal"/>
+        <a:font script="Telu" typeface="Gautami"/>
+        <a:font script="Taml" typeface="Latha"/>
+        <a:font script="Syrc" typeface="Estrangelo Edessa"/>
+        <a:font script="Orya" typeface="Kalinga"/>
+        <a:font script="Mlym" typeface="Kartika"/>
+        <a:font script="Laoo" typeface="DokChampa"/>
+        <a:font script="Sinh" typeface="Iskoola Pota"/>
+        <a:font script="Mong" typeface="Mongolian Baiti"/>
+        <a:font script="Viet" typeface="Arial"/>
+        <a:font script="Uigh" typeface="Microsoft Uighur"/>
+        <a:font script="Geor" typeface="Sylfaen"/>
+        <a:font script="Armn" typeface="Arial"/>
+        <a:font script="Bugi" typeface="Leelawadee UI"/>
+        <a:font script="Bopo" typeface="Microsoft JhengHei"/>
+        <a:font script="Java" typeface="Javanese Text"/>
+        <a:font script="Lisu" typeface="Segoe UI"/>
+        <a:font script="Mymr" typeface="Myanmar Text"/>
+        <a:font script="Nkoo" typeface="Ebrima"/>
+        <a:font script="Olck" typeface="Nirmala UI"/>
+        <a:font script="Osma" typeface="Ebrima"/>
+        <a:font script="Phag" typeface="Phagspa"/>
+        <a:font script="Syrn" typeface="Estrangelo Edessa"/>
+        <a:font script="Syrj" typeface="Estrangelo Edessa"/>
+        <a:font script="Syre" typeface="Estrangelo Edessa"/>
+        <a:font script="Sora" typeface="Nirmala UI"/>
+        <a:font script="Tale" typeface="Microsoft Tai Le"/>
+        <a:font script="Talu" typeface="Microsoft New Tai Lue"/>
+        <a:font script="Tfng" typeface="Ebrima"/>
+      </a:minorFont>
+    </a:fontScheme>
+    <a:fmtScheme name="Office">
+      <a:fillStyleLst>
+        <a:solidFill>
+          <a:schemeClr val="phClr"/>
+        </a:solidFill>
+        <a:gradFill rotWithShape="1">
+          <a:gsLst>
+            <a:gs pos="0">
+              <a:schemeClr val="phClr">
+                <a:lumMod val="110000"/>
+                <a:satMod val="105000"/>
+                <a:tint val="67000"/>
+              </a:schemeClr>
+            </a:gs>
+            <a:gs pos="50000">
+              <a:schemeClr val="phClr">
+                <a:lumMod val="105000"/>
+                <a:satMod val="103000"/>
+                <a:tint val="73000"/>
+              </a:schemeClr>
+            </a:gs>
+            <a:gs pos="100000">
+              <a:schemeClr val="phClr">
+                <a:lumMod val="105000"/>
+                <a:satMod val="109000"/>
+                <a:tint val="81000"/>
+              </a:schemeClr>
+            </a:gs>
+          </a:gsLst>
+          <a:lin ang="5400000" scaled="0"/>
+        </a:gradFill>
+        <a:gradFill rotWithShape="1">
+          <a:gsLst>
+            <a:gs pos="0">
+              <a:schemeClr val="phClr">
+                <a:satMod val="103000"/>
+                <a:lumMod val="102000"/>
+                <a:tint val="94000"/>
+              </a:schemeClr>
+            </a:gs>
+            <a:gs pos="50000">
+              <a:schemeClr val="phClr">
+                <a:satMod val="110000"/>
+                <a:lumMod val="100000"/>
+                <a:shade val="100000"/>
+              </a:schemeClr>
+            </a:gs>
+            <a:gs pos="100000">
+              <a:schemeClr val="phClr">
+                <a:lumMod val="99000"/>
+                <a:satMod val="120000"/>
+                <a:shade val="78000"/>
+              </a:schemeClr>
+            </a:gs>
+          </a:gsLst>
+          <a:lin ang="5400000" scaled="0"/>
+        </a:gradFill>
+      </a:fillStyleLst>
+      <a:lnStyleLst>
+        <a:ln w="12700" cap="flat" cmpd="sng" algn="ctr">
+          <a:solidFill>
+            <a:schemeClr val="phClr"/>
+          </a:solidFill>
+          <a:prstDash val="solid"/>
+          <a:miter lim="800000"/>
+        </a:ln>
+        <a:ln w="19050" cap="flat" cmpd="sng" algn="ctr">
+          <a:solidFill>
+            <a:schemeClr val="phClr"/>
+          </a:solidFill>
+          <a:prstDash val="solid"/>
+          <a:miter lim="800000"/>
+        </a:ln>
+        <a:ln w="25400" cap="flat" cmpd="sng" algn="ctr">
+          <a:solidFill>
+            <a:schemeClr val="phClr"/>
+          </a:solidFill>
+          <a:prstDash val="solid"/>
+          <a:miter lim="800000"/>
+        </a:ln>
+      </a:lnStyleLst>
+      <a:effectStyleLst>
+        <a:effectStyle>
+          <a:effectLst/>
+        </a:effectStyle>
+        <a:effectStyle>
+          <a:effectLst/>
+        </a:effectStyle>
+        <a:effectStyle>
+          <a:effectLst>
+            <a:outerShdw blurRad="57150" dist="19050" dir="5400000" algn="ctr" rotWithShape="0">
+              <a:srgbClr val="000000">
+                <a:alpha val="63000"/>
+              </a:srgbClr>
+            </a:outerShdw>
+          </a:effectLst>
+        </a:effectStyle>
+      </a:effectStyleLst>
+      <a:bgFillStyleLst>
+        <a:solidFill>
+          <a:schemeClr val="phClr"/>
+        </a:solidFill>
+        <a:solidFill>
+          <a:schemeClr val="phClr">
+            <a:tint val="95000"/>
+            <a:satMod val="170000"/>
+          </a:schemeClr>
+        </a:solidFill>
+        <a:gradFill rotWithShape="1">
+          <a:gsLst>
+            <a:gs pos="0">
+              <a:schemeClr val="phClr">
+                <a:tint val="93000"/>
+                <a:satMod val="150000"/>
+                <a:shade val="98000"/>
+                <a:lumMod val="102000"/>
+              </a:schemeClr>
+            </a:gs>
+            <a:gs pos="50000">
+              <a:schemeClr val="phClr">
+                <a:tint val="98000"/>
+                <a:satMod val="130000"/>
+                <a:shade val="90000"/>
+                <a:lumMod val="103000"/>
+              </a:schemeClr>
+            </a:gs>
+            <a:gs pos="100000">
+              <a:schemeClr val="phClr">
+                <a:shade val="63000"/>
+                <a:satMod val="120000"/>
+              </a:schemeClr>
+            </a:gs>
+          </a:gsLst>
+          <a:lin ang="5400000" scaled="0"/>
+        </a:gradFill>
+      </a:bgFillStyleLst>
+    </a:fmtScheme>
+  </a:themeElements>
+  <a:objectDefaults>
+    <a:lnDef>
+      <a:spPr/>
+      <a:bodyPr/>
+      <a:lstStyle/>
+      <a:style>
+        <a:lnRef idx="2">
+          <a:schemeClr val="accent1"/>
+        </a:lnRef>
+        <a:fillRef idx="0">
+          <a:schemeClr val="accent1"/>
+        </a:fillRef>
+        <a:effectRef idx="1">
+          <a:schemeClr val="accent1"/>
+        </a:effectRef>
+        <a:fontRef idx="minor">
+          <a:schemeClr val="tx1"/>
+        </a:fontRef>
+      </a:style>
+    </a:lnDef>
+  </a:objectDefaults>
+  <a:extraClrSchemeLst/>
+  <a:extLst>
+    <a:ext uri="{05A4C25C-085E-4340-85A3-A5531E510DB2}">
+      <thm15:themeFamily xmlns:thm15="http://schemas.microsoft.com/office/thememl/2012/main" name="Office Theme" id="{2E142A2C-CD16-42D6-873A-C26D2A0506FA}" vid="{1BDDFF52-6CD6-40A5-AB3C-68EB2F1E4D0A}"/>
+    </a:ext>
+  </a:extLst>
+</a:theme>
 </file>
--- a/docs/predlog.pptx
+++ b/docs/predlog.pptx
@@ -4,9 +4,6 @@
   <p:sldMasterIdLst>
     <p:sldMasterId id="2147483648" r:id="rId1"/>
   </p:sldMasterIdLst>
-  <p:notesMasterIdLst>
-    <p:notesMasterId r:id="rId9"/>
-  </p:notesMasterIdLst>
   <p:sldIdLst>
     <p:sldId id="256" r:id="rId2"/>
     <p:sldId id="257" r:id="rId3"/>
@@ -16,6 +13,9 @@
     <p:sldId id="261" r:id="rId7"/>
     <p:sldId id="262" r:id="rId8"/>
   </p:sldIdLst>
+  <p:notesMasterIdLst>
+    <p:notesMasterId r:id="rId9"/>
+  </p:notesMasterIdLst>
   <p:sldSz cx="12192000" cy="6858000"/>
   <p:notesSz cx="6858000" cy="12192000"/>
   <p:defaultTextStyle>
@@ -113,7 +113,7 @@
   <p:extLst>
     <p:ext uri="{521415D9-36F7-43E2-AB2F-B90AF26B5E84}">
       <p14:sectionLst xmlns:p14="http://schemas.microsoft.com/office/powerpoint/2010/main">
-        <p14:section name="Предлог" id="{2326CED4-C589-00DA-34A0-3FD94411A74A}">
+        <p14:section name="Предлог" id="{304ad869-64d6-8dbf-131d-cffc214c0afd}">
           <p14:sldIdLst>
             <p14:sldId id="256"/>
             <p14:sldId id="257"/>
@@ -155,10 +155,234 @@
           <a:chExt cx="0" cy="0"/>
         </a:xfrm>
       </p:grpSpPr>
+      <p:sp>
+        <p:nvSpPr>
+          <p:cNvPr id="2" name="Header Placeholder 1"/>
+          <p:cNvSpPr>
+            <a:spLocks noGrp="1"/>
+          </p:cNvSpPr>
+          <p:nvPr>
+            <p:ph type="hdr" sz="quarter"/>
+          </p:nvPr>
+        </p:nvSpPr>
+        <p:spPr>
+          <a:xfrm>
+            <a:off x="0" y="0"/>
+            <a:ext cx="2971800" cy="458788"/>
+          </a:xfrm>
+          <a:prstGeom prst="rect">
+            <a:avLst/>
+          </a:prstGeom>
+        </p:spPr>
+        <p:txBody>
+          <a:bodyPr vert="horz" lIns="91440" tIns="45720" rIns="91440" bIns="45720" rtlCol="0"/>
+          <a:lstStyle>
+            <a:lvl1pPr algn="l">
+              <a:defRPr sz="1200"/>
+            </a:lvl1pPr>
+          </a:lstStyle>
+          <a:p>
+            <a:endParaRPr lang="en-US"/>
+          </a:p>
+        </p:txBody>
+      </p:sp>
+      <p:sp>
+        <p:nvSpPr>
+          <p:cNvPr id="3" name="Date Placeholder 2"/>
+          <p:cNvSpPr>
+            <a:spLocks noGrp="1"/>
+          </p:cNvSpPr>
+          <p:nvPr>
+            <p:ph type="dt" idx="1"/>
+          </p:nvPr>
+        </p:nvSpPr>
+        <p:spPr>
+          <a:xfrm>
+            <a:off x="3884613" y="0"/>
+            <a:ext cx="2971800" cy="458788"/>
+          </a:xfrm>
+          <a:prstGeom prst="rect">
+            <a:avLst/>
+          </a:prstGeom>
+        </p:spPr>
+        <p:txBody>
+          <a:bodyPr vert="horz" lIns="91440" tIns="45720" rIns="91440" bIns="45720" rtlCol="0"/>
+          <a:lstStyle>
+            <a:lvl1pPr algn="r">
+              <a:defRPr sz="1200"/>
+            </a:lvl1pPr>
+          </a:lstStyle>
+          <a:p>
+            <a:fld id="{5282F153-3F37-0F45-9E97-73ACFA13230C}" type="datetimeFigureOut">
+              <a:rPr lang="en-US"/>
+              <a:t>7/23/19</a:t>
+            </a:fld>
+            <a:endParaRPr lang="en-US"/>
+          </a:p>
+        </p:txBody>
+      </p:sp>
+      <p:sp>
+        <p:nvSpPr>
+          <p:cNvPr id="4" name="Slide Image Placeholder 3"/>
+          <p:cNvSpPr>
+            <a:spLocks noGrp="1" noRot="1" noChangeAspect="1"/>
+          </p:cNvSpPr>
+          <p:nvPr>
+            <p:ph type="sldImg" idx="2"/>
+          </p:nvPr>
+        </p:nvSpPr>
+        <p:spPr>
+          <a:xfrm>
+            <a:off x="685800" y="1143000"/>
+            <a:ext cx="5486400" cy="3086100"/>
+          </a:xfrm>
+          <a:prstGeom prst="rect">
+            <a:avLst/>
+          </a:prstGeom>
+          <a:noFill/>
+          <a:ln w="12700">
+            <a:solidFill>
+              <a:prstClr val="black"/>
+            </a:solidFill>
+          </a:ln>
+        </p:spPr>
+        <p:txBody>
+          <a:bodyPr vert="horz" lIns="91440" tIns="45720" rIns="91440" bIns="45720" rtlCol="0" anchor="ctr"/>
+          <a:lstStyle/>
+          <a:p>
+            <a:endParaRPr lang="en-US"/>
+          </a:p>
+        </p:txBody>
+      </p:sp>
+      <p:sp>
+        <p:nvSpPr>
+          <p:cNvPr id="5" name="Notes Placeholder 4"/>
+          <p:cNvSpPr>
+            <a:spLocks noGrp="1"/>
+          </p:cNvSpPr>
+          <p:nvPr>
+            <p:ph type="body" sz="quarter" idx="3"/>
+          </p:nvPr>
+        </p:nvSpPr>
+        <p:spPr>
+          <a:xfrm>
+            <a:off x="685800" y="4400550"/>
+            <a:ext cx="5486400" cy="3600450"/>
+          </a:xfrm>
+          <a:prstGeom prst="rect">
+            <a:avLst/>
+          </a:prstGeom>
+        </p:spPr>
+        <p:txBody>
+          <a:bodyPr vert="horz" lIns="91440" tIns="45720" rIns="91440" bIns="45720" rtlCol="0"/>
+          <a:lstStyle/>
+          <a:p>
+            <a:pPr lvl="0"/>
+            <a:r>
+              <a:rPr lang="en-US"/>
+              <a:t>Click to edit Master text styles</a:t>
+            </a:r>
+          </a:p>
+          <a:p>
+            <a:pPr lvl="1"/>
+            <a:r>
+              <a:rPr lang="en-US"/>
+              <a:t>Second level</a:t>
+            </a:r>
+          </a:p>
+          <a:p>
+            <a:pPr lvl="2"/>
+            <a:r>
+              <a:rPr lang="en-US"/>
+              <a:t>Third level</a:t>
+            </a:r>
+          </a:p>
+          <a:p>
+            <a:pPr lvl="3"/>
+            <a:r>
+              <a:rPr lang="en-US"/>
+              <a:t>Fourth level</a:t>
+            </a:r>
+          </a:p>
+          <a:p>
+            <a:pPr lvl="4"/>
+            <a:r>
+              <a:rPr lang="en-US"/>
+              <a:t>Fifth level</a:t>
+            </a:r>
+          </a:p>
+        </p:txBody>
+      </p:sp>
+      <p:sp>
+        <p:nvSpPr>
+          <p:cNvPr id="6" name="Footer Placeholder 5"/>
+          <p:cNvSpPr>
+            <a:spLocks noGrp="1"/>
+          </p:cNvSpPr>
+          <p:nvPr>
+            <p:ph type="ftr" sz="quarter" idx="4"/>
+          </p:nvPr>
+        </p:nvSpPr>
+        <p:spPr>
+          <a:xfrm>
+            <a:off x="0" y="8685213"/>
+            <a:ext cx="2971800" cy="458787"/>
+          </a:xfrm>
+          <a:prstGeom prst="rect">
+            <a:avLst/>
+          </a:prstGeom>
+        </p:spPr>
+        <p:txBody>
+          <a:bodyPr vert="horz" lIns="91440" tIns="45720" rIns="91440" bIns="45720" rtlCol="0" anchor="b"/>
+          <a:lstStyle>
+            <a:lvl1pPr algn="l">
+              <a:defRPr sz="1200"/>
+            </a:lvl1pPr>
+          </a:lstStyle>
+          <a:p>
+            <a:endParaRPr lang="en-US"/>
+          </a:p>
+        </p:txBody>
+      </p:sp>
+      <p:sp>
+        <p:nvSpPr>
+          <p:cNvPr id="7" name="Slide Number Placeholder 6"/>
+          <p:cNvSpPr>
+            <a:spLocks noGrp="1"/>
+          </p:cNvSpPr>
+          <p:nvPr>
+            <p:ph type="sldNum" sz="quarter" idx="5"/>
+          </p:nvPr>
+        </p:nvSpPr>
+        <p:spPr>
+          <a:xfrm>
+            <a:off x="3884613" y="8685213"/>
+            <a:ext cx="2971800" cy="458787"/>
+          </a:xfrm>
+          <a:prstGeom prst="rect">
+            <a:avLst/>
+          </a:prstGeom>
+        </p:spPr>
+        <p:txBody>
+          <a:bodyPr vert="horz" lIns="91440" tIns="45720" rIns="91440" bIns="45720" rtlCol="0" anchor="b"/>
+          <a:lstStyle>
+            <a:lvl1pPr algn="r">
+              <a:defRPr sz="1200"/>
+            </a:lvl1pPr>
+          </a:lstStyle>
+          <a:p>
+            <a:fld id="{CE5E9CC1-C706-0F49-92D6-E571CC5EEA8F}" type="slidenum">
+              <a:rPr lang="en-US"/>
+              <a:t>‹#›</a:t>
+            </a:fld>
+            <a:endParaRPr lang="en-US"/>
+          </a:p>
+        </p:txBody>
+      </p:sp>
     </p:spTree>
     <p:extLst>
       <p:ext uri="{BB962C8B-B14F-4D97-AF65-F5344CB8AC3E}">
-        <p14:creationId xmlns:p14="http://schemas.microsoft.com/office/powerpoint/2010/main" val="617829023"/>
+        <p14:creationId xmlns:p14="http://schemas.microsoft.com/office/powerpoint/2010/main" val="1024086991"/>
       </p:ext>
     </p:extLst>
   </p:cSld>
@@ -307,6 +531,7 @@
               <a:t>Добар ден. Предлагам дипломска работа на тема event-driven микросервиси со модерна оркестрација и observability.
 Во една реченица: имам постоечка монолитна апликација за огласи за автомобили. Ќе ја разделам на сервиси што комуницираат преку настани, ќе ја оркестрирам со Kubernetes, ќе ја направам набљудлива — и ќе ги измерам двете верзии една против друга.</a:t>
             </a:r>
+            <a:endParaRPr lang="en-US" dirty="0"/>
           </a:p>
         </p:txBody>
       </p:sp>
@@ -397,6 +622,7 @@
 Темата е изводлива: прототип веќе постои, а DevOps делот го претставив на предметот DevOps.
 Зошто да го пишувам истото повторно? Затоа што функционалноста ја знам, па можам да ги споредувам архитектурите наместо да учам нов домен.</a:t>
             </a:r>
+            <a:endParaRPr lang="en-US" dirty="0"/>
           </a:p>
         </p:txBody>
       </p:sp>
@@ -487,6 +713,7 @@
 Пример: огласот треба да го прикаже името на продавачот, но сервисот за огласи има само id. Наместо да го прашува сервисот за корисници секој пат — и да падне ако тој не работи — при регистрација добива настан и си чува своја копија. Цената е кратко доцнење, eventual consistency.
 Сè работи во Kubernetes, а Grafana покажува што се случува.</a:t>
             </a:r>
+            <a:endParaRPr lang="en-US" dirty="0"/>
           </a:p>
         </p:txBody>
       </p:sp>
@@ -578,6 +805,7 @@
 Мал relay потоа ги праќа пораките. Ако Kafka не работи, пораката чека; ништо не се губи, само доцни.
 А ако иста порака стигне двапати, примачот (inbox) памти што веќе обработил и не ја повторува.</a:t>
             </a:r>
+            <a:endParaRPr lang="en-US" dirty="0"/>
           </a:p>
         </p:txBody>
       </p:sp>
@@ -667,6 +895,7 @@
 Прво, испораката е автоматска: секој push поминува низ CI (тестови, build, Docker image), а ArgoCD го синхронизира Kubernetes кластерот со она што е запишано во Git — GitOps, без рачни чекори. Во кластерот: автоскалирање, health проби, мрежна изолација меѓу сервисите, Helm charts.
 Второ, системот е видлив. Асинхроните дефекти се тивки: API-то враќа 200, а настаните не течат. Затоа три столба преку OpenTelemetry — метрики во Prometheus, логови во Loki, traces во Tempo — а Grafana ги прикажува и алармира, на пример кога outbox престане да се празни.</a:t>
             </a:r>
+            <a:endParaRPr lang="en-US" dirty="0"/>
           </a:p>
         </p:txBody>
       </p:sp>
@@ -752,13 +981,15 @@
           <a:p>
             <a:r>
               <a:rPr lang="en-US" dirty="0"/>
-              <a:t>Не сакам да завршам со „еве, работи“. Четири проверки, секоја со бројка:
-1. Ја гасам Kafka среде операција (Chaos Mesh) — очекувам нула изгубени настани.
-2. Истиот настан го праќам двапати — очекувам едно известување, не две.
-3. Исто оптоварување со k6 врз монолитот и врз сервисите — p95 латенција, пропусност, CPU и меморија. Тоа е цената на дистрибуцијата.
-4. Убивам pod или прекинувам мрежа — колку брзо се јавува аларм и колку брзо ја наоѓам причината (MTTD).
+              <a:t>Не сакам да завршам со „еве, работи“, туку со експерименти што може да се повторат.
+Прво, ја гасам Kafka додека системот работи — ниту еден настан не смее да се изгуби.
+Второ, истиот настан го праќам двапати — корисникот смее да добие само едно известување.
+Трето, двете верзии, монолитот и сервисите, ги оптоварувам на ист начин и ги споредувам брзината и потрошувачката на ресурси. Тоа ја покажува цената на дистрибуцијата.
+Четврто, намерно рушам делови од системот и гледам колку брзо алармите и traces ме носат до причината.
+Алатки: Chaos Mesh за отказите, k6 за оптоварувањето, Grafana за мерењето.
 Придонесот на трудот е токму ова: истата апликација во две архитектури, со измерено однесување при оптоварување и при откази.</a:t>
             </a:r>
+            <a:endParaRPr lang="en-US" dirty="0"/>
           </a:p>
         </p:txBody>
       </p:sp>
@@ -854,6 +1085,7 @@
 Не е ли обемот преголем? Затоа кажувам што не влегува. Нема нова функционалност — само архитектура, инфраструктура и мерења.
 Зошто Kafka, а не REST повици? Со директен повик, ако другиот сервис е паднат, паѓа и моето барање. Со настани, барањето поминува.</a:t>
             </a:r>
+            <a:endParaRPr lang="en-US" dirty="0"/>
           </a:p>
         </p:txBody>
       </p:sp>
@@ -931,7 +1163,6 @@
         <a:solidFill>
           <a:schemeClr val="tx2"/>
         </a:solidFill>
-        <a:effectLst/>
       </p:bgPr>
     </p:bg>
     <p:spTree>
@@ -951,11 +1182,9 @@
       <p:sp>
         <p:nvSpPr>
           <p:cNvPr id="2" name="Text 0"/>
-          <p:cNvSpPr>
-            <a:spLocks noGrp="1"/>
-          </p:cNvSpPr>
+          <p:cNvSpPr/>
           <p:nvPr>
-            <p:ph type="body" idx="100" hasCustomPrompt="1"/>
+            <p:ph idx="100" type="body" hasCustomPrompt="1"/>
           </p:nvPr>
         </p:nvSpPr>
         <p:spPr>
@@ -972,9 +1201,9 @@
         <p:txBody>
           <a:bodyPr wrap="square" rtlCol="0"/>
           <a:lstStyle>
-            <a:lvl1pPr marL="0" indent="0">
-              <a:buNone/>
-              <a:defRPr lang="en-US" sz="1200" b="1" kern="0" spc="300" dirty="0">
+            <a:lvl1pPr indent="0" marL="0">
+              <a:buNone/>
+              <a:defRPr lang="en-US" sz="1200" b="1" spc="300" kern="0" dirty="0">
                 <a:solidFill>
                   <a:schemeClr val="accent6"/>
                 </a:solidFill>
@@ -985,7 +1214,7 @@
             </a:lvl1pPr>
           </a:lstStyle>
           <a:p>
-            <a:pPr marL="0" indent="0">
+            <a:pPr indent="0" marL="0">
               <a:buNone/>
             </a:pPr>
             <a:endParaRPr lang="en-US" sz="1200" dirty="0"/>
@@ -995,17 +1224,15 @@
       <p:sp>
         <p:nvSpPr>
           <p:cNvPr id="3" name="Text 0"/>
-          <p:cNvSpPr>
-            <a:spLocks noGrp="1"/>
-          </p:cNvSpPr>
+          <p:cNvSpPr/>
           <p:nvPr>
-            <p:ph type="title" idx="101" hasCustomPrompt="1"/>
+            <p:ph idx="101" type="title" hasCustomPrompt="1"/>
           </p:nvPr>
         </p:nvSpPr>
         <p:spPr>
           <a:xfrm>
             <a:off x="640080" y="1645920"/>
-            <a:ext cx="7132320" cy="2011680"/>
+            <a:ext cx="7315200" cy="2011680"/>
           </a:xfrm>
           <a:prstGeom prst="rect">
             <a:avLst/>
@@ -1016,9 +1243,9 @@
         <p:txBody>
           <a:bodyPr wrap="square" rtlCol="0"/>
           <a:lstStyle>
-            <a:lvl1pPr marL="0" indent="0" algn="l">
-              <a:buNone/>
-              <a:defRPr lang="en-US" sz="3800" b="1" dirty="0">
+            <a:lvl1pPr algn="l" indent="0" marL="0">
+              <a:buNone/>
+              <a:defRPr lang="en-US" sz="3300" b="1" dirty="0">
                 <a:solidFill>
                   <a:schemeClr val="bg1"/>
                 </a:solidFill>
@@ -1026,21 +1253,19 @@
             </a:lvl1pPr>
           </a:lstStyle>
           <a:p>
-            <a:pPr marL="0" indent="0" algn="l">
-              <a:buNone/>
-            </a:pPr>
-            <a:endParaRPr lang="en-US" sz="3800" dirty="0"/>
+            <a:pPr algn="l" indent="0" marL="0">
+              <a:buNone/>
+            </a:pPr>
+            <a:endParaRPr lang="en-US" sz="3300" dirty="0"/>
           </a:p>
         </p:txBody>
       </p:sp>
       <p:sp>
         <p:nvSpPr>
           <p:cNvPr id="4" name="Text 0"/>
-          <p:cNvSpPr>
-            <a:spLocks noGrp="1"/>
-          </p:cNvSpPr>
+          <p:cNvSpPr/>
           <p:nvPr>
-            <p:ph type="body" idx="102" hasCustomPrompt="1"/>
+            <p:ph idx="102" type="body" hasCustomPrompt="1"/>
           </p:nvPr>
         </p:nvSpPr>
         <p:spPr>
@@ -1057,7 +1282,7 @@
         <p:txBody>
           <a:bodyPr wrap="square" rtlCol="0"/>
           <a:lstStyle>
-            <a:lvl1pPr marL="0" indent="0">
+            <a:lvl1pPr indent="0" marL="0">
               <a:buNone/>
               <a:defRPr lang="en-US" sz="1800" dirty="0">
                 <a:solidFill>
@@ -1067,7 +1292,7 @@
             </a:lvl1pPr>
           </a:lstStyle>
           <a:p>
-            <a:pPr marL="0" indent="0">
+            <a:pPr indent="0" marL="0">
               <a:buNone/>
             </a:pPr>
             <a:endParaRPr lang="en-US" sz="1800" dirty="0"/>
@@ -1077,11 +1302,9 @@
       <p:sp>
         <p:nvSpPr>
           <p:cNvPr id="5" name="Text 0"/>
-          <p:cNvSpPr>
-            <a:spLocks noGrp="1"/>
-          </p:cNvSpPr>
+          <p:cNvSpPr/>
           <p:nvPr>
-            <p:ph type="body" idx="103" hasCustomPrompt="1"/>
+            <p:ph idx="103" type="body" hasCustomPrompt="1"/>
           </p:nvPr>
         </p:nvSpPr>
         <p:spPr>
@@ -1098,7 +1321,7 @@
         <p:txBody>
           <a:bodyPr wrap="square" rtlCol="0"/>
           <a:lstStyle>
-            <a:lvl1pPr marL="0" indent="0">
+            <a:lvl1pPr indent="0" marL="0">
               <a:spcAft>
                 <a:spcPts val="400"/>
               </a:spcAft>
@@ -1111,7 +1334,7 @@
             </a:lvl1pPr>
           </a:lstStyle>
           <a:p>
-            <a:pPr marL="0" indent="0">
+            <a:pPr indent="0" marL="0">
               <a:spcAft>
                 <a:spcPts val="400"/>
               </a:spcAft>
@@ -1137,7 +1360,6 @@
         <a:solidFill>
           <a:schemeClr val="bg2"/>
         </a:solidFill>
-        <a:effectLst/>
       </p:bgPr>
     </p:bg>
     <p:spTree>
@@ -1157,11 +1379,9 @@
       <p:sp>
         <p:nvSpPr>
           <p:cNvPr id="2" name="Text 0"/>
-          <p:cNvSpPr>
-            <a:spLocks noGrp="1"/>
-          </p:cNvSpPr>
+          <p:cNvSpPr/>
           <p:nvPr>
-            <p:ph type="body" idx="100" hasCustomPrompt="1"/>
+            <p:ph idx="100" type="body" hasCustomPrompt="1"/>
           </p:nvPr>
         </p:nvSpPr>
         <p:spPr>
@@ -1178,9 +1398,9 @@
         <p:txBody>
           <a:bodyPr wrap="square" rtlCol="0"/>
           <a:lstStyle>
-            <a:lvl1pPr marL="0" indent="0">
-              <a:buNone/>
-              <a:defRPr lang="en-US" sz="1100" b="1" kern="0" spc="200" dirty="0">
+            <a:lvl1pPr indent="0" marL="0">
+              <a:buNone/>
+              <a:defRPr lang="en-US" sz="1100" b="1" spc="200" kern="0" dirty="0">
                 <a:solidFill>
                   <a:schemeClr val="accent1"/>
                 </a:solidFill>
@@ -1191,7 +1411,7 @@
             </a:lvl1pPr>
           </a:lstStyle>
           <a:p>
-            <a:pPr marL="0" indent="0">
+            <a:pPr indent="0" marL="0">
               <a:buNone/>
             </a:pPr>
             <a:endParaRPr lang="en-US" sz="1100" dirty="0"/>
@@ -1201,11 +1421,9 @@
       <p:sp>
         <p:nvSpPr>
           <p:cNvPr id="3" name="Text 0"/>
-          <p:cNvSpPr>
-            <a:spLocks noGrp="1"/>
-          </p:cNvSpPr>
+          <p:cNvSpPr/>
           <p:nvPr>
-            <p:ph type="title" idx="101" hasCustomPrompt="1"/>
+            <p:ph idx="101" type="title" hasCustomPrompt="1"/>
           </p:nvPr>
         </p:nvSpPr>
         <p:spPr>
@@ -1222,7 +1440,7 @@
         <p:txBody>
           <a:bodyPr wrap="square" rtlCol="0"/>
           <a:lstStyle>
-            <a:lvl1pPr marL="0" indent="0" algn="l">
+            <a:lvl1pPr algn="l" indent="0" marL="0">
               <a:buNone/>
               <a:defRPr lang="en-US" sz="3200" b="1" dirty="0">
                 <a:solidFill>
@@ -1232,7 +1450,7 @@
             </a:lvl1pPr>
           </a:lstStyle>
           <a:p>
-            <a:pPr marL="0" indent="0" algn="l">
+            <a:pPr algn="l" indent="0" marL="0">
               <a:buNone/>
             </a:pPr>
             <a:endParaRPr lang="en-US" sz="3200" dirty="0"/>
@@ -1259,7 +1477,7 @@
           </a:prstGeom>
           <a:extLst>
             <a:ext uri="{C572A759-6A51-4108-AA02-DFA0A04FC94B}">
-              <ma14:wrappingTextBoxFlag xmlns:ma14="http://schemas.microsoft.com/office/mac/drawingml/2011/main" xmlns="" val="0"/>
+              <ma14:wrappingTextBoxFlag xmlns:ma14="http://schemas.microsoft.com/office/mac/drawingml/2011/main" val="0"/>
             </a:ext>
           </a:extLst>
         </p:spPr>
@@ -1280,8 +1498,8 @@
           <a:p>
             <a:pPr algn="r"/>
             <a:fld id="{F7021451-1387-4CA6-816F-3879F97B5CBC}" type="slidenum">
-              <a:rPr lang="en-US" b="0"/>
-              <a:t>‹#›</a:t>
+              <a:rPr b="0" lang="en-US"/>
+              <a:t>1003</a:t>
             </a:fld>
             <a:endParaRPr lang="en-US"/>
           </a:p>
@@ -1303,7 +1521,6 @@
         <a:solidFill>
           <a:schemeClr val="bg2"/>
         </a:solidFill>
-        <a:effectLst/>
       </p:bgPr>
     </p:bg>
     <p:spTree>
@@ -1323,11 +1540,9 @@
       <p:sp>
         <p:nvSpPr>
           <p:cNvPr id="2" name="Text 0"/>
-          <p:cNvSpPr>
-            <a:spLocks noGrp="1"/>
-          </p:cNvSpPr>
+          <p:cNvSpPr/>
           <p:nvPr>
-            <p:ph type="body" idx="100" hasCustomPrompt="1"/>
+            <p:ph idx="100" type="body" hasCustomPrompt="1"/>
           </p:nvPr>
         </p:nvSpPr>
         <p:spPr>
@@ -1344,9 +1559,9 @@
         <p:txBody>
           <a:bodyPr wrap="square" rtlCol="0"/>
           <a:lstStyle>
-            <a:lvl1pPr marL="0" indent="0">
-              <a:buNone/>
-              <a:defRPr lang="en-US" sz="1100" b="1" kern="0" spc="200" dirty="0">
+            <a:lvl1pPr indent="0" marL="0">
+              <a:buNone/>
+              <a:defRPr lang="en-US" sz="1100" b="1" spc="200" kern="0" dirty="0">
                 <a:solidFill>
                   <a:schemeClr val="accent1"/>
                 </a:solidFill>
@@ -1357,7 +1572,7 @@
             </a:lvl1pPr>
           </a:lstStyle>
           <a:p>
-            <a:pPr marL="0" indent="0">
+            <a:pPr indent="0" marL="0">
               <a:buNone/>
             </a:pPr>
             <a:endParaRPr lang="en-US" sz="1100" dirty="0"/>
@@ -1367,11 +1582,9 @@
       <p:sp>
         <p:nvSpPr>
           <p:cNvPr id="3" name="Text 0"/>
-          <p:cNvSpPr>
-            <a:spLocks noGrp="1"/>
-          </p:cNvSpPr>
+          <p:cNvSpPr/>
           <p:nvPr>
-            <p:ph type="title" idx="101" hasCustomPrompt="1"/>
+            <p:ph idx="101" type="title" hasCustomPrompt="1"/>
           </p:nvPr>
         </p:nvSpPr>
         <p:spPr>
@@ -1388,7 +1601,7 @@
         <p:txBody>
           <a:bodyPr wrap="square" rtlCol="0"/>
           <a:lstStyle>
-            <a:lvl1pPr marL="0" indent="0" algn="l">
+            <a:lvl1pPr algn="l" indent="0" marL="0">
               <a:buNone/>
               <a:defRPr lang="en-US" sz="3200" b="1" dirty="0">
                 <a:solidFill>
@@ -1398,7 +1611,7 @@
             </a:lvl1pPr>
           </a:lstStyle>
           <a:p>
-            <a:pPr marL="0" indent="0" algn="l">
+            <a:pPr algn="l" indent="0" marL="0">
               <a:buNone/>
             </a:pPr>
             <a:endParaRPr lang="en-US" sz="3200" dirty="0"/>
@@ -1408,11 +1621,9 @@
       <p:sp>
         <p:nvSpPr>
           <p:cNvPr id="4" name="Text 0"/>
-          <p:cNvSpPr>
-            <a:spLocks noGrp="1"/>
-          </p:cNvSpPr>
+          <p:cNvSpPr/>
           <p:nvPr>
-            <p:ph type="body" idx="102" hasCustomPrompt="1"/>
+            <p:ph idx="102" type="body" hasCustomPrompt="1"/>
           </p:nvPr>
         </p:nvSpPr>
         <p:spPr>
@@ -1429,7 +1640,7 @@
         <p:txBody>
           <a:bodyPr wrap="square" rtlCol="0"/>
           <a:lstStyle>
-            <a:lvl1pPr marL="0" indent="0">
+            <a:lvl1pPr indent="0" marL="0">
               <a:buNone/>
               <a:defRPr lang="en-US" sz="1800" dirty="0">
                 <a:solidFill>
@@ -1439,7 +1650,7 @@
             </a:lvl1pPr>
           </a:lstStyle>
           <a:p>
-            <a:pPr marL="0" indent="0">
+            <a:pPr indent="0" marL="0">
               <a:buNone/>
             </a:pPr>
             <a:endParaRPr lang="en-US" sz="1800" dirty="0"/>
@@ -1466,7 +1677,7 @@
           </a:prstGeom>
           <a:extLst>
             <a:ext uri="{C572A759-6A51-4108-AA02-DFA0A04FC94B}">
-              <ma14:wrappingTextBoxFlag xmlns:ma14="http://schemas.microsoft.com/office/mac/drawingml/2011/main" xmlns="" val="0"/>
+              <ma14:wrappingTextBoxFlag xmlns:ma14="http://schemas.microsoft.com/office/mac/drawingml/2011/main" val="0"/>
             </a:ext>
           </a:extLst>
         </p:spPr>
@@ -1487,8 +1698,8 @@
           <a:p>
             <a:pPr algn="r"/>
             <a:fld id="{F7021451-1387-4CA6-816F-3879F97B5CBC}" type="slidenum">
-              <a:rPr lang="en-US" b="0"/>
-              <a:t>‹#›</a:t>
+              <a:rPr b="0" lang="en-US"/>
+              <a:t>1004</a:t>
             </a:fld>
             <a:endParaRPr lang="en-US"/>
           </a:p>
@@ -1502,17 +1713,9 @@
 </p:sldLayout>
 </file>
 
-<file path=ppt/slideLayouts/slideLayout5.xml><?xml version="1.0" encoding="utf-8"?>
-<p:sldLayout xmlns:a="http://schemas.openxmlformats.org/drawingml/2006/main" xmlns:r="http://schemas.openxmlformats.org/officeDocument/2006/relationships" xmlns:p="http://schemas.openxmlformats.org/presentationml/2006/main" preserve="1">
-  <p:cSld name="CLOSING_DARK">
-    <p:bg>
-      <p:bgPr>
-        <a:solidFill>
-          <a:schemeClr val="tx2"/>
-        </a:solidFill>
-        <a:effectLst/>
-      </p:bgPr>
-    </p:bg>
+<file path=ppt/slideMasters/slideMaster1.xml><?xml version="1.0" encoding="utf-8"?>
+<p:sldMaster xmlns:a="http://schemas.openxmlformats.org/drawingml/2006/main" xmlns:r="http://schemas.openxmlformats.org/officeDocument/2006/relationships" xmlns:p="http://schemas.openxmlformats.org/presentationml/2006/main">
+  <p:cSld>
     <p:spTree>
       <p:nvGrpSpPr>
         <p:cNvPr id="1" name=""/>
@@ -1529,91 +1732,6 @@
       </p:grpSpPr>
       <p:sp>
         <p:nvSpPr>
-          <p:cNvPr id="2" name="Text 0"/>
-          <p:cNvSpPr>
-            <a:spLocks noGrp="1"/>
-          </p:cNvSpPr>
-          <p:nvPr>
-            <p:ph type="body" idx="100" hasCustomPrompt="1"/>
-          </p:nvPr>
-        </p:nvSpPr>
-        <p:spPr>
-          <a:xfrm>
-            <a:off x="548640" y="384048"/>
-            <a:ext cx="8229600" cy="274320"/>
-          </a:xfrm>
-          <a:prstGeom prst="rect">
-            <a:avLst/>
-          </a:prstGeom>
-          <a:noFill/>
-          <a:ln/>
-        </p:spPr>
-        <p:txBody>
-          <a:bodyPr wrap="square" rtlCol="0"/>
-          <a:lstStyle>
-            <a:lvl1pPr marL="0" indent="0">
-              <a:buNone/>
-              <a:defRPr lang="en-US" sz="1100" b="1" kern="0" spc="200" dirty="0">
-                <a:solidFill>
-                  <a:schemeClr val="accent6"/>
-                </a:solidFill>
-                <a:latin typeface="Courier New" pitchFamily="34" charset="0"/>
-                <a:ea typeface="Courier New" pitchFamily="34" charset="-122"/>
-                <a:cs typeface="Courier New" pitchFamily="34" charset="-120"/>
-              </a:defRPr>
-            </a:lvl1pPr>
-          </a:lstStyle>
-          <a:p>
-            <a:pPr marL="0" indent="0">
-              <a:buNone/>
-            </a:pPr>
-            <a:endParaRPr lang="en-US" sz="1100" dirty="0"/>
-          </a:p>
-        </p:txBody>
-      </p:sp>
-      <p:sp>
-        <p:nvSpPr>
-          <p:cNvPr id="3" name="Text 0"/>
-          <p:cNvSpPr>
-            <a:spLocks noGrp="1"/>
-          </p:cNvSpPr>
-          <p:nvPr>
-            <p:ph type="title" idx="101" hasCustomPrompt="1"/>
-          </p:nvPr>
-        </p:nvSpPr>
-        <p:spPr>
-          <a:xfrm>
-            <a:off x="548640" y="658368"/>
-            <a:ext cx="11094415" cy="685800"/>
-          </a:xfrm>
-          <a:prstGeom prst="rect">
-            <a:avLst/>
-          </a:prstGeom>
-          <a:noFill/>
-          <a:ln/>
-        </p:spPr>
-        <p:txBody>
-          <a:bodyPr wrap="square" rtlCol="0"/>
-          <a:lstStyle>
-            <a:lvl1pPr marL="0" indent="0" algn="l">
-              <a:buNone/>
-              <a:defRPr lang="en-US" sz="3200" b="1" dirty="0">
-                <a:solidFill>
-                  <a:schemeClr val="bg1"/>
-                </a:solidFill>
-              </a:defRPr>
-            </a:lvl1pPr>
-          </a:lstStyle>
-          <a:p>
-            <a:pPr marL="0" indent="0" algn="l">
-              <a:buNone/>
-            </a:pPr>
-            <a:endParaRPr lang="en-US" sz="3200" dirty="0"/>
-          </a:p>
-        </p:txBody>
-      </p:sp>
-      <p:sp>
-        <p:nvSpPr>
           <p:cNvPr id="25" name="Slide Number Placeholder 0"/>
           <p:cNvSpPr>
             <a:spLocks noGrp="1"/>
@@ -1632,7 +1750,7 @@
           </a:prstGeom>
           <a:extLst>
             <a:ext uri="{C572A759-6A51-4108-AA02-DFA0A04FC94B}">
-              <ma14:wrappingTextBoxFlag xmlns:ma14="http://schemas.microsoft.com/office/mac/drawingml/2011/main" xmlns="" val="0"/>
+              <ma14:wrappingTextBoxFlag xmlns:ma14="http://schemas.microsoft.com/office/mac/drawingml/2011/main" val="0"/>
             </a:ext>
           </a:extLst>
         </p:spPr>
@@ -1642,7 +1760,7 @@
             <a:lvl1pPr>
               <a:defRPr sz="900">
                 <a:solidFill>
-                  <a:schemeClr val="accent5"/>
+                  <a:schemeClr val="accent2"/>
                 </a:solidFill>
                 <a:latin typeface="Courier New"/>
                 <a:ea typeface="Courier New"/>
@@ -1653,86 +1771,8 @@
           <a:p>
             <a:pPr algn="r"/>
             <a:fld id="{F7021451-1387-4CA6-816F-3879F97B5CBC}" type="slidenum">
-              <a:rPr lang="en-US" b="0"/>
-              <a:t>‹#›</a:t>
-            </a:fld>
-            <a:endParaRPr lang="en-US"/>
-          </a:p>
-        </p:txBody>
-      </p:sp>
-    </p:spTree>
-  </p:cSld>
-  <p:clrMapOvr>
-    <a:masterClrMapping/>
-  </p:clrMapOvr>
-</p:sldLayout>
-</file>
-
-<file path=ppt/slideMasters/slideMaster1.xml><?xml version="1.0" encoding="utf-8"?>
-<p:sldMaster xmlns:a="http://schemas.openxmlformats.org/drawingml/2006/main" xmlns:r="http://schemas.openxmlformats.org/officeDocument/2006/relationships" xmlns:p="http://schemas.openxmlformats.org/presentationml/2006/main">
-  <p:cSld>
-    <p:bg>
-      <p:bgRef idx="1001">
-        <a:schemeClr val="bg1"/>
-      </p:bgRef>
-    </p:bg>
-    <p:spTree>
-      <p:nvGrpSpPr>
-        <p:cNvPr id="1" name=""/>
-        <p:cNvGrpSpPr/>
-        <p:nvPr/>
-      </p:nvGrpSpPr>
-      <p:grpSpPr>
-        <a:xfrm>
-          <a:off x="0" y="0"/>
-          <a:ext cx="0" cy="0"/>
-          <a:chOff x="0" y="0"/>
-          <a:chExt cx="0" cy="0"/>
-        </a:xfrm>
-      </p:grpSpPr>
-      <p:sp>
-        <p:nvSpPr>
-          <p:cNvPr id="25" name="Slide Number Placeholder 0"/>
-          <p:cNvSpPr>
-            <a:spLocks noGrp="1"/>
-          </p:cNvSpPr>
-          <p:nvPr>
-            <p:ph type="sldNum" sz="quarter" idx="4294967295"/>
-          </p:nvPr>
-        </p:nvSpPr>
-        <p:spPr>
-          <a:xfrm>
-            <a:off x="10911535" y="6400800"/>
-            <a:ext cx="731520" cy="274320"/>
-          </a:xfrm>
-          <a:prstGeom prst="rect">
-            <a:avLst/>
-          </a:prstGeom>
-          <a:extLst>
-            <a:ext uri="{C572A759-6A51-4108-AA02-DFA0A04FC94B}">
-              <ma14:wrappingTextBoxFlag xmlns:ma14="http://schemas.microsoft.com/office/mac/drawingml/2011/main" xmlns="" val="0"/>
-            </a:ext>
-          </a:extLst>
-        </p:spPr>
-        <p:txBody>
-          <a:bodyPr lIns="0" tIns="0" rIns="0" bIns="0" anchor="ctr"/>
-          <a:lstStyle>
-            <a:lvl1pPr>
-              <a:defRPr sz="900">
-                <a:solidFill>
-                  <a:schemeClr val="accent2"/>
-                </a:solidFill>
-                <a:latin typeface="Courier New"/>
-                <a:ea typeface="Courier New"/>
-                <a:cs typeface="Courier New"/>
-              </a:defRPr>
-            </a:lvl1pPr>
-          </a:lstStyle>
-          <a:p>
-            <a:pPr algn="r"/>
-            <a:fld id="{F7021451-1387-4CA6-816F-3879F97B5CBC}" type="slidenum">
-              <a:rPr lang="en-US" b="0"/>
-              <a:t>‹#›</a:t>
+              <a:rPr b="0" lang="en-US"/>
+              <a:t>null</a:t>
             </a:fld>
             <a:endParaRPr lang="en-US"/>
           </a:p>
@@ -1746,7 +1786,6 @@
     <p:sldLayoutId id="2147483650" r:id="rId2"/>
     <p:sldLayoutId id="2147483651" r:id="rId3"/>
     <p:sldLayoutId id="2147483652" r:id="rId4"/>
-    <p:sldLayoutId id="2147483653" r:id="rId5"/>
   </p:sldLayoutIdLst>
   <p:hf sldNum="0" hdr="0" ftr="0" dt="0"/>
   <p:txStyles>
@@ -2022,11 +2061,9 @@
       <p:sp>
         <p:nvSpPr>
           <p:cNvPr id="2" name="Text 0"/>
-          <p:cNvSpPr>
-            <a:spLocks noGrp="1"/>
-          </p:cNvSpPr>
+          <p:cNvSpPr/>
           <p:nvPr>
-            <p:ph type="body" idx="100" hasCustomPrompt="1"/>
+            <p:ph idx="100" type="body" hasCustomPrompt="1"/>
           </p:nvPr>
         </p:nvSpPr>
         <p:spPr>
@@ -2044,11 +2081,11 @@
           <a:bodyPr wrap="square" lIns="0" tIns="0" rIns="0" bIns="0" rtlCol="0" anchor="ctr"/>
           <a:lstStyle/>
           <a:p>
-            <a:pPr marL="0" indent="0">
-              <a:buNone/>
-            </a:pPr>
-            <a:r>
-              <a:rPr lang="en-US" sz="1200" b="1" kern="0" spc="300" dirty="0">
+            <a:pPr indent="0" marL="0">
+              <a:buNone/>
+            </a:pPr>
+            <a:r>
+              <a:rPr lang="en-US" sz="1200" b="1" spc="300" kern="0" dirty="0">
                 <a:solidFill>
                   <a:schemeClr val="accent6"/>
                 </a:solidFill>
@@ -2065,17 +2102,15 @@
       <p:sp>
         <p:nvSpPr>
           <p:cNvPr id="3" name="Text 0"/>
-          <p:cNvSpPr>
-            <a:spLocks noGrp="1"/>
-          </p:cNvSpPr>
+          <p:cNvSpPr/>
           <p:nvPr>
-            <p:ph type="title" idx="101" hasCustomPrompt="1"/>
+            <p:ph idx="101" type="title" hasCustomPrompt="1"/>
           </p:nvPr>
         </p:nvSpPr>
         <p:spPr>
           <a:xfrm>
             <a:off x="640080" y="1645920"/>
-            <a:ext cx="7132320" cy="2011680"/>
+            <a:ext cx="7315200" cy="2011680"/>
           </a:xfrm>
           <a:prstGeom prst="rect">
             <a:avLst/>
@@ -2087,29 +2122,27 @@
           <a:bodyPr wrap="square" lIns="0" tIns="0" rIns="0" bIns="0" rtlCol="0" anchor="t"/>
           <a:lstStyle/>
           <a:p>
-            <a:pPr marL="0" indent="0" algn="l">
-              <a:buNone/>
-            </a:pPr>
-            <a:r>
-              <a:rPr lang="en-US" sz="3800" b="1" dirty="0">
+            <a:pPr algn="l" indent="0" marL="0">
+              <a:buNone/>
+            </a:pPr>
+            <a:r>
+              <a:rPr lang="en-US" sz="3300" b="1" dirty="0">
                 <a:solidFill>
                   <a:schemeClr val="bg1"/>
                 </a:solidFill>
               </a:rPr>
               <a:t>Event-driven микросервиси со модерна оркестрација и observability</a:t>
             </a:r>
-            <a:endParaRPr lang="en-US" sz="3800" dirty="0"/>
+            <a:endParaRPr lang="en-US" sz="3300" dirty="0"/>
           </a:p>
         </p:txBody>
       </p:sp>
       <p:sp>
         <p:nvSpPr>
           <p:cNvPr id="4" name="Text 0"/>
-          <p:cNvSpPr>
-            <a:spLocks noGrp="1"/>
-          </p:cNvSpPr>
+          <p:cNvSpPr/>
           <p:nvPr>
-            <p:ph type="body" idx="102" hasCustomPrompt="1"/>
+            <p:ph idx="102" type="body" hasCustomPrompt="1"/>
           </p:nvPr>
         </p:nvSpPr>
         <p:spPr>
@@ -2127,24 +2160,16 @@
           <a:bodyPr wrap="square" lIns="0" tIns="0" rIns="0" bIns="0" rtlCol="0" anchor="t"/>
           <a:lstStyle/>
           <a:p>
-            <a:pPr marL="0" indent="0">
-              <a:buNone/>
-            </a:pPr>
-            <a:r>
-              <a:rPr lang="en-US" sz="1800" dirty="0" err="1">
+            <a:pPr indent="0" marL="0">
+              <a:buNone/>
+            </a:pPr>
+            <a:r>
+              <a:rPr lang="en-US" sz="1800" dirty="0">
                 <a:solidFill>
                   <a:schemeClr val="accent5"/>
                 </a:solidFill>
               </a:rPr>
-              <a:t>AutoMarket</a:t>
-            </a:r>
-            <a:r>
-              <a:rPr lang="en-US" sz="1800" dirty="0">
-                <a:solidFill>
-                  <a:schemeClr val="accent5"/>
-                </a:solidFill>
-              </a:rPr>
-              <a:t> — огласи за автомобили</a:t>
+              <a:t>AutoMarket — огласи за автомобили</a:t>
             </a:r>
             <a:endParaRPr lang="en-US" sz="1800" dirty="0"/>
           </a:p>
@@ -2153,11 +2178,9 @@
       <p:sp>
         <p:nvSpPr>
           <p:cNvPr id="5" name="Text 0"/>
-          <p:cNvSpPr>
-            <a:spLocks noGrp="1"/>
-          </p:cNvSpPr>
+          <p:cNvSpPr/>
           <p:nvPr>
-            <p:ph type="body" idx="103" hasCustomPrompt="1"/>
+            <p:ph idx="103" type="body" hasCustomPrompt="1"/>
           </p:nvPr>
         </p:nvSpPr>
         <p:spPr>
@@ -2175,99 +2198,53 @@
           <a:bodyPr wrap="square" lIns="0" tIns="0" rIns="0" bIns="0" rtlCol="0" anchor="t"/>
           <a:lstStyle/>
           <a:p>
-            <a:pPr marL="0" indent="0">
+            <a:pPr indent="0" marL="0">
               <a:spcAft>
                 <a:spcPts val="400"/>
               </a:spcAft>
               <a:buNone/>
             </a:pPr>
             <a:r>
-              <a:rPr lang="mk-MK" sz="1400" b="1" dirty="0">
+              <a:rPr lang="en-US" sz="1400" b="1" dirty="0">
                 <a:solidFill>
                   <a:schemeClr val="bg1"/>
                 </a:solidFill>
               </a:rPr>
-              <a:t>Даниел Костоски</a:t>
-            </a:r>
-            <a:r>
-              <a:rPr lang="en-US" sz="1400" b="1" dirty="0">
-                <a:solidFill>
-                  <a:schemeClr val="bg1"/>
-                </a:solidFill>
-              </a:rPr>
-              <a:t>· </a:t>
-            </a:r>
-            <a:r>
-              <a:rPr lang="mk-MK" sz="1400" b="1" dirty="0">
-                <a:solidFill>
-                  <a:schemeClr val="bg1"/>
-                </a:solidFill>
-              </a:rPr>
-              <a:t>221189</a:t>
+              <a:t>Даниел Костоски · 221189</a:t>
             </a:r>
             <a:endParaRPr lang="en-US" sz="1400" dirty="0"/>
           </a:p>
           <a:p>
-            <a:r>
-              <a:rPr lang="en-US" sz="1400" dirty="0" err="1">
-                <a:solidFill>
-                  <a:schemeClr val="accent5"/>
-                </a:solidFill>
-              </a:rPr>
-              <a:t>Ментор</a:t>
-            </a:r>
-            <a:r>
-              <a:rPr lang="en-US" sz="1400" dirty="0">
-                <a:solidFill>
-                  <a:schemeClr val="accent5"/>
-                </a:solidFill>
-              </a:rPr>
-              <a:t>: </a:t>
-            </a:r>
-            <a:r>
-              <a:rPr lang="en-US" sz="1400" dirty="0" err="1">
-                <a:solidFill>
-                  <a:schemeClr val="accent5"/>
-                </a:solidFill>
-              </a:rPr>
-              <a:t>проф</a:t>
-            </a:r>
-            <a:r>
-              <a:rPr lang="en-US" sz="1400" dirty="0">
-                <a:solidFill>
-                  <a:schemeClr val="accent5"/>
-                </a:solidFill>
-              </a:rPr>
-              <a:t>. </a:t>
-            </a:r>
-            <a:r>
-              <a:rPr lang="" dirty="0"/>
-              <a:t>д-р Костадин Мишев</a:t>
-            </a:r>
-            <a:endParaRPr lang="en-US" sz="1400" dirty="0"/>
-          </a:p>
-          <a:p>
-            <a:pPr marL="0" indent="0">
+            <a:pPr indent="0" marL="0">
               <a:spcAft>
                 <a:spcPts val="400"/>
               </a:spcAft>
               <a:buNone/>
             </a:pPr>
             <a:r>
-              <a:rPr lang="mk-MK" sz="1400" dirty="0">
+              <a:rPr lang="en-US" sz="1400" dirty="0">
                 <a:solidFill>
                   <a:schemeClr val="accent5"/>
                 </a:solidFill>
               </a:rPr>
-              <a:t>ФИНКИ</a:t>
-            </a:r>
+              <a:t>Ментор: проф. д-р Костадин Мишев</a:t>
+            </a:r>
+            <a:endParaRPr lang="en-US" sz="1400" dirty="0"/>
+          </a:p>
+          <a:p>
+            <a:pPr indent="0" marL="0">
+              <a:spcAft>
+                <a:spcPts val="400"/>
+              </a:spcAft>
+              <a:buNone/>
+            </a:pPr>
             <a:r>
               <a:rPr lang="en-US" sz="1400" dirty="0">
                 <a:solidFill>
                   <a:schemeClr val="accent5"/>
                 </a:solidFill>
               </a:rPr>
-              <a:t>· октомври 2026</a:t>
+              <a:t>ФИНКИ · октомври 2026</a:t>
             </a:r>
             <a:endParaRPr lang="en-US" sz="1400" dirty="0"/>
           </a:p>
@@ -2295,13 +2272,6 @@
             <a:prstDash val="solid"/>
           </a:ln>
         </p:spPr>
-        <p:txBody>
-          <a:bodyPr/>
-          <a:lstStyle/>
-          <a:p>
-            <a:endParaRPr lang="LID4096"/>
-          </a:p>
-        </p:txBody>
       </p:sp>
       <p:sp>
         <p:nvSpPr>
@@ -2329,24 +2299,17 @@
             <a:prstDash val="solid"/>
           </a:ln>
         </p:spPr>
-        <p:txBody>
-          <a:bodyPr/>
-          <a:lstStyle/>
-          <a:p>
-            <a:endParaRPr lang="LID4096"/>
-          </a:p>
-        </p:txBody>
       </p:sp>
       <p:pic>
         <p:nvPicPr>
-          <p:cNvPr id="8" name="icon-2" descr="preencoded.png"/>
+          <p:cNvPr id="8" name="icon-2" descr="preencoded.png">    </p:cNvPr>
           <p:cNvPicPr>
             <a:picLocks noChangeAspect="1"/>
           </p:cNvPicPr>
           <p:nvPr/>
         </p:nvPicPr>
         <p:blipFill>
-          <a:blip r:embed="rId3"/>
+          <a:blip r:embed="rId1"/>
           <a:stretch>
             <a:fillRect/>
           </a:stretch>
@@ -2382,7 +2345,7 @@
           <a:bodyPr wrap="square" lIns="0" tIns="0" rIns="0" bIns="0" rtlCol="0" anchor="ctr"/>
           <a:lstStyle/>
           <a:p>
-            <a:pPr marL="0" indent="0" algn="ctr">
+            <a:pPr algn="ctr" indent="0" marL="0">
               <a:buNone/>
             </a:pPr>
             <a:r>
@@ -2422,13 +2385,6 @@
             <a:prstDash val="dash"/>
           </a:ln>
         </p:spPr>
-        <p:txBody>
-          <a:bodyPr/>
-          <a:lstStyle/>
-          <a:p>
-            <a:endParaRPr lang="LID4096"/>
-          </a:p>
-        </p:txBody>
       </p:sp>
       <p:sp>
         <p:nvSpPr>
@@ -2456,24 +2412,17 @@
             <a:prstDash val="solid"/>
           </a:ln>
         </p:spPr>
-        <p:txBody>
-          <a:bodyPr/>
-          <a:lstStyle/>
-          <a:p>
-            <a:endParaRPr lang="LID4096"/>
-          </a:p>
-        </p:txBody>
       </p:sp>
       <p:pic>
         <p:nvPicPr>
-          <p:cNvPr id="12" name="icon-6" descr="preencoded.png"/>
+          <p:cNvPr id="12" name="icon-6" descr="preencoded.png">    </p:cNvPr>
           <p:cNvPicPr>
             <a:picLocks noChangeAspect="1"/>
           </p:cNvPicPr>
           <p:nvPr/>
         </p:nvPicPr>
         <p:blipFill>
-          <a:blip r:embed="rId4"/>
+          <a:blip r:embed="rId2"/>
           <a:stretch>
             <a:fillRect/>
           </a:stretch>
@@ -2509,7 +2458,7 @@
           <a:bodyPr wrap="square" lIns="0" tIns="0" rIns="0" bIns="0" rtlCol="0" anchor="ctr"/>
           <a:lstStyle/>
           <a:p>
-            <a:pPr marL="0" indent="0" algn="ctr">
+            <a:pPr algn="ctr" indent="0" marL="0">
               <a:buNone/>
             </a:pPr>
             <a:r>
@@ -2549,13 +2498,6 @@
             <a:prstDash val="dash"/>
           </a:ln>
         </p:spPr>
-        <p:txBody>
-          <a:bodyPr/>
-          <a:lstStyle/>
-          <a:p>
-            <a:endParaRPr lang="LID4096"/>
-          </a:p>
-        </p:txBody>
       </p:sp>
       <p:sp>
         <p:nvSpPr>
@@ -2583,24 +2525,17 @@
             <a:prstDash val="solid"/>
           </a:ln>
         </p:spPr>
-        <p:txBody>
-          <a:bodyPr/>
-          <a:lstStyle/>
-          <a:p>
-            <a:endParaRPr lang="LID4096"/>
-          </a:p>
-        </p:txBody>
       </p:sp>
       <p:pic>
         <p:nvPicPr>
-          <p:cNvPr id="16" name="icon-10" descr="preencoded.png"/>
+          <p:cNvPr id="16" name="icon-10" descr="preencoded.png">    </p:cNvPr>
           <p:cNvPicPr>
             <a:picLocks noChangeAspect="1"/>
           </p:cNvPicPr>
           <p:nvPr/>
         </p:nvPicPr>
         <p:blipFill>
-          <a:blip r:embed="rId5"/>
+          <a:blip r:embed="rId3"/>
           <a:stretch>
             <a:fillRect/>
           </a:stretch>
@@ -2636,7 +2571,7 @@
           <a:bodyPr wrap="square" lIns="0" tIns="0" rIns="0" bIns="0" rtlCol="0" anchor="ctr"/>
           <a:lstStyle/>
           <a:p>
-            <a:pPr marL="0" indent="0" algn="ctr">
+            <a:pPr algn="ctr" indent="0" marL="0">
               <a:buNone/>
             </a:pPr>
             <a:r>
@@ -2676,13 +2611,6 @@
             <a:prstDash val="dash"/>
           </a:ln>
         </p:spPr>
-        <p:txBody>
-          <a:bodyPr/>
-          <a:lstStyle/>
-          <a:p>
-            <a:endParaRPr lang="LID4096"/>
-          </a:p>
-        </p:txBody>
       </p:sp>
       <p:sp>
         <p:nvSpPr>
@@ -2710,24 +2638,17 @@
             <a:prstDash val="solid"/>
           </a:ln>
         </p:spPr>
-        <p:txBody>
-          <a:bodyPr/>
-          <a:lstStyle/>
-          <a:p>
-            <a:endParaRPr lang="LID4096"/>
-          </a:p>
-        </p:txBody>
       </p:sp>
       <p:pic>
         <p:nvPicPr>
-          <p:cNvPr id="20" name="icon-14" descr="preencoded.png"/>
+          <p:cNvPr id="20" name="icon-14" descr="preencoded.png">    </p:cNvPr>
           <p:cNvPicPr>
             <a:picLocks noChangeAspect="1"/>
           </p:cNvPicPr>
           <p:nvPr/>
         </p:nvPicPr>
         <p:blipFill>
-          <a:blip r:embed="rId6"/>
+          <a:blip r:embed="rId4"/>
           <a:stretch>
             <a:fillRect/>
           </a:stretch>
@@ -2763,7 +2684,7 @@
           <a:bodyPr wrap="square" lIns="0" tIns="0" rIns="0" bIns="0" rtlCol="0" anchor="ctr"/>
           <a:lstStyle/>
           <a:p>
-            <a:pPr marL="0" indent="0" algn="ctr">
+            <a:pPr algn="ctr" indent="0" marL="0">
               <a:buNone/>
             </a:pPr>
             <a:r>
@@ -2803,13 +2724,6 @@
             <a:prstDash val="dash"/>
           </a:ln>
         </p:spPr>
-        <p:txBody>
-          <a:bodyPr/>
-          <a:lstStyle/>
-          <a:p>
-            <a:endParaRPr lang="LID4096"/>
-          </a:p>
-        </p:txBody>
       </p:sp>
       <p:sp>
         <p:nvSpPr>
@@ -2837,24 +2751,17 @@
             <a:prstDash val="solid"/>
           </a:ln>
         </p:spPr>
-        <p:txBody>
-          <a:bodyPr/>
-          <a:lstStyle/>
-          <a:p>
-            <a:endParaRPr lang="LID4096"/>
-          </a:p>
-        </p:txBody>
       </p:sp>
       <p:pic>
         <p:nvPicPr>
-          <p:cNvPr id="24" name="icon-18" descr="preencoded.png"/>
+          <p:cNvPr id="24" name="icon-18" descr="preencoded.png">    </p:cNvPr>
           <p:cNvPicPr>
             <a:picLocks noChangeAspect="1"/>
           </p:cNvPicPr>
           <p:nvPr/>
         </p:nvPicPr>
         <p:blipFill>
-          <a:blip r:embed="rId7"/>
+          <a:blip r:embed="rId5"/>
           <a:stretch>
             <a:fillRect/>
           </a:stretch>
@@ -2890,7 +2797,7 @@
           <a:bodyPr wrap="square" lIns="0" tIns="0" rIns="0" bIns="0" rtlCol="0" anchor="ctr"/>
           <a:lstStyle/>
           <a:p>
-            <a:pPr marL="0" indent="0" algn="ctr">
+            <a:pPr algn="ctr" indent="0" marL="0">
               <a:buNone/>
             </a:pPr>
             <a:r>
@@ -2930,13 +2837,6 @@
             <a:prstDash val="dash"/>
           </a:ln>
         </p:spPr>
-        <p:txBody>
-          <a:bodyPr/>
-          <a:lstStyle/>
-          <a:p>
-            <a:endParaRPr lang="LID4096"/>
-          </a:p>
-        </p:txBody>
       </p:sp>
       <p:sp>
         <p:nvSpPr>
@@ -2964,24 +2864,17 @@
             <a:prstDash val="solid"/>
           </a:ln>
         </p:spPr>
-        <p:txBody>
-          <a:bodyPr/>
-          <a:lstStyle/>
-          <a:p>
-            <a:endParaRPr lang="LID4096"/>
-          </a:p>
-        </p:txBody>
       </p:sp>
       <p:pic>
         <p:nvPicPr>
-          <p:cNvPr id="28" name="icon-22" descr="preencoded.png"/>
+          <p:cNvPr id="28" name="icon-22" descr="preencoded.png">    </p:cNvPr>
           <p:cNvPicPr>
             <a:picLocks noChangeAspect="1"/>
           </p:cNvPicPr>
           <p:nvPr/>
         </p:nvPicPr>
         <p:blipFill>
-          <a:blip r:embed="rId8"/>
+          <a:blip r:embed="rId6"/>
           <a:stretch>
             <a:fillRect/>
           </a:stretch>
@@ -3017,7 +2910,7 @@
           <a:bodyPr wrap="square" lIns="0" tIns="0" rIns="0" bIns="0" rtlCol="0" anchor="ctr"/>
           <a:lstStyle/>
           <a:p>
-            <a:pPr marL="0" indent="0" algn="ctr">
+            <a:pPr algn="ctr" indent="0" marL="0">
               <a:buNone/>
             </a:pPr>
             <a:r>
@@ -3057,13 +2950,6 @@
             <a:prstDash val="dash"/>
           </a:ln>
         </p:spPr>
-        <p:txBody>
-          <a:bodyPr/>
-          <a:lstStyle/>
-          <a:p>
-            <a:endParaRPr lang="LID4096"/>
-          </a:p>
-        </p:txBody>
       </p:sp>
       <p:sp>
         <p:nvSpPr>
@@ -3086,11 +2972,11 @@
           <a:bodyPr wrap="square" lIns="0" tIns="0" rIns="0" bIns="0" rtlCol="0" anchor="ctr"/>
           <a:lstStyle/>
           <a:p>
-            <a:pPr marL="0" indent="0" algn="ctr">
-              <a:buNone/>
-            </a:pPr>
-            <a:r>
-              <a:rPr lang="en-US" sz="1200" b="1" kern="0" spc="100" dirty="0">
+            <a:pPr algn="ctr" indent="0" marL="0">
+              <a:buNone/>
+            </a:pPr>
+            <a:r>
+              <a:rPr lang="en-US" sz="1200" b="1" spc="100" kern="0" dirty="0">
                 <a:solidFill>
                   <a:schemeClr val="accent6"/>
                 </a:solidFill>
@@ -3132,11 +3018,9 @@
       <p:sp>
         <p:nvSpPr>
           <p:cNvPr id="2" name="Text 0"/>
-          <p:cNvSpPr>
-            <a:spLocks noGrp="1"/>
-          </p:cNvSpPr>
+          <p:cNvSpPr/>
           <p:nvPr>
-            <p:ph type="body" idx="100" hasCustomPrompt="1"/>
+            <p:ph idx="100" type="body" hasCustomPrompt="1"/>
           </p:nvPr>
         </p:nvSpPr>
         <p:spPr>
@@ -3154,11 +3038,11 @@
           <a:bodyPr wrap="square" lIns="0" tIns="0" rIns="0" bIns="0" rtlCol="0" anchor="ctr"/>
           <a:lstStyle/>
           <a:p>
-            <a:pPr marL="0" indent="0">
-              <a:buNone/>
-            </a:pPr>
-            <a:r>
-              <a:rPr lang="en-US" sz="1100" b="1" kern="0" spc="200" dirty="0">
+            <a:pPr indent="0" marL="0">
+              <a:buNone/>
+            </a:pPr>
+            <a:r>
+              <a:rPr lang="en-US" sz="1100" b="1" spc="200" kern="0" dirty="0">
                 <a:solidFill>
                   <a:schemeClr val="accent1"/>
                 </a:solidFill>
@@ -3175,11 +3059,9 @@
       <p:sp>
         <p:nvSpPr>
           <p:cNvPr id="3" name="Text 0"/>
-          <p:cNvSpPr>
-            <a:spLocks noGrp="1"/>
-          </p:cNvSpPr>
+          <p:cNvSpPr/>
           <p:nvPr>
-            <p:ph type="title" idx="101" hasCustomPrompt="1"/>
+            <p:ph idx="101" type="title" hasCustomPrompt="1"/>
           </p:nvPr>
         </p:nvSpPr>
         <p:spPr>
@@ -3197,11 +3079,15 @@
           <a:bodyPr wrap="square" lIns="0" tIns="0" rIns="0" bIns="0" rtlCol="0" anchor="t"/>
           <a:lstStyle/>
           <a:p>
-            <a:pPr marL="0" indent="0" algn="l">
-              <a:buNone/>
-            </a:pPr>
-            <a:r>
-              <a:rPr lang="en-US" dirty="0"/>
+            <a:pPr algn="l" indent="0" marL="0">
+              <a:buNone/>
+            </a:pPr>
+            <a:r>
+              <a:rPr lang="en-US" sz="3200" b="1" dirty="0">
+                <a:solidFill>
+                  <a:schemeClr val="tx1"/>
+                </a:solidFill>
+              </a:rPr>
               <a:t>Monolith -&gt; Microservice architecture</a:t>
             </a:r>
             <a:endParaRPr lang="en-US" sz="3200" dirty="0"/>
@@ -3210,7 +3096,7 @@
       </p:sp>
       <p:sp>
         <p:nvSpPr>
-          <p:cNvPr id="5" name="text-26"/>
+          <p:cNvPr id="4" name="text-26"/>
           <p:cNvSpPr txBox="1"/>
           <p:nvPr/>
         </p:nvSpPr>
@@ -3229,11 +3115,11 @@
           <a:bodyPr wrap="square" lIns="0" tIns="0" rIns="0" bIns="0" rtlCol="0" anchor="ctr"/>
           <a:lstStyle/>
           <a:p>
-            <a:pPr marL="0" indent="0" algn="l">
-              <a:buNone/>
-            </a:pPr>
-            <a:r>
-              <a:rPr lang="en-US" sz="1100" b="1" kern="0" spc="100" dirty="0">
+            <a:pPr algn="l" indent="0" marL="0">
+              <a:buNone/>
+            </a:pPr>
+            <a:r>
+              <a:rPr lang="en-US" sz="1100" b="1" spc="100" kern="0" dirty="0">
                 <a:solidFill>
                   <a:schemeClr val="accent2"/>
                 </a:solidFill>
@@ -3249,7 +3135,7 @@
       </p:sp>
       <p:sp>
         <p:nvSpPr>
-          <p:cNvPr id="6" name="monolith"/>
+          <p:cNvPr id="5" name="monolith"/>
           <p:cNvSpPr/>
           <p:nvPr/>
         </p:nvSpPr>
@@ -3273,24 +3159,17 @@
             <a:prstDash val="solid"/>
           </a:ln>
         </p:spPr>
-        <p:txBody>
-          <a:bodyPr/>
-          <a:lstStyle/>
-          <a:p>
-            <a:endParaRPr lang="LID4096"/>
-          </a:p>
-        </p:txBody>
       </p:sp>
       <p:pic>
         <p:nvPicPr>
-          <p:cNvPr id="7" name="icon-27" descr="preencoded.png"/>
+          <p:cNvPr id="6" name="icon-27" descr="preencoded.png">    </p:cNvPr>
           <p:cNvPicPr>
             <a:picLocks noChangeAspect="1"/>
           </p:cNvPicPr>
           <p:nvPr/>
         </p:nvPicPr>
         <p:blipFill>
-          <a:blip r:embed="rId3"/>
+          <a:blip r:embed="rId1"/>
           <a:stretch>
             <a:fillRect/>
           </a:stretch>
@@ -3307,7 +3186,7 @@
       </p:pic>
       <p:sp>
         <p:nvSpPr>
-          <p:cNvPr id="8" name="text-28"/>
+          <p:cNvPr id="7" name="text-28"/>
           <p:cNvSpPr txBox="1"/>
           <p:nvPr/>
         </p:nvSpPr>
@@ -3326,11 +3205,11 @@
           <a:bodyPr wrap="square" lIns="0" tIns="0" rIns="0" bIns="0" rtlCol="0" anchor="t"/>
           <a:lstStyle/>
           <a:p>
-            <a:pPr marL="0" indent="0" algn="ctr">
-              <a:buNone/>
-            </a:pPr>
-            <a:r>
-              <a:rPr lang="en-US" sz="2400" b="1" dirty="0" err="1">
+            <a:pPr algn="ctr" indent="0" marL="0">
+              <a:buNone/>
+            </a:pPr>
+            <a:r>
+              <a:rPr lang="en-US" sz="2400" b="1" dirty="0">
                 <a:solidFill>
                   <a:schemeClr val="accent2"/>
                 </a:solidFill>
@@ -3346,7 +3225,7 @@
       </p:sp>
       <p:sp>
         <p:nvSpPr>
-          <p:cNvPr id="9" name="text-29"/>
+          <p:cNvPr id="8" name="text-29"/>
           <p:cNvSpPr txBox="1"/>
           <p:nvPr/>
         </p:nvSpPr>
@@ -3365,7 +3244,7 @@
           <a:bodyPr wrap="square" lIns="0" tIns="0" rIns="0" bIns="0" rtlCol="0" anchor="t"/>
           <a:lstStyle/>
           <a:p>
-            <a:pPr marL="0" indent="0" algn="ctr">
+            <a:pPr algn="ctr" indent="0" marL="0">
               <a:buNone/>
             </a:pPr>
             <a:r>
@@ -3382,7 +3261,7 @@
       </p:sp>
       <p:sp>
         <p:nvSpPr>
-          <p:cNvPr id="10" name="arrow-30"/>
+          <p:cNvPr id="9" name="arrow-30"/>
           <p:cNvSpPr/>
           <p:nvPr/>
         </p:nvSpPr>
@@ -3403,17 +3282,10 @@
             <a:tailEnd type="triangle"/>
           </a:ln>
         </p:spPr>
-        <p:txBody>
-          <a:bodyPr/>
-          <a:lstStyle/>
-          <a:p>
-            <a:endParaRPr lang="LID4096"/>
-          </a:p>
-        </p:txBody>
-      </p:sp>
-      <p:sp>
-        <p:nvSpPr>
-          <p:cNvPr id="11" name="text-31"/>
+      </p:sp>
+      <p:sp>
+        <p:nvSpPr>
+          <p:cNvPr id="10" name="text-31"/>
           <p:cNvSpPr txBox="1"/>
           <p:nvPr/>
         </p:nvSpPr>
@@ -3432,11 +3304,11 @@
           <a:bodyPr wrap="square" lIns="0" tIns="0" rIns="0" bIns="0" rtlCol="0" anchor="ctr"/>
           <a:lstStyle/>
           <a:p>
-            <a:pPr marL="0" indent="0" algn="l">
-              <a:buNone/>
-            </a:pPr>
-            <a:r>
-              <a:rPr lang="en-US" sz="1100" b="1" kern="0" spc="100" dirty="0">
+            <a:pPr algn="l" indent="0" marL="0">
+              <a:buNone/>
+            </a:pPr>
+            <a:r>
+              <a:rPr lang="en-US" sz="1100" b="1" spc="100" kern="0" dirty="0">
                 <a:solidFill>
                   <a:schemeClr val="accent1"/>
                 </a:solidFill>
@@ -3452,7 +3324,7 @@
       </p:sp>
       <p:sp>
         <p:nvSpPr>
-          <p:cNvPr id="12" name="bus"/>
+          <p:cNvPr id="11" name="bus"/>
           <p:cNvSpPr/>
           <p:nvPr/>
         </p:nvSpPr>
@@ -3472,17 +3344,10 @@
             <a:prstDash val="solid"/>
           </a:ln>
         </p:spPr>
-        <p:txBody>
-          <a:bodyPr/>
-          <a:lstStyle/>
-          <a:p>
-            <a:endParaRPr lang="LID4096"/>
-          </a:p>
-        </p:txBody>
-      </p:sp>
-      <p:sp>
-        <p:nvSpPr>
-          <p:cNvPr id="13" name="tile-32"/>
+      </p:sp>
+      <p:sp>
+        <p:nvSpPr>
+          <p:cNvPr id="12" name="tile-32"/>
           <p:cNvSpPr/>
           <p:nvPr/>
         </p:nvSpPr>
@@ -3504,31 +3369,24 @@
             <a:prstDash val="solid"/>
           </a:ln>
           <a:effectLst>
-            <a:outerShdw blurRad="101600" dist="19050" dir="5400000" algn="bl" rotWithShape="0">
+            <a:outerShdw sx="100000" sy="100000" kx="0" ky="0" algn="bl" rotWithShape="0" blurRad="101600" dist="19050" dir="5400000">
               <a:srgbClr val="000000">
                 <a:alpha val="7000"/>
               </a:srgbClr>
             </a:outerShdw>
           </a:effectLst>
         </p:spPr>
-        <p:txBody>
-          <a:bodyPr/>
-          <a:lstStyle/>
-          <a:p>
-            <a:endParaRPr lang="LID4096"/>
-          </a:p>
-        </p:txBody>
       </p:sp>
       <p:pic>
         <p:nvPicPr>
-          <p:cNvPr id="14" name="icon-33" descr="preencoded.png"/>
+          <p:cNvPr id="13" name="icon-33" descr="preencoded.png">    </p:cNvPr>
           <p:cNvPicPr>
             <a:picLocks noChangeAspect="1"/>
           </p:cNvPicPr>
           <p:nvPr/>
         </p:nvPicPr>
         <p:blipFill>
-          <a:blip r:embed="rId4"/>
+          <a:blip r:embed="rId2"/>
           <a:stretch>
             <a:fillRect/>
           </a:stretch>
@@ -3545,7 +3403,7 @@
       </p:pic>
       <p:sp>
         <p:nvSpPr>
-          <p:cNvPr id="15" name="text-34"/>
+          <p:cNvPr id="14" name="text-34"/>
           <p:cNvSpPr txBox="1"/>
           <p:nvPr/>
         </p:nvSpPr>
@@ -3564,7 +3422,7 @@
           <a:bodyPr wrap="square" lIns="0" tIns="0" rIns="0" bIns="0" rtlCol="0" anchor="ctr"/>
           <a:lstStyle/>
           <a:p>
-            <a:pPr marL="0" indent="0" algn="ctr">
+            <a:pPr algn="ctr" indent="0" marL="0">
               <a:buNone/>
             </a:pPr>
             <a:r>
@@ -3581,7 +3439,7 @@
       </p:sp>
       <p:sp>
         <p:nvSpPr>
-          <p:cNvPr id="16" name="arrow-35"/>
+          <p:cNvPr id="15" name="arrow-35"/>
           <p:cNvSpPr/>
           <p:nvPr/>
         </p:nvSpPr>
@@ -3601,17 +3459,10 @@
             <a:prstDash val="dash"/>
           </a:ln>
         </p:spPr>
-        <p:txBody>
-          <a:bodyPr/>
-          <a:lstStyle/>
-          <a:p>
-            <a:endParaRPr lang="LID4096"/>
-          </a:p>
-        </p:txBody>
-      </p:sp>
-      <p:sp>
-        <p:nvSpPr>
-          <p:cNvPr id="17" name="tile-36"/>
+      </p:sp>
+      <p:sp>
+        <p:nvSpPr>
+          <p:cNvPr id="16" name="tile-36"/>
           <p:cNvSpPr/>
           <p:nvPr/>
         </p:nvSpPr>
@@ -3633,31 +3484,24 @@
             <a:prstDash val="solid"/>
           </a:ln>
           <a:effectLst>
-            <a:outerShdw blurRad="101600" dist="19050" dir="5400000" algn="bl" rotWithShape="0">
+            <a:outerShdw sx="100000" sy="100000" kx="0" ky="0" algn="bl" rotWithShape="0" blurRad="101600" dist="19050" dir="5400000">
               <a:srgbClr val="000000">
                 <a:alpha val="7000"/>
               </a:srgbClr>
             </a:outerShdw>
           </a:effectLst>
         </p:spPr>
-        <p:txBody>
-          <a:bodyPr/>
-          <a:lstStyle/>
-          <a:p>
-            <a:endParaRPr lang="LID4096"/>
-          </a:p>
-        </p:txBody>
       </p:sp>
       <p:pic>
         <p:nvPicPr>
-          <p:cNvPr id="18" name="icon-37" descr="preencoded.png"/>
+          <p:cNvPr id="17" name="icon-37" descr="preencoded.png">    </p:cNvPr>
           <p:cNvPicPr>
             <a:picLocks noChangeAspect="1"/>
           </p:cNvPicPr>
           <p:nvPr/>
         </p:nvPicPr>
         <p:blipFill>
-          <a:blip r:embed="rId5"/>
+          <a:blip r:embed="rId3"/>
           <a:stretch>
             <a:fillRect/>
           </a:stretch>
@@ -3674,7 +3518,7 @@
       </p:pic>
       <p:sp>
         <p:nvSpPr>
-          <p:cNvPr id="19" name="text-38"/>
+          <p:cNvPr id="18" name="text-38"/>
           <p:cNvSpPr txBox="1"/>
           <p:nvPr/>
         </p:nvSpPr>
@@ -3693,7 +3537,7 @@
           <a:bodyPr wrap="square" lIns="0" tIns="0" rIns="0" bIns="0" rtlCol="0" anchor="ctr"/>
           <a:lstStyle/>
           <a:p>
-            <a:pPr marL="0" indent="0" algn="ctr">
+            <a:pPr algn="ctr" indent="0" marL="0">
               <a:buNone/>
             </a:pPr>
             <a:r>
@@ -3710,7 +3554,7 @@
       </p:sp>
       <p:sp>
         <p:nvSpPr>
-          <p:cNvPr id="20" name="arrow-39"/>
+          <p:cNvPr id="19" name="arrow-39"/>
           <p:cNvSpPr/>
           <p:nvPr/>
         </p:nvSpPr>
@@ -3730,17 +3574,10 @@
             <a:prstDash val="dash"/>
           </a:ln>
         </p:spPr>
-        <p:txBody>
-          <a:bodyPr/>
-          <a:lstStyle/>
-          <a:p>
-            <a:endParaRPr lang="LID4096"/>
-          </a:p>
-        </p:txBody>
-      </p:sp>
-      <p:sp>
-        <p:nvSpPr>
-          <p:cNvPr id="21" name="tile-40"/>
+      </p:sp>
+      <p:sp>
+        <p:nvSpPr>
+          <p:cNvPr id="20" name="tile-40"/>
           <p:cNvSpPr/>
           <p:nvPr/>
         </p:nvSpPr>
@@ -3762,31 +3599,24 @@
             <a:prstDash val="solid"/>
           </a:ln>
           <a:effectLst>
-            <a:outerShdw blurRad="101600" dist="19050" dir="5400000" algn="bl" rotWithShape="0">
+            <a:outerShdw sx="100000" sy="100000" kx="0" ky="0" algn="bl" rotWithShape="0" blurRad="101600" dist="19050" dir="5400000">
               <a:srgbClr val="000000">
                 <a:alpha val="7000"/>
               </a:srgbClr>
             </a:outerShdw>
           </a:effectLst>
         </p:spPr>
-        <p:txBody>
-          <a:bodyPr/>
-          <a:lstStyle/>
-          <a:p>
-            <a:endParaRPr lang="LID4096"/>
-          </a:p>
-        </p:txBody>
       </p:sp>
       <p:pic>
         <p:nvPicPr>
-          <p:cNvPr id="22" name="icon-41" descr="preencoded.png"/>
+          <p:cNvPr id="21" name="icon-41" descr="preencoded.png">    </p:cNvPr>
           <p:cNvPicPr>
             <a:picLocks noChangeAspect="1"/>
           </p:cNvPicPr>
           <p:nvPr/>
         </p:nvPicPr>
         <p:blipFill>
-          <a:blip r:embed="rId6"/>
+          <a:blip r:embed="rId4"/>
           <a:stretch>
             <a:fillRect/>
           </a:stretch>
@@ -3803,7 +3633,7 @@
       </p:pic>
       <p:sp>
         <p:nvSpPr>
-          <p:cNvPr id="23" name="text-42"/>
+          <p:cNvPr id="22" name="text-42"/>
           <p:cNvSpPr txBox="1"/>
           <p:nvPr/>
         </p:nvSpPr>
@@ -3822,7 +3652,7 @@
           <a:bodyPr wrap="square" lIns="0" tIns="0" rIns="0" bIns="0" rtlCol="0" anchor="ctr"/>
           <a:lstStyle/>
           <a:p>
-            <a:pPr marL="0" indent="0" algn="ctr">
+            <a:pPr algn="ctr" indent="0" marL="0">
               <a:buNone/>
             </a:pPr>
             <a:r>
@@ -3839,7 +3669,7 @@
       </p:sp>
       <p:sp>
         <p:nvSpPr>
-          <p:cNvPr id="24" name="arrow-43"/>
+          <p:cNvPr id="23" name="arrow-43"/>
           <p:cNvSpPr/>
           <p:nvPr/>
         </p:nvSpPr>
@@ -3859,17 +3689,10 @@
             <a:prstDash val="dash"/>
           </a:ln>
         </p:spPr>
-        <p:txBody>
-          <a:bodyPr/>
-          <a:lstStyle/>
-          <a:p>
-            <a:endParaRPr lang="LID4096"/>
-          </a:p>
-        </p:txBody>
-      </p:sp>
-      <p:sp>
-        <p:nvSpPr>
-          <p:cNvPr id="25" name="tile-44"/>
+      </p:sp>
+      <p:sp>
+        <p:nvSpPr>
+          <p:cNvPr id="24" name="tile-44"/>
           <p:cNvSpPr/>
           <p:nvPr/>
         </p:nvSpPr>
@@ -3891,31 +3714,24 @@
             <a:prstDash val="solid"/>
           </a:ln>
           <a:effectLst>
-            <a:outerShdw blurRad="101600" dist="19050" dir="5400000" algn="bl" rotWithShape="0">
+            <a:outerShdw sx="100000" sy="100000" kx="0" ky="0" algn="bl" rotWithShape="0" blurRad="101600" dist="19050" dir="5400000">
               <a:srgbClr val="000000">
                 <a:alpha val="7000"/>
               </a:srgbClr>
             </a:outerShdw>
           </a:effectLst>
         </p:spPr>
-        <p:txBody>
-          <a:bodyPr/>
-          <a:lstStyle/>
-          <a:p>
-            <a:endParaRPr lang="LID4096"/>
-          </a:p>
-        </p:txBody>
       </p:sp>
       <p:pic>
         <p:nvPicPr>
-          <p:cNvPr id="26" name="icon-45" descr="preencoded.png"/>
+          <p:cNvPr id="25" name="icon-45" descr="preencoded.png">    </p:cNvPr>
           <p:cNvPicPr>
             <a:picLocks noChangeAspect="1"/>
           </p:cNvPicPr>
           <p:nvPr/>
         </p:nvPicPr>
         <p:blipFill>
-          <a:blip r:embed="rId7"/>
+          <a:blip r:embed="rId5"/>
           <a:stretch>
             <a:fillRect/>
           </a:stretch>
@@ -3932,7 +3748,7 @@
       </p:pic>
       <p:sp>
         <p:nvSpPr>
-          <p:cNvPr id="27" name="text-46"/>
+          <p:cNvPr id="26" name="text-46"/>
           <p:cNvSpPr txBox="1"/>
           <p:nvPr/>
         </p:nvSpPr>
@@ -3951,7 +3767,7 @@
           <a:bodyPr wrap="square" lIns="0" tIns="0" rIns="0" bIns="0" rtlCol="0" anchor="ctr"/>
           <a:lstStyle/>
           <a:p>
-            <a:pPr marL="0" indent="0" algn="ctr">
+            <a:pPr algn="ctr" indent="0" marL="0">
               <a:buNone/>
             </a:pPr>
             <a:r>
@@ -3968,7 +3784,7 @@
       </p:sp>
       <p:sp>
         <p:nvSpPr>
-          <p:cNvPr id="28" name="arrow-47"/>
+          <p:cNvPr id="27" name="arrow-47"/>
           <p:cNvSpPr/>
           <p:nvPr/>
         </p:nvSpPr>
@@ -3988,17 +3804,10 @@
             <a:prstDash val="dash"/>
           </a:ln>
         </p:spPr>
-        <p:txBody>
-          <a:bodyPr/>
-          <a:lstStyle/>
-          <a:p>
-            <a:endParaRPr lang="LID4096"/>
-          </a:p>
-        </p:txBody>
-      </p:sp>
-      <p:sp>
-        <p:nvSpPr>
-          <p:cNvPr id="29" name="tile-48"/>
+      </p:sp>
+      <p:sp>
+        <p:nvSpPr>
+          <p:cNvPr id="28" name="tile-48"/>
           <p:cNvSpPr/>
           <p:nvPr/>
         </p:nvSpPr>
@@ -4020,31 +3829,24 @@
             <a:prstDash val="solid"/>
           </a:ln>
           <a:effectLst>
-            <a:outerShdw blurRad="101600" dist="19050" dir="5400000" algn="bl" rotWithShape="0">
+            <a:outerShdw sx="100000" sy="100000" kx="0" ky="0" algn="bl" rotWithShape="0" blurRad="101600" dist="19050" dir="5400000">
               <a:srgbClr val="000000">
                 <a:alpha val="7000"/>
               </a:srgbClr>
             </a:outerShdw>
           </a:effectLst>
         </p:spPr>
-        <p:txBody>
-          <a:bodyPr/>
-          <a:lstStyle/>
-          <a:p>
-            <a:endParaRPr lang="LID4096"/>
-          </a:p>
-        </p:txBody>
       </p:sp>
       <p:pic>
         <p:nvPicPr>
-          <p:cNvPr id="30" name="icon-49" descr="preencoded.png"/>
+          <p:cNvPr id="29" name="icon-49" descr="preencoded.png">    </p:cNvPr>
           <p:cNvPicPr>
             <a:picLocks noChangeAspect="1"/>
           </p:cNvPicPr>
           <p:nvPr/>
         </p:nvPicPr>
         <p:blipFill>
-          <a:blip r:embed="rId8"/>
+          <a:blip r:embed="rId6"/>
           <a:stretch>
             <a:fillRect/>
           </a:stretch>
@@ -4061,7 +3863,7 @@
       </p:pic>
       <p:sp>
         <p:nvSpPr>
-          <p:cNvPr id="31" name="text-50"/>
+          <p:cNvPr id="30" name="text-50"/>
           <p:cNvSpPr txBox="1"/>
           <p:nvPr/>
         </p:nvSpPr>
@@ -4080,7 +3882,7 @@
           <a:bodyPr wrap="square" lIns="0" tIns="0" rIns="0" bIns="0" rtlCol="0" anchor="ctr"/>
           <a:lstStyle/>
           <a:p>
-            <a:pPr marL="0" indent="0" algn="ctr">
+            <a:pPr algn="ctr" indent="0" marL="0">
               <a:buNone/>
             </a:pPr>
             <a:r>
@@ -4097,7 +3899,7 @@
       </p:sp>
       <p:sp>
         <p:nvSpPr>
-          <p:cNvPr id="32" name="arrow-51"/>
+          <p:cNvPr id="31" name="arrow-51"/>
           <p:cNvSpPr/>
           <p:nvPr/>
         </p:nvSpPr>
@@ -4117,17 +3919,10 @@
             <a:prstDash val="dash"/>
           </a:ln>
         </p:spPr>
-        <p:txBody>
-          <a:bodyPr/>
-          <a:lstStyle/>
-          <a:p>
-            <a:endParaRPr lang="LID4096"/>
-          </a:p>
-        </p:txBody>
-      </p:sp>
-      <p:sp>
-        <p:nvSpPr>
-          <p:cNvPr id="33" name="tile-52"/>
+      </p:sp>
+      <p:sp>
+        <p:nvSpPr>
+          <p:cNvPr id="32" name="tile-52"/>
           <p:cNvSpPr/>
           <p:nvPr/>
         </p:nvSpPr>
@@ -4149,31 +3944,24 @@
             <a:prstDash val="solid"/>
           </a:ln>
           <a:effectLst>
-            <a:outerShdw blurRad="101600" dist="19050" dir="5400000" algn="bl" rotWithShape="0">
+            <a:outerShdw sx="100000" sy="100000" kx="0" ky="0" algn="bl" rotWithShape="0" blurRad="101600" dist="19050" dir="5400000">
               <a:srgbClr val="000000">
                 <a:alpha val="7000"/>
               </a:srgbClr>
             </a:outerShdw>
           </a:effectLst>
         </p:spPr>
-        <p:txBody>
-          <a:bodyPr/>
-          <a:lstStyle/>
-          <a:p>
-            <a:endParaRPr lang="LID4096"/>
-          </a:p>
-        </p:txBody>
       </p:sp>
       <p:pic>
         <p:nvPicPr>
-          <p:cNvPr id="34" name="icon-53" descr="preencoded.png"/>
+          <p:cNvPr id="33" name="icon-53" descr="preencoded.png">    </p:cNvPr>
           <p:cNvPicPr>
             <a:picLocks noChangeAspect="1"/>
           </p:cNvPicPr>
           <p:nvPr/>
         </p:nvPicPr>
         <p:blipFill>
-          <a:blip r:embed="rId9"/>
+          <a:blip r:embed="rId7"/>
           <a:stretch>
             <a:fillRect/>
           </a:stretch>
@@ -4190,7 +3978,7 @@
       </p:pic>
       <p:sp>
         <p:nvSpPr>
-          <p:cNvPr id="35" name="text-54"/>
+          <p:cNvPr id="34" name="text-54"/>
           <p:cNvSpPr txBox="1"/>
           <p:nvPr/>
         </p:nvSpPr>
@@ -4209,7 +3997,7 @@
           <a:bodyPr wrap="square" lIns="0" tIns="0" rIns="0" bIns="0" rtlCol="0" anchor="ctr"/>
           <a:lstStyle/>
           <a:p>
-            <a:pPr marL="0" indent="0" algn="ctr">
+            <a:pPr algn="ctr" indent="0" marL="0">
               <a:buNone/>
             </a:pPr>
             <a:r>
@@ -4226,7 +4014,7 @@
       </p:sp>
       <p:sp>
         <p:nvSpPr>
-          <p:cNvPr id="36" name="arrow-55"/>
+          <p:cNvPr id="35" name="arrow-55"/>
           <p:cNvSpPr/>
           <p:nvPr/>
         </p:nvSpPr>
@@ -4246,17 +4034,10 @@
             <a:prstDash val="dash"/>
           </a:ln>
         </p:spPr>
-        <p:txBody>
-          <a:bodyPr/>
-          <a:lstStyle/>
-          <a:p>
-            <a:endParaRPr lang="LID4096"/>
-          </a:p>
-        </p:txBody>
-      </p:sp>
-      <p:sp>
-        <p:nvSpPr>
-          <p:cNvPr id="37" name="kafka-pill"/>
+      </p:sp>
+      <p:sp>
+        <p:nvSpPr>
+          <p:cNvPr id="36" name="kafka-pill"/>
           <p:cNvSpPr/>
           <p:nvPr/>
         </p:nvSpPr>
@@ -4275,17 +4056,10 @@
           </a:solidFill>
           <a:ln/>
         </p:spPr>
-        <p:txBody>
-          <a:bodyPr/>
-          <a:lstStyle/>
-          <a:p>
-            <a:endParaRPr lang="LID4096"/>
-          </a:p>
-        </p:txBody>
-      </p:sp>
-      <p:sp>
-        <p:nvSpPr>
-          <p:cNvPr id="38" name="text-56"/>
+      </p:sp>
+      <p:sp>
+        <p:nvSpPr>
+          <p:cNvPr id="37" name="text-56"/>
           <p:cNvSpPr txBox="1"/>
           <p:nvPr/>
         </p:nvSpPr>
@@ -4304,7 +4078,7 @@
           <a:bodyPr wrap="square" lIns="0" tIns="0" rIns="0" bIns="0" rtlCol="0" anchor="ctr"/>
           <a:lstStyle/>
           <a:p>
-            <a:pPr marL="0" indent="0" algn="ctr">
+            <a:pPr algn="ctr" indent="0" marL="0">
               <a:buNone/>
             </a:pPr>
             <a:r>
@@ -4324,7 +4098,7 @@
       </p:sp>
       <p:sp>
         <p:nvSpPr>
-          <p:cNvPr id="41" name="Slide Number Placeholder 0"/>
+          <p:cNvPr id="25" name="Slide Number Placeholder 0"/>
           <p:cNvSpPr>
             <a:spLocks noGrp="1"/>
           </p:cNvSpPr>
@@ -4342,7 +4116,7 @@
           </a:prstGeom>
           <a:extLst>
             <a:ext uri="{C572A759-6A51-4108-AA02-DFA0A04FC94B}">
-              <ma14:wrappingTextBoxFlag xmlns:ma14="http://schemas.microsoft.com/office/mac/drawingml/2011/main" xmlns="" val="0"/>
+              <ma14:wrappingTextBoxFlag xmlns:ma14="http://schemas.microsoft.com/office/mac/drawingml/2011/main" val="0"/>
             </a:ext>
           </a:extLst>
         </p:spPr>
@@ -4363,7 +4137,7 @@
           <a:p>
             <a:pPr algn="r"/>
             <a:fld id="{F7021451-1387-4CA6-816F-3879F97B5CBC}" type="slidenum">
-              <a:rPr lang="en-US" b="0"/>
+              <a:rPr b="0" lang="en-US"/>
               <a:t>2</a:t>
             </a:fld>
             <a:endParaRPr lang="en-US"/>
@@ -4398,11 +4172,9 @@
       <p:sp>
         <p:nvSpPr>
           <p:cNvPr id="2" name="Text 0"/>
-          <p:cNvSpPr>
-            <a:spLocks noGrp="1"/>
-          </p:cNvSpPr>
+          <p:cNvSpPr/>
           <p:nvPr>
-            <p:ph type="body" idx="100" hasCustomPrompt="1"/>
+            <p:ph idx="100" type="body" hasCustomPrompt="1"/>
           </p:nvPr>
         </p:nvSpPr>
         <p:spPr>
@@ -4420,11 +4192,11 @@
           <a:bodyPr wrap="square" lIns="0" tIns="0" rIns="0" bIns="0" rtlCol="0" anchor="ctr"/>
           <a:lstStyle/>
           <a:p>
-            <a:pPr marL="0" indent="0">
-              <a:buNone/>
-            </a:pPr>
-            <a:r>
-              <a:rPr lang="en-US" sz="1100" b="1" kern="0" spc="200" dirty="0">
+            <a:pPr indent="0" marL="0">
+              <a:buNone/>
+            </a:pPr>
+            <a:r>
+              <a:rPr lang="en-US" sz="1100" b="1" spc="200" kern="0" dirty="0">
                 <a:solidFill>
                   <a:schemeClr val="accent1"/>
                 </a:solidFill>
@@ -4441,11 +4213,9 @@
       <p:sp>
         <p:nvSpPr>
           <p:cNvPr id="3" name="Text 0"/>
-          <p:cNvSpPr>
-            <a:spLocks noGrp="1"/>
-          </p:cNvSpPr>
+          <p:cNvSpPr/>
           <p:nvPr>
-            <p:ph type="title" idx="101" hasCustomPrompt="1"/>
+            <p:ph idx="101" type="title" hasCustomPrompt="1"/>
           </p:nvPr>
         </p:nvSpPr>
         <p:spPr>
@@ -4463,7 +4233,7 @@
           <a:bodyPr wrap="square" lIns="0" tIns="0" rIns="0" bIns="0" rtlCol="0" anchor="t"/>
           <a:lstStyle/>
           <a:p>
-            <a:pPr marL="0" indent="0" algn="l">
+            <a:pPr algn="l" indent="0" marL="0">
               <a:buNone/>
             </a:pPr>
             <a:r>
@@ -4506,17 +4276,10 @@
             <a:prstDash val="dash"/>
           </a:ln>
         </p:spPr>
-        <p:txBody>
-          <a:bodyPr/>
-          <a:lstStyle/>
-          <a:p>
-            <a:endParaRPr lang="LID4096"/>
-          </a:p>
-        </p:txBody>
-      </p:sp>
-      <p:sp>
-        <p:nvSpPr>
-          <p:cNvPr id="5" name="text-59"/>
+      </p:sp>
+      <p:sp>
+        <p:nvSpPr>
+          <p:cNvPr id="5" name="text-57"/>
           <p:cNvSpPr txBox="1"/>
           <p:nvPr/>
         </p:nvSpPr>
@@ -4535,11 +4298,11 @@
           <a:bodyPr wrap="square" lIns="0" tIns="0" rIns="0" bIns="0" rtlCol="0" anchor="ctr"/>
           <a:lstStyle/>
           <a:p>
-            <a:pPr marL="0" indent="0" algn="l">
-              <a:buNone/>
-            </a:pPr>
-            <a:r>
-              <a:rPr lang="en-US" sz="1100" b="1" kern="0" spc="100" dirty="0">
+            <a:pPr algn="l" indent="0" marL="0">
+              <a:buNone/>
+            </a:pPr>
+            <a:r>
+              <a:rPr lang="en-US" sz="1100" b="1" spc="100" kern="0" dirty="0">
                 <a:solidFill>
                   <a:schemeClr val="accent2"/>
                 </a:solidFill>
@@ -4555,7 +4318,7 @@
       </p:sp>
       <p:sp>
         <p:nvSpPr>
-          <p:cNvPr id="6" name="box-60"/>
+          <p:cNvPr id="6" name="box-58"/>
           <p:cNvSpPr/>
           <p:nvPr/>
         </p:nvSpPr>
@@ -4577,17 +4340,10 @@
             <a:prstDash val="solid"/>
           </a:ln>
         </p:spPr>
-        <p:txBody>
-          <a:bodyPr/>
-          <a:lstStyle/>
-          <a:p>
-            <a:endParaRPr lang="LID4096"/>
-          </a:p>
-        </p:txBody>
-      </p:sp>
-      <p:sp>
-        <p:nvSpPr>
-          <p:cNvPr id="7" name="text-61"/>
+      </p:sp>
+      <p:sp>
+        <p:nvSpPr>
+          <p:cNvPr id="7" name="text-59"/>
           <p:cNvSpPr txBox="1"/>
           <p:nvPr/>
         </p:nvSpPr>
@@ -4606,7 +4362,7 @@
           <a:bodyPr wrap="square" lIns="0" tIns="0" rIns="0" bIns="0" rtlCol="0" anchor="ctr"/>
           <a:lstStyle/>
           <a:p>
-            <a:pPr marL="0" indent="0" algn="ctr">
+            <a:pPr algn="ctr" indent="0" marL="0">
               <a:spcAft>
                 <a:spcPts val="300"/>
               </a:spcAft>
@@ -4623,7 +4379,7 @@
             <a:endParaRPr lang="en-US" sz="1600" dirty="0"/>
           </a:p>
           <a:p>
-            <a:pPr marL="0" indent="0" algn="ctr">
+            <a:pPr algn="ctr" indent="0" marL="0">
               <a:spcAft>
                 <a:spcPts val="300"/>
               </a:spcAft>
@@ -4646,7 +4402,7 @@
       </p:sp>
       <p:sp>
         <p:nvSpPr>
-          <p:cNvPr id="8" name="box-62"/>
+          <p:cNvPr id="8" name="box-60"/>
           <p:cNvSpPr/>
           <p:nvPr/>
         </p:nvSpPr>
@@ -4670,24 +4426,17 @@
             <a:prstDash val="solid"/>
           </a:ln>
           <a:effectLst>
-            <a:outerShdw blurRad="101600" dist="19050" dir="5400000" algn="bl" rotWithShape="0">
+            <a:outerShdw sx="100000" sy="100000" kx="0" ky="0" algn="bl" rotWithShape="0" blurRad="101600" dist="19050" dir="5400000">
               <a:srgbClr val="000000">
                 <a:alpha val="7000"/>
               </a:srgbClr>
             </a:outerShdw>
           </a:effectLst>
         </p:spPr>
-        <p:txBody>
-          <a:bodyPr/>
-          <a:lstStyle/>
-          <a:p>
-            <a:endParaRPr lang="LID4096"/>
-          </a:p>
-        </p:txBody>
-      </p:sp>
-      <p:sp>
-        <p:nvSpPr>
-          <p:cNvPr id="9" name="text-63"/>
+      </p:sp>
+      <p:sp>
+        <p:nvSpPr>
+          <p:cNvPr id="9" name="text-61"/>
           <p:cNvSpPr txBox="1"/>
           <p:nvPr/>
         </p:nvSpPr>
@@ -4706,7 +4455,7 @@
           <a:bodyPr wrap="square" lIns="0" tIns="0" rIns="0" bIns="0" rtlCol="0" anchor="ctr"/>
           <a:lstStyle/>
           <a:p>
-            <a:pPr marL="0" indent="0" algn="ctr">
+            <a:pPr algn="ctr" indent="0" marL="0">
               <a:spcAft>
                 <a:spcPts val="300"/>
               </a:spcAft>
@@ -4723,7 +4472,7 @@
             <a:endParaRPr lang="en-US" sz="1600" dirty="0"/>
           </a:p>
           <a:p>
-            <a:pPr marL="0" indent="0" algn="ctr">
+            <a:pPr algn="ctr" indent="0" marL="0">
               <a:spcAft>
                 <a:spcPts val="300"/>
               </a:spcAft>
@@ -4746,7 +4495,7 @@
       </p:sp>
       <p:sp>
         <p:nvSpPr>
-          <p:cNvPr id="10" name="arrow-64"/>
+          <p:cNvPr id="10" name="arrow-62"/>
           <p:cNvSpPr/>
           <p:nvPr/>
         </p:nvSpPr>
@@ -4767,17 +4516,10 @@
             <a:tailEnd type="triangle"/>
           </a:ln>
         </p:spPr>
-        <p:txBody>
-          <a:bodyPr/>
-          <a:lstStyle/>
-          <a:p>
-            <a:endParaRPr lang="LID4096"/>
-          </a:p>
-        </p:txBody>
-      </p:sp>
-      <p:sp>
-        <p:nvSpPr>
-          <p:cNvPr id="11" name="arrow-65"/>
+      </p:sp>
+      <p:sp>
+        <p:nvSpPr>
+          <p:cNvPr id="11" name="arrow-63"/>
           <p:cNvSpPr/>
           <p:nvPr/>
         </p:nvSpPr>
@@ -4798,17 +4540,10 @@
             <a:tailEnd type="triangle"/>
           </a:ln>
         </p:spPr>
-        <p:txBody>
-          <a:bodyPr/>
-          <a:lstStyle/>
-          <a:p>
-            <a:endParaRPr lang="LID4096"/>
-          </a:p>
-        </p:txBody>
-      </p:sp>
-      <p:sp>
-        <p:nvSpPr>
-          <p:cNvPr id="12" name="tile-66"/>
+      </p:sp>
+      <p:sp>
+        <p:nvSpPr>
+          <p:cNvPr id="12" name="tile-64"/>
           <p:cNvSpPr/>
           <p:nvPr/>
         </p:nvSpPr>
@@ -4830,31 +4565,24 @@
             <a:prstDash val="solid"/>
           </a:ln>
           <a:effectLst>
-            <a:outerShdw blurRad="101600" dist="19050" dir="5400000" algn="bl" rotWithShape="0">
+            <a:outerShdw sx="100000" sy="100000" kx="0" ky="0" algn="bl" rotWithShape="0" blurRad="101600" dist="19050" dir="5400000">
               <a:srgbClr val="000000">
                 <a:alpha val="7000"/>
               </a:srgbClr>
             </a:outerShdw>
           </a:effectLst>
         </p:spPr>
-        <p:txBody>
-          <a:bodyPr/>
-          <a:lstStyle/>
-          <a:p>
-            <a:endParaRPr lang="LID4096"/>
-          </a:p>
-        </p:txBody>
       </p:sp>
       <p:pic>
         <p:nvPicPr>
-          <p:cNvPr id="13" name="icon-67" descr="preencoded.png"/>
+          <p:cNvPr id="13" name="icon-65" descr="preencoded.png">    </p:cNvPr>
           <p:cNvPicPr>
             <a:picLocks noChangeAspect="1"/>
           </p:cNvPicPr>
           <p:nvPr/>
         </p:nvPicPr>
         <p:blipFill>
-          <a:blip r:embed="rId3"/>
+          <a:blip r:embed="rId1"/>
           <a:stretch>
             <a:fillRect/>
           </a:stretch>
@@ -4871,7 +4599,7 @@
       </p:pic>
       <p:sp>
         <p:nvSpPr>
-          <p:cNvPr id="14" name="text-68"/>
+          <p:cNvPr id="14" name="text-66"/>
           <p:cNvSpPr txBox="1"/>
           <p:nvPr/>
         </p:nvSpPr>
@@ -4890,7 +4618,7 @@
           <a:bodyPr wrap="square" lIns="0" tIns="0" rIns="0" bIns="0" rtlCol="0" anchor="ctr"/>
           <a:lstStyle/>
           <a:p>
-            <a:pPr marL="0" indent="0" algn="ctr">
+            <a:pPr algn="ctr" indent="0" marL="0">
               <a:buNone/>
             </a:pPr>
             <a:r>
@@ -4907,7 +4635,7 @@
       </p:sp>
       <p:sp>
         <p:nvSpPr>
-          <p:cNvPr id="15" name="tile-69"/>
+          <p:cNvPr id="15" name="tile-67"/>
           <p:cNvSpPr/>
           <p:nvPr/>
         </p:nvSpPr>
@@ -4929,31 +4657,24 @@
             <a:prstDash val="solid"/>
           </a:ln>
           <a:effectLst>
-            <a:outerShdw blurRad="101600" dist="19050" dir="5400000" algn="bl" rotWithShape="0">
+            <a:outerShdw sx="100000" sy="100000" kx="0" ky="0" algn="bl" rotWithShape="0" blurRad="101600" dist="19050" dir="5400000">
               <a:srgbClr val="000000">
                 <a:alpha val="7000"/>
               </a:srgbClr>
             </a:outerShdw>
           </a:effectLst>
         </p:spPr>
-        <p:txBody>
-          <a:bodyPr/>
-          <a:lstStyle/>
-          <a:p>
-            <a:endParaRPr lang="LID4096"/>
-          </a:p>
-        </p:txBody>
       </p:sp>
       <p:pic>
         <p:nvPicPr>
-          <p:cNvPr id="16" name="icon-70" descr="preencoded.png"/>
+          <p:cNvPr id="16" name="icon-68" descr="preencoded.png">    </p:cNvPr>
           <p:cNvPicPr>
             <a:picLocks noChangeAspect="1"/>
           </p:cNvPicPr>
           <p:nvPr/>
         </p:nvPicPr>
         <p:blipFill>
-          <a:blip r:embed="rId4"/>
+          <a:blip r:embed="rId2"/>
           <a:stretch>
             <a:fillRect/>
           </a:stretch>
@@ -4970,7 +4691,7 @@
       </p:pic>
       <p:sp>
         <p:nvSpPr>
-          <p:cNvPr id="17" name="text-71"/>
+          <p:cNvPr id="17" name="text-69"/>
           <p:cNvSpPr txBox="1"/>
           <p:nvPr/>
         </p:nvSpPr>
@@ -4989,7 +4710,7 @@
           <a:bodyPr wrap="square" lIns="0" tIns="0" rIns="0" bIns="0" rtlCol="0" anchor="ctr"/>
           <a:lstStyle/>
           <a:p>
-            <a:pPr marL="0" indent="0" algn="ctr">
+            <a:pPr algn="ctr" indent="0" marL="0">
               <a:buNone/>
             </a:pPr>
             <a:r>
@@ -5006,7 +4727,7 @@
       </p:sp>
       <p:sp>
         <p:nvSpPr>
-          <p:cNvPr id="18" name="tile-72"/>
+          <p:cNvPr id="18" name="tile-70"/>
           <p:cNvSpPr/>
           <p:nvPr/>
         </p:nvSpPr>
@@ -5028,31 +4749,24 @@
             <a:prstDash val="solid"/>
           </a:ln>
           <a:effectLst>
-            <a:outerShdw blurRad="101600" dist="19050" dir="5400000" algn="bl" rotWithShape="0">
+            <a:outerShdw sx="100000" sy="100000" kx="0" ky="0" algn="bl" rotWithShape="0" blurRad="101600" dist="19050" dir="5400000">
               <a:srgbClr val="000000">
                 <a:alpha val="7000"/>
               </a:srgbClr>
             </a:outerShdw>
           </a:effectLst>
         </p:spPr>
-        <p:txBody>
-          <a:bodyPr/>
-          <a:lstStyle/>
-          <a:p>
-            <a:endParaRPr lang="LID4096"/>
-          </a:p>
-        </p:txBody>
       </p:sp>
       <p:pic>
         <p:nvPicPr>
-          <p:cNvPr id="19" name="icon-73" descr="preencoded.png"/>
+          <p:cNvPr id="19" name="icon-71" descr="preencoded.png">    </p:cNvPr>
           <p:cNvPicPr>
             <a:picLocks noChangeAspect="1"/>
           </p:cNvPicPr>
           <p:nvPr/>
         </p:nvPicPr>
         <p:blipFill>
-          <a:blip r:embed="rId5"/>
+          <a:blip r:embed="rId3"/>
           <a:stretch>
             <a:fillRect/>
           </a:stretch>
@@ -5069,7 +4783,7 @@
       </p:pic>
       <p:sp>
         <p:nvSpPr>
-          <p:cNvPr id="20" name="text-74"/>
+          <p:cNvPr id="20" name="text-72"/>
           <p:cNvSpPr txBox="1"/>
           <p:nvPr/>
         </p:nvSpPr>
@@ -5088,7 +4802,7 @@
           <a:bodyPr wrap="square" lIns="0" tIns="0" rIns="0" bIns="0" rtlCol="0" anchor="ctr"/>
           <a:lstStyle/>
           <a:p>
-            <a:pPr marL="0" indent="0" algn="ctr">
+            <a:pPr algn="ctr" indent="0" marL="0">
               <a:buNone/>
             </a:pPr>
             <a:r>
@@ -5105,7 +4819,7 @@
       </p:sp>
       <p:sp>
         <p:nvSpPr>
-          <p:cNvPr id="21" name="tile-75"/>
+          <p:cNvPr id="21" name="tile-73"/>
           <p:cNvSpPr/>
           <p:nvPr/>
         </p:nvSpPr>
@@ -5127,31 +4841,24 @@
             <a:prstDash val="solid"/>
           </a:ln>
           <a:effectLst>
-            <a:outerShdw blurRad="101600" dist="19050" dir="5400000" algn="bl" rotWithShape="0">
+            <a:outerShdw sx="100000" sy="100000" kx="0" ky="0" algn="bl" rotWithShape="0" blurRad="101600" dist="19050" dir="5400000">
               <a:srgbClr val="000000">
                 <a:alpha val="7000"/>
               </a:srgbClr>
             </a:outerShdw>
           </a:effectLst>
         </p:spPr>
-        <p:txBody>
-          <a:bodyPr/>
-          <a:lstStyle/>
-          <a:p>
-            <a:endParaRPr lang="LID4096"/>
-          </a:p>
-        </p:txBody>
       </p:sp>
       <p:pic>
         <p:nvPicPr>
-          <p:cNvPr id="22" name="icon-76" descr="preencoded.png"/>
+          <p:cNvPr id="22" name="icon-74" descr="preencoded.png">    </p:cNvPr>
           <p:cNvPicPr>
             <a:picLocks noChangeAspect="1"/>
           </p:cNvPicPr>
           <p:nvPr/>
         </p:nvPicPr>
         <p:blipFill>
-          <a:blip r:embed="rId6"/>
+          <a:blip r:embed="rId4"/>
           <a:stretch>
             <a:fillRect/>
           </a:stretch>
@@ -5168,7 +4875,7 @@
       </p:pic>
       <p:sp>
         <p:nvSpPr>
-          <p:cNvPr id="23" name="text-77"/>
+          <p:cNvPr id="23" name="text-75"/>
           <p:cNvSpPr txBox="1"/>
           <p:nvPr/>
         </p:nvSpPr>
@@ -5187,7 +4894,7 @@
           <a:bodyPr wrap="square" lIns="0" tIns="0" rIns="0" bIns="0" rtlCol="0" anchor="ctr"/>
           <a:lstStyle/>
           <a:p>
-            <a:pPr marL="0" indent="0" algn="ctr">
+            <a:pPr algn="ctr" indent="0" marL="0">
               <a:buNone/>
             </a:pPr>
             <a:r>
@@ -5204,7 +4911,7 @@
       </p:sp>
       <p:sp>
         <p:nvSpPr>
-          <p:cNvPr id="24" name="tile-78"/>
+          <p:cNvPr id="24" name="tile-76"/>
           <p:cNvSpPr/>
           <p:nvPr/>
         </p:nvSpPr>
@@ -5226,31 +4933,24 @@
             <a:prstDash val="solid"/>
           </a:ln>
           <a:effectLst>
-            <a:outerShdw blurRad="101600" dist="19050" dir="5400000" algn="bl" rotWithShape="0">
+            <a:outerShdw sx="100000" sy="100000" kx="0" ky="0" algn="bl" rotWithShape="0" blurRad="101600" dist="19050" dir="5400000">
               <a:srgbClr val="000000">
                 <a:alpha val="7000"/>
               </a:srgbClr>
             </a:outerShdw>
           </a:effectLst>
         </p:spPr>
-        <p:txBody>
-          <a:bodyPr/>
-          <a:lstStyle/>
-          <a:p>
-            <a:endParaRPr lang="LID4096"/>
-          </a:p>
-        </p:txBody>
       </p:sp>
       <p:pic>
         <p:nvPicPr>
-          <p:cNvPr id="25" name="icon-79" descr="preencoded.png"/>
+          <p:cNvPr id="25" name="icon-77" descr="preencoded.png">    </p:cNvPr>
           <p:cNvPicPr>
             <a:picLocks noChangeAspect="1"/>
           </p:cNvPicPr>
           <p:nvPr/>
         </p:nvPicPr>
         <p:blipFill>
-          <a:blip r:embed="rId7"/>
+          <a:blip r:embed="rId5"/>
           <a:stretch>
             <a:fillRect/>
           </a:stretch>
@@ -5267,7 +4967,7 @@
       </p:pic>
       <p:sp>
         <p:nvSpPr>
-          <p:cNvPr id="26" name="text-80"/>
+          <p:cNvPr id="26" name="text-78"/>
           <p:cNvSpPr txBox="1"/>
           <p:nvPr/>
         </p:nvSpPr>
@@ -5286,7 +4986,7 @@
           <a:bodyPr wrap="square" lIns="0" tIns="0" rIns="0" bIns="0" rtlCol="0" anchor="ctr"/>
           <a:lstStyle/>
           <a:p>
-            <a:pPr marL="0" indent="0" algn="ctr">
+            <a:pPr algn="ctr" indent="0" marL="0">
               <a:buNone/>
             </a:pPr>
             <a:r>
@@ -5303,7 +5003,7 @@
       </p:sp>
       <p:sp>
         <p:nvSpPr>
-          <p:cNvPr id="27" name="tile-81"/>
+          <p:cNvPr id="27" name="tile-79"/>
           <p:cNvSpPr/>
           <p:nvPr/>
         </p:nvSpPr>
@@ -5325,31 +5025,24 @@
             <a:prstDash val="solid"/>
           </a:ln>
           <a:effectLst>
-            <a:outerShdw blurRad="101600" dist="19050" dir="5400000" algn="bl" rotWithShape="0">
+            <a:outerShdw sx="100000" sy="100000" kx="0" ky="0" algn="bl" rotWithShape="0" blurRad="101600" dist="19050" dir="5400000">
               <a:srgbClr val="000000">
                 <a:alpha val="7000"/>
               </a:srgbClr>
             </a:outerShdw>
           </a:effectLst>
         </p:spPr>
-        <p:txBody>
-          <a:bodyPr/>
-          <a:lstStyle/>
-          <a:p>
-            <a:endParaRPr lang="LID4096"/>
-          </a:p>
-        </p:txBody>
       </p:sp>
       <p:pic>
         <p:nvPicPr>
-          <p:cNvPr id="28" name="icon-82" descr="preencoded.png"/>
+          <p:cNvPr id="28" name="icon-80" descr="preencoded.png">    </p:cNvPr>
           <p:cNvPicPr>
             <a:picLocks noChangeAspect="1"/>
           </p:cNvPicPr>
           <p:nvPr/>
         </p:nvPicPr>
         <p:blipFill>
-          <a:blip r:embed="rId8"/>
+          <a:blip r:embed="rId6"/>
           <a:stretch>
             <a:fillRect/>
           </a:stretch>
@@ -5366,7 +5059,7 @@
       </p:pic>
       <p:sp>
         <p:nvSpPr>
-          <p:cNvPr id="29" name="text-83"/>
+          <p:cNvPr id="29" name="text-81"/>
           <p:cNvSpPr txBox="1"/>
           <p:nvPr/>
         </p:nvSpPr>
@@ -5385,7 +5078,7 @@
           <a:bodyPr wrap="square" lIns="0" tIns="0" rIns="0" bIns="0" rtlCol="0" anchor="ctr"/>
           <a:lstStyle/>
           <a:p>
-            <a:pPr marL="0" indent="0" algn="ctr">
+            <a:pPr algn="ctr" indent="0" marL="0">
               <a:buNone/>
             </a:pPr>
             <a:r>
@@ -5402,7 +5095,7 @@
       </p:sp>
       <p:sp>
         <p:nvSpPr>
-          <p:cNvPr id="30" name="box-84"/>
+          <p:cNvPr id="30" name="box-82"/>
           <p:cNvSpPr/>
           <p:nvPr/>
         </p:nvSpPr>
@@ -5426,24 +5119,17 @@
             <a:prstDash val="solid"/>
           </a:ln>
           <a:effectLst>
-            <a:outerShdw blurRad="101600" dist="19050" dir="5400000" algn="bl" rotWithShape="0">
+            <a:outerShdw sx="100000" sy="100000" kx="0" ky="0" algn="bl" rotWithShape="0" blurRad="101600" dist="19050" dir="5400000">
               <a:srgbClr val="000000">
                 <a:alpha val="7000"/>
               </a:srgbClr>
             </a:outerShdw>
           </a:effectLst>
         </p:spPr>
-        <p:txBody>
-          <a:bodyPr/>
-          <a:lstStyle/>
-          <a:p>
-            <a:endParaRPr lang="LID4096"/>
-          </a:p>
-        </p:txBody>
-      </p:sp>
-      <p:sp>
-        <p:nvSpPr>
-          <p:cNvPr id="31" name="text-85"/>
+      </p:sp>
+      <p:sp>
+        <p:nvSpPr>
+          <p:cNvPr id="31" name="text-83"/>
           <p:cNvSpPr txBox="1"/>
           <p:nvPr/>
         </p:nvSpPr>
@@ -5462,7 +5148,7 @@
           <a:bodyPr wrap="square" lIns="0" tIns="0" rIns="0" bIns="0" rtlCol="0" anchor="ctr"/>
           <a:lstStyle/>
           <a:p>
-            <a:pPr marL="0" indent="0" algn="ctr">
+            <a:pPr algn="ctr" indent="0" marL="0">
               <a:spcAft>
                 <a:spcPts val="300"/>
               </a:spcAft>
@@ -5479,7 +5165,7 @@
             <a:endParaRPr lang="en-US" sz="1600" dirty="0"/>
           </a:p>
           <a:p>
-            <a:pPr marL="0" indent="0" algn="ctr">
+            <a:pPr algn="ctr" indent="0" marL="0">
               <a:spcAft>
                 <a:spcPts val="300"/>
               </a:spcAft>
@@ -5502,7 +5188,7 @@
       </p:sp>
       <p:sp>
         <p:nvSpPr>
-          <p:cNvPr id="32" name="arrow-86"/>
+          <p:cNvPr id="32" name="arrow-84"/>
           <p:cNvSpPr/>
           <p:nvPr/>
         </p:nvSpPr>
@@ -5524,17 +5210,10 @@
             <a:tailEnd type="triangle"/>
           </a:ln>
         </p:spPr>
-        <p:txBody>
-          <a:bodyPr/>
-          <a:lstStyle/>
-          <a:p>
-            <a:endParaRPr lang="LID4096"/>
-          </a:p>
-        </p:txBody>
-      </p:sp>
-      <p:sp>
-        <p:nvSpPr>
-          <p:cNvPr id="33" name="box-87"/>
+      </p:sp>
+      <p:sp>
+        <p:nvSpPr>
+          <p:cNvPr id="33" name="box-85"/>
           <p:cNvSpPr/>
           <p:nvPr/>
         </p:nvSpPr>
@@ -5556,17 +5235,10 @@
             <a:prstDash val="solid"/>
           </a:ln>
         </p:spPr>
-        <p:txBody>
-          <a:bodyPr/>
-          <a:lstStyle/>
-          <a:p>
-            <a:endParaRPr lang="LID4096"/>
-          </a:p>
-        </p:txBody>
-      </p:sp>
-      <p:sp>
-        <p:nvSpPr>
-          <p:cNvPr id="34" name="text-88"/>
+      </p:sp>
+      <p:sp>
+        <p:nvSpPr>
+          <p:cNvPr id="34" name="text-86"/>
           <p:cNvSpPr txBox="1"/>
           <p:nvPr/>
         </p:nvSpPr>
@@ -5585,7 +5257,7 @@
           <a:bodyPr wrap="square" lIns="0" tIns="0" rIns="0" bIns="0" rtlCol="0" anchor="ctr"/>
           <a:lstStyle/>
           <a:p>
-            <a:pPr marL="0" indent="0" algn="ctr">
+            <a:pPr algn="ctr" indent="0" marL="0">
               <a:spcAft>
                 <a:spcPts val="300"/>
               </a:spcAft>
@@ -5602,7 +5274,7 @@
             <a:endParaRPr lang="en-US" sz="1600" dirty="0"/>
           </a:p>
           <a:p>
-            <a:pPr marL="0" indent="0" algn="ctr">
+            <a:pPr algn="ctr" indent="0" marL="0">
               <a:spcAft>
                 <a:spcPts val="300"/>
               </a:spcAft>
@@ -5625,7 +5297,7 @@
       </p:sp>
       <p:sp>
         <p:nvSpPr>
-          <p:cNvPr id="35" name="arrow-89"/>
+          <p:cNvPr id="35" name="arrow-87"/>
           <p:cNvSpPr/>
           <p:nvPr/>
         </p:nvSpPr>
@@ -5646,17 +5318,10 @@
             <a:tailEnd type="triangle"/>
           </a:ln>
         </p:spPr>
-        <p:txBody>
-          <a:bodyPr/>
-          <a:lstStyle/>
-          <a:p>
-            <a:endParaRPr lang="LID4096"/>
-          </a:p>
-        </p:txBody>
-      </p:sp>
-      <p:sp>
-        <p:nvSpPr>
-          <p:cNvPr id="36" name="box-90"/>
+      </p:sp>
+      <p:sp>
+        <p:nvSpPr>
+          <p:cNvPr id="36" name="box-88"/>
           <p:cNvSpPr/>
           <p:nvPr/>
         </p:nvSpPr>
@@ -5678,17 +5343,10 @@
             <a:prstDash val="solid"/>
           </a:ln>
         </p:spPr>
-        <p:txBody>
-          <a:bodyPr/>
-          <a:lstStyle/>
-          <a:p>
-            <a:endParaRPr lang="LID4096"/>
-          </a:p>
-        </p:txBody>
-      </p:sp>
-      <p:sp>
-        <p:nvSpPr>
-          <p:cNvPr id="37" name="text-91"/>
+      </p:sp>
+      <p:sp>
+        <p:nvSpPr>
+          <p:cNvPr id="37" name="text-89"/>
           <p:cNvSpPr txBox="1"/>
           <p:nvPr/>
         </p:nvSpPr>
@@ -5707,7 +5365,7 @@
           <a:bodyPr wrap="square" lIns="0" tIns="0" rIns="0" bIns="0" rtlCol="0" anchor="ctr"/>
           <a:lstStyle/>
           <a:p>
-            <a:pPr marL="0" indent="0" algn="ctr">
+            <a:pPr algn="ctr" indent="0" marL="0">
               <a:spcAft>
                 <a:spcPts val="300"/>
               </a:spcAft>
@@ -5724,7 +5382,7 @@
             <a:endParaRPr lang="en-US" sz="1600" dirty="0"/>
           </a:p>
           <a:p>
-            <a:pPr marL="0" indent="0" algn="ctr">
+            <a:pPr algn="ctr" indent="0" marL="0">
               <a:spcAft>
                 <a:spcPts val="300"/>
               </a:spcAft>
@@ -5747,7 +5405,7 @@
       </p:sp>
       <p:sp>
         <p:nvSpPr>
-          <p:cNvPr id="38" name="Slide Number Placeholder 0"/>
+          <p:cNvPr id="25" name="Slide Number Placeholder 0"/>
           <p:cNvSpPr>
             <a:spLocks noGrp="1"/>
           </p:cNvSpPr>
@@ -5765,7 +5423,7 @@
           </a:prstGeom>
           <a:extLst>
             <a:ext uri="{C572A759-6A51-4108-AA02-DFA0A04FC94B}">
-              <ma14:wrappingTextBoxFlag xmlns:ma14="http://schemas.microsoft.com/office/mac/drawingml/2011/main" xmlns="" val="0"/>
+              <ma14:wrappingTextBoxFlag xmlns:ma14="http://schemas.microsoft.com/office/mac/drawingml/2011/main" val="0"/>
             </a:ext>
           </a:extLst>
         </p:spPr>
@@ -5786,7 +5444,7 @@
           <a:p>
             <a:pPr algn="r"/>
             <a:fld id="{F7021451-1387-4CA6-816F-3879F97B5CBC}" type="slidenum">
-              <a:rPr lang="en-US" b="0"/>
+              <a:rPr b="0" lang="en-US"/>
               <a:t>3</a:t>
             </a:fld>
             <a:endParaRPr lang="en-US"/>
@@ -5821,11 +5479,9 @@
       <p:sp>
         <p:nvSpPr>
           <p:cNvPr id="2" name="Text 0"/>
-          <p:cNvSpPr>
-            <a:spLocks noGrp="1"/>
-          </p:cNvSpPr>
+          <p:cNvSpPr/>
           <p:nvPr>
-            <p:ph type="body" idx="100" hasCustomPrompt="1"/>
+            <p:ph idx="100" type="body" hasCustomPrompt="1"/>
           </p:nvPr>
         </p:nvSpPr>
         <p:spPr>
@@ -5843,11 +5499,11 @@
           <a:bodyPr wrap="square" lIns="0" tIns="0" rIns="0" bIns="0" rtlCol="0" anchor="ctr"/>
           <a:lstStyle/>
           <a:p>
-            <a:pPr marL="0" indent="0">
-              <a:buNone/>
-            </a:pPr>
-            <a:r>
-              <a:rPr lang="en-US" sz="1100" b="1" kern="0" spc="200" dirty="0">
+            <a:pPr indent="0" marL="0">
+              <a:buNone/>
+            </a:pPr>
+            <a:r>
+              <a:rPr lang="en-US" sz="1100" b="1" spc="200" kern="0" dirty="0">
                 <a:solidFill>
                   <a:schemeClr val="accent1"/>
                 </a:solidFill>
@@ -5864,11 +5520,9 @@
       <p:sp>
         <p:nvSpPr>
           <p:cNvPr id="3" name="Text 0"/>
-          <p:cNvSpPr>
-            <a:spLocks noGrp="1"/>
-          </p:cNvSpPr>
+          <p:cNvSpPr/>
           <p:nvPr>
-            <p:ph type="title" idx="101" hasCustomPrompt="1"/>
+            <p:ph idx="101" type="title" hasCustomPrompt="1"/>
           </p:nvPr>
         </p:nvSpPr>
         <p:spPr>
@@ -5886,7 +5540,7 @@
           <a:bodyPr wrap="square" lIns="0" tIns="0" rIns="0" bIns="0" rtlCol="0" anchor="t"/>
           <a:lstStyle/>
           <a:p>
-            <a:pPr marL="0" indent="0" algn="l">
+            <a:pPr algn="l" indent="0" marL="0">
               <a:buNone/>
             </a:pPr>
             <a:r>
@@ -5903,7 +5557,7 @@
       </p:sp>
       <p:sp>
         <p:nvSpPr>
-          <p:cNvPr id="5" name="tile-92"/>
+          <p:cNvPr id="4" name="tile-90"/>
           <p:cNvSpPr/>
           <p:nvPr/>
         </p:nvSpPr>
@@ -5925,31 +5579,24 @@
             <a:prstDash val="solid"/>
           </a:ln>
           <a:effectLst>
-            <a:outerShdw blurRad="101600" dist="19050" dir="5400000" algn="bl" rotWithShape="0">
+            <a:outerShdw sx="100000" sy="100000" kx="0" ky="0" algn="bl" rotWithShape="0" blurRad="101600" dist="19050" dir="5400000">
               <a:srgbClr val="000000">
                 <a:alpha val="7000"/>
               </a:srgbClr>
             </a:outerShdw>
           </a:effectLst>
         </p:spPr>
-        <p:txBody>
-          <a:bodyPr/>
-          <a:lstStyle/>
-          <a:p>
-            <a:endParaRPr lang="LID4096"/>
-          </a:p>
-        </p:txBody>
       </p:sp>
       <p:pic>
         <p:nvPicPr>
-          <p:cNvPr id="6" name="icon-93" descr="preencoded.png"/>
+          <p:cNvPr id="5" name="icon-91" descr="preencoded.png">    </p:cNvPr>
           <p:cNvPicPr>
             <a:picLocks noChangeAspect="1"/>
           </p:cNvPicPr>
           <p:nvPr/>
         </p:nvPicPr>
         <p:blipFill>
-          <a:blip r:embed="rId3"/>
+          <a:blip r:embed="rId1"/>
           <a:stretch>
             <a:fillRect/>
           </a:stretch>
@@ -5966,7 +5613,7 @@
       </p:pic>
       <p:sp>
         <p:nvSpPr>
-          <p:cNvPr id="7" name="text-94"/>
+          <p:cNvPr id="6" name="text-92"/>
           <p:cNvSpPr txBox="1"/>
           <p:nvPr/>
         </p:nvSpPr>
@@ -5985,7 +5632,7 @@
           <a:bodyPr wrap="square" lIns="0" tIns="0" rIns="0" bIns="0" rtlCol="0" anchor="ctr"/>
           <a:lstStyle/>
           <a:p>
-            <a:pPr marL="0" indent="0" algn="ctr">
+            <a:pPr algn="ctr" indent="0" marL="0">
               <a:buNone/>
             </a:pPr>
             <a:r>
@@ -6002,7 +5649,7 @@
       </p:sp>
       <p:sp>
         <p:nvSpPr>
-          <p:cNvPr id="8" name="tx"/>
+          <p:cNvPr id="7" name="tx"/>
           <p:cNvSpPr/>
           <p:nvPr/>
         </p:nvSpPr>
@@ -6026,24 +5673,17 @@
             <a:prstDash val="solid"/>
           </a:ln>
           <a:effectLst>
-            <a:outerShdw blurRad="101600" dist="19050" dir="5400000" algn="bl" rotWithShape="0">
+            <a:outerShdw sx="100000" sy="100000" kx="0" ky="0" algn="bl" rotWithShape="0" blurRad="101600" dist="19050" dir="5400000">
               <a:srgbClr val="000000">
                 <a:alpha val="7000"/>
               </a:srgbClr>
             </a:outerShdw>
           </a:effectLst>
         </p:spPr>
-        <p:txBody>
-          <a:bodyPr/>
-          <a:lstStyle/>
-          <a:p>
-            <a:endParaRPr lang="LID4096"/>
-          </a:p>
-        </p:txBody>
-      </p:sp>
-      <p:sp>
-        <p:nvSpPr>
-          <p:cNvPr id="9" name="text-95"/>
+      </p:sp>
+      <p:sp>
+        <p:nvSpPr>
+          <p:cNvPr id="8" name="text-93"/>
           <p:cNvSpPr txBox="1"/>
           <p:nvPr/>
         </p:nvSpPr>
@@ -6062,11 +5702,11 @@
           <a:bodyPr wrap="square" lIns="0" tIns="0" rIns="0" bIns="0" rtlCol="0" anchor="ctr"/>
           <a:lstStyle/>
           <a:p>
-            <a:pPr marL="0" indent="0" algn="ctr">
-              <a:buNone/>
-            </a:pPr>
-            <a:r>
-              <a:rPr lang="en-US" sz="1100" b="1" kern="0" spc="100" dirty="0">
+            <a:pPr algn="ctr" indent="0" marL="0">
+              <a:buNone/>
+            </a:pPr>
+            <a:r>
+              <a:rPr lang="en-US" sz="1100" b="1" spc="100" kern="0" dirty="0">
                 <a:solidFill>
                   <a:schemeClr val="accent1"/>
                 </a:solidFill>
@@ -6082,7 +5722,7 @@
       </p:sp>
       <p:sp>
         <p:nvSpPr>
-          <p:cNvPr id="10" name="box-96"/>
+          <p:cNvPr id="9" name="box-94"/>
           <p:cNvSpPr/>
           <p:nvPr/>
         </p:nvSpPr>
@@ -6104,17 +5744,10 @@
             <a:prstDash val="solid"/>
           </a:ln>
         </p:spPr>
-        <p:txBody>
-          <a:bodyPr/>
-          <a:lstStyle/>
-          <a:p>
-            <a:endParaRPr lang="LID4096"/>
-          </a:p>
-        </p:txBody>
-      </p:sp>
-      <p:sp>
-        <p:nvSpPr>
-          <p:cNvPr id="11" name="text-97"/>
+      </p:sp>
+      <p:sp>
+        <p:nvSpPr>
+          <p:cNvPr id="10" name="text-95"/>
           <p:cNvSpPr txBox="1"/>
           <p:nvPr/>
         </p:nvSpPr>
@@ -6133,7 +5766,7 @@
           <a:bodyPr wrap="square" lIns="0" tIns="0" rIns="0" bIns="0" rtlCol="0" anchor="ctr"/>
           <a:lstStyle/>
           <a:p>
-            <a:pPr marL="0" indent="0" algn="ctr">
+            <a:pPr algn="ctr" indent="0" marL="0">
               <a:spcAft>
                 <a:spcPts val="300"/>
               </a:spcAft>
@@ -6153,7 +5786,7 @@
       </p:sp>
       <p:sp>
         <p:nvSpPr>
-          <p:cNvPr id="12" name="box-98"/>
+          <p:cNvPr id="11" name="box-96"/>
           <p:cNvSpPr/>
           <p:nvPr/>
         </p:nvSpPr>
@@ -6175,17 +5808,10 @@
             <a:prstDash val="solid"/>
           </a:ln>
         </p:spPr>
-        <p:txBody>
-          <a:bodyPr/>
-          <a:lstStyle/>
-          <a:p>
-            <a:endParaRPr lang="LID4096"/>
-          </a:p>
-        </p:txBody>
-      </p:sp>
-      <p:sp>
-        <p:nvSpPr>
-          <p:cNvPr id="13" name="text-99"/>
+      </p:sp>
+      <p:sp>
+        <p:nvSpPr>
+          <p:cNvPr id="12" name="text-97"/>
           <p:cNvSpPr txBox="1"/>
           <p:nvPr/>
         </p:nvSpPr>
@@ -6204,7 +5830,7 @@
           <a:bodyPr wrap="square" lIns="0" tIns="0" rIns="0" bIns="0" rtlCol="0" anchor="ctr"/>
           <a:lstStyle/>
           <a:p>
-            <a:pPr marL="0" indent="0" algn="ctr">
+            <a:pPr algn="ctr" indent="0" marL="0">
               <a:spcAft>
                 <a:spcPts val="300"/>
               </a:spcAft>
@@ -6224,7 +5850,7 @@
       </p:sp>
       <p:sp>
         <p:nvSpPr>
-          <p:cNvPr id="14" name="box-100"/>
+          <p:cNvPr id="13" name="box-98"/>
           <p:cNvSpPr/>
           <p:nvPr/>
         </p:nvSpPr>
@@ -6246,24 +5872,17 @@
             <a:prstDash val="solid"/>
           </a:ln>
           <a:effectLst>
-            <a:outerShdw blurRad="101600" dist="19050" dir="5400000" algn="bl" rotWithShape="0">
+            <a:outerShdw sx="100000" sy="100000" kx="0" ky="0" algn="bl" rotWithShape="0" blurRad="101600" dist="19050" dir="5400000">
               <a:srgbClr val="000000">
                 <a:alpha val="7000"/>
               </a:srgbClr>
             </a:outerShdw>
           </a:effectLst>
         </p:spPr>
-        <p:txBody>
-          <a:bodyPr/>
-          <a:lstStyle/>
-          <a:p>
-            <a:endParaRPr lang="LID4096"/>
-          </a:p>
-        </p:txBody>
-      </p:sp>
-      <p:sp>
-        <p:nvSpPr>
-          <p:cNvPr id="15" name="text-101"/>
+      </p:sp>
+      <p:sp>
+        <p:nvSpPr>
+          <p:cNvPr id="14" name="text-99"/>
           <p:cNvSpPr txBox="1"/>
           <p:nvPr/>
         </p:nvSpPr>
@@ -6282,7 +5901,7 @@
           <a:bodyPr wrap="square" lIns="0" tIns="0" rIns="0" bIns="0" rtlCol="0" anchor="ctr"/>
           <a:lstStyle/>
           <a:p>
-            <a:pPr marL="0" indent="0" algn="ctr">
+            <a:pPr algn="ctr" indent="0" marL="0">
               <a:spcAft>
                 <a:spcPts val="300"/>
               </a:spcAft>
@@ -6299,7 +5918,7 @@
             <a:endParaRPr lang="en-US" sz="1600" dirty="0"/>
           </a:p>
           <a:p>
-            <a:pPr marL="0" indent="0" algn="ctr">
+            <a:pPr algn="ctr" indent="0" marL="0">
               <a:spcAft>
                 <a:spcPts val="300"/>
               </a:spcAft>
@@ -6322,7 +5941,7 @@
       </p:sp>
       <p:sp>
         <p:nvSpPr>
-          <p:cNvPr id="16" name="tile-102"/>
+          <p:cNvPr id="15" name="tile-100"/>
           <p:cNvSpPr/>
           <p:nvPr/>
         </p:nvSpPr>
@@ -6344,24 +5963,245 @@
             <a:prstDash val="solid"/>
           </a:ln>
           <a:effectLst>
-            <a:outerShdw blurRad="101600" dist="19050" dir="5400000" algn="bl" rotWithShape="0">
+            <a:outerShdw sx="100000" sy="100000" kx="0" ky="0" algn="bl" rotWithShape="0" blurRad="101600" dist="19050" dir="5400000">
               <a:srgbClr val="000000">
                 <a:alpha val="7000"/>
               </a:srgbClr>
             </a:outerShdw>
           </a:effectLst>
         </p:spPr>
-        <p:txBody>
-          <a:bodyPr/>
-          <a:lstStyle/>
-          <a:p>
-            <a:endParaRPr lang="LID4096"/>
-          </a:p>
-        </p:txBody>
       </p:sp>
       <p:pic>
         <p:nvPicPr>
-          <p:cNvPr id="17" name="icon-103" descr="preencoded.png"/>
+          <p:cNvPr id="16" name="icon-101" descr="preencoded.png">    </p:cNvPr>
+          <p:cNvPicPr>
+            <a:picLocks noChangeAspect="1"/>
+          </p:cNvPicPr>
+          <p:nvPr/>
+        </p:nvPicPr>
+        <p:blipFill>
+          <a:blip r:embed="rId2"/>
+          <a:stretch>
+            <a:fillRect/>
+          </a:stretch>
+        </p:blipFill>
+        <p:spPr>
+          <a:xfrm>
+            <a:off x="10379812" y="2773375"/>
+            <a:ext cx="347472" cy="347472"/>
+          </a:xfrm>
+          <a:prstGeom prst="rect">
+            <a:avLst/>
+          </a:prstGeom>
+        </p:spPr>
+      </p:pic>
+      <p:sp>
+        <p:nvSpPr>
+          <p:cNvPr id="17" name="text-102"/>
+          <p:cNvSpPr txBox="1"/>
+          <p:nvPr/>
+        </p:nvSpPr>
+        <p:spPr>
+          <a:xfrm>
+            <a:off x="9464040" y="3175711"/>
+            <a:ext cx="2179015" cy="274320"/>
+          </a:xfrm>
+          <a:prstGeom prst="rect">
+            <a:avLst/>
+          </a:prstGeom>
+          <a:noFill/>
+          <a:ln/>
+        </p:spPr>
+        <p:txBody>
+          <a:bodyPr wrap="square" lIns="0" tIns="0" rIns="0" bIns="0" rtlCol="0" anchor="ctr"/>
+          <a:lstStyle/>
+          <a:p>
+            <a:pPr algn="ctr" indent="0" marL="0">
+              <a:buNone/>
+            </a:pPr>
+            <a:r>
+              <a:rPr lang="en-US" sz="1400" b="1" dirty="0">
+                <a:solidFill>
+                  <a:schemeClr val="tx1"/>
+                </a:solidFill>
+              </a:rPr>
+              <a:t>Огласи</a:t>
+            </a:r>
+            <a:endParaRPr lang="en-US" sz="1400" dirty="0"/>
+          </a:p>
+        </p:txBody>
+      </p:sp>
+      <p:sp>
+        <p:nvSpPr>
+          <p:cNvPr id="18" name="arrow-103"/>
+          <p:cNvSpPr/>
+          <p:nvPr/>
+        </p:nvSpPr>
+        <p:spPr>
+          <a:xfrm>
+            <a:off x="2606040" y="3177540"/>
+            <a:ext cx="411480" cy="0"/>
+          </a:xfrm>
+          <a:prstGeom prst="line">
+            <a:avLst/>
+          </a:prstGeom>
+          <a:noFill/>
+          <a:ln w="25400">
+            <a:solidFill>
+              <a:schemeClr val="accent1"/>
+            </a:solidFill>
+            <a:prstDash val="solid"/>
+            <a:tailEnd type="triangle"/>
+          </a:ln>
+        </p:spPr>
+      </p:sp>
+      <p:sp>
+        <p:nvSpPr>
+          <p:cNvPr id="19" name="arrow-104"/>
+          <p:cNvSpPr/>
+          <p:nvPr/>
+        </p:nvSpPr>
+        <p:spPr>
+          <a:xfrm>
+            <a:off x="6675120" y="3177540"/>
+            <a:ext cx="411480" cy="0"/>
+          </a:xfrm>
+          <a:prstGeom prst="line">
+            <a:avLst/>
+          </a:prstGeom>
+          <a:noFill/>
+          <a:ln w="25400">
+            <a:solidFill>
+              <a:schemeClr val="accent1"/>
+            </a:solidFill>
+            <a:prstDash val="solid"/>
+            <a:tailEnd type="triangle"/>
+          </a:ln>
+        </p:spPr>
+      </p:sp>
+      <p:sp>
+        <p:nvSpPr>
+          <p:cNvPr id="20" name="arrow-105"/>
+          <p:cNvSpPr/>
+          <p:nvPr/>
+        </p:nvSpPr>
+        <p:spPr>
+          <a:xfrm>
+            <a:off x="9006840" y="3177540"/>
+            <a:ext cx="411480" cy="0"/>
+          </a:xfrm>
+          <a:prstGeom prst="line">
+            <a:avLst/>
+          </a:prstGeom>
+          <a:noFill/>
+          <a:ln w="25400">
+            <a:solidFill>
+              <a:schemeClr val="accent1"/>
+            </a:solidFill>
+            <a:prstDash val="solid"/>
+            <a:tailEnd type="triangle"/>
+          </a:ln>
+        </p:spPr>
+      </p:sp>
+      <p:pic>
+        <p:nvPicPr>
+          <p:cNvPr id="21" name="icon-106" descr="preencoded.png">    </p:cNvPr>
+          <p:cNvPicPr>
+            <a:picLocks noChangeAspect="1"/>
+          </p:cNvPicPr>
+          <p:nvPr/>
+        </p:nvPicPr>
+        <p:blipFill>
+          <a:blip r:embed="rId3"/>
+          <a:stretch>
+            <a:fillRect/>
+          </a:stretch>
+        </p:blipFill>
+        <p:spPr>
+          <a:xfrm>
+            <a:off x="548640" y="4617720"/>
+            <a:ext cx="365760" cy="365760"/>
+          </a:xfrm>
+          <a:prstGeom prst="rect">
+            <a:avLst/>
+          </a:prstGeom>
+        </p:spPr>
+      </p:pic>
+      <p:sp>
+        <p:nvSpPr>
+          <p:cNvPr id="22" name="text-107"/>
+          <p:cNvSpPr txBox="1"/>
+          <p:nvPr/>
+        </p:nvSpPr>
+        <p:spPr>
+          <a:xfrm>
+            <a:off x="1051560" y="4572000"/>
+            <a:ext cx="3012338" cy="411480"/>
+          </a:xfrm>
+          <a:prstGeom prst="rect">
+            <a:avLst/>
+          </a:prstGeom>
+          <a:noFill/>
+          <a:ln/>
+        </p:spPr>
+        <p:txBody>
+          <a:bodyPr wrap="square" lIns="0" tIns="0" rIns="0" bIns="0" rtlCol="0" anchor="ctr"/>
+          <a:lstStyle/>
+          <a:p>
+            <a:pPr indent="0" marL="0">
+              <a:buNone/>
+            </a:pPr>
+            <a:r>
+              <a:rPr lang="en-US" sz="1800" b="1" dirty="0">
+                <a:solidFill>
+                  <a:schemeClr val="tx1"/>
+                </a:solidFill>
+              </a:rPr>
+              <a:t>Или двете, или ниедно</a:t>
+            </a:r>
+            <a:endParaRPr lang="en-US" sz="1800" dirty="0"/>
+          </a:p>
+        </p:txBody>
+      </p:sp>
+      <p:sp>
+        <p:nvSpPr>
+          <p:cNvPr id="23" name="text-108"/>
+          <p:cNvSpPr txBox="1"/>
+          <p:nvPr/>
+        </p:nvSpPr>
+        <p:spPr>
+          <a:xfrm>
+            <a:off x="1051560" y="5029200"/>
+            <a:ext cx="3012338" cy="548640"/>
+          </a:xfrm>
+          <a:prstGeom prst="rect">
+            <a:avLst/>
+          </a:prstGeom>
+          <a:noFill/>
+          <a:ln/>
+        </p:spPr>
+        <p:txBody>
+          <a:bodyPr wrap="square" lIns="0" tIns="0" rIns="0" bIns="0" rtlCol="0" anchor="t"/>
+          <a:lstStyle/>
+          <a:p>
+            <a:pPr indent="0" marL="0">
+              <a:buNone/>
+            </a:pPr>
+            <a:r>
+              <a:rPr lang="en-US" sz="1500" dirty="0">
+                <a:solidFill>
+                  <a:schemeClr val="accent2"/>
+                </a:solidFill>
+              </a:rPr>
+              <a:t>телефонот и пораката се запишуваат заедно</a:t>
+            </a:r>
+            <a:endParaRPr lang="en-US" sz="1500" dirty="0"/>
+          </a:p>
+        </p:txBody>
+      </p:sp>
+      <p:pic>
+        <p:nvPicPr>
+          <p:cNvPr id="24" name="icon-109" descr="preencoded.png">    </p:cNvPr>
           <p:cNvPicPr>
             <a:picLocks noChangeAspect="1"/>
           </p:cNvPicPr>
@@ -6375,8 +6215,8 @@
         </p:blipFill>
         <p:spPr>
           <a:xfrm>
-            <a:off x="10379812" y="2773375"/>
-            <a:ext cx="347472" cy="347472"/>
+            <a:off x="4338218" y="4617720"/>
+            <a:ext cx="365760" cy="365760"/>
           </a:xfrm>
           <a:prstGeom prst="rect">
             <a:avLst/>
@@ -6385,14 +6225,14 @@
       </p:pic>
       <p:sp>
         <p:nvSpPr>
-          <p:cNvPr id="18" name="text-104"/>
+          <p:cNvPr id="25" name="text-110"/>
           <p:cNvSpPr txBox="1"/>
           <p:nvPr/>
         </p:nvSpPr>
         <p:spPr>
           <a:xfrm>
-            <a:off x="9464040" y="3175711"/>
-            <a:ext cx="2179015" cy="274320"/>
+            <a:off x="4841138" y="4572000"/>
+            <a:ext cx="3012338" cy="411480"/>
           </a:xfrm>
           <a:prstGeom prst="rect">
             <a:avLst/>
@@ -6404,117 +6244,60 @@
           <a:bodyPr wrap="square" lIns="0" tIns="0" rIns="0" bIns="0" rtlCol="0" anchor="ctr"/>
           <a:lstStyle/>
           <a:p>
-            <a:pPr marL="0" indent="0" algn="ctr">
-              <a:buNone/>
-            </a:pPr>
-            <a:r>
-              <a:rPr lang="en-US" sz="1400" b="1" dirty="0">
+            <a:pPr indent="0" marL="0">
+              <a:buNone/>
+            </a:pPr>
+            <a:r>
+              <a:rPr lang="en-US" sz="1800" b="1" dirty="0">
                 <a:solidFill>
                   <a:schemeClr val="tx1"/>
                 </a:solidFill>
               </a:rPr>
-              <a:t>Огласи</a:t>
-            </a:r>
-            <a:endParaRPr lang="en-US" sz="1400" dirty="0"/>
-          </a:p>
-        </p:txBody>
-      </p:sp>
-      <p:sp>
-        <p:nvSpPr>
-          <p:cNvPr id="19" name="arrow-105"/>
-          <p:cNvSpPr/>
-          <p:nvPr/>
-        </p:nvSpPr>
-        <p:spPr>
-          <a:xfrm>
-            <a:off x="2606040" y="3177540"/>
-            <a:ext cx="411480" cy="0"/>
-          </a:xfrm>
-          <a:prstGeom prst="line">
-            <a:avLst/>
-          </a:prstGeom>
-          <a:noFill/>
-          <a:ln w="25400">
-            <a:solidFill>
-              <a:schemeClr val="accent1"/>
-            </a:solidFill>
-            <a:prstDash val="solid"/>
-            <a:tailEnd type="triangle"/>
-          </a:ln>
-        </p:spPr>
-        <p:txBody>
-          <a:bodyPr/>
-          <a:lstStyle/>
-          <a:p>
-            <a:endParaRPr lang="LID4096"/>
-          </a:p>
-        </p:txBody>
-      </p:sp>
-      <p:sp>
-        <p:nvSpPr>
-          <p:cNvPr id="20" name="arrow-106"/>
-          <p:cNvSpPr/>
-          <p:nvPr/>
-        </p:nvSpPr>
-        <p:spPr>
-          <a:xfrm>
-            <a:off x="6675120" y="3177540"/>
-            <a:ext cx="411480" cy="0"/>
-          </a:xfrm>
-          <a:prstGeom prst="line">
-            <a:avLst/>
-          </a:prstGeom>
-          <a:noFill/>
-          <a:ln w="25400">
-            <a:solidFill>
-              <a:schemeClr val="accent1"/>
-            </a:solidFill>
-            <a:prstDash val="solid"/>
-            <a:tailEnd type="triangle"/>
-          </a:ln>
-        </p:spPr>
-        <p:txBody>
-          <a:bodyPr/>
-          <a:lstStyle/>
-          <a:p>
-            <a:endParaRPr lang="LID4096"/>
-          </a:p>
-        </p:txBody>
-      </p:sp>
-      <p:sp>
-        <p:nvSpPr>
-          <p:cNvPr id="21" name="arrow-107"/>
-          <p:cNvSpPr/>
-          <p:nvPr/>
-        </p:nvSpPr>
-        <p:spPr>
-          <a:xfrm>
-            <a:off x="9006840" y="3177540"/>
-            <a:ext cx="411480" cy="0"/>
-          </a:xfrm>
-          <a:prstGeom prst="line">
-            <a:avLst/>
-          </a:prstGeom>
-          <a:noFill/>
-          <a:ln w="25400">
-            <a:solidFill>
-              <a:schemeClr val="accent1"/>
-            </a:solidFill>
-            <a:prstDash val="solid"/>
-            <a:tailEnd type="triangle"/>
-          </a:ln>
-        </p:spPr>
-        <p:txBody>
-          <a:bodyPr/>
-          <a:lstStyle/>
-          <a:p>
-            <a:endParaRPr lang="LID4096"/>
+              <a:t>Kafka падна? Пораката чека</a:t>
+            </a:r>
+            <a:endParaRPr lang="en-US" sz="1800" dirty="0"/>
+          </a:p>
+        </p:txBody>
+      </p:sp>
+      <p:sp>
+        <p:nvSpPr>
+          <p:cNvPr id="26" name="text-111"/>
+          <p:cNvSpPr txBox="1"/>
+          <p:nvPr/>
+        </p:nvSpPr>
+        <p:spPr>
+          <a:xfrm>
+            <a:off x="4841138" y="5029200"/>
+            <a:ext cx="3012338" cy="548640"/>
+          </a:xfrm>
+          <a:prstGeom prst="rect">
+            <a:avLst/>
+          </a:prstGeom>
+          <a:noFill/>
+          <a:ln/>
+        </p:spPr>
+        <p:txBody>
+          <a:bodyPr wrap="square" lIns="0" tIns="0" rIns="0" bIns="0" rtlCol="0" anchor="t"/>
+          <a:lstStyle/>
+          <a:p>
+            <a:pPr indent="0" marL="0">
+              <a:buNone/>
+            </a:pPr>
+            <a:r>
+              <a:rPr lang="en-US" sz="1500" dirty="0">
+                <a:solidFill>
+                  <a:schemeClr val="accent2"/>
+                </a:solidFill>
+              </a:rPr>
+              <a:t>се праќа штом брокерот ќе се врати</a:t>
+            </a:r>
+            <a:endParaRPr lang="en-US" sz="1500" dirty="0"/>
           </a:p>
         </p:txBody>
       </p:sp>
       <p:pic>
         <p:nvPicPr>
-          <p:cNvPr id="22" name="icon-108" descr="preencoded.png"/>
+          <p:cNvPr id="27" name="icon-112" descr="preencoded.png">    </p:cNvPr>
           <p:cNvPicPr>
             <a:picLocks noChangeAspect="1"/>
           </p:cNvPicPr>
@@ -6528,198 +6311,6 @@
         </p:blipFill>
         <p:spPr>
           <a:xfrm>
-            <a:off x="548640" y="4617720"/>
-            <a:ext cx="365760" cy="365760"/>
-          </a:xfrm>
-          <a:prstGeom prst="rect">
-            <a:avLst/>
-          </a:prstGeom>
-        </p:spPr>
-      </p:pic>
-      <p:sp>
-        <p:nvSpPr>
-          <p:cNvPr id="23" name="text-109"/>
-          <p:cNvSpPr txBox="1"/>
-          <p:nvPr/>
-        </p:nvSpPr>
-        <p:spPr>
-          <a:xfrm>
-            <a:off x="1051560" y="4572000"/>
-            <a:ext cx="3012338" cy="411480"/>
-          </a:xfrm>
-          <a:prstGeom prst="rect">
-            <a:avLst/>
-          </a:prstGeom>
-          <a:noFill/>
-          <a:ln/>
-        </p:spPr>
-        <p:txBody>
-          <a:bodyPr wrap="square" lIns="0" tIns="0" rIns="0" bIns="0" rtlCol="0" anchor="ctr"/>
-          <a:lstStyle/>
-          <a:p>
-            <a:pPr marL="0" indent="0">
-              <a:buNone/>
-            </a:pPr>
-            <a:r>
-              <a:rPr lang="en-US" sz="1800" b="1" dirty="0">
-                <a:solidFill>
-                  <a:schemeClr val="tx1"/>
-                </a:solidFill>
-              </a:rPr>
-              <a:t>Или двете, или ниедно</a:t>
-            </a:r>
-            <a:endParaRPr lang="en-US" sz="1800" dirty="0"/>
-          </a:p>
-        </p:txBody>
-      </p:sp>
-      <p:sp>
-        <p:nvSpPr>
-          <p:cNvPr id="24" name="text-110"/>
-          <p:cNvSpPr txBox="1"/>
-          <p:nvPr/>
-        </p:nvSpPr>
-        <p:spPr>
-          <a:xfrm>
-            <a:off x="1051560" y="5029200"/>
-            <a:ext cx="3012338" cy="548640"/>
-          </a:xfrm>
-          <a:prstGeom prst="rect">
-            <a:avLst/>
-          </a:prstGeom>
-          <a:noFill/>
-          <a:ln/>
-        </p:spPr>
-        <p:txBody>
-          <a:bodyPr wrap="square" lIns="0" tIns="0" rIns="0" bIns="0" rtlCol="0" anchor="t"/>
-          <a:lstStyle/>
-          <a:p>
-            <a:pPr marL="0" indent="0">
-              <a:buNone/>
-            </a:pPr>
-            <a:r>
-              <a:rPr lang="en-US" sz="1500" dirty="0">
-                <a:solidFill>
-                  <a:schemeClr val="accent2"/>
-                </a:solidFill>
-              </a:rPr>
-              <a:t>телефонот и пораката се запишуваат заедно</a:t>
-            </a:r>
-            <a:endParaRPr lang="en-US" sz="1500" dirty="0"/>
-          </a:p>
-        </p:txBody>
-      </p:sp>
-      <p:pic>
-        <p:nvPicPr>
-          <p:cNvPr id="25" name="icon-111" descr="preencoded.png"/>
-          <p:cNvPicPr>
-            <a:picLocks noChangeAspect="1"/>
-          </p:cNvPicPr>
-          <p:nvPr/>
-        </p:nvPicPr>
-        <p:blipFill>
-          <a:blip r:embed="rId5"/>
-          <a:stretch>
-            <a:fillRect/>
-          </a:stretch>
-        </p:blipFill>
-        <p:spPr>
-          <a:xfrm>
-            <a:off x="4338218" y="4617720"/>
-            <a:ext cx="365760" cy="365760"/>
-          </a:xfrm>
-          <a:prstGeom prst="rect">
-            <a:avLst/>
-          </a:prstGeom>
-        </p:spPr>
-      </p:pic>
-      <p:sp>
-        <p:nvSpPr>
-          <p:cNvPr id="26" name="text-112"/>
-          <p:cNvSpPr txBox="1"/>
-          <p:nvPr/>
-        </p:nvSpPr>
-        <p:spPr>
-          <a:xfrm>
-            <a:off x="4841138" y="4572000"/>
-            <a:ext cx="3012338" cy="411480"/>
-          </a:xfrm>
-          <a:prstGeom prst="rect">
-            <a:avLst/>
-          </a:prstGeom>
-          <a:noFill/>
-          <a:ln/>
-        </p:spPr>
-        <p:txBody>
-          <a:bodyPr wrap="square" lIns="0" tIns="0" rIns="0" bIns="0" rtlCol="0" anchor="ctr"/>
-          <a:lstStyle/>
-          <a:p>
-            <a:pPr marL="0" indent="0">
-              <a:buNone/>
-            </a:pPr>
-            <a:r>
-              <a:rPr lang="en-US" sz="1800" b="1" dirty="0">
-                <a:solidFill>
-                  <a:schemeClr val="tx1"/>
-                </a:solidFill>
-              </a:rPr>
-              <a:t>Kafka падна? Пораката чека</a:t>
-            </a:r>
-            <a:endParaRPr lang="en-US" sz="1800" dirty="0"/>
-          </a:p>
-        </p:txBody>
-      </p:sp>
-      <p:sp>
-        <p:nvSpPr>
-          <p:cNvPr id="27" name="text-113"/>
-          <p:cNvSpPr txBox="1"/>
-          <p:nvPr/>
-        </p:nvSpPr>
-        <p:spPr>
-          <a:xfrm>
-            <a:off x="4841138" y="5029200"/>
-            <a:ext cx="3012338" cy="548640"/>
-          </a:xfrm>
-          <a:prstGeom prst="rect">
-            <a:avLst/>
-          </a:prstGeom>
-          <a:noFill/>
-          <a:ln/>
-        </p:spPr>
-        <p:txBody>
-          <a:bodyPr wrap="square" lIns="0" tIns="0" rIns="0" bIns="0" rtlCol="0" anchor="t"/>
-          <a:lstStyle/>
-          <a:p>
-            <a:pPr marL="0" indent="0">
-              <a:buNone/>
-            </a:pPr>
-            <a:r>
-              <a:rPr lang="en-US" sz="1500" dirty="0">
-                <a:solidFill>
-                  <a:schemeClr val="accent2"/>
-                </a:solidFill>
-              </a:rPr>
-              <a:t>се праќа штом брокерот ќе се врати</a:t>
-            </a:r>
-            <a:endParaRPr lang="en-US" sz="1500" dirty="0"/>
-          </a:p>
-        </p:txBody>
-      </p:sp>
-      <p:pic>
-        <p:nvPicPr>
-          <p:cNvPr id="28" name="icon-114" descr="preencoded.png"/>
-          <p:cNvPicPr>
-            <a:picLocks noChangeAspect="1"/>
-          </p:cNvPicPr>
-          <p:nvPr/>
-        </p:nvPicPr>
-        <p:blipFill>
-          <a:blip r:embed="rId5"/>
-          <a:stretch>
-            <a:fillRect/>
-          </a:stretch>
-        </p:blipFill>
-        <p:spPr>
-          <a:xfrm>
             <a:off x="8127797" y="4617720"/>
             <a:ext cx="365760" cy="365760"/>
           </a:xfrm>
@@ -6730,7 +6321,7 @@
       </p:pic>
       <p:sp>
         <p:nvSpPr>
-          <p:cNvPr id="29" name="text-115"/>
+          <p:cNvPr id="28" name="text-113"/>
           <p:cNvSpPr txBox="1"/>
           <p:nvPr/>
         </p:nvSpPr>
@@ -6749,7 +6340,7 @@
           <a:bodyPr wrap="square" lIns="0" tIns="0" rIns="0" bIns="0" rtlCol="0" anchor="ctr"/>
           <a:lstStyle/>
           <a:p>
-            <a:pPr marL="0" indent="0">
+            <a:pPr indent="0" marL="0">
               <a:buNone/>
             </a:pPr>
             <a:r>
@@ -6766,7 +6357,7 @@
       </p:sp>
       <p:sp>
         <p:nvSpPr>
-          <p:cNvPr id="30" name="text-116"/>
+          <p:cNvPr id="29" name="text-114"/>
           <p:cNvSpPr txBox="1"/>
           <p:nvPr/>
         </p:nvSpPr>
@@ -6785,7 +6376,7 @@
           <a:bodyPr wrap="square" lIns="0" tIns="0" rIns="0" bIns="0" rtlCol="0" anchor="t"/>
           <a:lstStyle/>
           <a:p>
-            <a:pPr marL="0" indent="0">
+            <a:pPr indent="0" marL="0">
               <a:buNone/>
             </a:pPr>
             <a:r>
@@ -6802,7 +6393,7 @@
       </p:sp>
       <p:sp>
         <p:nvSpPr>
-          <p:cNvPr id="31" name="Slide Number Placeholder 0"/>
+          <p:cNvPr id="25" name="Slide Number Placeholder 0"/>
           <p:cNvSpPr>
             <a:spLocks noGrp="1"/>
           </p:cNvSpPr>
@@ -6820,7 +6411,7 @@
           </a:prstGeom>
           <a:extLst>
             <a:ext uri="{C572A759-6A51-4108-AA02-DFA0A04FC94B}">
-              <ma14:wrappingTextBoxFlag xmlns:ma14="http://schemas.microsoft.com/office/mac/drawingml/2011/main" xmlns="" val="0"/>
+              <ma14:wrappingTextBoxFlag xmlns:ma14="http://schemas.microsoft.com/office/mac/drawingml/2011/main" val="0"/>
             </a:ext>
           </a:extLst>
         </p:spPr>
@@ -6841,10 +6432,10 @@
           <a:p>
             <a:pPr algn="r"/>
             <a:fld id="{F7021451-1387-4CA6-816F-3879F97B5CBC}" type="slidenum">
-              <a:rPr lang="en-US" b="0"/>
+              <a:rPr b="0" lang="en-US"/>
               <a:t>4</a:t>
             </a:fld>
-            <a:endParaRPr lang="en-US" dirty="0"/>
+            <a:endParaRPr lang="en-US"/>
           </a:p>
         </p:txBody>
       </p:sp>
@@ -6876,11 +6467,9 @@
       <p:sp>
         <p:nvSpPr>
           <p:cNvPr id="2" name="Text 0"/>
-          <p:cNvSpPr>
-            <a:spLocks noGrp="1"/>
-          </p:cNvSpPr>
+          <p:cNvSpPr/>
           <p:nvPr>
-            <p:ph type="body" idx="100" hasCustomPrompt="1"/>
+            <p:ph idx="100" type="body" hasCustomPrompt="1"/>
           </p:nvPr>
         </p:nvSpPr>
         <p:spPr>
@@ -6898,11 +6487,11 @@
           <a:bodyPr wrap="square" lIns="0" tIns="0" rIns="0" bIns="0" rtlCol="0" anchor="ctr"/>
           <a:lstStyle/>
           <a:p>
-            <a:pPr marL="0" indent="0">
-              <a:buNone/>
-            </a:pPr>
-            <a:r>
-              <a:rPr lang="en-US" sz="1100" b="1" kern="0" spc="200" dirty="0">
+            <a:pPr indent="0" marL="0">
+              <a:buNone/>
+            </a:pPr>
+            <a:r>
+              <a:rPr lang="en-US" sz="1100" b="1" spc="200" kern="0" dirty="0">
                 <a:solidFill>
                   <a:schemeClr val="accent1"/>
                 </a:solidFill>
@@ -6919,11 +6508,9 @@
       <p:sp>
         <p:nvSpPr>
           <p:cNvPr id="3" name="Text 0"/>
-          <p:cNvSpPr>
-            <a:spLocks noGrp="1"/>
-          </p:cNvSpPr>
+          <p:cNvSpPr/>
           <p:nvPr>
-            <p:ph type="title" idx="101" hasCustomPrompt="1"/>
+            <p:ph idx="101" type="title" hasCustomPrompt="1"/>
           </p:nvPr>
         </p:nvSpPr>
         <p:spPr>
@@ -6941,7 +6528,7 @@
           <a:bodyPr wrap="square" lIns="0" tIns="0" rIns="0" bIns="0" rtlCol="0" anchor="t"/>
           <a:lstStyle/>
           <a:p>
-            <a:pPr marL="0" indent="0" algn="l">
+            <a:pPr algn="l" indent="0" marL="0">
               <a:buNone/>
             </a:pPr>
             <a:r>
@@ -6958,7 +6545,7 @@
       </p:sp>
       <p:sp>
         <p:nvSpPr>
-          <p:cNvPr id="4" name="card-117"/>
+          <p:cNvPr id="4" name="card-115"/>
           <p:cNvSpPr/>
           <p:nvPr/>
         </p:nvSpPr>
@@ -6980,24 +6567,17 @@
             <a:prstDash val="solid"/>
           </a:ln>
           <a:effectLst>
-            <a:outerShdw blurRad="101600" dist="19050" dir="5400000" algn="bl" rotWithShape="0">
+            <a:outerShdw sx="100000" sy="100000" kx="0" ky="0" algn="bl" rotWithShape="0" blurRad="101600" dist="19050" dir="5400000">
               <a:srgbClr val="000000">
                 <a:alpha val="7000"/>
               </a:srgbClr>
             </a:outerShdw>
           </a:effectLst>
         </p:spPr>
-        <p:txBody>
-          <a:bodyPr/>
-          <a:lstStyle/>
-          <a:p>
-            <a:endParaRPr lang="LID4096"/>
-          </a:p>
-        </p:txBody>
-      </p:sp>
-      <p:sp>
-        <p:nvSpPr>
-          <p:cNvPr id="5" name="text-118"/>
+      </p:sp>
+      <p:sp>
+        <p:nvSpPr>
+          <p:cNvPr id="5" name="text-116"/>
           <p:cNvSpPr txBox="1"/>
           <p:nvPr/>
         </p:nvSpPr>
@@ -7016,11 +6596,11 @@
           <a:bodyPr wrap="square" lIns="0" tIns="0" rIns="0" bIns="0" rtlCol="0" anchor="ctr"/>
           <a:lstStyle/>
           <a:p>
-            <a:pPr marL="0" indent="0" algn="l">
-              <a:buNone/>
-            </a:pPr>
-            <a:r>
-              <a:rPr lang="en-US" sz="1100" b="1" kern="0" spc="100" dirty="0">
+            <a:pPr algn="l" indent="0" marL="0">
+              <a:buNone/>
+            </a:pPr>
+            <a:r>
+              <a:rPr lang="en-US" sz="1100" b="1" spc="100" kern="0" dirty="0">
                 <a:solidFill>
                   <a:schemeClr val="accent1"/>
                 </a:solidFill>
@@ -7036,7 +6616,7 @@
       </p:sp>
       <p:sp>
         <p:nvSpPr>
-          <p:cNvPr id="6" name="icon-bg-119"/>
+          <p:cNvPr id="6" name="icon-bg-117"/>
           <p:cNvSpPr/>
           <p:nvPr/>
         </p:nvSpPr>
@@ -7055,17 +6635,222 @@
           </a:solidFill>
           <a:ln/>
         </p:spPr>
-        <p:txBody>
-          <a:bodyPr/>
-          <a:lstStyle/>
-          <a:p>
-            <a:endParaRPr lang="LID4096"/>
-          </a:p>
-        </p:txBody>
       </p:sp>
       <p:pic>
         <p:nvPicPr>
-          <p:cNvPr id="7" name="icon-120" descr="preencoded.png"/>
+          <p:cNvPr id="7" name="icon-118" descr="preencoded.png">    </p:cNvPr>
+          <p:cNvPicPr>
+            <a:picLocks noChangeAspect="1"/>
+          </p:cNvPicPr>
+          <p:nvPr/>
+        </p:nvPicPr>
+        <p:blipFill>
+          <a:blip r:embed="rId1"/>
+          <a:stretch>
+            <a:fillRect/>
+          </a:stretch>
+        </p:blipFill>
+        <p:spPr>
+          <a:xfrm>
+            <a:off x="1196035" y="2704795"/>
+            <a:ext cx="351130" cy="351130"/>
+          </a:xfrm>
+          <a:prstGeom prst="rect">
+            <a:avLst/>
+          </a:prstGeom>
+        </p:spPr>
+      </p:pic>
+      <p:sp>
+        <p:nvSpPr>
+          <p:cNvPr id="8" name="text-119"/>
+          <p:cNvSpPr txBox="1"/>
+          <p:nvPr/>
+        </p:nvSpPr>
+        <p:spPr>
+          <a:xfrm>
+            <a:off x="731520" y="3337560"/>
+            <a:ext cx="1280160" cy="320040"/>
+          </a:xfrm>
+          <a:prstGeom prst="rect">
+            <a:avLst/>
+          </a:prstGeom>
+          <a:noFill/>
+          <a:ln/>
+        </p:spPr>
+        <p:txBody>
+          <a:bodyPr wrap="square" lIns="0" tIns="0" rIns="0" bIns="0" rtlCol="0" anchor="t"/>
+          <a:lstStyle/>
+          <a:p>
+            <a:pPr algn="ctr" indent="0" marL="0">
+              <a:buNone/>
+            </a:pPr>
+            <a:r>
+              <a:rPr lang="en-US" sz="1500" b="1" dirty="0">
+                <a:solidFill>
+                  <a:schemeClr val="tx1"/>
+                </a:solidFill>
+              </a:rPr>
+              <a:t>Git</a:t>
+            </a:r>
+            <a:endParaRPr lang="en-US" sz="1500" dirty="0"/>
+          </a:p>
+        </p:txBody>
+      </p:sp>
+      <p:sp>
+        <p:nvSpPr>
+          <p:cNvPr id="9" name="arrow-120"/>
+          <p:cNvSpPr/>
+          <p:nvPr/>
+        </p:nvSpPr>
+        <p:spPr>
+          <a:xfrm>
+            <a:off x="1783080" y="2880360"/>
+            <a:ext cx="431749" cy="0"/>
+          </a:xfrm>
+          <a:prstGeom prst="line">
+            <a:avLst/>
+          </a:prstGeom>
+          <a:noFill/>
+          <a:ln w="22225">
+            <a:solidFill>
+              <a:schemeClr val="accent1"/>
+            </a:solidFill>
+            <a:prstDash val="solid"/>
+            <a:tailEnd type="triangle"/>
+          </a:ln>
+        </p:spPr>
+      </p:sp>
+      <p:sp>
+        <p:nvSpPr>
+          <p:cNvPr id="10" name="icon-bg-121"/>
+          <p:cNvSpPr/>
+          <p:nvPr/>
+        </p:nvSpPr>
+        <p:spPr>
+          <a:xfrm>
+            <a:off x="2260549" y="2514600"/>
+            <a:ext cx="731520" cy="731520"/>
+          </a:xfrm>
+          <a:prstGeom prst="ellipse">
+            <a:avLst/>
+          </a:prstGeom>
+          <a:solidFill>
+            <a:schemeClr val="accent1">
+              <a:alpha val="12000"/>
+            </a:schemeClr>
+          </a:solidFill>
+          <a:ln/>
+        </p:spPr>
+      </p:sp>
+      <p:pic>
+        <p:nvPicPr>
+          <p:cNvPr id="11" name="icon-122" descr="preencoded.png">    </p:cNvPr>
+          <p:cNvPicPr>
+            <a:picLocks noChangeAspect="1"/>
+          </p:cNvPicPr>
+          <p:nvPr/>
+        </p:nvPicPr>
+        <p:blipFill>
+          <a:blip r:embed="rId2"/>
+          <a:stretch>
+            <a:fillRect/>
+          </a:stretch>
+        </p:blipFill>
+        <p:spPr>
+          <a:xfrm>
+            <a:off x="2450744" y="2704795"/>
+            <a:ext cx="351130" cy="351130"/>
+          </a:xfrm>
+          <a:prstGeom prst="rect">
+            <a:avLst/>
+          </a:prstGeom>
+        </p:spPr>
+      </p:pic>
+      <p:sp>
+        <p:nvSpPr>
+          <p:cNvPr id="12" name="text-123"/>
+          <p:cNvSpPr txBox="1"/>
+          <p:nvPr/>
+        </p:nvSpPr>
+        <p:spPr>
+          <a:xfrm>
+            <a:off x="1986229" y="3337560"/>
+            <a:ext cx="1280160" cy="320040"/>
+          </a:xfrm>
+          <a:prstGeom prst="rect">
+            <a:avLst/>
+          </a:prstGeom>
+          <a:noFill/>
+          <a:ln/>
+        </p:spPr>
+        <p:txBody>
+          <a:bodyPr wrap="square" lIns="0" tIns="0" rIns="0" bIns="0" rtlCol="0" anchor="t"/>
+          <a:lstStyle/>
+          <a:p>
+            <a:pPr algn="ctr" indent="0" marL="0">
+              <a:buNone/>
+            </a:pPr>
+            <a:r>
+              <a:rPr lang="en-US" sz="1500" b="1" dirty="0">
+                <a:solidFill>
+                  <a:schemeClr val="tx1"/>
+                </a:solidFill>
+              </a:rPr>
+              <a:t>CI</a:t>
+            </a:r>
+            <a:endParaRPr lang="en-US" sz="1500" dirty="0"/>
+          </a:p>
+        </p:txBody>
+      </p:sp>
+      <p:sp>
+        <p:nvSpPr>
+          <p:cNvPr id="13" name="arrow-124"/>
+          <p:cNvSpPr/>
+          <p:nvPr/>
+        </p:nvSpPr>
+        <p:spPr>
+          <a:xfrm>
+            <a:off x="3037789" y="2880360"/>
+            <a:ext cx="431749" cy="0"/>
+          </a:xfrm>
+          <a:prstGeom prst="line">
+            <a:avLst/>
+          </a:prstGeom>
+          <a:noFill/>
+          <a:ln w="22225">
+            <a:solidFill>
+              <a:schemeClr val="accent1"/>
+            </a:solidFill>
+            <a:prstDash val="solid"/>
+            <a:tailEnd type="triangle"/>
+          </a:ln>
+        </p:spPr>
+      </p:sp>
+      <p:sp>
+        <p:nvSpPr>
+          <p:cNvPr id="14" name="icon-bg-125"/>
+          <p:cNvSpPr/>
+          <p:nvPr/>
+        </p:nvSpPr>
+        <p:spPr>
+          <a:xfrm>
+            <a:off x="3515258" y="2514600"/>
+            <a:ext cx="731520" cy="731520"/>
+          </a:xfrm>
+          <a:prstGeom prst="ellipse">
+            <a:avLst/>
+          </a:prstGeom>
+          <a:solidFill>
+            <a:schemeClr val="accent1">
+              <a:alpha val="12000"/>
+            </a:schemeClr>
+          </a:solidFill>
+          <a:ln/>
+        </p:spPr>
+      </p:sp>
+      <p:pic>
+        <p:nvPicPr>
+          <p:cNvPr id="15" name="icon-126" descr="preencoded.png">    </p:cNvPr>
           <p:cNvPicPr>
             <a:picLocks noChangeAspect="1"/>
           </p:cNvPicPr>
@@ -7079,7 +6864,7 @@
         </p:blipFill>
         <p:spPr>
           <a:xfrm>
-            <a:off x="1196035" y="2704795"/>
+            <a:off x="3705454" y="2704795"/>
             <a:ext cx="351130" cy="351130"/>
           </a:xfrm>
           <a:prstGeom prst="rect">
@@ -7089,13 +6874,13 @@
       </p:pic>
       <p:sp>
         <p:nvSpPr>
-          <p:cNvPr id="8" name="text-121"/>
+          <p:cNvPr id="16" name="text-127"/>
           <p:cNvSpPr txBox="1"/>
           <p:nvPr/>
         </p:nvSpPr>
         <p:spPr>
           <a:xfrm>
-            <a:off x="731520" y="3337560"/>
+            <a:off x="3240938" y="3337560"/>
             <a:ext cx="1280160" cy="320040"/>
           </a:xfrm>
           <a:prstGeom prst="rect">
@@ -7108,7 +6893,7 @@
           <a:bodyPr wrap="square" lIns="0" tIns="0" rIns="0" bIns="0" rtlCol="0" anchor="t"/>
           <a:lstStyle/>
           <a:p>
-            <a:pPr marL="0" indent="0" algn="ctr">
+            <a:pPr algn="ctr" indent="0" marL="0">
               <a:buNone/>
             </a:pPr>
             <a:r>
@@ -7117,7 +6902,7 @@
                   <a:schemeClr val="tx1"/>
                 </a:solidFill>
               </a:rPr>
-              <a:t>Git</a:t>
+              <a:t>ArgoCD</a:t>
             </a:r>
             <a:endParaRPr lang="en-US" sz="1500" dirty="0"/>
           </a:p>
@@ -7125,13 +6910,13 @@
       </p:sp>
       <p:sp>
         <p:nvSpPr>
-          <p:cNvPr id="9" name="arrow-122"/>
-          <p:cNvSpPr/>
-          <p:nvPr/>
-        </p:nvSpPr>
-        <p:spPr>
-          <a:xfrm>
-            <a:off x="1783080" y="2880360"/>
+          <p:cNvPr id="17" name="arrow-128"/>
+          <p:cNvSpPr/>
+          <p:nvPr/>
+        </p:nvSpPr>
+        <p:spPr>
+          <a:xfrm>
+            <a:off x="4292498" y="2880360"/>
             <a:ext cx="431749" cy="0"/>
           </a:xfrm>
           <a:prstGeom prst="line">
@@ -7146,23 +6931,16 @@
             <a:tailEnd type="triangle"/>
           </a:ln>
         </p:spPr>
-        <p:txBody>
-          <a:bodyPr/>
-          <a:lstStyle/>
-          <a:p>
-            <a:endParaRPr lang="LID4096"/>
-          </a:p>
-        </p:txBody>
-      </p:sp>
-      <p:sp>
-        <p:nvSpPr>
-          <p:cNvPr id="10" name="icon-bg-123"/>
-          <p:cNvSpPr/>
-          <p:nvPr/>
-        </p:nvSpPr>
-        <p:spPr>
-          <a:xfrm>
-            <a:off x="2260549" y="2514600"/>
+      </p:sp>
+      <p:sp>
+        <p:nvSpPr>
+          <p:cNvPr id="18" name="icon-bg-129"/>
+          <p:cNvSpPr/>
+          <p:nvPr/>
+        </p:nvSpPr>
+        <p:spPr>
+          <a:xfrm>
+            <a:off x="4769968" y="2514600"/>
             <a:ext cx="731520" cy="731520"/>
           </a:xfrm>
           <a:prstGeom prst="ellipse">
@@ -7175,17 +6953,10 @@
           </a:solidFill>
           <a:ln/>
         </p:spPr>
-        <p:txBody>
-          <a:bodyPr/>
-          <a:lstStyle/>
-          <a:p>
-            <a:endParaRPr lang="LID4096"/>
-          </a:p>
-        </p:txBody>
       </p:sp>
       <p:pic>
         <p:nvPicPr>
-          <p:cNvPr id="11" name="icon-124" descr="preencoded.png"/>
+          <p:cNvPr id="19" name="icon-130" descr="preencoded.png">    </p:cNvPr>
           <p:cNvPicPr>
             <a:picLocks noChangeAspect="1"/>
           </p:cNvPicPr>
@@ -7199,246 +6970,6 @@
         </p:blipFill>
         <p:spPr>
           <a:xfrm>
-            <a:off x="2450744" y="2704795"/>
-            <a:ext cx="351130" cy="351130"/>
-          </a:xfrm>
-          <a:prstGeom prst="rect">
-            <a:avLst/>
-          </a:prstGeom>
-        </p:spPr>
-      </p:pic>
-      <p:sp>
-        <p:nvSpPr>
-          <p:cNvPr id="12" name="text-125"/>
-          <p:cNvSpPr txBox="1"/>
-          <p:nvPr/>
-        </p:nvSpPr>
-        <p:spPr>
-          <a:xfrm>
-            <a:off x="1986229" y="3337560"/>
-            <a:ext cx="1280160" cy="320040"/>
-          </a:xfrm>
-          <a:prstGeom prst="rect">
-            <a:avLst/>
-          </a:prstGeom>
-          <a:noFill/>
-          <a:ln/>
-        </p:spPr>
-        <p:txBody>
-          <a:bodyPr wrap="square" lIns="0" tIns="0" rIns="0" bIns="0" rtlCol="0" anchor="t"/>
-          <a:lstStyle/>
-          <a:p>
-            <a:pPr marL="0" indent="0" algn="ctr">
-              <a:buNone/>
-            </a:pPr>
-            <a:r>
-              <a:rPr lang="en-US" sz="1500" b="1" dirty="0">
-                <a:solidFill>
-                  <a:schemeClr val="tx1"/>
-                </a:solidFill>
-              </a:rPr>
-              <a:t>CI</a:t>
-            </a:r>
-            <a:endParaRPr lang="en-US" sz="1500" dirty="0"/>
-          </a:p>
-        </p:txBody>
-      </p:sp>
-      <p:sp>
-        <p:nvSpPr>
-          <p:cNvPr id="13" name="arrow-126"/>
-          <p:cNvSpPr/>
-          <p:nvPr/>
-        </p:nvSpPr>
-        <p:spPr>
-          <a:xfrm>
-            <a:off x="3037789" y="2880360"/>
-            <a:ext cx="431749" cy="0"/>
-          </a:xfrm>
-          <a:prstGeom prst="line">
-            <a:avLst/>
-          </a:prstGeom>
-          <a:noFill/>
-          <a:ln w="22225">
-            <a:solidFill>
-              <a:schemeClr val="accent1"/>
-            </a:solidFill>
-            <a:prstDash val="solid"/>
-            <a:tailEnd type="triangle"/>
-          </a:ln>
-        </p:spPr>
-        <p:txBody>
-          <a:bodyPr/>
-          <a:lstStyle/>
-          <a:p>
-            <a:endParaRPr lang="LID4096"/>
-          </a:p>
-        </p:txBody>
-      </p:sp>
-      <p:sp>
-        <p:nvSpPr>
-          <p:cNvPr id="14" name="icon-bg-127"/>
-          <p:cNvSpPr/>
-          <p:nvPr/>
-        </p:nvSpPr>
-        <p:spPr>
-          <a:xfrm>
-            <a:off x="3515258" y="2514600"/>
-            <a:ext cx="731520" cy="731520"/>
-          </a:xfrm>
-          <a:prstGeom prst="ellipse">
-            <a:avLst/>
-          </a:prstGeom>
-          <a:solidFill>
-            <a:schemeClr val="accent1">
-              <a:alpha val="12000"/>
-            </a:schemeClr>
-          </a:solidFill>
-          <a:ln/>
-        </p:spPr>
-        <p:txBody>
-          <a:bodyPr/>
-          <a:lstStyle/>
-          <a:p>
-            <a:endParaRPr lang="LID4096"/>
-          </a:p>
-        </p:txBody>
-      </p:sp>
-      <p:pic>
-        <p:nvPicPr>
-          <p:cNvPr id="15" name="icon-128" descr="preencoded.png"/>
-          <p:cNvPicPr>
-            <a:picLocks noChangeAspect="1"/>
-          </p:cNvPicPr>
-          <p:nvPr/>
-        </p:nvPicPr>
-        <p:blipFill>
-          <a:blip r:embed="rId5"/>
-          <a:stretch>
-            <a:fillRect/>
-          </a:stretch>
-        </p:blipFill>
-        <p:spPr>
-          <a:xfrm>
-            <a:off x="3705454" y="2704795"/>
-            <a:ext cx="351130" cy="351130"/>
-          </a:xfrm>
-          <a:prstGeom prst="rect">
-            <a:avLst/>
-          </a:prstGeom>
-        </p:spPr>
-      </p:pic>
-      <p:sp>
-        <p:nvSpPr>
-          <p:cNvPr id="16" name="text-129"/>
-          <p:cNvSpPr txBox="1"/>
-          <p:nvPr/>
-        </p:nvSpPr>
-        <p:spPr>
-          <a:xfrm>
-            <a:off x="3240938" y="3337560"/>
-            <a:ext cx="1280160" cy="320040"/>
-          </a:xfrm>
-          <a:prstGeom prst="rect">
-            <a:avLst/>
-          </a:prstGeom>
-          <a:noFill/>
-          <a:ln/>
-        </p:spPr>
-        <p:txBody>
-          <a:bodyPr wrap="square" lIns="0" tIns="0" rIns="0" bIns="0" rtlCol="0" anchor="t"/>
-          <a:lstStyle/>
-          <a:p>
-            <a:pPr marL="0" indent="0" algn="ctr">
-              <a:buNone/>
-            </a:pPr>
-            <a:r>
-              <a:rPr lang="en-US" sz="1500" b="1" dirty="0">
-                <a:solidFill>
-                  <a:schemeClr val="tx1"/>
-                </a:solidFill>
-              </a:rPr>
-              <a:t>ArgoCD</a:t>
-            </a:r>
-            <a:endParaRPr lang="en-US" sz="1500" dirty="0"/>
-          </a:p>
-        </p:txBody>
-      </p:sp>
-      <p:sp>
-        <p:nvSpPr>
-          <p:cNvPr id="17" name="arrow-130"/>
-          <p:cNvSpPr/>
-          <p:nvPr/>
-        </p:nvSpPr>
-        <p:spPr>
-          <a:xfrm>
-            <a:off x="4292498" y="2880360"/>
-            <a:ext cx="431749" cy="0"/>
-          </a:xfrm>
-          <a:prstGeom prst="line">
-            <a:avLst/>
-          </a:prstGeom>
-          <a:noFill/>
-          <a:ln w="22225">
-            <a:solidFill>
-              <a:schemeClr val="accent1"/>
-            </a:solidFill>
-            <a:prstDash val="solid"/>
-            <a:tailEnd type="triangle"/>
-          </a:ln>
-        </p:spPr>
-        <p:txBody>
-          <a:bodyPr/>
-          <a:lstStyle/>
-          <a:p>
-            <a:endParaRPr lang="LID4096"/>
-          </a:p>
-        </p:txBody>
-      </p:sp>
-      <p:sp>
-        <p:nvSpPr>
-          <p:cNvPr id="18" name="icon-bg-131"/>
-          <p:cNvSpPr/>
-          <p:nvPr/>
-        </p:nvSpPr>
-        <p:spPr>
-          <a:xfrm>
-            <a:off x="4769968" y="2514600"/>
-            <a:ext cx="731520" cy="731520"/>
-          </a:xfrm>
-          <a:prstGeom prst="ellipse">
-            <a:avLst/>
-          </a:prstGeom>
-          <a:solidFill>
-            <a:schemeClr val="accent1">
-              <a:alpha val="12000"/>
-            </a:schemeClr>
-          </a:solidFill>
-          <a:ln/>
-        </p:spPr>
-        <p:txBody>
-          <a:bodyPr/>
-          <a:lstStyle/>
-          <a:p>
-            <a:endParaRPr lang="LID4096"/>
-          </a:p>
-        </p:txBody>
-      </p:sp>
-      <p:pic>
-        <p:nvPicPr>
-          <p:cNvPr id="19" name="icon-132" descr="preencoded.png"/>
-          <p:cNvPicPr>
-            <a:picLocks noChangeAspect="1"/>
-          </p:cNvPicPr>
-          <p:nvPr/>
-        </p:nvPicPr>
-        <p:blipFill>
-          <a:blip r:embed="rId6"/>
-          <a:stretch>
-            <a:fillRect/>
-          </a:stretch>
-        </p:blipFill>
-        <p:spPr>
-          <a:xfrm>
             <a:off x="4960163" y="2704795"/>
             <a:ext cx="351130" cy="351130"/>
           </a:xfrm>
@@ -7449,7 +6980,7 @@
       </p:pic>
       <p:sp>
         <p:nvSpPr>
-          <p:cNvPr id="20" name="text-133"/>
+          <p:cNvPr id="20" name="text-131"/>
           <p:cNvSpPr txBox="1"/>
           <p:nvPr/>
         </p:nvSpPr>
@@ -7468,7 +6999,7 @@
           <a:bodyPr wrap="square" lIns="0" tIns="0" rIns="0" bIns="0" rtlCol="0" anchor="t"/>
           <a:lstStyle/>
           <a:p>
-            <a:pPr marL="0" indent="0" algn="ctr">
+            <a:pPr algn="ctr" indent="0" marL="0">
               <a:buNone/>
             </a:pPr>
             <a:r>
@@ -7505,17 +7036,10 @@
             <a:prstDash val="solid"/>
           </a:ln>
         </p:spPr>
-        <p:txBody>
-          <a:bodyPr/>
-          <a:lstStyle/>
-          <a:p>
-            <a:endParaRPr lang="LID4096"/>
-          </a:p>
-        </p:txBody>
-      </p:sp>
-      <p:sp>
-        <p:nvSpPr>
-          <p:cNvPr id="22" name="chip-134"/>
+      </p:sp>
+      <p:sp>
+        <p:nvSpPr>
+          <p:cNvPr id="22" name="chip-132"/>
           <p:cNvSpPr/>
           <p:nvPr/>
         </p:nvSpPr>
@@ -7539,17 +7063,10 @@
             <a:prstDash val="solid"/>
           </a:ln>
         </p:spPr>
-        <p:txBody>
-          <a:bodyPr/>
-          <a:lstStyle/>
-          <a:p>
-            <a:endParaRPr lang="LID4096"/>
-          </a:p>
-        </p:txBody>
-      </p:sp>
-      <p:sp>
-        <p:nvSpPr>
-          <p:cNvPr id="23" name="text-135"/>
+      </p:sp>
+      <p:sp>
+        <p:nvSpPr>
+          <p:cNvPr id="23" name="text-133"/>
           <p:cNvSpPr txBox="1"/>
           <p:nvPr/>
         </p:nvSpPr>
@@ -7568,7 +7085,7 @@
           <a:bodyPr wrap="square" lIns="0" tIns="0" rIns="0" bIns="0" rtlCol="0" anchor="ctr"/>
           <a:lstStyle/>
           <a:p>
-            <a:pPr marL="0" indent="0" algn="ctr">
+            <a:pPr algn="ctr" indent="0" marL="0">
               <a:buNone/>
             </a:pPr>
             <a:r>
@@ -7585,7 +7102,7 @@
       </p:sp>
       <p:sp>
         <p:nvSpPr>
-          <p:cNvPr id="24" name="chip-136"/>
+          <p:cNvPr id="24" name="chip-134"/>
           <p:cNvSpPr/>
           <p:nvPr/>
         </p:nvSpPr>
@@ -7609,17 +7126,10 @@
             <a:prstDash val="solid"/>
           </a:ln>
         </p:spPr>
-        <p:txBody>
-          <a:bodyPr/>
-          <a:lstStyle/>
-          <a:p>
-            <a:endParaRPr lang="LID4096"/>
-          </a:p>
-        </p:txBody>
-      </p:sp>
-      <p:sp>
-        <p:nvSpPr>
-          <p:cNvPr id="25" name="text-137"/>
+      </p:sp>
+      <p:sp>
+        <p:nvSpPr>
+          <p:cNvPr id="25" name="text-135"/>
           <p:cNvSpPr txBox="1"/>
           <p:nvPr/>
         </p:nvSpPr>
@@ -7638,7 +7148,7 @@
           <a:bodyPr wrap="square" lIns="0" tIns="0" rIns="0" bIns="0" rtlCol="0" anchor="ctr"/>
           <a:lstStyle/>
           <a:p>
-            <a:pPr marL="0" indent="0" algn="ctr">
+            <a:pPr algn="ctr" indent="0" marL="0">
               <a:buNone/>
             </a:pPr>
             <a:r>
@@ -7655,7 +7165,7 @@
       </p:sp>
       <p:sp>
         <p:nvSpPr>
-          <p:cNvPr id="26" name="chip-138"/>
+          <p:cNvPr id="26" name="chip-136"/>
           <p:cNvSpPr/>
           <p:nvPr/>
         </p:nvSpPr>
@@ -7679,17 +7189,10 @@
             <a:prstDash val="solid"/>
           </a:ln>
         </p:spPr>
-        <p:txBody>
-          <a:bodyPr/>
-          <a:lstStyle/>
-          <a:p>
-            <a:endParaRPr lang="LID4096"/>
-          </a:p>
-        </p:txBody>
-      </p:sp>
-      <p:sp>
-        <p:nvSpPr>
-          <p:cNvPr id="27" name="text-139"/>
+      </p:sp>
+      <p:sp>
+        <p:nvSpPr>
+          <p:cNvPr id="27" name="text-137"/>
           <p:cNvSpPr txBox="1"/>
           <p:nvPr/>
         </p:nvSpPr>
@@ -7708,7 +7211,7 @@
           <a:bodyPr wrap="square" lIns="0" tIns="0" rIns="0" bIns="0" rtlCol="0" anchor="ctr"/>
           <a:lstStyle/>
           <a:p>
-            <a:pPr marL="0" indent="0" algn="ctr">
+            <a:pPr algn="ctr" indent="0" marL="0">
               <a:buNone/>
             </a:pPr>
             <a:r>
@@ -7725,7 +7228,7 @@
       </p:sp>
       <p:sp>
         <p:nvSpPr>
-          <p:cNvPr id="28" name="chip-140"/>
+          <p:cNvPr id="28" name="chip-138"/>
           <p:cNvSpPr/>
           <p:nvPr/>
         </p:nvSpPr>
@@ -7749,17 +7252,10 @@
             <a:prstDash val="solid"/>
           </a:ln>
         </p:spPr>
-        <p:txBody>
-          <a:bodyPr/>
-          <a:lstStyle/>
-          <a:p>
-            <a:endParaRPr lang="LID4096"/>
-          </a:p>
-        </p:txBody>
-      </p:sp>
-      <p:sp>
-        <p:nvSpPr>
-          <p:cNvPr id="29" name="text-141"/>
+      </p:sp>
+      <p:sp>
+        <p:nvSpPr>
+          <p:cNvPr id="29" name="text-139"/>
           <p:cNvSpPr txBox="1"/>
           <p:nvPr/>
         </p:nvSpPr>
@@ -7778,7 +7274,7 @@
           <a:bodyPr wrap="square" lIns="0" tIns="0" rIns="0" bIns="0" rtlCol="0" anchor="ctr"/>
           <a:lstStyle/>
           <a:p>
-            <a:pPr marL="0" indent="0" algn="ctr">
+            <a:pPr algn="ctr" indent="0" marL="0">
               <a:buNone/>
             </a:pPr>
             <a:r>
@@ -7795,7 +7291,7 @@
       </p:sp>
       <p:sp>
         <p:nvSpPr>
-          <p:cNvPr id="30" name="card-142"/>
+          <p:cNvPr id="30" name="card-140"/>
           <p:cNvSpPr/>
           <p:nvPr/>
         </p:nvSpPr>
@@ -7817,24 +7313,17 @@
             <a:prstDash val="solid"/>
           </a:ln>
           <a:effectLst>
-            <a:outerShdw blurRad="101600" dist="19050" dir="5400000" algn="bl" rotWithShape="0">
+            <a:outerShdw sx="100000" sy="100000" kx="0" ky="0" algn="bl" rotWithShape="0" blurRad="101600" dist="19050" dir="5400000">
               <a:srgbClr val="000000">
                 <a:alpha val="7000"/>
               </a:srgbClr>
             </a:outerShdw>
           </a:effectLst>
         </p:spPr>
-        <p:txBody>
-          <a:bodyPr/>
-          <a:lstStyle/>
-          <a:p>
-            <a:endParaRPr lang="LID4096"/>
-          </a:p>
-        </p:txBody>
-      </p:sp>
-      <p:sp>
-        <p:nvSpPr>
-          <p:cNvPr id="31" name="text-143"/>
+      </p:sp>
+      <p:sp>
+        <p:nvSpPr>
+          <p:cNvPr id="31" name="text-141"/>
           <p:cNvSpPr txBox="1"/>
           <p:nvPr/>
         </p:nvSpPr>
@@ -7853,11 +7342,11 @@
           <a:bodyPr wrap="square" lIns="0" tIns="0" rIns="0" bIns="0" rtlCol="0" anchor="ctr"/>
           <a:lstStyle/>
           <a:p>
-            <a:pPr marL="0" indent="0" algn="l">
-              <a:buNone/>
-            </a:pPr>
-            <a:r>
-              <a:rPr lang="en-US" sz="1100" b="1" kern="0" spc="100" dirty="0">
+            <a:pPr algn="l" indent="0" marL="0">
+              <a:buNone/>
+            </a:pPr>
+            <a:r>
+              <a:rPr lang="en-US" sz="1100" b="1" spc="100" kern="0" dirty="0">
                 <a:solidFill>
                   <a:schemeClr val="accent1"/>
                 </a:solidFill>
@@ -7873,7 +7362,7 @@
       </p:sp>
       <p:sp>
         <p:nvSpPr>
-          <p:cNvPr id="32" name="icon-bg-144"/>
+          <p:cNvPr id="32" name="icon-bg-142"/>
           <p:cNvSpPr/>
           <p:nvPr/>
         </p:nvSpPr>
@@ -7892,17 +7381,274 @@
           </a:solidFill>
           <a:ln/>
         </p:spPr>
-        <p:txBody>
-          <a:bodyPr/>
-          <a:lstStyle/>
-          <a:p>
-            <a:endParaRPr lang="LID4096"/>
-          </a:p>
-        </p:txBody>
       </p:sp>
       <p:pic>
         <p:nvPicPr>
-          <p:cNvPr id="33" name="icon-145" descr="preencoded.png"/>
+          <p:cNvPr id="33" name="icon-143" descr="preencoded.png">    </p:cNvPr>
+          <p:cNvPicPr>
+            <a:picLocks noChangeAspect="1"/>
+          </p:cNvPicPr>
+          <p:nvPr/>
+        </p:nvPicPr>
+        <p:blipFill>
+          <a:blip r:embed="rId5"/>
+          <a:stretch>
+            <a:fillRect/>
+          </a:stretch>
+        </p:blipFill>
+        <p:spPr>
+          <a:xfrm>
+            <a:off x="6765188" y="2635301"/>
+            <a:ext cx="307238" cy="307238"/>
+          </a:xfrm>
+          <a:prstGeom prst="rect">
+            <a:avLst/>
+          </a:prstGeom>
+        </p:spPr>
+      </p:pic>
+      <p:sp>
+        <p:nvSpPr>
+          <p:cNvPr id="34" name="text-144"/>
+          <p:cNvSpPr txBox="1"/>
+          <p:nvPr/>
+        </p:nvSpPr>
+        <p:spPr>
+          <a:xfrm>
+            <a:off x="7421728" y="2450592"/>
+            <a:ext cx="3855568" cy="365760"/>
+          </a:xfrm>
+          <a:prstGeom prst="rect">
+            <a:avLst/>
+          </a:prstGeom>
+          <a:noFill/>
+          <a:ln/>
+        </p:spPr>
+        <p:txBody>
+          <a:bodyPr wrap="square" lIns="0" tIns="0" rIns="0" bIns="0" rtlCol="0" anchor="ctr"/>
+          <a:lstStyle/>
+          <a:p>
+            <a:pPr indent="0" marL="0">
+              <a:buNone/>
+            </a:pPr>
+            <a:r>
+              <a:rPr lang="en-US" sz="1800" b="1" dirty="0">
+                <a:solidFill>
+                  <a:schemeClr val="tx1"/>
+                </a:solidFill>
+              </a:rPr>
+              <a:t>Метрики  </a:t>
+            </a:r>
+            <a:pPr indent="0" marL="0">
+              <a:buNone/>
+            </a:pPr>
+            <a:r>
+              <a:rPr lang="en-US" sz="1200" dirty="0">
+                <a:solidFill>
+                  <a:schemeClr val="accent2"/>
+                </a:solidFill>
+                <a:latin typeface="Courier New" pitchFamily="34" charset="0"/>
+                <a:ea typeface="Courier New" pitchFamily="34" charset="-122"/>
+                <a:cs typeface="Courier New" pitchFamily="34" charset="-120"/>
+              </a:rPr>
+              <a:t>Prometheus</a:t>
+            </a:r>
+            <a:endParaRPr lang="en-US" sz="1600" dirty="0"/>
+          </a:p>
+        </p:txBody>
+      </p:sp>
+      <p:sp>
+        <p:nvSpPr>
+          <p:cNvPr id="35" name="text-145"/>
+          <p:cNvSpPr txBox="1"/>
+          <p:nvPr/>
+        </p:nvSpPr>
+        <p:spPr>
+          <a:xfrm>
+            <a:off x="7421728" y="2798064"/>
+            <a:ext cx="3855568" cy="292608"/>
+          </a:xfrm>
+          <a:prstGeom prst="rect">
+            <a:avLst/>
+          </a:prstGeom>
+          <a:noFill/>
+          <a:ln/>
+        </p:spPr>
+        <p:txBody>
+          <a:bodyPr wrap="square" lIns="0" tIns="0" rIns="0" bIns="0" rtlCol="0" anchor="ctr"/>
+          <a:lstStyle/>
+          <a:p>
+            <a:pPr indent="0" marL="0">
+              <a:buNone/>
+            </a:pPr>
+            <a:r>
+              <a:rPr lang="en-US" sz="1500" i="1" dirty="0">
+                <a:solidFill>
+                  <a:schemeClr val="accent2"/>
+                </a:solidFill>
+              </a:rPr>
+              <a:t>дали нешто не е во ред?</a:t>
+            </a:r>
+            <a:endParaRPr lang="en-US" sz="1500" dirty="0"/>
+          </a:p>
+        </p:txBody>
+      </p:sp>
+      <p:sp>
+        <p:nvSpPr>
+          <p:cNvPr id="36" name="icon-bg-146"/>
+          <p:cNvSpPr/>
+          <p:nvPr/>
+        </p:nvSpPr>
+        <p:spPr>
+          <a:xfrm>
+            <a:off x="6598768" y="3383280"/>
+            <a:ext cx="640080" cy="640080"/>
+          </a:xfrm>
+          <a:prstGeom prst="ellipse">
+            <a:avLst/>
+          </a:prstGeom>
+          <a:solidFill>
+            <a:schemeClr val="accent1">
+              <a:alpha val="12000"/>
+            </a:schemeClr>
+          </a:solidFill>
+          <a:ln/>
+        </p:spPr>
+      </p:sp>
+      <p:pic>
+        <p:nvPicPr>
+          <p:cNvPr id="37" name="icon-147" descr="preencoded.png">    </p:cNvPr>
+          <p:cNvPicPr>
+            <a:picLocks noChangeAspect="1"/>
+          </p:cNvPicPr>
+          <p:nvPr/>
+        </p:nvPicPr>
+        <p:blipFill>
+          <a:blip r:embed="rId6"/>
+          <a:stretch>
+            <a:fillRect/>
+          </a:stretch>
+        </p:blipFill>
+        <p:spPr>
+          <a:xfrm>
+            <a:off x="6765188" y="3549701"/>
+            <a:ext cx="307238" cy="307238"/>
+          </a:xfrm>
+          <a:prstGeom prst="rect">
+            <a:avLst/>
+          </a:prstGeom>
+        </p:spPr>
+      </p:pic>
+      <p:sp>
+        <p:nvSpPr>
+          <p:cNvPr id="38" name="text-148"/>
+          <p:cNvSpPr txBox="1"/>
+          <p:nvPr/>
+        </p:nvSpPr>
+        <p:spPr>
+          <a:xfrm>
+            <a:off x="7421728" y="3364992"/>
+            <a:ext cx="3855568" cy="365760"/>
+          </a:xfrm>
+          <a:prstGeom prst="rect">
+            <a:avLst/>
+          </a:prstGeom>
+          <a:noFill/>
+          <a:ln/>
+        </p:spPr>
+        <p:txBody>
+          <a:bodyPr wrap="square" lIns="0" tIns="0" rIns="0" bIns="0" rtlCol="0" anchor="ctr"/>
+          <a:lstStyle/>
+          <a:p>
+            <a:pPr indent="0" marL="0">
+              <a:buNone/>
+            </a:pPr>
+            <a:r>
+              <a:rPr lang="en-US" sz="1800" b="1" dirty="0">
+                <a:solidFill>
+                  <a:schemeClr val="tx1"/>
+                </a:solidFill>
+              </a:rPr>
+              <a:t>Логови  </a:t>
+            </a:r>
+            <a:pPr indent="0" marL="0">
+              <a:buNone/>
+            </a:pPr>
+            <a:r>
+              <a:rPr lang="en-US" sz="1200" dirty="0">
+                <a:solidFill>
+                  <a:schemeClr val="accent2"/>
+                </a:solidFill>
+                <a:latin typeface="Courier New" pitchFamily="34" charset="0"/>
+                <a:ea typeface="Courier New" pitchFamily="34" charset="-122"/>
+                <a:cs typeface="Courier New" pitchFamily="34" charset="-120"/>
+              </a:rPr>
+              <a:t>Loki</a:t>
+            </a:r>
+            <a:endParaRPr lang="en-US" sz="1600" dirty="0"/>
+          </a:p>
+        </p:txBody>
+      </p:sp>
+      <p:sp>
+        <p:nvSpPr>
+          <p:cNvPr id="39" name="text-149"/>
+          <p:cNvSpPr txBox="1"/>
+          <p:nvPr/>
+        </p:nvSpPr>
+        <p:spPr>
+          <a:xfrm>
+            <a:off x="7421728" y="3712464"/>
+            <a:ext cx="3855568" cy="292608"/>
+          </a:xfrm>
+          <a:prstGeom prst="rect">
+            <a:avLst/>
+          </a:prstGeom>
+          <a:noFill/>
+          <a:ln/>
+        </p:spPr>
+        <p:txBody>
+          <a:bodyPr wrap="square" lIns="0" tIns="0" rIns="0" bIns="0" rtlCol="0" anchor="ctr"/>
+          <a:lstStyle/>
+          <a:p>
+            <a:pPr indent="0" marL="0">
+              <a:buNone/>
+            </a:pPr>
+            <a:r>
+              <a:rPr lang="en-US" sz="1500" i="1" dirty="0">
+                <a:solidFill>
+                  <a:schemeClr val="accent2"/>
+                </a:solidFill>
+              </a:rPr>
+              <a:t>што точно се случило?</a:t>
+            </a:r>
+            <a:endParaRPr lang="en-US" sz="1500" dirty="0"/>
+          </a:p>
+        </p:txBody>
+      </p:sp>
+      <p:sp>
+        <p:nvSpPr>
+          <p:cNvPr id="40" name="icon-bg-150"/>
+          <p:cNvSpPr/>
+          <p:nvPr/>
+        </p:nvSpPr>
+        <p:spPr>
+          <a:xfrm>
+            <a:off x="6598768" y="4297680"/>
+            <a:ext cx="640080" cy="640080"/>
+          </a:xfrm>
+          <a:prstGeom prst="ellipse">
+            <a:avLst/>
+          </a:prstGeom>
+          <a:solidFill>
+            <a:schemeClr val="accent1">
+              <a:alpha val="12000"/>
+            </a:schemeClr>
+          </a:solidFill>
+          <a:ln/>
+        </p:spPr>
+      </p:sp>
+      <p:pic>
+        <p:nvPicPr>
+          <p:cNvPr id="41" name="icon-151" descr="preencoded.png">    </p:cNvPr>
           <p:cNvPicPr>
             <a:picLocks noChangeAspect="1"/>
           </p:cNvPicPr>
@@ -7916,7 +7662,7 @@
         </p:blipFill>
         <p:spPr>
           <a:xfrm>
-            <a:off x="6765188" y="2635301"/>
+            <a:off x="6765188" y="4464101"/>
             <a:ext cx="307238" cy="307238"/>
           </a:xfrm>
           <a:prstGeom prst="rect">
@@ -7926,13 +7672,13 @@
       </p:pic>
       <p:sp>
         <p:nvSpPr>
-          <p:cNvPr id="34" name="text-146"/>
+          <p:cNvPr id="42" name="text-152"/>
           <p:cNvSpPr txBox="1"/>
           <p:nvPr/>
         </p:nvSpPr>
         <p:spPr>
           <a:xfrm>
-            <a:off x="7421728" y="2450592"/>
+            <a:off x="7421728" y="4279392"/>
             <a:ext cx="3855568" cy="365760"/>
           </a:xfrm>
           <a:prstGeom prst="rect">
@@ -7945,7 +7691,7 @@
           <a:bodyPr wrap="square" lIns="0" tIns="0" rIns="0" bIns="0" rtlCol="0" anchor="ctr"/>
           <a:lstStyle/>
           <a:p>
-            <a:pPr marL="0" indent="0">
+            <a:pPr indent="0" marL="0">
               <a:buNone/>
             </a:pPr>
             <a:r>
@@ -7954,8 +7700,11 @@
                   <a:schemeClr val="tx1"/>
                 </a:solidFill>
               </a:rPr>
-              <a:t>Метрики  </a:t>
-            </a:r>
+              <a:t>Traces  </a:t>
+            </a:r>
+            <a:pPr indent="0" marL="0">
+              <a:buNone/>
+            </a:pPr>
             <a:r>
               <a:rPr lang="en-US" sz="1200" dirty="0">
                 <a:solidFill>
@@ -7965,7 +7714,7 @@
                 <a:ea typeface="Courier New" pitchFamily="34" charset="-122"/>
                 <a:cs typeface="Courier New" pitchFamily="34" charset="-120"/>
               </a:rPr>
-              <a:t>Prometheus</a:t>
+              <a:t>Tempo</a:t>
             </a:r>
             <a:endParaRPr lang="en-US" sz="1600" dirty="0"/>
           </a:p>
@@ -7973,13 +7722,13 @@
       </p:sp>
       <p:sp>
         <p:nvSpPr>
-          <p:cNvPr id="35" name="text-147"/>
+          <p:cNvPr id="43" name="text-153"/>
           <p:cNvSpPr txBox="1"/>
           <p:nvPr/>
         </p:nvSpPr>
         <p:spPr>
           <a:xfrm>
-            <a:off x="7421728" y="2798064"/>
+            <a:off x="7421728" y="4626864"/>
             <a:ext cx="3855568" cy="292608"/>
           </a:xfrm>
           <a:prstGeom prst="rect">
@@ -7992,7 +7741,7 @@
           <a:bodyPr wrap="square" lIns="0" tIns="0" rIns="0" bIns="0" rtlCol="0" anchor="ctr"/>
           <a:lstStyle/>
           <a:p>
-            <a:pPr marL="0" indent="0">
+            <a:pPr indent="0" marL="0">
               <a:buNone/>
             </a:pPr>
             <a:r>
@@ -8001,7 +7750,7 @@
                   <a:schemeClr val="accent2"/>
                 </a:solidFill>
               </a:rPr>
-              <a:t>дали нешто не е во ред?</a:t>
+              <a:t>каде се случило?</a:t>
             </a:r>
             <a:endParaRPr lang="en-US" sz="1500" dirty="0"/>
           </a:p>
@@ -8009,36 +7758,30 @@
       </p:sp>
       <p:sp>
         <p:nvSpPr>
-          <p:cNvPr id="36" name="icon-bg-148"/>
-          <p:cNvSpPr/>
-          <p:nvPr/>
-        </p:nvSpPr>
-        <p:spPr>
-          <a:xfrm>
-            <a:off x="6598768" y="3383280"/>
-            <a:ext cx="640080" cy="640080"/>
-          </a:xfrm>
-          <a:prstGeom prst="ellipse">
-            <a:avLst/>
-          </a:prstGeom>
-          <a:solidFill>
-            <a:schemeClr val="accent1">
-              <a:alpha val="12000"/>
-            </a:schemeClr>
-          </a:solidFill>
-          <a:ln/>
-        </p:spPr>
-        <p:txBody>
-          <a:bodyPr/>
-          <a:lstStyle/>
-          <a:p>
-            <a:endParaRPr lang="LID4096"/>
-          </a:p>
-        </p:txBody>
+          <p:cNvPr id="44" name="rule-r"/>
+          <p:cNvSpPr/>
+          <p:nvPr/>
+        </p:nvSpPr>
+        <p:spPr>
+          <a:xfrm>
+            <a:off x="6598768" y="5303520"/>
+            <a:ext cx="4678528" cy="0"/>
+          </a:xfrm>
+          <a:prstGeom prst="line">
+            <a:avLst/>
+          </a:prstGeom>
+          <a:noFill/>
+          <a:ln w="9525">
+            <a:solidFill>
+              <a:schemeClr val="accent5"/>
+            </a:solidFill>
+            <a:prstDash val="solid"/>
+          </a:ln>
+        </p:spPr>
       </p:sp>
       <p:pic>
         <p:nvPicPr>
-          <p:cNvPr id="37" name="icon-149" descr="preencoded.png"/>
+          <p:cNvPr id="45" name="icon-154" descr="preencoded.png">    </p:cNvPr>
           <p:cNvPicPr>
             <a:picLocks noChangeAspect="1"/>
           </p:cNvPicPr>
@@ -8052,279 +7795,6 @@
         </p:blipFill>
         <p:spPr>
           <a:xfrm>
-            <a:off x="6765188" y="3549701"/>
-            <a:ext cx="307238" cy="307238"/>
-          </a:xfrm>
-          <a:prstGeom prst="rect">
-            <a:avLst/>
-          </a:prstGeom>
-        </p:spPr>
-      </p:pic>
-      <p:sp>
-        <p:nvSpPr>
-          <p:cNvPr id="38" name="text-150"/>
-          <p:cNvSpPr txBox="1"/>
-          <p:nvPr/>
-        </p:nvSpPr>
-        <p:spPr>
-          <a:xfrm>
-            <a:off x="7421728" y="3364992"/>
-            <a:ext cx="3855568" cy="365760"/>
-          </a:xfrm>
-          <a:prstGeom prst="rect">
-            <a:avLst/>
-          </a:prstGeom>
-          <a:noFill/>
-          <a:ln/>
-        </p:spPr>
-        <p:txBody>
-          <a:bodyPr wrap="square" lIns="0" tIns="0" rIns="0" bIns="0" rtlCol="0" anchor="ctr"/>
-          <a:lstStyle/>
-          <a:p>
-            <a:pPr marL="0" indent="0">
-              <a:buNone/>
-            </a:pPr>
-            <a:r>
-              <a:rPr lang="en-US" sz="1800" b="1" dirty="0">
-                <a:solidFill>
-                  <a:schemeClr val="tx1"/>
-                </a:solidFill>
-              </a:rPr>
-              <a:t>Логови  </a:t>
-            </a:r>
-            <a:r>
-              <a:rPr lang="en-US" sz="1200" dirty="0">
-                <a:solidFill>
-                  <a:schemeClr val="accent2"/>
-                </a:solidFill>
-                <a:latin typeface="Courier New" pitchFamily="34" charset="0"/>
-                <a:ea typeface="Courier New" pitchFamily="34" charset="-122"/>
-                <a:cs typeface="Courier New" pitchFamily="34" charset="-120"/>
-              </a:rPr>
-              <a:t>Loki</a:t>
-            </a:r>
-            <a:endParaRPr lang="en-US" sz="1600" dirty="0"/>
-          </a:p>
-        </p:txBody>
-      </p:sp>
-      <p:sp>
-        <p:nvSpPr>
-          <p:cNvPr id="39" name="text-151"/>
-          <p:cNvSpPr txBox="1"/>
-          <p:nvPr/>
-        </p:nvSpPr>
-        <p:spPr>
-          <a:xfrm>
-            <a:off x="7421728" y="3712464"/>
-            <a:ext cx="3855568" cy="292608"/>
-          </a:xfrm>
-          <a:prstGeom prst="rect">
-            <a:avLst/>
-          </a:prstGeom>
-          <a:noFill/>
-          <a:ln/>
-        </p:spPr>
-        <p:txBody>
-          <a:bodyPr wrap="square" lIns="0" tIns="0" rIns="0" bIns="0" rtlCol="0" anchor="ctr"/>
-          <a:lstStyle/>
-          <a:p>
-            <a:pPr marL="0" indent="0">
-              <a:buNone/>
-            </a:pPr>
-            <a:r>
-              <a:rPr lang="en-US" sz="1500" i="1" dirty="0">
-                <a:solidFill>
-                  <a:schemeClr val="accent2"/>
-                </a:solidFill>
-              </a:rPr>
-              <a:t>што точно се случило?</a:t>
-            </a:r>
-            <a:endParaRPr lang="en-US" sz="1500" dirty="0"/>
-          </a:p>
-        </p:txBody>
-      </p:sp>
-      <p:sp>
-        <p:nvSpPr>
-          <p:cNvPr id="40" name="icon-bg-152"/>
-          <p:cNvSpPr/>
-          <p:nvPr/>
-        </p:nvSpPr>
-        <p:spPr>
-          <a:xfrm>
-            <a:off x="6598768" y="4297680"/>
-            <a:ext cx="640080" cy="640080"/>
-          </a:xfrm>
-          <a:prstGeom prst="ellipse">
-            <a:avLst/>
-          </a:prstGeom>
-          <a:solidFill>
-            <a:schemeClr val="accent1">
-              <a:alpha val="12000"/>
-            </a:schemeClr>
-          </a:solidFill>
-          <a:ln/>
-        </p:spPr>
-        <p:txBody>
-          <a:bodyPr/>
-          <a:lstStyle/>
-          <a:p>
-            <a:endParaRPr lang="LID4096"/>
-          </a:p>
-        </p:txBody>
-      </p:sp>
-      <p:pic>
-        <p:nvPicPr>
-          <p:cNvPr id="41" name="icon-153" descr="preencoded.png"/>
-          <p:cNvPicPr>
-            <a:picLocks noChangeAspect="1"/>
-          </p:cNvPicPr>
-          <p:nvPr/>
-        </p:nvPicPr>
-        <p:blipFill>
-          <a:blip r:embed="rId9"/>
-          <a:stretch>
-            <a:fillRect/>
-          </a:stretch>
-        </p:blipFill>
-        <p:spPr>
-          <a:xfrm>
-            <a:off x="6765188" y="4464101"/>
-            <a:ext cx="307238" cy="307238"/>
-          </a:xfrm>
-          <a:prstGeom prst="rect">
-            <a:avLst/>
-          </a:prstGeom>
-        </p:spPr>
-      </p:pic>
-      <p:sp>
-        <p:nvSpPr>
-          <p:cNvPr id="42" name="text-154"/>
-          <p:cNvSpPr txBox="1"/>
-          <p:nvPr/>
-        </p:nvSpPr>
-        <p:spPr>
-          <a:xfrm>
-            <a:off x="7421728" y="4279392"/>
-            <a:ext cx="3855568" cy="365760"/>
-          </a:xfrm>
-          <a:prstGeom prst="rect">
-            <a:avLst/>
-          </a:prstGeom>
-          <a:noFill/>
-          <a:ln/>
-        </p:spPr>
-        <p:txBody>
-          <a:bodyPr wrap="square" lIns="0" tIns="0" rIns="0" bIns="0" rtlCol="0" anchor="ctr"/>
-          <a:lstStyle/>
-          <a:p>
-            <a:pPr marL="0" indent="0">
-              <a:buNone/>
-            </a:pPr>
-            <a:r>
-              <a:rPr lang="en-US" sz="1800" b="1" dirty="0">
-                <a:solidFill>
-                  <a:schemeClr val="tx1"/>
-                </a:solidFill>
-              </a:rPr>
-              <a:t>Traces  </a:t>
-            </a:r>
-            <a:r>
-              <a:rPr lang="en-US" sz="1200" dirty="0">
-                <a:solidFill>
-                  <a:schemeClr val="accent2"/>
-                </a:solidFill>
-                <a:latin typeface="Courier New" pitchFamily="34" charset="0"/>
-                <a:ea typeface="Courier New" pitchFamily="34" charset="-122"/>
-                <a:cs typeface="Courier New" pitchFamily="34" charset="-120"/>
-              </a:rPr>
-              <a:t>Tempo</a:t>
-            </a:r>
-            <a:endParaRPr lang="en-US" sz="1600" dirty="0"/>
-          </a:p>
-        </p:txBody>
-      </p:sp>
-      <p:sp>
-        <p:nvSpPr>
-          <p:cNvPr id="43" name="text-155"/>
-          <p:cNvSpPr txBox="1"/>
-          <p:nvPr/>
-        </p:nvSpPr>
-        <p:spPr>
-          <a:xfrm>
-            <a:off x="7421728" y="4626864"/>
-            <a:ext cx="3855568" cy="292608"/>
-          </a:xfrm>
-          <a:prstGeom prst="rect">
-            <a:avLst/>
-          </a:prstGeom>
-          <a:noFill/>
-          <a:ln/>
-        </p:spPr>
-        <p:txBody>
-          <a:bodyPr wrap="square" lIns="0" tIns="0" rIns="0" bIns="0" rtlCol="0" anchor="ctr"/>
-          <a:lstStyle/>
-          <a:p>
-            <a:pPr marL="0" indent="0">
-              <a:buNone/>
-            </a:pPr>
-            <a:r>
-              <a:rPr lang="en-US" sz="1500" i="1" dirty="0">
-                <a:solidFill>
-                  <a:schemeClr val="accent2"/>
-                </a:solidFill>
-              </a:rPr>
-              <a:t>каде се случило?</a:t>
-            </a:r>
-            <a:endParaRPr lang="en-US" sz="1500" dirty="0"/>
-          </a:p>
-        </p:txBody>
-      </p:sp>
-      <p:sp>
-        <p:nvSpPr>
-          <p:cNvPr id="44" name="rule-r"/>
-          <p:cNvSpPr/>
-          <p:nvPr/>
-        </p:nvSpPr>
-        <p:spPr>
-          <a:xfrm>
-            <a:off x="6598768" y="5303520"/>
-            <a:ext cx="4678528" cy="0"/>
-          </a:xfrm>
-          <a:prstGeom prst="line">
-            <a:avLst/>
-          </a:prstGeom>
-          <a:noFill/>
-          <a:ln w="9525">
-            <a:solidFill>
-              <a:schemeClr val="accent5"/>
-            </a:solidFill>
-            <a:prstDash val="solid"/>
-          </a:ln>
-        </p:spPr>
-        <p:txBody>
-          <a:bodyPr/>
-          <a:lstStyle/>
-          <a:p>
-            <a:endParaRPr lang="LID4096"/>
-          </a:p>
-        </p:txBody>
-      </p:sp>
-      <p:pic>
-        <p:nvPicPr>
-          <p:cNvPr id="45" name="icon-156" descr="preencoded.png"/>
-          <p:cNvPicPr>
-            <a:picLocks noChangeAspect="1"/>
-          </p:cNvPicPr>
-          <p:nvPr/>
-        </p:nvPicPr>
-        <p:blipFill>
-          <a:blip r:embed="rId10"/>
-          <a:stretch>
-            <a:fillRect/>
-          </a:stretch>
-        </p:blipFill>
-        <p:spPr>
-          <a:xfrm>
             <a:off x="6735928" y="5550408"/>
             <a:ext cx="365760" cy="365760"/>
           </a:xfrm>
@@ -8335,7 +7805,7 @@
       </p:pic>
       <p:sp>
         <p:nvSpPr>
-          <p:cNvPr id="46" name="text-157"/>
+          <p:cNvPr id="46" name="text-155"/>
           <p:cNvSpPr txBox="1"/>
           <p:nvPr/>
         </p:nvSpPr>
@@ -8354,7 +7824,7 @@
           <a:bodyPr wrap="square" lIns="0" tIns="0" rIns="0" bIns="0" rtlCol="0" anchor="ctr"/>
           <a:lstStyle/>
           <a:p>
-            <a:pPr marL="0" indent="0">
+            <a:pPr indent="0" marL="0">
               <a:buNone/>
             </a:pPr>
             <a:r>
@@ -8365,6 +7835,9 @@
               </a:rPr>
               <a:t>Grafana: </a:t>
             </a:r>
+            <a:pPr indent="0" marL="0">
+              <a:buNone/>
+            </a:pPr>
             <a:r>
               <a:rPr lang="en-US" sz="1700" dirty="0">
                 <a:solidFill>
@@ -8379,7 +7852,7 @@
       </p:sp>
       <p:sp>
         <p:nvSpPr>
-          <p:cNvPr id="47" name="Slide Number Placeholder 0"/>
+          <p:cNvPr id="25" name="Slide Number Placeholder 0"/>
           <p:cNvSpPr>
             <a:spLocks noGrp="1"/>
           </p:cNvSpPr>
@@ -8397,7 +7870,7 @@
           </a:prstGeom>
           <a:extLst>
             <a:ext uri="{C572A759-6A51-4108-AA02-DFA0A04FC94B}">
-              <ma14:wrappingTextBoxFlag xmlns:ma14="http://schemas.microsoft.com/office/mac/drawingml/2011/main" xmlns="" val="0"/>
+              <ma14:wrappingTextBoxFlag xmlns:ma14="http://schemas.microsoft.com/office/mac/drawingml/2011/main" val="0"/>
             </a:ext>
           </a:extLst>
         </p:spPr>
@@ -8418,7 +7891,7 @@
           <a:p>
             <a:pPr algn="r"/>
             <a:fld id="{F7021451-1387-4CA6-816F-3879F97B5CBC}" type="slidenum">
-              <a:rPr lang="en-US" b="0"/>
+              <a:rPr b="0" lang="en-US"/>
               <a:t>5</a:t>
             </a:fld>
             <a:endParaRPr lang="en-US"/>
@@ -8453,11 +7926,9 @@
       <p:sp>
         <p:nvSpPr>
           <p:cNvPr id="2" name="Text 0"/>
-          <p:cNvSpPr>
-            <a:spLocks noGrp="1"/>
-          </p:cNvSpPr>
+          <p:cNvSpPr/>
           <p:nvPr>
-            <p:ph type="body" idx="100" hasCustomPrompt="1"/>
+            <p:ph idx="100" type="body" hasCustomPrompt="1"/>
           </p:nvPr>
         </p:nvSpPr>
         <p:spPr>
@@ -8475,11 +7946,11 @@
           <a:bodyPr wrap="square" lIns="0" tIns="0" rIns="0" bIns="0" rtlCol="0" anchor="ctr"/>
           <a:lstStyle/>
           <a:p>
-            <a:pPr marL="0" indent="0">
-              <a:buNone/>
-            </a:pPr>
-            <a:r>
-              <a:rPr lang="en-US" sz="1100" b="1" kern="0" spc="200" dirty="0">
+            <a:pPr indent="0" marL="0">
+              <a:buNone/>
+            </a:pPr>
+            <a:r>
+              <a:rPr lang="en-US" sz="1100" b="1" spc="200" kern="0" dirty="0">
                 <a:solidFill>
                   <a:schemeClr val="accent1"/>
                 </a:solidFill>
@@ -8487,7 +7958,7 @@
                 <a:ea typeface="Courier New" pitchFamily="34" charset="-122"/>
                 <a:cs typeface="Courier New" pitchFamily="34" charset="-120"/>
               </a:rPr>
-              <a:t>05 · МЕРЕЊЕ</a:t>
+              <a:t>05 · ЕВАЛУАЦИЈА</a:t>
             </a:r>
             <a:endParaRPr lang="en-US" sz="1100" dirty="0"/>
           </a:p>
@@ -8496,11 +7967,9 @@
       <p:sp>
         <p:nvSpPr>
           <p:cNvPr id="3" name="Text 0"/>
-          <p:cNvSpPr>
-            <a:spLocks noGrp="1"/>
-          </p:cNvSpPr>
+          <p:cNvSpPr/>
           <p:nvPr>
-            <p:ph type="title" idx="101" hasCustomPrompt="1"/>
+            <p:ph idx="101" type="title" hasCustomPrompt="1"/>
           </p:nvPr>
         </p:nvSpPr>
         <p:spPr>
@@ -8518,7 +7987,7 @@
           <a:bodyPr wrap="square" lIns="0" tIns="0" rIns="0" bIns="0" rtlCol="0" anchor="t"/>
           <a:lstStyle/>
           <a:p>
-            <a:pPr marL="0" indent="0" algn="l">
+            <a:pPr algn="l" indent="0" marL="0">
               <a:buNone/>
             </a:pPr>
             <a:r>
@@ -8527,7 +7996,7 @@
                   <a:schemeClr val="tx1"/>
                 </a:solidFill>
               </a:rPr>
-              <a:t>Не „еве, работи“ — туку четири бројки</a:t>
+              <a:t>Како ќе докажам дека работи</a:t>
             </a:r>
             <a:endParaRPr lang="en-US" sz="3200" dirty="0"/>
           </a:p>
@@ -8536,11 +8005,9 @@
       <p:sp>
         <p:nvSpPr>
           <p:cNvPr id="4" name="Text 0"/>
-          <p:cNvSpPr>
-            <a:spLocks noGrp="1"/>
-          </p:cNvSpPr>
+          <p:cNvSpPr/>
           <p:nvPr>
-            <p:ph type="body" idx="102" hasCustomPrompt="1"/>
+            <p:ph idx="102" type="body" hasCustomPrompt="1"/>
           </p:nvPr>
         </p:nvSpPr>
         <p:spPr>
@@ -8558,7 +8025,7 @@
           <a:bodyPr wrap="square" lIns="0" tIns="0" rIns="0" bIns="0" rtlCol="0" anchor="t"/>
           <a:lstStyle/>
           <a:p>
-            <a:pPr marL="0" indent="0">
+            <a:pPr indent="0" marL="0">
               <a:buNone/>
             </a:pPr>
             <a:r>
@@ -8567,7 +8034,7 @@
                   <a:schemeClr val="accent2"/>
                 </a:solidFill>
               </a:rPr>
-              <a:t>Секоја проверка завршува со мерлив резултат.</a:t>
+              <a:t>Наместо „еве, работи“ — контролирани експерименти врз двете верзии.</a:t>
             </a:r>
             <a:endParaRPr lang="en-US" sz="1800" dirty="0"/>
           </a:p>
@@ -8575,155 +8042,92 @@
       </p:sp>
       <p:sp>
         <p:nvSpPr>
-          <p:cNvPr id="5" name="text-158"/>
-          <p:cNvSpPr txBox="1"/>
-          <p:nvPr/>
-        </p:nvSpPr>
-        <p:spPr>
-          <a:xfrm>
-            <a:off x="548640" y="2514600"/>
-            <a:ext cx="2316404" cy="1371600"/>
-          </a:xfrm>
-          <a:prstGeom prst="rect">
-            <a:avLst/>
-          </a:prstGeom>
-          <a:noFill/>
-          <a:ln/>
-        </p:spPr>
-        <p:txBody>
-          <a:bodyPr wrap="square" lIns="0" tIns="0" rIns="0" bIns="0" rtlCol="0" anchor="ctr"/>
-          <a:lstStyle/>
-          <a:p>
-            <a:pPr marL="0" indent="0">
-              <a:buNone/>
-            </a:pPr>
-            <a:r>
-              <a:rPr lang="en-US" sz="5600" b="1" dirty="0">
-                <a:solidFill>
-                  <a:schemeClr val="accent1"/>
-                </a:solidFill>
-                <a:latin typeface="+mj-lt" pitchFamily="34" charset="0"/>
-                <a:ea typeface="+mj-lt" pitchFamily="34" charset="-122"/>
-                <a:cs typeface="+mj-lt" pitchFamily="34" charset="-120"/>
-              </a:rPr>
-              <a:t>0</a:t>
-            </a:r>
-            <a:endParaRPr lang="en-US" sz="5600" dirty="0"/>
-          </a:p>
-        </p:txBody>
-      </p:sp>
-      <p:sp>
-        <p:nvSpPr>
-          <p:cNvPr id="6" name="text-159"/>
-          <p:cNvSpPr txBox="1"/>
-          <p:nvPr/>
-        </p:nvSpPr>
-        <p:spPr>
-          <a:xfrm>
-            <a:off x="548640" y="4069080"/>
-            <a:ext cx="2316404" cy="777240"/>
-          </a:xfrm>
-          <a:prstGeom prst="rect">
-            <a:avLst/>
-          </a:prstGeom>
-          <a:noFill/>
-          <a:ln/>
-        </p:spPr>
-        <p:txBody>
-          <a:bodyPr wrap="square" lIns="0" tIns="0" rIns="0" bIns="0" rtlCol="0" anchor="t"/>
-          <a:lstStyle/>
-          <a:p>
-            <a:pPr marL="0" indent="0">
-              <a:buNone/>
-            </a:pPr>
-            <a:r>
-              <a:rPr lang="en-US" sz="2100" b="1" dirty="0">
-                <a:solidFill>
-                  <a:schemeClr val="tx1"/>
-                </a:solidFill>
-              </a:rPr>
-              <a:t>изгубени настани</a:t>
-            </a:r>
-            <a:endParaRPr lang="en-US" sz="2100" dirty="0"/>
-          </a:p>
-        </p:txBody>
-      </p:sp>
-      <p:sp>
-        <p:nvSpPr>
-          <p:cNvPr id="7" name="text-160"/>
-          <p:cNvSpPr txBox="1"/>
-          <p:nvPr/>
-        </p:nvSpPr>
-        <p:spPr>
-          <a:xfrm>
-            <a:off x="548640" y="4937760"/>
-            <a:ext cx="2316404" cy="822960"/>
-          </a:xfrm>
-          <a:prstGeom prst="rect">
-            <a:avLst/>
-          </a:prstGeom>
-          <a:noFill/>
-          <a:ln/>
-        </p:spPr>
-        <p:txBody>
-          <a:bodyPr wrap="square" lIns="0" tIns="0" rIns="0" bIns="0" rtlCol="0" anchor="t"/>
-          <a:lstStyle/>
-          <a:p>
-            <a:pPr marL="0" indent="0">
-              <a:buNone/>
-            </a:pPr>
-            <a:r>
-              <a:rPr lang="en-US" sz="1600" dirty="0">
-                <a:solidFill>
-                  <a:schemeClr val="accent2"/>
-                </a:solidFill>
-              </a:rPr>
-              <a:t>гасам Kafka среде операција</a:t>
-            </a:r>
-            <a:endParaRPr lang="en-US" sz="1600" dirty="0"/>
-          </a:p>
-        </p:txBody>
-      </p:sp>
-      <p:sp>
-        <p:nvSpPr>
-          <p:cNvPr id="8" name="sep-161"/>
-          <p:cNvSpPr/>
-          <p:nvPr/>
-        </p:nvSpPr>
-        <p:spPr>
-          <a:xfrm>
-            <a:off x="3322244" y="2606040"/>
-            <a:ext cx="0" cy="3291840"/>
-          </a:xfrm>
-          <a:prstGeom prst="line">
-            <a:avLst/>
-          </a:prstGeom>
-          <a:noFill/>
-          <a:ln w="12700">
+          <p:cNvPr id="5" name="card-156"/>
+          <p:cNvSpPr/>
+          <p:nvPr/>
+        </p:nvSpPr>
+        <p:spPr>
+          <a:xfrm>
+            <a:off x="548640" y="2011680"/>
+            <a:ext cx="5410048" cy="1965960"/>
+          </a:xfrm>
+          <a:prstGeom prst="rect">
+            <a:avLst/>
+          </a:prstGeom>
+          <a:solidFill>
+            <a:schemeClr val="bg1"/>
+          </a:solidFill>
+          <a:ln w="9525">
             <a:solidFill>
               <a:schemeClr val="accent5"/>
             </a:solidFill>
             <a:prstDash val="solid"/>
           </a:ln>
-        </p:spPr>
-        <p:txBody>
-          <a:bodyPr/>
-          <a:lstStyle/>
-          <a:p>
-            <a:endParaRPr lang="LID4096"/>
-          </a:p>
-        </p:txBody>
-      </p:sp>
-      <p:sp>
-        <p:nvSpPr>
-          <p:cNvPr id="9" name="text-162"/>
+          <a:effectLst>
+            <a:outerShdw sx="100000" sy="100000" kx="0" ky="0" algn="bl" rotWithShape="0" blurRad="101600" dist="19050" dir="5400000">
+              <a:srgbClr val="000000">
+                <a:alpha val="7000"/>
+              </a:srgbClr>
+            </a:outerShdw>
+          </a:effectLst>
+        </p:spPr>
+      </p:sp>
+      <p:sp>
+        <p:nvSpPr>
+          <p:cNvPr id="6" name="icon-bg-157"/>
+          <p:cNvSpPr/>
+          <p:nvPr/>
+        </p:nvSpPr>
+        <p:spPr>
+          <a:xfrm>
+            <a:off x="914400" y="2377440"/>
+            <a:ext cx="685800" cy="685800"/>
+          </a:xfrm>
+          <a:prstGeom prst="ellipse">
+            <a:avLst/>
+          </a:prstGeom>
+          <a:solidFill>
+            <a:schemeClr val="accent1">
+              <a:alpha val="12000"/>
+            </a:schemeClr>
+          </a:solidFill>
+          <a:ln/>
+        </p:spPr>
+      </p:sp>
+      <p:pic>
+        <p:nvPicPr>
+          <p:cNvPr id="7" name="icon-158" descr="preencoded.png">    </p:cNvPr>
+          <p:cNvPicPr>
+            <a:picLocks noChangeAspect="1"/>
+          </p:cNvPicPr>
+          <p:nvPr/>
+        </p:nvPicPr>
+        <p:blipFill>
+          <a:blip r:embed="rId1"/>
+          <a:stretch>
+            <a:fillRect/>
+          </a:stretch>
+        </p:blipFill>
+        <p:spPr>
+          <a:xfrm>
+            <a:off x="1092708" y="2555748"/>
+            <a:ext cx="329184" cy="329184"/>
+          </a:xfrm>
+          <a:prstGeom prst="rect">
+            <a:avLst/>
+          </a:prstGeom>
+        </p:spPr>
+      </p:pic>
+      <p:sp>
+        <p:nvSpPr>
+          <p:cNvPr id="8" name="text-159"/>
           <p:cNvSpPr txBox="1"/>
           <p:nvPr/>
         </p:nvSpPr>
         <p:spPr>
           <a:xfrm>
-            <a:off x="3642284" y="2514600"/>
-            <a:ext cx="2316404" cy="1371600"/>
+            <a:off x="1828800" y="2359152"/>
+            <a:ext cx="3764128" cy="548640"/>
           </a:xfrm>
           <a:prstGeom prst="rect">
             <a:avLst/>
@@ -8735,34 +8139,34 @@
           <a:bodyPr wrap="square" lIns="0" tIns="0" rIns="0" bIns="0" rtlCol="0" anchor="ctr"/>
           <a:lstStyle/>
           <a:p>
-            <a:pPr marL="0" indent="0">
-              <a:buNone/>
-            </a:pPr>
-            <a:r>
-              <a:rPr lang="en-US" sz="5600" b="1" dirty="0">
-                <a:solidFill>
-                  <a:schemeClr val="accent1"/>
+            <a:pPr indent="0" marL="0">
+              <a:buNone/>
+            </a:pPr>
+            <a:r>
+              <a:rPr lang="en-US" sz="2000" b="1" dirty="0">
+                <a:solidFill>
+                  <a:schemeClr val="tx1"/>
                 </a:solidFill>
                 <a:latin typeface="+mj-lt" pitchFamily="34" charset="0"/>
                 <a:ea typeface="+mj-lt" pitchFamily="34" charset="-122"/>
                 <a:cs typeface="+mj-lt" pitchFamily="34" charset="-120"/>
               </a:rPr>
-              <a:t>1</a:t>
-            </a:r>
-            <a:endParaRPr lang="en-US" sz="5600" dirty="0"/>
-          </a:p>
-        </p:txBody>
-      </p:sp>
-      <p:sp>
-        <p:nvSpPr>
-          <p:cNvPr id="10" name="text-163"/>
+              <a:t>Пад на Kafka</a:t>
+            </a:r>
+            <a:endParaRPr lang="en-US" sz="2000" dirty="0"/>
+          </a:p>
+        </p:txBody>
+      </p:sp>
+      <p:sp>
+        <p:nvSpPr>
+          <p:cNvPr id="9" name="text-160"/>
           <p:cNvSpPr txBox="1"/>
           <p:nvPr/>
         </p:nvSpPr>
         <p:spPr>
           <a:xfrm>
-            <a:off x="3642284" y="4069080"/>
-            <a:ext cx="2316404" cy="777240"/>
+            <a:off x="1828800" y="2971800"/>
+            <a:ext cx="3764128" cy="822960"/>
           </a:xfrm>
           <a:prstGeom prst="rect">
             <a:avLst/>
@@ -8774,43 +8178,7 @@
           <a:bodyPr wrap="square" lIns="0" tIns="0" rIns="0" bIns="0" rtlCol="0" anchor="t"/>
           <a:lstStyle/>
           <a:p>
-            <a:pPr marL="0" indent="0">
-              <a:buNone/>
-            </a:pPr>
-            <a:r>
-              <a:rPr lang="en-US" sz="2100" b="1" dirty="0">
-                <a:solidFill>
-                  <a:schemeClr val="tx1"/>
-                </a:solidFill>
-              </a:rPr>
-              <a:t>известување, не две</a:t>
-            </a:r>
-            <a:endParaRPr lang="en-US" sz="2100" dirty="0"/>
-          </a:p>
-        </p:txBody>
-      </p:sp>
-      <p:sp>
-        <p:nvSpPr>
-          <p:cNvPr id="11" name="text-164"/>
-          <p:cNvSpPr txBox="1"/>
-          <p:nvPr/>
-        </p:nvSpPr>
-        <p:spPr>
-          <a:xfrm>
-            <a:off x="3642284" y="4937760"/>
-            <a:ext cx="2316404" cy="822960"/>
-          </a:xfrm>
-          <a:prstGeom prst="rect">
-            <a:avLst/>
-          </a:prstGeom>
-          <a:noFill/>
-          <a:ln/>
-        </p:spPr>
-        <p:txBody>
-          <a:bodyPr wrap="square" lIns="0" tIns="0" rIns="0" bIns="0" rtlCol="0" anchor="t"/>
-          <a:lstStyle/>
-          <a:p>
-            <a:pPr marL="0" indent="0">
+            <a:pPr indent="0" marL="0">
               <a:buNone/>
             </a:pPr>
             <a:r>
@@ -8819,7 +8187,7 @@
                   <a:schemeClr val="accent2"/>
                 </a:solidFill>
               </a:rPr>
-              <a:t>ист настан праќам двапати</a:t>
+              <a:t>Ја гасам Kafka додека системот работи и проверувам дека ниту еден настан не е изгубен.</a:t>
             </a:r>
             <a:endParaRPr lang="en-US" sz="1600" dirty="0"/>
           </a:p>
@@ -8827,44 +8195,92 @@
       </p:sp>
       <p:sp>
         <p:nvSpPr>
-          <p:cNvPr id="12" name="sep-165"/>
-          <p:cNvSpPr/>
-          <p:nvPr/>
-        </p:nvSpPr>
-        <p:spPr>
-          <a:xfrm>
-            <a:off x="6095848" y="2606040"/>
-            <a:ext cx="0" cy="3291840"/>
-          </a:xfrm>
-          <a:prstGeom prst="line">
-            <a:avLst/>
-          </a:prstGeom>
-          <a:noFill/>
-          <a:ln w="12700">
+          <p:cNvPr id="10" name="card-161"/>
+          <p:cNvSpPr/>
+          <p:nvPr/>
+        </p:nvSpPr>
+        <p:spPr>
+          <a:xfrm>
+            <a:off x="6233008" y="2011680"/>
+            <a:ext cx="5410048" cy="1965960"/>
+          </a:xfrm>
+          <a:prstGeom prst="rect">
+            <a:avLst/>
+          </a:prstGeom>
+          <a:solidFill>
+            <a:schemeClr val="bg1"/>
+          </a:solidFill>
+          <a:ln w="9525">
             <a:solidFill>
               <a:schemeClr val="accent5"/>
             </a:solidFill>
             <a:prstDash val="solid"/>
           </a:ln>
-        </p:spPr>
-        <p:txBody>
-          <a:bodyPr/>
-          <a:lstStyle/>
-          <a:p>
-            <a:endParaRPr lang="LID4096"/>
-          </a:p>
-        </p:txBody>
-      </p:sp>
-      <p:sp>
-        <p:nvSpPr>
-          <p:cNvPr id="13" name="text-166"/>
+          <a:effectLst>
+            <a:outerShdw sx="100000" sy="100000" kx="0" ky="0" algn="bl" rotWithShape="0" blurRad="101600" dist="19050" dir="5400000">
+              <a:srgbClr val="000000">
+                <a:alpha val="7000"/>
+              </a:srgbClr>
+            </a:outerShdw>
+          </a:effectLst>
+        </p:spPr>
+      </p:sp>
+      <p:sp>
+        <p:nvSpPr>
+          <p:cNvPr id="11" name="icon-bg-162"/>
+          <p:cNvSpPr/>
+          <p:nvPr/>
+        </p:nvSpPr>
+        <p:spPr>
+          <a:xfrm>
+            <a:off x="6598768" y="2377440"/>
+            <a:ext cx="685800" cy="685800"/>
+          </a:xfrm>
+          <a:prstGeom prst="ellipse">
+            <a:avLst/>
+          </a:prstGeom>
+          <a:solidFill>
+            <a:schemeClr val="accent1">
+              <a:alpha val="12000"/>
+            </a:schemeClr>
+          </a:solidFill>
+          <a:ln/>
+        </p:spPr>
+      </p:sp>
+      <p:pic>
+        <p:nvPicPr>
+          <p:cNvPr id="12" name="icon-163" descr="preencoded.png">    </p:cNvPr>
+          <p:cNvPicPr>
+            <a:picLocks noChangeAspect="1"/>
+          </p:cNvPicPr>
+          <p:nvPr/>
+        </p:nvPicPr>
+        <p:blipFill>
+          <a:blip r:embed="rId2"/>
+          <a:stretch>
+            <a:fillRect/>
+          </a:stretch>
+        </p:blipFill>
+        <p:spPr>
+          <a:xfrm>
+            <a:off x="6777076" y="2555748"/>
+            <a:ext cx="329184" cy="329184"/>
+          </a:xfrm>
+          <a:prstGeom prst="rect">
+            <a:avLst/>
+          </a:prstGeom>
+        </p:spPr>
+      </p:pic>
+      <p:sp>
+        <p:nvSpPr>
+          <p:cNvPr id="13" name="text-164"/>
           <p:cNvSpPr txBox="1"/>
           <p:nvPr/>
         </p:nvSpPr>
         <p:spPr>
           <a:xfrm>
-            <a:off x="6415888" y="2514600"/>
-            <a:ext cx="2316404" cy="1371600"/>
+            <a:off x="7513168" y="2359152"/>
+            <a:ext cx="3764128" cy="548640"/>
           </a:xfrm>
           <a:prstGeom prst="rect">
             <a:avLst/>
@@ -8876,34 +8292,34 @@
           <a:bodyPr wrap="square" lIns="0" tIns="0" rIns="0" bIns="0" rtlCol="0" anchor="ctr"/>
           <a:lstStyle/>
           <a:p>
-            <a:pPr marL="0" indent="0">
-              <a:buNone/>
-            </a:pPr>
-            <a:r>
-              <a:rPr lang="en-US" sz="5600" b="1" dirty="0">
-                <a:solidFill>
-                  <a:schemeClr val="accent1"/>
+            <a:pPr indent="0" marL="0">
+              <a:buNone/>
+            </a:pPr>
+            <a:r>
+              <a:rPr lang="en-US" sz="2000" b="1" dirty="0">
+                <a:solidFill>
+                  <a:schemeClr val="tx1"/>
                 </a:solidFill>
                 <a:latin typeface="+mj-lt" pitchFamily="34" charset="0"/>
                 <a:ea typeface="+mj-lt" pitchFamily="34" charset="-122"/>
                 <a:cs typeface="+mj-lt" pitchFamily="34" charset="-120"/>
               </a:rPr>
-              <a:t>p95</a:t>
-            </a:r>
-            <a:endParaRPr lang="en-US" sz="5600" dirty="0"/>
-          </a:p>
-        </p:txBody>
-      </p:sp>
-      <p:sp>
-        <p:nvSpPr>
-          <p:cNvPr id="14" name="text-167"/>
+              <a:t>Дупла порака</a:t>
+            </a:r>
+            <a:endParaRPr lang="en-US" sz="2000" dirty="0"/>
+          </a:p>
+        </p:txBody>
+      </p:sp>
+      <p:sp>
+        <p:nvSpPr>
+          <p:cNvPr id="14" name="text-165"/>
           <p:cNvSpPr txBox="1"/>
           <p:nvPr/>
         </p:nvSpPr>
         <p:spPr>
           <a:xfrm>
-            <a:off x="6415888" y="4069080"/>
-            <a:ext cx="2316404" cy="777240"/>
+            <a:off x="7513168" y="2971800"/>
+            <a:ext cx="3764128" cy="822960"/>
           </a:xfrm>
           <a:prstGeom prst="rect">
             <a:avLst/>
@@ -8915,43 +8331,7 @@
           <a:bodyPr wrap="square" lIns="0" tIns="0" rIns="0" bIns="0" rtlCol="0" anchor="t"/>
           <a:lstStyle/>
           <a:p>
-            <a:pPr marL="0" indent="0">
-              <a:buNone/>
-            </a:pPr>
-            <a:r>
-              <a:rPr lang="en-US" sz="2100" b="1" dirty="0">
-                <a:solidFill>
-                  <a:schemeClr val="tx1"/>
-                </a:solidFill>
-              </a:rPr>
-              <a:t>монолит vs. сервиси</a:t>
-            </a:r>
-            <a:endParaRPr lang="en-US" sz="2100" dirty="0"/>
-          </a:p>
-        </p:txBody>
-      </p:sp>
-      <p:sp>
-        <p:nvSpPr>
-          <p:cNvPr id="15" name="text-168"/>
-          <p:cNvSpPr txBox="1"/>
-          <p:nvPr/>
-        </p:nvSpPr>
-        <p:spPr>
-          <a:xfrm>
-            <a:off x="6415888" y="4937760"/>
-            <a:ext cx="2316404" cy="822960"/>
-          </a:xfrm>
-          <a:prstGeom prst="rect">
-            <a:avLst/>
-          </a:prstGeom>
-          <a:noFill/>
-          <a:ln/>
-        </p:spPr>
-        <p:txBody>
-          <a:bodyPr wrap="square" lIns="0" tIns="0" rIns="0" bIns="0" rtlCol="0" anchor="t"/>
-          <a:lstStyle/>
-          <a:p>
-            <a:pPr marL="0" indent="0">
+            <a:pPr indent="0" marL="0">
               <a:buNone/>
             </a:pPr>
             <a:r>
@@ -8960,7 +8340,7 @@
                   <a:schemeClr val="accent2"/>
                 </a:solidFill>
               </a:rPr>
-              <a:t>исто оптоварување со k6</a:t>
+              <a:t>Истиот настан го праќам двапати и проверувам дека корисникот добива само едно известување.</a:t>
             </a:r>
             <a:endParaRPr lang="en-US" sz="1600" dirty="0"/>
           </a:p>
@@ -8968,44 +8348,92 @@
       </p:sp>
       <p:sp>
         <p:nvSpPr>
-          <p:cNvPr id="16" name="sep-169"/>
-          <p:cNvSpPr/>
-          <p:nvPr/>
-        </p:nvSpPr>
-        <p:spPr>
-          <a:xfrm>
-            <a:off x="8869451" y="2606040"/>
-            <a:ext cx="0" cy="3291840"/>
-          </a:xfrm>
-          <a:prstGeom prst="line">
-            <a:avLst/>
-          </a:prstGeom>
-          <a:noFill/>
-          <a:ln w="12700">
+          <p:cNvPr id="15" name="card-166"/>
+          <p:cNvSpPr/>
+          <p:nvPr/>
+        </p:nvSpPr>
+        <p:spPr>
+          <a:xfrm>
+            <a:off x="548640" y="4251960"/>
+            <a:ext cx="5410048" cy="1965960"/>
+          </a:xfrm>
+          <a:prstGeom prst="rect">
+            <a:avLst/>
+          </a:prstGeom>
+          <a:solidFill>
+            <a:schemeClr val="bg1"/>
+          </a:solidFill>
+          <a:ln w="9525">
             <a:solidFill>
               <a:schemeClr val="accent5"/>
             </a:solidFill>
             <a:prstDash val="solid"/>
           </a:ln>
-        </p:spPr>
-        <p:txBody>
-          <a:bodyPr/>
-          <a:lstStyle/>
-          <a:p>
-            <a:endParaRPr lang="LID4096"/>
-          </a:p>
-        </p:txBody>
-      </p:sp>
-      <p:sp>
-        <p:nvSpPr>
-          <p:cNvPr id="17" name="text-170"/>
+          <a:effectLst>
+            <a:outerShdw sx="100000" sy="100000" kx="0" ky="0" algn="bl" rotWithShape="0" blurRad="101600" dist="19050" dir="5400000">
+              <a:srgbClr val="000000">
+                <a:alpha val="7000"/>
+              </a:srgbClr>
+            </a:outerShdw>
+          </a:effectLst>
+        </p:spPr>
+      </p:sp>
+      <p:sp>
+        <p:nvSpPr>
+          <p:cNvPr id="16" name="icon-bg-167"/>
+          <p:cNvSpPr/>
+          <p:nvPr/>
+        </p:nvSpPr>
+        <p:spPr>
+          <a:xfrm>
+            <a:off x="914400" y="4617720"/>
+            <a:ext cx="685800" cy="685800"/>
+          </a:xfrm>
+          <a:prstGeom prst="ellipse">
+            <a:avLst/>
+          </a:prstGeom>
+          <a:solidFill>
+            <a:schemeClr val="accent1">
+              <a:alpha val="12000"/>
+            </a:schemeClr>
+          </a:solidFill>
+          <a:ln/>
+        </p:spPr>
+      </p:sp>
+      <p:pic>
+        <p:nvPicPr>
+          <p:cNvPr id="17" name="icon-168" descr="preencoded.png">    </p:cNvPr>
+          <p:cNvPicPr>
+            <a:picLocks noChangeAspect="1"/>
+          </p:cNvPicPr>
+          <p:nvPr/>
+        </p:nvPicPr>
+        <p:blipFill>
+          <a:blip r:embed="rId3"/>
+          <a:stretch>
+            <a:fillRect/>
+          </a:stretch>
+        </p:blipFill>
+        <p:spPr>
+          <a:xfrm>
+            <a:off x="1092708" y="4796028"/>
+            <a:ext cx="329184" cy="329184"/>
+          </a:xfrm>
+          <a:prstGeom prst="rect">
+            <a:avLst/>
+          </a:prstGeom>
+        </p:spPr>
+      </p:pic>
+      <p:sp>
+        <p:nvSpPr>
+          <p:cNvPr id="18" name="text-169"/>
           <p:cNvSpPr txBox="1"/>
           <p:nvPr/>
         </p:nvSpPr>
         <p:spPr>
           <a:xfrm>
-            <a:off x="9189491" y="2514600"/>
-            <a:ext cx="2316404" cy="1371600"/>
+            <a:off x="1828800" y="4599432"/>
+            <a:ext cx="3764128" cy="548640"/>
           </a:xfrm>
           <a:prstGeom prst="rect">
             <a:avLst/>
@@ -9017,34 +8445,34 @@
           <a:bodyPr wrap="square" lIns="0" tIns="0" rIns="0" bIns="0" rtlCol="0" anchor="ctr"/>
           <a:lstStyle/>
           <a:p>
-            <a:pPr marL="0" indent="0">
-              <a:buNone/>
-            </a:pPr>
-            <a:r>
-              <a:rPr lang="en-US" sz="5600" b="1" dirty="0">
-                <a:solidFill>
-                  <a:schemeClr val="accent1"/>
+            <a:pPr indent="0" marL="0">
+              <a:buNone/>
+            </a:pPr>
+            <a:r>
+              <a:rPr lang="en-US" sz="2000" b="1" dirty="0">
+                <a:solidFill>
+                  <a:schemeClr val="tx1"/>
                 </a:solidFill>
                 <a:latin typeface="+mj-lt" pitchFamily="34" charset="0"/>
                 <a:ea typeface="+mj-lt" pitchFamily="34" charset="-122"/>
                 <a:cs typeface="+mj-lt" pitchFamily="34" charset="-120"/>
               </a:rPr>
-              <a:t>MTTD</a:t>
-            </a:r>
-            <a:endParaRPr lang="en-US" sz="5600" dirty="0"/>
-          </a:p>
-        </p:txBody>
-      </p:sp>
-      <p:sp>
-        <p:nvSpPr>
-          <p:cNvPr id="18" name="text-171"/>
+              <a:t>Споредба со монолитот</a:t>
+            </a:r>
+            <a:endParaRPr lang="en-US" sz="2000" dirty="0"/>
+          </a:p>
+        </p:txBody>
+      </p:sp>
+      <p:sp>
+        <p:nvSpPr>
+          <p:cNvPr id="19" name="text-170"/>
           <p:cNvSpPr txBox="1"/>
           <p:nvPr/>
         </p:nvSpPr>
         <p:spPr>
           <a:xfrm>
-            <a:off x="9189491" y="4069080"/>
-            <a:ext cx="2316404" cy="777240"/>
+            <a:off x="1828800" y="5212080"/>
+            <a:ext cx="3764128" cy="822960"/>
           </a:xfrm>
           <a:prstGeom prst="rect">
             <a:avLst/>
@@ -9056,31 +8484,148 @@
           <a:bodyPr wrap="square" lIns="0" tIns="0" rIns="0" bIns="0" rtlCol="0" anchor="t"/>
           <a:lstStyle/>
           <a:p>
-            <a:pPr marL="0" indent="0">
-              <a:buNone/>
-            </a:pPr>
-            <a:r>
-              <a:rPr lang="en-US" sz="2100" b="1" dirty="0">
+            <a:pPr indent="0" marL="0">
+              <a:buNone/>
+            </a:pPr>
+            <a:r>
+              <a:rPr lang="en-US" sz="1600" dirty="0">
+                <a:solidFill>
+                  <a:schemeClr val="accent2"/>
+                </a:solidFill>
+              </a:rPr>
+              <a:t>Двете верзии ги оптоварувам на ист начин и ги споредувам брзината и потрошените ресурси.</a:t>
+            </a:r>
+            <a:endParaRPr lang="en-US" sz="1600" dirty="0"/>
+          </a:p>
+        </p:txBody>
+      </p:sp>
+      <p:sp>
+        <p:nvSpPr>
+          <p:cNvPr id="20" name="card-171"/>
+          <p:cNvSpPr/>
+          <p:nvPr/>
+        </p:nvSpPr>
+        <p:spPr>
+          <a:xfrm>
+            <a:off x="6233008" y="4251960"/>
+            <a:ext cx="5410048" cy="1965960"/>
+          </a:xfrm>
+          <a:prstGeom prst="rect">
+            <a:avLst/>
+          </a:prstGeom>
+          <a:solidFill>
+            <a:schemeClr val="bg1"/>
+          </a:solidFill>
+          <a:ln w="9525">
+            <a:solidFill>
+              <a:schemeClr val="accent5"/>
+            </a:solidFill>
+            <a:prstDash val="solid"/>
+          </a:ln>
+          <a:effectLst>
+            <a:outerShdw sx="100000" sy="100000" kx="0" ky="0" algn="bl" rotWithShape="0" blurRad="101600" dist="19050" dir="5400000">
+              <a:srgbClr val="000000">
+                <a:alpha val="7000"/>
+              </a:srgbClr>
+            </a:outerShdw>
+          </a:effectLst>
+        </p:spPr>
+      </p:sp>
+      <p:sp>
+        <p:nvSpPr>
+          <p:cNvPr id="21" name="icon-bg-172"/>
+          <p:cNvSpPr/>
+          <p:nvPr/>
+        </p:nvSpPr>
+        <p:spPr>
+          <a:xfrm>
+            <a:off x="6598768" y="4617720"/>
+            <a:ext cx="685800" cy="685800"/>
+          </a:xfrm>
+          <a:prstGeom prst="ellipse">
+            <a:avLst/>
+          </a:prstGeom>
+          <a:solidFill>
+            <a:schemeClr val="accent1">
+              <a:alpha val="12000"/>
+            </a:schemeClr>
+          </a:solidFill>
+          <a:ln/>
+        </p:spPr>
+      </p:sp>
+      <p:pic>
+        <p:nvPicPr>
+          <p:cNvPr id="22" name="icon-173" descr="preencoded.png">    </p:cNvPr>
+          <p:cNvPicPr>
+            <a:picLocks noChangeAspect="1"/>
+          </p:cNvPicPr>
+          <p:nvPr/>
+        </p:nvPicPr>
+        <p:blipFill>
+          <a:blip r:embed="rId4"/>
+          <a:stretch>
+            <a:fillRect/>
+          </a:stretch>
+        </p:blipFill>
+        <p:spPr>
+          <a:xfrm>
+            <a:off x="6777076" y="4796028"/>
+            <a:ext cx="329184" cy="329184"/>
+          </a:xfrm>
+          <a:prstGeom prst="rect">
+            <a:avLst/>
+          </a:prstGeom>
+        </p:spPr>
+      </p:pic>
+      <p:sp>
+        <p:nvSpPr>
+          <p:cNvPr id="23" name="text-174"/>
+          <p:cNvSpPr txBox="1"/>
+          <p:nvPr/>
+        </p:nvSpPr>
+        <p:spPr>
+          <a:xfrm>
+            <a:off x="7513168" y="4599432"/>
+            <a:ext cx="3764128" cy="548640"/>
+          </a:xfrm>
+          <a:prstGeom prst="rect">
+            <a:avLst/>
+          </a:prstGeom>
+          <a:noFill/>
+          <a:ln/>
+        </p:spPr>
+        <p:txBody>
+          <a:bodyPr wrap="square" lIns="0" tIns="0" rIns="0" bIns="0" rtlCol="0" anchor="ctr"/>
+          <a:lstStyle/>
+          <a:p>
+            <a:pPr indent="0" marL="0">
+              <a:buNone/>
+            </a:pPr>
+            <a:r>
+              <a:rPr lang="en-US" sz="2000" b="1" dirty="0">
                 <a:solidFill>
                   <a:schemeClr val="tx1"/>
                 </a:solidFill>
-              </a:rPr>
-              <a:t>време до аларм</a:t>
-            </a:r>
-            <a:endParaRPr lang="en-US" sz="2100" dirty="0"/>
-          </a:p>
-        </p:txBody>
-      </p:sp>
-      <p:sp>
-        <p:nvSpPr>
-          <p:cNvPr id="19" name="text-172"/>
+                <a:latin typeface="+mj-lt" pitchFamily="34" charset="0"/>
+                <a:ea typeface="+mj-lt" pitchFamily="34" charset="-122"/>
+                <a:cs typeface="+mj-lt" pitchFamily="34" charset="-120"/>
+              </a:rPr>
+              <a:t>Намерни откази</a:t>
+            </a:r>
+            <a:endParaRPr lang="en-US" sz="2000" dirty="0"/>
+          </a:p>
+        </p:txBody>
+      </p:sp>
+      <p:sp>
+        <p:nvSpPr>
+          <p:cNvPr id="24" name="text-175"/>
           <p:cNvSpPr txBox="1"/>
           <p:nvPr/>
         </p:nvSpPr>
         <p:spPr>
           <a:xfrm>
-            <a:off x="9189491" y="4937760"/>
-            <a:ext cx="2316404" cy="822960"/>
+            <a:off x="7513168" y="5212080"/>
+            <a:ext cx="3764128" cy="822960"/>
           </a:xfrm>
           <a:prstGeom prst="rect">
             <a:avLst/>
@@ -9092,7 +8637,7 @@
           <a:bodyPr wrap="square" lIns="0" tIns="0" rIns="0" bIns="0" rtlCol="0" anchor="t"/>
           <a:lstStyle/>
           <a:p>
-            <a:pPr marL="0" indent="0">
+            <a:pPr indent="0" marL="0">
               <a:buNone/>
             </a:pPr>
             <a:r>
@@ -9101,7 +8646,7 @@
                   <a:schemeClr val="accent2"/>
                 </a:solidFill>
               </a:rPr>
-              <a:t>убивам pod со Chaos Mesh</a:t>
+              <a:t>Намерно рушам делови од системот и гледам колку брзо алармите го откриваат проблемот.</a:t>
             </a:r>
             <a:endParaRPr lang="en-US" sz="1600" dirty="0"/>
           </a:p>
@@ -9127,7 +8672,7 @@
           </a:prstGeom>
           <a:extLst>
             <a:ext uri="{C572A759-6A51-4108-AA02-DFA0A04FC94B}">
-              <ma14:wrappingTextBoxFlag xmlns:ma14="http://schemas.microsoft.com/office/mac/drawingml/2011/main" xmlns="" val="0"/>
+              <ma14:wrappingTextBoxFlag xmlns:ma14="http://schemas.microsoft.com/office/mac/drawingml/2011/main" val="0"/>
             </a:ext>
           </a:extLst>
         </p:spPr>
@@ -9148,7 +8693,7 @@
           <a:p>
             <a:pPr algn="r"/>
             <a:fld id="{F7021451-1387-4CA6-816F-3879F97B5CBC}" type="slidenum">
-              <a:rPr lang="en-US" b="0"/>
+              <a:rPr b="0" lang="en-US"/>
               <a:t>6</a:t>
             </a:fld>
             <a:endParaRPr lang="en-US"/>
@@ -9183,11 +8728,9 @@
       <p:sp>
         <p:nvSpPr>
           <p:cNvPr id="2" name="Text 0"/>
-          <p:cNvSpPr>
-            <a:spLocks noGrp="1"/>
-          </p:cNvSpPr>
+          <p:cNvSpPr/>
           <p:nvPr>
-            <p:ph type="body" idx="100" hasCustomPrompt="1"/>
+            <p:ph idx="100" type="body" hasCustomPrompt="1"/>
           </p:nvPr>
         </p:nvSpPr>
         <p:spPr>
@@ -9205,13 +8748,13 @@
           <a:bodyPr wrap="square" lIns="0" tIns="0" rIns="0" bIns="0" rtlCol="0" anchor="ctr"/>
           <a:lstStyle/>
           <a:p>
-            <a:pPr marL="0" indent="0">
-              <a:buNone/>
-            </a:pPr>
-            <a:r>
-              <a:rPr lang="en-US" sz="1100" b="1" kern="0" spc="200" dirty="0">
-                <a:solidFill>
-                  <a:schemeClr val="accent6"/>
+            <a:pPr indent="0" marL="0">
+              <a:buNone/>
+            </a:pPr>
+            <a:r>
+              <a:rPr lang="en-US" sz="1100" b="1" spc="200" kern="0" dirty="0">
+                <a:solidFill>
+                  <a:schemeClr val="accent1"/>
                 </a:solidFill>
                 <a:latin typeface="Courier New" pitchFamily="34" charset="0"/>
                 <a:ea typeface="Courier New" pitchFamily="34" charset="-122"/>
@@ -9226,11 +8769,9 @@
       <p:sp>
         <p:nvSpPr>
           <p:cNvPr id="3" name="Text 0"/>
-          <p:cNvSpPr>
-            <a:spLocks noGrp="1"/>
-          </p:cNvSpPr>
+          <p:cNvSpPr/>
           <p:nvPr>
-            <p:ph type="title" idx="101" hasCustomPrompt="1"/>
+            <p:ph idx="101" type="title" hasCustomPrompt="1"/>
           </p:nvPr>
         </p:nvSpPr>
         <p:spPr>
@@ -9248,16 +8789,16 @@
           <a:bodyPr wrap="square" lIns="0" tIns="0" rIns="0" bIns="0" rtlCol="0" anchor="t"/>
           <a:lstStyle/>
           <a:p>
-            <a:pPr marL="0" indent="0" algn="l">
+            <a:pPr algn="l" indent="0" marL="0">
               <a:buNone/>
             </a:pPr>
             <a:r>
               <a:rPr lang="en-US" sz="3200" b="1" dirty="0">
                 <a:solidFill>
-                  <a:schemeClr val="bg1"/>
-                </a:solidFill>
-              </a:rPr>
-              <a:t>Тежината е на едно место</a:t>
+                  <a:schemeClr val="tx1"/>
+                </a:solidFill>
+              </a:rPr>
+              <a:t>Обемот на трудот</a:t>
             </a:r>
             <a:endParaRPr lang="en-US" sz="3200" dirty="0"/>
           </a:p>
@@ -9265,61 +8806,66 @@
       </p:sp>
       <p:sp>
         <p:nvSpPr>
-          <p:cNvPr id="4" name="text-173"/>
-          <p:cNvSpPr txBox="1"/>
-          <p:nvPr/>
-        </p:nvSpPr>
-        <p:spPr>
-          <a:xfrm>
-            <a:off x="548640" y="1828800"/>
-            <a:ext cx="4572000" cy="274320"/>
-          </a:xfrm>
-          <a:prstGeom prst="rect">
-            <a:avLst/>
-          </a:prstGeom>
-          <a:noFill/>
-          <a:ln/>
-        </p:spPr>
-        <p:txBody>
-          <a:bodyPr wrap="square" lIns="0" tIns="0" rIns="0" bIns="0" rtlCol="0" anchor="ctr"/>
-          <a:lstStyle/>
-          <a:p>
-            <a:pPr marL="0" indent="0" algn="l">
-              <a:buNone/>
-            </a:pPr>
-            <a:r>
-              <a:rPr lang="en-US" sz="1200" b="1" kern="0" spc="100" dirty="0">
-                <a:solidFill>
-                  <a:schemeClr val="accent6"/>
-                </a:solidFill>
-                <a:latin typeface="Courier New" pitchFamily="34" charset="0"/>
-                <a:ea typeface="Courier New" pitchFamily="34" charset="-122"/>
-                <a:cs typeface="Courier New" pitchFamily="34" charset="-120"/>
-              </a:rPr>
-              <a:t>ВЛЕГУВА</a:t>
-            </a:r>
-            <a:endParaRPr lang="en-US" sz="1200" dirty="0"/>
-          </a:p>
-        </p:txBody>
+          <p:cNvPr id="4" name="card-176"/>
+          <p:cNvSpPr/>
+          <p:nvPr/>
+        </p:nvSpPr>
+        <p:spPr>
+          <a:xfrm>
+            <a:off x="548640" y="1691640"/>
+            <a:ext cx="5410048" cy="3840480"/>
+          </a:xfrm>
+          <a:prstGeom prst="rect">
+            <a:avLst/>
+          </a:prstGeom>
+          <a:solidFill>
+            <a:schemeClr val="accent1">
+              <a:alpha val="9000"/>
+            </a:schemeClr>
+          </a:solidFill>
+          <a:ln/>
+        </p:spPr>
+      </p:sp>
+      <p:sp>
+        <p:nvSpPr>
+          <p:cNvPr id="5" name="icon-bg-177"/>
+          <p:cNvSpPr/>
+          <p:nvPr/>
+        </p:nvSpPr>
+        <p:spPr>
+          <a:xfrm>
+            <a:off x="914400" y="2057400"/>
+            <a:ext cx="685800" cy="685800"/>
+          </a:xfrm>
+          <a:prstGeom prst="ellipse">
+            <a:avLst/>
+          </a:prstGeom>
+          <a:solidFill>
+            <a:schemeClr val="accent1">
+              <a:alpha val="20000"/>
+            </a:schemeClr>
+          </a:solidFill>
+          <a:ln/>
+        </p:spPr>
       </p:sp>
       <p:pic>
         <p:nvPicPr>
-          <p:cNvPr id="5" name="icon-174" descr="preencoded.png"/>
+          <p:cNvPr id="6" name="icon-178" descr="preencoded.png">    </p:cNvPr>
           <p:cNvPicPr>
             <a:picLocks noChangeAspect="1"/>
           </p:cNvPicPr>
           <p:nvPr/>
         </p:nvPicPr>
         <p:blipFill>
-          <a:blip r:embed="rId3"/>
+          <a:blip r:embed="rId1"/>
           <a:stretch>
             <a:fillRect/>
           </a:stretch>
         </p:blipFill>
         <p:spPr>
           <a:xfrm>
-            <a:off x="548640" y="2359152"/>
-            <a:ext cx="274320" cy="274320"/>
+            <a:off x="1092708" y="2235708"/>
+            <a:ext cx="329184" cy="329184"/>
           </a:xfrm>
           <a:prstGeom prst="rect">
             <a:avLst/>
@@ -9328,14 +8874,14 @@
       </p:pic>
       <p:sp>
         <p:nvSpPr>
-          <p:cNvPr id="6" name="text-175"/>
+          <p:cNvPr id="7" name="text-179"/>
           <p:cNvSpPr txBox="1"/>
           <p:nvPr/>
         </p:nvSpPr>
         <p:spPr>
           <a:xfrm>
-            <a:off x="1005840" y="2286000"/>
-            <a:ext cx="5120640" cy="420624"/>
+            <a:off x="1828800" y="2103120"/>
+            <a:ext cx="3764128" cy="274320"/>
           </a:xfrm>
           <a:prstGeom prst="rect">
             <a:avLst/>
@@ -9347,39 +8893,171 @@
           <a:bodyPr wrap="square" lIns="0" tIns="0" rIns="0" bIns="0" rtlCol="0" anchor="ctr"/>
           <a:lstStyle/>
           <a:p>
-            <a:pPr marL="0" indent="0">
+            <a:pPr algn="l" indent="0" marL="0">
+              <a:buNone/>
+            </a:pPr>
+            <a:r>
+              <a:rPr lang="en-US" sz="1100" b="1" spc="100" kern="0" dirty="0">
+                <a:solidFill>
+                  <a:schemeClr val="accent1"/>
+                </a:solidFill>
+                <a:latin typeface="Courier New" pitchFamily="34" charset="0"/>
+                <a:ea typeface="Courier New" pitchFamily="34" charset="-122"/>
+                <a:cs typeface="Courier New" pitchFamily="34" charset="-120"/>
+              </a:rPr>
+              <a:t>ФОКУС</a:t>
+            </a:r>
+            <a:endParaRPr lang="en-US" sz="1100" dirty="0"/>
+          </a:p>
+        </p:txBody>
+      </p:sp>
+      <p:sp>
+        <p:nvSpPr>
+          <p:cNvPr id="8" name="text-180"/>
+          <p:cNvSpPr txBox="1"/>
+          <p:nvPr/>
+        </p:nvSpPr>
+        <p:spPr>
+          <a:xfrm>
+            <a:off x="1828800" y="2377440"/>
+            <a:ext cx="3764128" cy="411480"/>
+          </a:xfrm>
+          <a:prstGeom prst="rect">
+            <a:avLst/>
+          </a:prstGeom>
+          <a:noFill/>
+          <a:ln/>
+        </p:spPr>
+        <p:txBody>
+          <a:bodyPr wrap="square" lIns="0" tIns="0" rIns="0" bIns="0" rtlCol="0" anchor="ctr"/>
+          <a:lstStyle/>
+          <a:p>
+            <a:pPr indent="0" marL="0">
+              <a:buNone/>
+            </a:pPr>
+            <a:r>
+              <a:rPr lang="en-US" sz="2000" b="1" dirty="0">
+                <a:solidFill>
+                  <a:schemeClr val="tx1"/>
+                </a:solidFill>
+                <a:latin typeface="+mj-lt" pitchFamily="34" charset="0"/>
+                <a:ea typeface="+mj-lt" pitchFamily="34" charset="-122"/>
+                <a:cs typeface="+mj-lt" pitchFamily="34" charset="-120"/>
+              </a:rPr>
+              <a:t>Што влегува</a:t>
+            </a:r>
+            <a:endParaRPr lang="en-US" sz="2000" dirty="0"/>
+          </a:p>
+        </p:txBody>
+      </p:sp>
+      <p:sp>
+        <p:nvSpPr>
+          <p:cNvPr id="9" name="text-181"/>
+          <p:cNvSpPr txBox="1"/>
+          <p:nvPr/>
+        </p:nvSpPr>
+        <p:spPr>
+          <a:xfrm>
+            <a:off x="914400" y="3154680"/>
+            <a:ext cx="4678528" cy="2103120"/>
+          </a:xfrm>
+          <a:prstGeom prst="rect">
+            <a:avLst/>
+          </a:prstGeom>
+          <a:noFill/>
+          <a:ln/>
+        </p:spPr>
+        <p:txBody>
+          <a:bodyPr wrap="square" lIns="0" tIns="0" rIns="0" bIns="0" rtlCol="0" anchor="t"/>
+          <a:lstStyle/>
+          <a:p>
+            <a:pPr indent="0" marL="0">
               <a:buNone/>
             </a:pPr>
             <a:r>
               <a:rPr lang="en-US" sz="1900" dirty="0">
                 <a:solidFill>
-                  <a:schemeClr val="bg1"/>
-                </a:solidFill>
-              </a:rPr>
-              <a:t>Kafka · outbox · inbox</a:t>
+                  <a:schemeClr val="tx1"/>
+                </a:solidFill>
+              </a:rPr>
+              <a:t>Функционалноста останува иста како кај монолитот. Работата е во настаните меѓу сервисите, оркестрацијата, автоматската испорака и observability — и во мерењето на сето тоа.</a:t>
             </a:r>
             <a:endParaRPr lang="en-US" sz="1900" dirty="0"/>
           </a:p>
         </p:txBody>
+      </p:sp>
+      <p:sp>
+        <p:nvSpPr>
+          <p:cNvPr id="10" name="card-182"/>
+          <p:cNvSpPr/>
+          <p:nvPr/>
+        </p:nvSpPr>
+        <p:spPr>
+          <a:xfrm>
+            <a:off x="6233008" y="1691640"/>
+            <a:ext cx="5410048" cy="3840480"/>
+          </a:xfrm>
+          <a:prstGeom prst="rect">
+            <a:avLst/>
+          </a:prstGeom>
+          <a:solidFill>
+            <a:schemeClr val="bg1"/>
+          </a:solidFill>
+          <a:ln w="9525">
+            <a:solidFill>
+              <a:schemeClr val="accent5"/>
+            </a:solidFill>
+            <a:prstDash val="solid"/>
+          </a:ln>
+          <a:effectLst>
+            <a:outerShdw sx="100000" sy="100000" kx="0" ky="0" algn="bl" rotWithShape="0" blurRad="101600" dist="19050" dir="5400000">
+              <a:srgbClr val="000000">
+                <a:alpha val="7000"/>
+              </a:srgbClr>
+            </a:outerShdw>
+          </a:effectLst>
+        </p:spPr>
+      </p:sp>
+      <p:sp>
+        <p:nvSpPr>
+          <p:cNvPr id="11" name="icon-bg-183"/>
+          <p:cNvSpPr/>
+          <p:nvPr/>
+        </p:nvSpPr>
+        <p:spPr>
+          <a:xfrm>
+            <a:off x="6598768" y="2057400"/>
+            <a:ext cx="685800" cy="685800"/>
+          </a:xfrm>
+          <a:prstGeom prst="ellipse">
+            <a:avLst/>
+          </a:prstGeom>
+          <a:solidFill>
+            <a:schemeClr val="accent2">
+              <a:alpha val="15000"/>
+            </a:schemeClr>
+          </a:solidFill>
+          <a:ln/>
+        </p:spPr>
       </p:sp>
       <p:pic>
         <p:nvPicPr>
-          <p:cNvPr id="7" name="icon-176" descr="preencoded.png"/>
+          <p:cNvPr id="12" name="icon-184" descr="preencoded.png">    </p:cNvPr>
           <p:cNvPicPr>
             <a:picLocks noChangeAspect="1"/>
           </p:cNvPicPr>
           <p:nvPr/>
         </p:nvPicPr>
         <p:blipFill>
-          <a:blip r:embed="rId3"/>
+          <a:blip r:embed="rId2"/>
           <a:stretch>
             <a:fillRect/>
           </a:stretch>
         </p:blipFill>
         <p:spPr>
           <a:xfrm>
-            <a:off x="548640" y="2862072"/>
-            <a:ext cx="274320" cy="274320"/>
+            <a:off x="6777076" y="2235708"/>
+            <a:ext cx="329184" cy="329184"/>
           </a:xfrm>
           <a:prstGeom prst="rect">
             <a:avLst/>
@@ -9388,14 +9066,14 @@
       </p:pic>
       <p:sp>
         <p:nvSpPr>
-          <p:cNvPr id="8" name="text-177"/>
+          <p:cNvPr id="13" name="text-185"/>
           <p:cNvSpPr txBox="1"/>
           <p:nvPr/>
         </p:nvSpPr>
         <p:spPr>
           <a:xfrm>
-            <a:off x="1005840" y="2788920"/>
-            <a:ext cx="5120640" cy="420624"/>
+            <a:off x="7513168" y="2103120"/>
+            <a:ext cx="3764128" cy="274320"/>
           </a:xfrm>
           <a:prstGeom prst="rect">
             <a:avLst/>
@@ -9407,274 +9085,34 @@
           <a:bodyPr wrap="square" lIns="0" tIns="0" rIns="0" bIns="0" rtlCol="0" anchor="ctr"/>
           <a:lstStyle/>
           <a:p>
-            <a:pPr marL="0" indent="0">
-              <a:buNone/>
-            </a:pPr>
-            <a:r>
-              <a:rPr lang="en-US" sz="1900" dirty="0">
-                <a:solidFill>
-                  <a:schemeClr val="bg1"/>
-                </a:solidFill>
-              </a:rPr>
-              <a:t>Kubernetes · Helm · ArgoCD</a:t>
-            </a:r>
-            <a:endParaRPr lang="en-US" sz="1900" dirty="0"/>
-          </a:p>
-        </p:txBody>
-      </p:sp>
-      <p:pic>
-        <p:nvPicPr>
-          <p:cNvPr id="9" name="icon-178" descr="preencoded.png"/>
-          <p:cNvPicPr>
-            <a:picLocks noChangeAspect="1"/>
-          </p:cNvPicPr>
-          <p:nvPr/>
-        </p:nvPicPr>
-        <p:blipFill>
-          <a:blip r:embed="rId3"/>
-          <a:stretch>
-            <a:fillRect/>
-          </a:stretch>
-        </p:blipFill>
-        <p:spPr>
-          <a:xfrm>
-            <a:off x="548640" y="3364992"/>
-            <a:ext cx="274320" cy="274320"/>
-          </a:xfrm>
-          <a:prstGeom prst="rect">
-            <a:avLst/>
-          </a:prstGeom>
-        </p:spPr>
-      </p:pic>
-      <p:sp>
-        <p:nvSpPr>
-          <p:cNvPr id="10" name="text-179"/>
-          <p:cNvSpPr txBox="1"/>
-          <p:nvPr/>
-        </p:nvSpPr>
-        <p:spPr>
-          <a:xfrm>
-            <a:off x="1005840" y="3291840"/>
-            <a:ext cx="5120640" cy="420624"/>
-          </a:xfrm>
-          <a:prstGeom prst="rect">
-            <a:avLst/>
-          </a:prstGeom>
-          <a:noFill/>
-          <a:ln/>
-        </p:spPr>
-        <p:txBody>
-          <a:bodyPr wrap="square" lIns="0" tIns="0" rIns="0" bIns="0" rtlCol="0" anchor="ctr"/>
-          <a:lstStyle/>
-          <a:p>
-            <a:pPr marL="0" indent="0">
-              <a:buNone/>
-            </a:pPr>
-            <a:r>
-              <a:rPr lang="en-US" sz="1900" dirty="0">
-                <a:solidFill>
-                  <a:schemeClr val="bg1"/>
-                </a:solidFill>
-              </a:rPr>
-              <a:t>CI/CD со GitHub Actions</a:t>
-            </a:r>
-            <a:endParaRPr lang="en-US" sz="1900" dirty="0"/>
-          </a:p>
-        </p:txBody>
-      </p:sp>
-      <p:pic>
-        <p:nvPicPr>
-          <p:cNvPr id="11" name="icon-180" descr="preencoded.png"/>
-          <p:cNvPicPr>
-            <a:picLocks noChangeAspect="1"/>
-          </p:cNvPicPr>
-          <p:nvPr/>
-        </p:nvPicPr>
-        <p:blipFill>
-          <a:blip r:embed="rId3"/>
-          <a:stretch>
-            <a:fillRect/>
-          </a:stretch>
-        </p:blipFill>
-        <p:spPr>
-          <a:xfrm>
-            <a:off x="548640" y="3867912"/>
-            <a:ext cx="274320" cy="274320"/>
-          </a:xfrm>
-          <a:prstGeom prst="rect">
-            <a:avLst/>
-          </a:prstGeom>
-        </p:spPr>
-      </p:pic>
-      <p:sp>
-        <p:nvSpPr>
-          <p:cNvPr id="12" name="text-181"/>
-          <p:cNvSpPr txBox="1"/>
-          <p:nvPr/>
-        </p:nvSpPr>
-        <p:spPr>
-          <a:xfrm>
-            <a:off x="1005840" y="3794760"/>
-            <a:ext cx="5120640" cy="420624"/>
-          </a:xfrm>
-          <a:prstGeom prst="rect">
-            <a:avLst/>
-          </a:prstGeom>
-          <a:noFill/>
-          <a:ln/>
-        </p:spPr>
-        <p:txBody>
-          <a:bodyPr wrap="square" lIns="0" tIns="0" rIns="0" bIns="0" rtlCol="0" anchor="ctr"/>
-          <a:lstStyle/>
-          <a:p>
-            <a:pPr marL="0" indent="0">
-              <a:buNone/>
-            </a:pPr>
-            <a:r>
-              <a:rPr lang="en-US" sz="1900" dirty="0">
-                <a:solidFill>
-                  <a:schemeClr val="bg1"/>
-                </a:solidFill>
-              </a:rPr>
-              <a:t>Метрики · логови · traces</a:t>
-            </a:r>
-            <a:endParaRPr lang="en-US" sz="1900" dirty="0"/>
-          </a:p>
-        </p:txBody>
-      </p:sp>
-      <p:pic>
-        <p:nvPicPr>
-          <p:cNvPr id="13" name="icon-182" descr="preencoded.png"/>
-          <p:cNvPicPr>
-            <a:picLocks noChangeAspect="1"/>
-          </p:cNvPicPr>
-          <p:nvPr/>
-        </p:nvPicPr>
-        <p:blipFill>
-          <a:blip r:embed="rId3"/>
-          <a:stretch>
-            <a:fillRect/>
-          </a:stretch>
-        </p:blipFill>
-        <p:spPr>
-          <a:xfrm>
-            <a:off x="548640" y="4370832"/>
-            <a:ext cx="274320" cy="274320"/>
-          </a:xfrm>
-          <a:prstGeom prst="rect">
-            <a:avLst/>
-          </a:prstGeom>
-        </p:spPr>
-      </p:pic>
-      <p:sp>
-        <p:nvSpPr>
-          <p:cNvPr id="14" name="text-183"/>
-          <p:cNvSpPr txBox="1"/>
-          <p:nvPr/>
-        </p:nvSpPr>
-        <p:spPr>
-          <a:xfrm>
-            <a:off x="1005840" y="4297680"/>
-            <a:ext cx="5120640" cy="420624"/>
-          </a:xfrm>
-          <a:prstGeom prst="rect">
-            <a:avLst/>
-          </a:prstGeom>
-          <a:noFill/>
-          <a:ln/>
-        </p:spPr>
-        <p:txBody>
-          <a:bodyPr wrap="square" lIns="0" tIns="0" rIns="0" bIns="0" rtlCol="0" anchor="ctr"/>
-          <a:lstStyle/>
-          <a:p>
-            <a:pPr marL="0" indent="0">
-              <a:buNone/>
-            </a:pPr>
-            <a:r>
-              <a:rPr lang="en-US" sz="1900" dirty="0">
-                <a:solidFill>
-                  <a:schemeClr val="bg1"/>
-                </a:solidFill>
-              </a:rPr>
-              <a:t>Мерења со k6 и Chaos Mesh</a:t>
-            </a:r>
-            <a:endParaRPr lang="en-US" sz="1900" dirty="0"/>
-          </a:p>
-        </p:txBody>
-      </p:sp>
-      <p:sp>
-        <p:nvSpPr>
-          <p:cNvPr id="15" name="text-184"/>
-          <p:cNvSpPr txBox="1"/>
-          <p:nvPr/>
-        </p:nvSpPr>
-        <p:spPr>
-          <a:xfrm>
-            <a:off x="6766560" y="1828800"/>
-            <a:ext cx="4572000" cy="274320"/>
-          </a:xfrm>
-          <a:prstGeom prst="rect">
-            <a:avLst/>
-          </a:prstGeom>
-          <a:noFill/>
-          <a:ln/>
-        </p:spPr>
-        <p:txBody>
-          <a:bodyPr wrap="square" lIns="0" tIns="0" rIns="0" bIns="0" rtlCol="0" anchor="ctr"/>
-          <a:lstStyle/>
-          <a:p>
-            <a:pPr marL="0" indent="0" algn="l">
-              <a:buNone/>
-            </a:pPr>
-            <a:r>
-              <a:rPr lang="en-US" sz="1200" b="1" kern="0" spc="100" dirty="0">
-                <a:solidFill>
-                  <a:schemeClr val="accent5"/>
+            <a:pPr algn="l" indent="0" marL="0">
+              <a:buNone/>
+            </a:pPr>
+            <a:r>
+              <a:rPr lang="en-US" sz="1100" b="1" spc="100" kern="0" dirty="0">
+                <a:solidFill>
+                  <a:schemeClr val="accent2"/>
                 </a:solidFill>
                 <a:latin typeface="Courier New" pitchFamily="34" charset="0"/>
                 <a:ea typeface="Courier New" pitchFamily="34" charset="-122"/>
                 <a:cs typeface="Courier New" pitchFamily="34" charset="-120"/>
               </a:rPr>
-              <a:t>НЕ ВЛЕГУВА</a:t>
-            </a:r>
-            <a:endParaRPr lang="en-US" sz="1200" dirty="0"/>
-          </a:p>
-        </p:txBody>
-      </p:sp>
-      <p:pic>
-        <p:nvPicPr>
-          <p:cNvPr id="16" name="icon-185" descr="preencoded.png"/>
-          <p:cNvPicPr>
-            <a:picLocks noChangeAspect="1"/>
-          </p:cNvPicPr>
-          <p:nvPr/>
-        </p:nvPicPr>
-        <p:blipFill>
-          <a:blip r:embed="rId4"/>
-          <a:stretch>
-            <a:fillRect/>
-          </a:stretch>
-        </p:blipFill>
-        <p:spPr>
-          <a:xfrm>
-            <a:off x="6766560" y="2359152"/>
-            <a:ext cx="274320" cy="274320"/>
-          </a:xfrm>
-          <a:prstGeom prst="rect">
-            <a:avLst/>
-          </a:prstGeom>
-        </p:spPr>
-      </p:pic>
-      <p:sp>
-        <p:nvSpPr>
-          <p:cNvPr id="17" name="text-186"/>
+              <a:t>НАДВОР ОД ОБЕМОТ</a:t>
+            </a:r>
+            <a:endParaRPr lang="en-US" sz="1100" dirty="0"/>
+          </a:p>
+        </p:txBody>
+      </p:sp>
+      <p:sp>
+        <p:nvSpPr>
+          <p:cNvPr id="14" name="text-186"/>
           <p:cNvSpPr txBox="1"/>
           <p:nvPr/>
         </p:nvSpPr>
         <p:spPr>
           <a:xfrm>
-            <a:off x="7223760" y="2286000"/>
-            <a:ext cx="4572000" cy="420624"/>
+            <a:off x="7513168" y="2377440"/>
+            <a:ext cx="3764128" cy="411480"/>
           </a:xfrm>
           <a:prstGeom prst="rect">
             <a:avLst/>
@@ -9686,234 +9124,63 @@
           <a:bodyPr wrap="square" lIns="0" tIns="0" rIns="0" bIns="0" rtlCol="0" anchor="ctr"/>
           <a:lstStyle/>
           <a:p>
-            <a:pPr marL="0" indent="0">
-              <a:buNone/>
-            </a:pPr>
-            <a:r>
-              <a:rPr lang="en-US" sz="1900" strike="sngStrike" dirty="0">
-                <a:solidFill>
-                  <a:schemeClr val="accent5"/>
-                </a:solidFill>
-              </a:rPr>
-              <a:t>Посебна база по сервис</a:t>
+            <a:pPr indent="0" marL="0">
+              <a:buNone/>
+            </a:pPr>
+            <a:r>
+              <a:rPr lang="en-US" sz="2000" b="1" dirty="0">
+                <a:solidFill>
+                  <a:schemeClr val="tx1"/>
+                </a:solidFill>
+                <a:latin typeface="+mj-lt" pitchFamily="34" charset="0"/>
+                <a:ea typeface="+mj-lt" pitchFamily="34" charset="-122"/>
+                <a:cs typeface="+mj-lt" pitchFamily="34" charset="-120"/>
+              </a:rPr>
+              <a:t>Што не влегува</a:t>
+            </a:r>
+            <a:endParaRPr lang="en-US" sz="2000" dirty="0"/>
+          </a:p>
+        </p:txBody>
+      </p:sp>
+      <p:sp>
+        <p:nvSpPr>
+          <p:cNvPr id="15" name="text-187"/>
+          <p:cNvSpPr txBox="1"/>
+          <p:nvPr/>
+        </p:nvSpPr>
+        <p:spPr>
+          <a:xfrm>
+            <a:off x="6598768" y="3154680"/>
+            <a:ext cx="4678528" cy="2103120"/>
+          </a:xfrm>
+          <a:prstGeom prst="rect">
+            <a:avLst/>
+          </a:prstGeom>
+          <a:noFill/>
+          <a:ln/>
+        </p:spPr>
+        <p:txBody>
+          <a:bodyPr wrap="square" lIns="0" tIns="0" rIns="0" bIns="0" rtlCol="0" anchor="t"/>
+          <a:lstStyle/>
+          <a:p>
+            <a:pPr indent="0" marL="0">
+              <a:buNone/>
+            </a:pPr>
+            <a:r>
+              <a:rPr lang="en-US" sz="1900" dirty="0">
+                <a:solidFill>
+                  <a:schemeClr val="accent2"/>
+                </a:solidFill>
+              </a:rPr>
+              <a:t>Нова функционалност, хостинг во облак, service mesh и посебна база за секој сервис. Тие не се потребни за да се одговори на прашањето на трудот.</a:t>
             </a:r>
             <a:endParaRPr lang="en-US" sz="1900" dirty="0"/>
           </a:p>
         </p:txBody>
       </p:sp>
-      <p:pic>
-        <p:nvPicPr>
-          <p:cNvPr id="18" name="icon-187" descr="preencoded.png"/>
-          <p:cNvPicPr>
-            <a:picLocks noChangeAspect="1"/>
-          </p:cNvPicPr>
-          <p:nvPr/>
-        </p:nvPicPr>
-        <p:blipFill>
-          <a:blip r:embed="rId4"/>
-          <a:stretch>
-            <a:fillRect/>
-          </a:stretch>
-        </p:blipFill>
-        <p:spPr>
-          <a:xfrm>
-            <a:off x="6766560" y="2862072"/>
-            <a:ext cx="274320" cy="274320"/>
-          </a:xfrm>
-          <a:prstGeom prst="rect">
-            <a:avLst/>
-          </a:prstGeom>
-        </p:spPr>
-      </p:pic>
-      <p:sp>
-        <p:nvSpPr>
-          <p:cNvPr id="19" name="text-188"/>
-          <p:cNvSpPr txBox="1"/>
-          <p:nvPr/>
-        </p:nvSpPr>
-        <p:spPr>
-          <a:xfrm>
-            <a:off x="7223760" y="2788920"/>
-            <a:ext cx="4572000" cy="420624"/>
-          </a:xfrm>
-          <a:prstGeom prst="rect">
-            <a:avLst/>
-          </a:prstGeom>
-          <a:noFill/>
-          <a:ln/>
-        </p:spPr>
-        <p:txBody>
-          <a:bodyPr wrap="square" lIns="0" tIns="0" rIns="0" bIns="0" rtlCol="0" anchor="ctr"/>
-          <a:lstStyle/>
-          <a:p>
-            <a:pPr marL="0" indent="0">
-              <a:buNone/>
-            </a:pPr>
-            <a:r>
-              <a:rPr lang="en-US" sz="1900" strike="sngStrike" dirty="0">
-                <a:solidFill>
-                  <a:schemeClr val="accent5"/>
-                </a:solidFill>
-              </a:rPr>
-              <a:t>Service mesh</a:t>
-            </a:r>
-            <a:endParaRPr lang="en-US" sz="1900" dirty="0"/>
-          </a:p>
-        </p:txBody>
-      </p:sp>
-      <p:pic>
-        <p:nvPicPr>
-          <p:cNvPr id="20" name="icon-189" descr="preencoded.png"/>
-          <p:cNvPicPr>
-            <a:picLocks noChangeAspect="1"/>
-          </p:cNvPicPr>
-          <p:nvPr/>
-        </p:nvPicPr>
-        <p:blipFill>
-          <a:blip r:embed="rId4"/>
-          <a:stretch>
-            <a:fillRect/>
-          </a:stretch>
-        </p:blipFill>
-        <p:spPr>
-          <a:xfrm>
-            <a:off x="6766560" y="3364992"/>
-            <a:ext cx="274320" cy="274320"/>
-          </a:xfrm>
-          <a:prstGeom prst="rect">
-            <a:avLst/>
-          </a:prstGeom>
-        </p:spPr>
-      </p:pic>
-      <p:sp>
-        <p:nvSpPr>
-          <p:cNvPr id="21" name="text-190"/>
-          <p:cNvSpPr txBox="1"/>
-          <p:nvPr/>
-        </p:nvSpPr>
-        <p:spPr>
-          <a:xfrm>
-            <a:off x="7223760" y="3291840"/>
-            <a:ext cx="4572000" cy="420624"/>
-          </a:xfrm>
-          <a:prstGeom prst="rect">
-            <a:avLst/>
-          </a:prstGeom>
-          <a:noFill/>
-          <a:ln/>
-        </p:spPr>
-        <p:txBody>
-          <a:bodyPr wrap="square" lIns="0" tIns="0" rIns="0" bIns="0" rtlCol="0" anchor="ctr"/>
-          <a:lstStyle/>
-          <a:p>
-            <a:pPr marL="0" indent="0">
-              <a:buNone/>
-            </a:pPr>
-            <a:r>
-              <a:rPr lang="en-US" sz="1900" strike="sngStrike" dirty="0">
-                <a:solidFill>
-                  <a:schemeClr val="accent5"/>
-                </a:solidFill>
-              </a:rPr>
-              <a:t>Хостинг во облак</a:t>
-            </a:r>
-            <a:endParaRPr lang="en-US" sz="1900" dirty="0"/>
-          </a:p>
-        </p:txBody>
-      </p:sp>
-      <p:pic>
-        <p:nvPicPr>
-          <p:cNvPr id="22" name="icon-191" descr="preencoded.png"/>
-          <p:cNvPicPr>
-            <a:picLocks noChangeAspect="1"/>
-          </p:cNvPicPr>
-          <p:nvPr/>
-        </p:nvPicPr>
-        <p:blipFill>
-          <a:blip r:embed="rId4"/>
-          <a:stretch>
-            <a:fillRect/>
-          </a:stretch>
-        </p:blipFill>
-        <p:spPr>
-          <a:xfrm>
-            <a:off x="6766560" y="3867912"/>
-            <a:ext cx="274320" cy="274320"/>
-          </a:xfrm>
-          <a:prstGeom prst="rect">
-            <a:avLst/>
-          </a:prstGeom>
-        </p:spPr>
-      </p:pic>
-      <p:sp>
-        <p:nvSpPr>
-          <p:cNvPr id="23" name="text-192"/>
-          <p:cNvSpPr txBox="1"/>
-          <p:nvPr/>
-        </p:nvSpPr>
-        <p:spPr>
-          <a:xfrm>
-            <a:off x="7223760" y="3794760"/>
-            <a:ext cx="4572000" cy="420624"/>
-          </a:xfrm>
-          <a:prstGeom prst="rect">
-            <a:avLst/>
-          </a:prstGeom>
-          <a:noFill/>
-          <a:ln/>
-        </p:spPr>
-        <p:txBody>
-          <a:bodyPr wrap="square" lIns="0" tIns="0" rIns="0" bIns="0" rtlCol="0" anchor="ctr"/>
-          <a:lstStyle/>
-          <a:p>
-            <a:pPr marL="0" indent="0">
-              <a:buNone/>
-            </a:pPr>
-            <a:r>
-              <a:rPr lang="en-US" sz="1900" strike="sngStrike" dirty="0">
-                <a:solidFill>
-                  <a:schemeClr val="accent5"/>
-                </a:solidFill>
-              </a:rPr>
-              <a:t>Нова функционалност</a:t>
-            </a:r>
-            <a:endParaRPr lang="en-US" sz="1900" dirty="0"/>
-          </a:p>
-        </p:txBody>
-      </p:sp>
-      <p:sp>
-        <p:nvSpPr>
-          <p:cNvPr id="24" name="close-rule"/>
-          <p:cNvSpPr/>
-          <p:nvPr/>
-        </p:nvSpPr>
-        <p:spPr>
-          <a:xfrm>
-            <a:off x="548640" y="4846320"/>
-            <a:ext cx="11094415" cy="0"/>
-          </a:xfrm>
-          <a:prstGeom prst="line">
-            <a:avLst/>
-          </a:prstGeom>
-          <a:noFill/>
-          <a:ln w="9525">
-            <a:solidFill>
-              <a:schemeClr val="accent2"/>
-            </a:solidFill>
-            <a:prstDash val="solid"/>
-          </a:ln>
-        </p:spPr>
-        <p:txBody>
-          <a:bodyPr/>
-          <a:lstStyle/>
-          <a:p>
-            <a:endParaRPr lang="LID4096"/>
-          </a:p>
-        </p:txBody>
-      </p:sp>
-      <p:sp>
-        <p:nvSpPr>
-          <p:cNvPr id="28" name="Slide Number Placeholder 0"/>
+      <p:sp>
+        <p:nvSpPr>
+          <p:cNvPr id="25" name="Slide Number Placeholder 0"/>
           <p:cNvSpPr>
             <a:spLocks noGrp="1"/>
           </p:cNvSpPr>
@@ -9931,7 +9198,7 @@
           </a:prstGeom>
           <a:extLst>
             <a:ext uri="{C572A759-6A51-4108-AA02-DFA0A04FC94B}">
-              <ma14:wrappingTextBoxFlag xmlns:ma14="http://schemas.microsoft.com/office/mac/drawingml/2011/main" xmlns="" val="0"/>
+              <ma14:wrappingTextBoxFlag xmlns:ma14="http://schemas.microsoft.com/office/mac/drawingml/2011/main" val="0"/>
             </a:ext>
           </a:extLst>
         </p:spPr>
@@ -9941,7 +9208,7 @@
             <a:lvl1pPr>
               <a:defRPr sz="900">
                 <a:solidFill>
-                  <a:schemeClr val="accent5"/>
+                  <a:schemeClr val="accent2"/>
                 </a:solidFill>
                 <a:latin typeface="Courier New"/>
                 <a:ea typeface="Courier New"/>
@@ -9952,7 +9219,7 @@
           <a:p>
             <a:pPr algn="r"/>
             <a:fld id="{F7021451-1387-4CA6-816F-3879F97B5CBC}" type="slidenum">
-              <a:rPr lang="en-US" b="0"/>
+              <a:rPr b="0" lang="en-US"/>
               <a:t>7</a:t>
             </a:fld>
             <a:endParaRPr lang="en-US"/>
@@ -10260,319 +9527,4 @@
     </a:ext>
   </a:extLst>
 </a:theme>
-</file>
-
-<file path=ppt/theme/theme2.xml><?xml version="1.0" encoding="utf-8"?>
-<a:theme xmlns:a="http://schemas.openxmlformats.org/drawingml/2006/main" name="Office Theme">
-  <a:themeElements>
-    <a:clrScheme name="Office">
-      <a:dk1>
-        <a:sysClr val="windowText" lastClr="000000"/>
-      </a:dk1>
-      <a:lt1>
-        <a:sysClr val="window" lastClr="FFFFFF"/>
-      </a:lt1>
-      <a:dk2>
-        <a:srgbClr val="0E2841"/>
-      </a:dk2>
-      <a:lt2>
-        <a:srgbClr val="E8E8E8"/>
-      </a:lt2>
-      <a:accent1>
-        <a:srgbClr val="156082"/>
-      </a:accent1>
-      <a:accent2>
-        <a:srgbClr val="E97132"/>
-      </a:accent2>
-      <a:accent3>
-        <a:srgbClr val="196B24"/>
-      </a:accent3>
-      <a:accent4>
-        <a:srgbClr val="0F9ED5"/>
-      </a:accent4>
-      <a:accent5>
-        <a:srgbClr val="A02B93"/>
-      </a:accent5>
-      <a:accent6>
-        <a:srgbClr val="4EA72E"/>
-      </a:accent6>
-      <a:hlink>
-        <a:srgbClr val="467886"/>
-      </a:hlink>
-      <a:folHlink>
-        <a:srgbClr val="96607D"/>
-      </a:folHlink>
-    </a:clrScheme>
-    <a:fontScheme name="Office">
-      <a:majorFont>
-        <a:latin typeface="Aptos Display" panose="02110004020202020204"/>
-        <a:ea typeface=""/>
-        <a:cs typeface=""/>
-        <a:font script="Jpan" typeface="游ゴシック Light"/>
-        <a:font script="Hang" typeface="맑은 고딕"/>
-        <a:font script="Hans" typeface="等线 Light"/>
-        <a:font script="Hant" typeface="新細明體"/>
-        <a:font script="Arab" typeface="Times New Roman"/>
-        <a:font script="Hebr" typeface="Times New Roman"/>
-        <a:font script="Thai" typeface="Angsana New"/>
-        <a:font script="Ethi" typeface="Nyala"/>
-        <a:font script="Beng" typeface="Vrinda"/>
-        <a:font script="Gujr" typeface="Shruti"/>
-        <a:font script="Khmr" typeface="MoolBoran"/>
-        <a:font script="Knda" typeface="Tunga"/>
-        <a:font script="Guru" typeface="Raavi"/>
-        <a:font script="Cans" typeface="Euphemia"/>
-        <a:font script="Cher" typeface="Plantagenet Cherokee"/>
-        <a:font script="Yiii" typeface="Microsoft Yi Baiti"/>
-        <a:font script="Tibt" typeface="Microsoft Himalaya"/>
-        <a:font script="Thaa" typeface="MV Boli"/>
-        <a:font script="Deva" typeface="Mangal"/>
-        <a:font script="Telu" typeface="Gautami"/>
-        <a:font script="Taml" typeface="Latha"/>
-        <a:font script="Syrc" typeface="Estrangelo Edessa"/>
-        <a:font script="Orya" typeface="Kalinga"/>
-        <a:font script="Mlym" typeface="Kartika"/>
-        <a:font script="Laoo" typeface="DokChampa"/>
-        <a:font script="Sinh" typeface="Iskoola Pota"/>
-        <a:font script="Mong" typeface="Mongolian Baiti"/>
-        <a:font script="Viet" typeface="Times New Roman"/>
-        <a:font script="Uigh" typeface="Microsoft Uighur"/>
-        <a:font script="Geor" typeface="Sylfaen"/>
-        <a:font script="Armn" typeface="Arial"/>
-        <a:font script="Bugi" typeface="Leelawadee UI"/>
-        <a:font script="Bopo" typeface="Microsoft JhengHei"/>
-        <a:font script="Java" typeface="Javanese Text"/>
-        <a:font script="Lisu" typeface="Segoe UI"/>
-        <a:font script="Mymr" typeface="Myanmar Text"/>
-        <a:font script="Nkoo" typeface="Ebrima"/>
-        <a:font script="Olck" typeface="Nirmala UI"/>
-        <a:font script="Osma" typeface="Ebrima"/>
-        <a:font script="Phag" typeface="Phagspa"/>
-        <a:font script="Syrn" typeface="Estrangelo Edessa"/>
-        <a:font script="Syrj" typeface="Estrangelo Edessa"/>
-        <a:font script="Syre" typeface="Estrangelo Edessa"/>
-        <a:font script="Sora" typeface="Nirmala UI"/>
-        <a:font script="Tale" typeface="Microsoft Tai Le"/>
-        <a:font script="Talu" typeface="Microsoft New Tai Lue"/>
-        <a:font script="Tfng" typeface="Ebrima"/>
-      </a:majorFont>
-      <a:minorFont>
-        <a:latin typeface="Aptos" panose="02110004020202020204"/>
-        <a:ea typeface=""/>
-        <a:cs typeface=""/>
-        <a:font script="Jpan" typeface="游ゴシック"/>
-        <a:font script="Hang" typeface="맑은 고딕"/>
-        <a:font script="Hans" typeface="等线"/>
-        <a:font script="Hant" typeface="新細明體"/>
-        <a:font script="Arab" typeface="Arial"/>
-        <a:font script="Hebr" typeface="Arial"/>
-        <a:font script="Thai" typeface="Cordia New"/>
-        <a:font script="Ethi" typeface="Nyala"/>
-        <a:font script="Beng" typeface="Vrinda"/>
-        <a:font script="Gujr" typeface="Shruti"/>
-        <a:font script="Khmr" typeface="DaunPenh"/>
-        <a:font script="Knda" typeface="Tunga"/>
-        <a:font script="Guru" typeface="Raavi"/>
-        <a:font script="Cans" typeface="Euphemia"/>
-        <a:font script="Cher" typeface="Plantagenet Cherokee"/>
-        <a:font script="Yiii" typeface="Microsoft Yi Baiti"/>
-        <a:font script="Tibt" typeface="Microsoft Himalaya"/>
-        <a:font script="Thaa" typeface="MV Boli"/>
-        <a:font script="Deva" typeface="Mangal"/>
-        <a:font script="Telu" typeface="Gautami"/>
-        <a:font script="Taml" typeface="Latha"/>
-        <a:font script="Syrc" typeface="Estrangelo Edessa"/>
-        <a:font script="Orya" typeface="Kalinga"/>
-        <a:font script="Mlym" typeface="Kartika"/>
-        <a:font script="Laoo" typeface="DokChampa"/>
-        <a:font script="Sinh" typeface="Iskoola Pota"/>
-        <a:font script="Mong" typeface="Mongolian Baiti"/>
-        <a:font script="Viet" typeface="Arial"/>
-        <a:font script="Uigh" typeface="Microsoft Uighur"/>
-        <a:font script="Geor" typeface="Sylfaen"/>
-        <a:font script="Armn" typeface="Arial"/>
-        <a:font script="Bugi" typeface="Leelawadee UI"/>
-        <a:font script="Bopo" typeface="Microsoft JhengHei"/>
-        <a:font script="Java" typeface="Javanese Text"/>
-        <a:font script="Lisu" typeface="Segoe UI"/>
-        <a:font script="Mymr" typeface="Myanmar Text"/>
-        <a:font script="Nkoo" typeface="Ebrima"/>
-        <a:font script="Olck" typeface="Nirmala UI"/>
-        <a:font script="Osma" typeface="Ebrima"/>
-        <a:font script="Phag" typeface="Phagspa"/>
-        <a:font script="Syrn" typeface="Estrangelo Edessa"/>
-        <a:font script="Syrj" typeface="Estrangelo Edessa"/>
-        <a:font script="Syre" typeface="Estrangelo Edessa"/>
-        <a:font script="Sora" typeface="Nirmala UI"/>
-        <a:font script="Tale" typeface="Microsoft Tai Le"/>
-        <a:font script="Talu" typeface="Microsoft New Tai Lue"/>
-        <a:font script="Tfng" typeface="Ebrima"/>
-      </a:minorFont>
-    </a:fontScheme>
-    <a:fmtScheme name="Office">
-      <a:fillStyleLst>
-        <a:solidFill>
-          <a:schemeClr val="phClr"/>
-        </a:solidFill>
-        <a:gradFill rotWithShape="1">
-          <a:gsLst>
-            <a:gs pos="0">
-              <a:schemeClr val="phClr">
-                <a:lumMod val="110000"/>
-                <a:satMod val="105000"/>
-                <a:tint val="67000"/>
-              </a:schemeClr>
-            </a:gs>
-            <a:gs pos="50000">
-              <a:schemeClr val="phClr">
-                <a:lumMod val="105000"/>
-                <a:satMod val="103000"/>
-                <a:tint val="73000"/>
-              </a:schemeClr>
-            </a:gs>
-            <a:gs pos="100000">
-              <a:schemeClr val="phClr">
-                <a:lumMod val="105000"/>
-                <a:satMod val="109000"/>
-                <a:tint val="81000"/>
-              </a:schemeClr>
-            </a:gs>
-          </a:gsLst>
-          <a:lin ang="5400000" scaled="0"/>
-        </a:gradFill>
-        <a:gradFill rotWithShape="1">
-          <a:gsLst>
-            <a:gs pos="0">
-              <a:schemeClr val="phClr">
-                <a:satMod val="103000"/>
-                <a:lumMod val="102000"/>
-                <a:tint val="94000"/>
-              </a:schemeClr>
-            </a:gs>
-            <a:gs pos="50000">
-              <a:schemeClr val="phClr">
-                <a:satMod val="110000"/>
-                <a:lumMod val="100000"/>
-                <a:shade val="100000"/>
-              </a:schemeClr>
-            </a:gs>
-            <a:gs pos="100000">
-              <a:schemeClr val="phClr">
-                <a:lumMod val="99000"/>
-                <a:satMod val="120000"/>
-                <a:shade val="78000"/>
-              </a:schemeClr>
-            </a:gs>
-          </a:gsLst>
-          <a:lin ang="5400000" scaled="0"/>
-        </a:gradFill>
-      </a:fillStyleLst>
-      <a:lnStyleLst>
-        <a:ln w="12700" cap="flat" cmpd="sng" algn="ctr">
-          <a:solidFill>
-            <a:schemeClr val="phClr"/>
-          </a:solidFill>
-          <a:prstDash val="solid"/>
-          <a:miter lim="800000"/>
-        </a:ln>
-        <a:ln w="19050" cap="flat" cmpd="sng" algn="ctr">
-          <a:solidFill>
-            <a:schemeClr val="phClr"/>
-          </a:solidFill>
-          <a:prstDash val="solid"/>
-          <a:miter lim="800000"/>
-        </a:ln>
-        <a:ln w="25400" cap="flat" cmpd="sng" algn="ctr">
-          <a:solidFill>
-            <a:schemeClr val="phClr"/>
-          </a:solidFill>
-          <a:prstDash val="solid"/>
-          <a:miter lim="800000"/>
-        </a:ln>
-      </a:lnStyleLst>
-      <a:effectStyleLst>
-        <a:effectStyle>
-          <a:effectLst/>
-        </a:effectStyle>
-        <a:effectStyle>
-          <a:effectLst/>
-        </a:effectStyle>
-        <a:effectStyle>
-          <a:effectLst>
-            <a:outerShdw blurRad="57150" dist="19050" dir="5400000" algn="ctr" rotWithShape="0">
-              <a:srgbClr val="000000">
-                <a:alpha val="63000"/>
-              </a:srgbClr>
-            </a:outerShdw>
-          </a:effectLst>
-        </a:effectStyle>
-      </a:effectStyleLst>
-      <a:bgFillStyleLst>
-        <a:solidFill>
-          <a:schemeClr val="phClr"/>
-        </a:solidFill>
-        <a:solidFill>
-          <a:schemeClr val="phClr">
-            <a:tint val="95000"/>
-            <a:satMod val="170000"/>
-          </a:schemeClr>
-        </a:solidFill>
-        <a:gradFill rotWithShape="1">
-          <a:gsLst>
-            <a:gs pos="0">
-              <a:schemeClr val="phClr">
-                <a:tint val="93000"/>
-                <a:satMod val="150000"/>
-                <a:shade val="98000"/>
-                <a:lumMod val="102000"/>
-              </a:schemeClr>
-            </a:gs>
-            <a:gs pos="50000">
-              <a:schemeClr val="phClr">
-                <a:tint val="98000"/>
-                <a:satMod val="130000"/>
-                <a:shade val="90000"/>
-                <a:lumMod val="103000"/>
-              </a:schemeClr>
-            </a:gs>
-            <a:gs pos="100000">
-              <a:schemeClr val="phClr">
-                <a:shade val="63000"/>
-                <a:satMod val="120000"/>
-              </a:schemeClr>
-            </a:gs>
-          </a:gsLst>
-          <a:lin ang="5400000" scaled="0"/>
-        </a:gradFill>
-      </a:bgFillStyleLst>
-    </a:fmtScheme>
-  </a:themeElements>
-  <a:objectDefaults>
-    <a:lnDef>
-      <a:spPr/>
-      <a:bodyPr/>
-      <a:lstStyle/>
-      <a:style>
-        <a:lnRef idx="2">
-          <a:schemeClr val="accent1"/>
-        </a:lnRef>
-        <a:fillRef idx="0">
-          <a:schemeClr val="accent1"/>
-        </a:fillRef>
-        <a:effectRef idx="1">
-          <a:schemeClr val="accent1"/>
-        </a:effectRef>
-        <a:fontRef idx="minor">
-          <a:schemeClr val="tx1"/>
-        </a:fontRef>
-      </a:style>
-    </a:lnDef>
-  </a:objectDefaults>
-  <a:extraClrSchemeLst/>
-  <a:extLst>
-    <a:ext uri="{05A4C25C-085E-4340-85A3-A5531E510DB2}">
-      <thm15:themeFamily xmlns:thm15="http://schemas.microsoft.com/office/thememl/2012/main" name="Office Theme" id="{2E142A2C-CD16-42D6-873A-C26D2A0506FA}" vid="{1BDDFF52-6CD6-40A5-AB3C-68EB2F1E4D0A}"/>
-    </a:ext>
-  </a:extLst>
-</a:theme>
 </file>